--- a/apresentacao-victorinox/Carta_Apresentacao_Pousada_Camburi_Victorinox.pptx
+++ b/apresentacao-victorinox/Carta_Apresentacao_Pousada_Camburi_Victorinox.pptx
@@ -15,9 +15,10 @@
     <p:sldId id="263" r:id="rId9"/>
     <p:sldId id="264" r:id="rId10"/>
     <p:sldId id="265" r:id="rId11"/>
+    <p:sldId id="266" r:id="rId12"/>
   </p:sldIdLst>
   <p:notesMasterIdLst>
-    <p:notesMasterId r:id="rId12"/>
+    <p:notesMasterId r:id="rId13"/>
   </p:notesMasterIdLst>
   <p:sldSz cx="10691961" cy="7559873"/>
   <p:notesSz cx="7559873" cy="10691961"/>
@@ -641,6 +642,94 @@
 </p:notes>
 </file>
 
+<file path=ppt/notesSlides/notesSlide11.xml><?xml version="1.0" encoding="utf-8"?>
+<p:notes xmlns:a="http://schemas.openxmlformats.org/drawingml/2006/main" xmlns:r="http://schemas.openxmlformats.org/officeDocument/2006/relationships" xmlns:p="http://schemas.openxmlformats.org/presentationml/2006/main">
+  <p:cSld>
+    <p:spTree>
+      <p:nvGrpSpPr>
+        <p:cNvPr id="1" name=""/>
+        <p:cNvGrpSpPr/>
+        <p:nvPr/>
+      </p:nvGrpSpPr>
+      <p:grpSpPr>
+        <a:xfrm>
+          <a:off x="0" y="0"/>
+          <a:ext cx="0" cy="0"/>
+          <a:chOff x="0" y="0"/>
+          <a:chExt cx="0" cy="0"/>
+        </a:xfrm>
+      </p:grpSpPr>
+      <p:sp>
+        <p:nvSpPr>
+          <p:cNvPr id="2" name="Slide Image Placeholder 1"/>
+          <p:cNvSpPr>
+            <a:spLocks noGrp="1" noRot="1" noChangeAspect="1"/>
+          </p:cNvSpPr>
+          <p:nvPr>
+            <p:ph type="sldImg"/>
+          </p:nvPr>
+        </p:nvSpPr>
+        <p:spPr/>
+      </p:sp>
+      <p:sp>
+        <p:nvSpPr>
+          <p:cNvPr id="3" name="Notes Placeholder 2"/>
+          <p:cNvSpPr>
+            <a:spLocks noGrp="1"/>
+          </p:cNvSpPr>
+          <p:nvPr>
+            <p:ph type="body" idx="1"/>
+          </p:nvPr>
+        </p:nvSpPr>
+        <p:spPr/>
+        <p:txBody>
+          <a:bodyPr/>
+          <a:lstStyle/>
+          <a:p>
+            <a:r>
+              <a:rPr lang="en-US" dirty="0"/>
+              <a:t/>
+            </a:r>
+            <a:endParaRPr lang="en-US" dirty="0"/>
+          </a:p>
+        </p:txBody>
+      </p:sp>
+      <p:sp>
+        <p:nvSpPr>
+          <p:cNvPr id="4" name="Slide Number Placeholder 3"/>
+          <p:cNvSpPr>
+            <a:spLocks noGrp="1"/>
+          </p:cNvSpPr>
+          <p:nvPr>
+            <p:ph type="sldNum" sz="quarter" idx="10"/>
+          </p:nvPr>
+        </p:nvSpPr>
+        <p:spPr/>
+        <p:txBody>
+          <a:bodyPr/>
+          <a:lstStyle/>
+          <a:p>
+            <a:fld id="{F7021451-1387-4CA6-816F-3879F97B5CBC}" type="slidenum">
+              <a:rPr lang="en-US"/>
+              <a:t>11</a:t>
+            </a:fld>
+            <a:endParaRPr lang="en-US"/>
+          </a:p>
+        </p:txBody>
+      </p:sp>
+    </p:spTree>
+    <p:extLst>
+      <p:ext uri="{BB962C8B-B14F-4D97-AF65-F5344CB8AC3E}">
+        <p14:creationId xmlns:p14="http://schemas.microsoft.com/office/powerpoint/2010/main" val="1024086991"/>
+      </p:ext>
+    </p:extLst>
+  </p:cSld>
+  <p:clrMapOvr>
+    <a:masterClrMapping/>
+  </p:clrMapOvr>
+</p:notes>
+</file>
+
 <file path=ppt/notesSlides/notesSlide2.xml><?xml version="1.0" encoding="utf-8"?>
 <p:notes xmlns:a="http://schemas.openxmlformats.org/drawingml/2006/main" xmlns:r="http://schemas.openxmlformats.org/officeDocument/2006/relationships" xmlns:p="http://schemas.openxmlformats.org/presentationml/2006/main">
   <p:cSld>
@@ -1744,7 +1833,7 @@
         </p:nvSpPr>
         <p:spPr>
           <a:xfrm>
-            <a:off x="1151930" y="5857577"/>
+            <a:off x="1151930" y="5598319"/>
             <a:ext cx="287982" cy="17711"/>
           </a:xfrm>
           <a:prstGeom prst="rect">
@@ -1765,7 +1854,7 @@
         <p:spPr>
           <a:xfrm>
             <a:off x="6808291" y="1901577"/>
-            <a:ext cx="9525" cy="4041130"/>
+            <a:ext cx="9525" cy="3781871"/>
           </a:xfrm>
           <a:prstGeom prst="rect">
             <a:avLst/>
@@ -1785,11 +1874,11 @@
         <p:spPr>
           <a:xfrm>
             <a:off x="7393781" y="1901577"/>
-            <a:ext cx="2506266" cy="1975545"/>
+            <a:ext cx="2506266" cy="1485007"/>
           </a:xfrm>
           <a:prstGeom prst="roundRect">
             <a:avLst>
-              <a:gd name="adj" fmla="val 3645"/>
+              <a:gd name="adj" fmla="val 4848"/>
             </a:avLst>
           </a:prstGeom>
           <a:solidFill>
@@ -1807,7 +1896,7 @@
         <p:spPr>
           <a:xfrm>
             <a:off x="7393781" y="1901577"/>
-            <a:ext cx="19050" cy="1975545"/>
+            <a:ext cx="19050" cy="1485007"/>
           </a:xfrm>
           <a:prstGeom prst="rect">
             <a:avLst/>
@@ -1937,7 +2026,7 @@
         <p:spPr>
           <a:xfrm>
             <a:off x="1151930" y="2165152"/>
-            <a:ext cx="1881515" cy="742950"/>
+            <a:ext cx="3922841" cy="742950"/>
           </a:xfrm>
           <a:prstGeom prst="rect">
             <a:avLst/>
@@ -1964,7 +2053,7 @@
                 <a:ea typeface="EB Garamond" pitchFamily="34" charset="-122"/>
                 <a:cs typeface="EB Garamond" pitchFamily="34" charset="-120"/>
               </a:rPr>
-              <a:t>Carta de</a:t>
+              <a:t>Pousada Camburi</a:t>
             </a:r>
             <a:endParaRPr lang="en-US" sz="4500" dirty="0"/>
           </a:p>
@@ -2006,7 +2095,7 @@
                 <a:ea typeface="EB Garamond" pitchFamily="34" charset="-122"/>
                 <a:cs typeface="EB Garamond" pitchFamily="34" charset="-120"/>
               </a:rPr>
-              <a:t>apresentação</a:t>
+              <a:t>Carta de apresentação</a:t>
             </a:r>
             <a:endParaRPr lang="en-US" sz="4500" dirty="0"/>
           </a:p>
@@ -2048,7 +2137,7 @@
                 <a:ea typeface="Jost Light" pitchFamily="34" charset="-122"/>
                 <a:cs typeface="Jost Light" pitchFamily="34" charset="-120"/>
               </a:rPr>
-              <a:t>Uma história de hospitalidade, qualidade e experiências construída ao longo de mais de vinte anos.</a:t>
+              <a:t>Uma história de hospitalidade, qualidade e experiências há mais de 20 anos.</a:t>
             </a:r>
             <a:endParaRPr lang="en-US" sz="1240" dirty="0"/>
           </a:p>
@@ -2062,7 +2151,7 @@
         </p:nvSpPr>
         <p:spPr>
           <a:xfrm>
-            <a:off x="1619845" y="5790307"/>
+            <a:off x="1619845" y="5531048"/>
             <a:ext cx="4283452" cy="152400"/>
           </a:xfrm>
           <a:prstGeom prst="rect">
@@ -2105,7 +2194,7 @@
         <p:spPr>
           <a:xfrm>
             <a:off x="7700814" y="2153543"/>
-            <a:ext cx="1956971" cy="1471613"/>
+            <a:ext cx="1956971" cy="981075"/>
           </a:xfrm>
           <a:prstGeom prst="rect">
             <a:avLst/>
@@ -2132,7 +2221,7 @@
                 <a:ea typeface="EB Garamond" pitchFamily="34" charset="-122"/>
                 <a:cs typeface="EB Garamond" pitchFamily="34" charset="-120"/>
               </a:rPr>
-              <a:t>À Victorinox Brasil — apresentamos a Pousada Camburi, empresa brasileira dedicada há mais de vinte anos à arte de receber pessoas.</a:t>
+              <a:t>É com grande satisfação que apresentamos a Pousada Camburi, uma empresa genuinamente brasileira.</a:t>
             </a:r>
             <a:endParaRPr lang="en-US" sz="1360" dirty="0"/>
           </a:p>
@@ -2146,7 +2235,7 @@
         </p:nvSpPr>
         <p:spPr>
           <a:xfrm>
-            <a:off x="7393781" y="4201120"/>
+            <a:off x="7393781" y="3722787"/>
             <a:ext cx="2551986" cy="114300"/>
           </a:xfrm>
           <a:prstGeom prst="rect">
@@ -2174,7 +2263,7 @@
                 <a:ea typeface="Jost Medium" pitchFamily="34" charset="-122"/>
                 <a:cs typeface="Jost Medium" pitchFamily="34" charset="-120"/>
               </a:rPr>
-              <a:t>HOSPITALIDADE</a:t>
+              <a:t>DESDE 2002</a:t>
             </a:r>
             <a:endParaRPr lang="en-US" sz="640" dirty="0"/>
           </a:p>
@@ -2188,8 +2277,8 @@
         </p:nvSpPr>
         <p:spPr>
           <a:xfrm>
-            <a:off x="7393781" y="4442222"/>
-            <a:ext cx="2320856" cy="152400"/>
+            <a:off x="7393781" y="3963888"/>
+            <a:ext cx="2441555" cy="152400"/>
           </a:xfrm>
           <a:prstGeom prst="rect">
             <a:avLst/>
@@ -2216,7 +2305,7 @@
                 <a:ea typeface="Jost" pitchFamily="34" charset="-122"/>
                 <a:cs typeface="Jost" pitchFamily="34" charset="-120"/>
               </a:rPr>
-              <a:t>Mais de duas décadas dedicadas a receber bem.</a:t>
+              <a:t>Nossa história começou em 22 de agosto de 2002.</a:t>
             </a:r>
             <a:endParaRPr lang="en-US" sz="860" dirty="0"/>
           </a:p>
@@ -2230,7 +2319,7 @@
         </p:nvSpPr>
         <p:spPr>
           <a:xfrm>
-            <a:off x="7393781" y="4865638"/>
+            <a:off x="7393781" y="4387304"/>
             <a:ext cx="2551986" cy="114300"/>
           </a:xfrm>
           <a:prstGeom prst="rect">
@@ -2258,7 +2347,7 @@
                 <a:ea typeface="Jost Medium" pitchFamily="34" charset="-122"/>
                 <a:cs typeface="Jost Medium" pitchFamily="34" charset="-120"/>
               </a:rPr>
-              <a:t>LONGEVIDADE</a:t>
+              <a:t>HOSPITALIDADE</a:t>
             </a:r>
             <a:endParaRPr lang="en-US" sz="640" dirty="0"/>
           </a:p>
@@ -2272,8 +2361,8 @@
         </p:nvSpPr>
         <p:spPr>
           <a:xfrm>
-            <a:off x="7393781" y="5106739"/>
-            <a:ext cx="2367736" cy="152400"/>
+            <a:off x="7393781" y="4628406"/>
+            <a:ext cx="2533233" cy="371475"/>
           </a:xfrm>
           <a:prstGeom prst="rect">
             <a:avLst/>
@@ -2300,7 +2389,7 @@
                 <a:ea typeface="Jost" pitchFamily="34" charset="-122"/>
                 <a:cs typeface="Jost" pitchFamily="34" charset="-120"/>
               </a:rPr>
-              <a:t>Operação contínua desde 2002, sem interrupção.</a:t>
+              <a:t>Há mais de duas décadas dedica-se à arte de receber pessoas.</a:t>
             </a:r>
             <a:endParaRPr lang="en-US" sz="860" dirty="0"/>
           </a:p>
@@ -2314,7 +2403,7 @@
         </p:nvSpPr>
         <p:spPr>
           <a:xfrm>
-            <a:off x="7393781" y="5530155"/>
+            <a:off x="7393781" y="5270897"/>
             <a:ext cx="2551986" cy="114300"/>
           </a:xfrm>
           <a:prstGeom prst="rect">
@@ -2342,7 +2431,7 @@
                 <a:ea typeface="Jost Medium" pitchFamily="34" charset="-122"/>
                 <a:cs typeface="Jost Medium" pitchFamily="34" charset="-120"/>
               </a:rPr>
-              <a:t>AFINIDADE</a:t>
+              <a:t>CAMBURI</a:t>
             </a:r>
             <a:endParaRPr lang="en-US" sz="640" dirty="0"/>
           </a:p>
@@ -2356,8 +2445,8 @@
         </p:nvSpPr>
         <p:spPr>
           <a:xfrm>
-            <a:off x="7393781" y="5771257"/>
-            <a:ext cx="2482334" cy="152400"/>
+            <a:off x="7393781" y="5511998"/>
+            <a:ext cx="1751886" cy="152400"/>
           </a:xfrm>
           <a:prstGeom prst="rect">
             <a:avLst/>
@@ -2384,7 +2473,7 @@
                 <a:ea typeface="Jost" pitchFamily="34" charset="-122"/>
                 <a:cs typeface="Jost" pitchFamily="34" charset="-120"/>
               </a:rPr>
-              <a:t>Valores que reconhecemos na história da Victorinox.</a:t>
+              <a:t>Litoral norte do Estado de São Paulo.</a:t>
             </a:r>
             <a:endParaRPr lang="en-US" sz="860" dirty="0"/>
           </a:p>
@@ -2398,8 +2487,8 @@
         </p:nvSpPr>
         <p:spPr>
           <a:xfrm>
-            <a:off x="7706737" y="6763941"/>
-            <a:ext cx="2193310" cy="328017"/>
+            <a:off x="8526929" y="6763941"/>
+            <a:ext cx="1373118" cy="328017"/>
           </a:xfrm>
           <a:prstGeom prst="rect">
             <a:avLst/>
@@ -2426,7 +2515,7 @@
                 <a:ea typeface="Jost" pitchFamily="34" charset="-122"/>
                 <a:cs typeface="Jost" pitchFamily="34" charset="-120"/>
               </a:rPr>
-              <a:t>CARTA DE APRESENTAÇÃO INSTITUCIONAL</a:t>
+              <a:t>CARTA DE APRESENTAÇÃO</a:t>
             </a:r>
             <a:endParaRPr lang="en-US" sz="680" dirty="0"/>
           </a:p>
@@ -2552,7 +2641,7 @@
         </p:nvSpPr>
         <p:spPr>
           <a:xfrm>
-            <a:off x="719882" y="5654725"/>
+            <a:off x="719882" y="5917555"/>
             <a:ext cx="2654498" cy="9525"/>
           </a:xfrm>
           <a:prstGeom prst="rect">
@@ -2572,7 +2661,7 @@
         </p:nvSpPr>
         <p:spPr>
           <a:xfrm>
-            <a:off x="4463802" y="2430214"/>
+            <a:off x="4463802" y="6126510"/>
             <a:ext cx="5508278" cy="9525"/>
           </a:xfrm>
           <a:prstGeom prst="rect">
@@ -2592,28 +2681,6 @@
         </p:nvSpPr>
         <p:spPr>
           <a:xfrm>
-            <a:off x="4463802" y="5010001"/>
-            <a:ext cx="5508278" cy="1694706"/>
-          </a:xfrm>
-          <a:prstGeom prst="roundRect">
-            <a:avLst>
-              <a:gd name="adj" fmla="val 6373"/>
-            </a:avLst>
-          </a:prstGeom>
-          <a:solidFill>
-            <a:srgbClr val="16283C"/>
-          </a:solidFill>
-          <a:ln/>
-        </p:spPr>
-      </p:sp>
-      <p:sp>
-        <p:nvSpPr>
-          <p:cNvPr id="8" name="Shape 6"/>
-          <p:cNvSpPr/>
-          <p:nvPr/>
-        </p:nvSpPr>
-        <p:spPr>
-          <a:xfrm>
             <a:off x="719882" y="6704707"/>
             <a:ext cx="9252198" cy="9525"/>
           </a:xfrm>
@@ -2628,7 +2695,7 @@
       </p:sp>
       <p:pic>
         <p:nvPicPr>
-          <p:cNvPr id="9" name="Image 0" descr="/home/user/SkillsClaude/apresentacao-victorinox/build/logos/logo-pc.png">    </p:cNvPr>
+          <p:cNvPr id="8" name="Image 0" descr="/home/user/SkillsClaude/apresentacao-victorinox/build/logos/logo-pc.png">    </p:cNvPr>
           <p:cNvPicPr>
             <a:picLocks noChangeAspect="1"/>
           </p:cNvPicPr>
@@ -2652,7 +2719,7 @@
       </p:pic>
       <p:pic>
         <p:nvPicPr>
-          <p:cNvPr id="10" name="Image 1" descr="/home/user/SkillsClaude/apresentacao-victorinox/build/logos/logo-vx.png">    </p:cNvPr>
+          <p:cNvPr id="9" name="Image 1" descr="/home/user/SkillsClaude/apresentacao-victorinox/build/logos/logo-vx.png">    </p:cNvPr>
           <p:cNvPicPr>
             <a:picLocks noChangeAspect="1"/>
           </p:cNvPicPr>
@@ -2676,7 +2743,7 @@
       </p:pic>
       <p:sp>
         <p:nvSpPr>
-          <p:cNvPr id="11" name="Text 7"/>
+          <p:cNvPr id="10" name="Text 6"/>
           <p:cNvSpPr txBox="1"/>
           <p:nvPr/>
         </p:nvSpPr>
@@ -2718,7 +2785,7 @@
       </p:sp>
       <p:sp>
         <p:nvSpPr>
-          <p:cNvPr id="12" name="Text 8"/>
+          <p:cNvPr id="11" name="Text 7"/>
           <p:cNvSpPr txBox="1"/>
           <p:nvPr/>
         </p:nvSpPr>
@@ -2760,7 +2827,7 @@
       </p:sp>
       <p:sp>
         <p:nvSpPr>
-          <p:cNvPr id="13" name="Text 9"/>
+          <p:cNvPr id="12" name="Text 8"/>
           <p:cNvSpPr txBox="1"/>
           <p:nvPr/>
         </p:nvSpPr>
@@ -2794,7 +2861,7 @@
                 <a:ea typeface="Jost Medium" pitchFamily="34" charset="-122"/>
                 <a:cs typeface="Jost Medium" pitchFamily="34" charset="-120"/>
               </a:rPr>
-              <a:t>ATENCIOSAMENTE</a:t>
+              <a:t>O CONVITE</a:t>
             </a:r>
             <a:endParaRPr lang="en-US" sz="660" dirty="0"/>
           </a:p>
@@ -2802,14 +2869,14 @@
       </p:sp>
       <p:sp>
         <p:nvSpPr>
-          <p:cNvPr id="14" name="Text 10"/>
+          <p:cNvPr id="13" name="Text 9"/>
           <p:cNvSpPr txBox="1"/>
           <p:nvPr/>
         </p:nvSpPr>
         <p:spPr>
           <a:xfrm>
             <a:off x="719882" y="1617464"/>
-            <a:ext cx="2700218" cy="781645"/>
+            <a:ext cx="2700218" cy="390823"/>
           </a:xfrm>
           <a:prstGeom prst="rect">
             <a:avLst/>
@@ -2836,7 +2903,7 @@
                 <a:ea typeface="EB Garamond Medium" pitchFamily="34" charset="-122"/>
                 <a:cs typeface="EB Garamond Medium" pitchFamily="34" charset="-120"/>
               </a:rPr>
-              <a:t>Seu lugar em Camburi</a:t>
+              <a:t>Nosso convite</a:t>
             </a:r>
             <a:endParaRPr lang="en-US" sz="2700" dirty="0"/>
           </a:p>
@@ -2844,14 +2911,14 @@
       </p:sp>
       <p:sp>
         <p:nvSpPr>
-          <p:cNvPr id="15" name="Text 11"/>
-          <p:cNvSpPr txBox="1"/>
-          <p:nvPr/>
-        </p:nvSpPr>
-        <p:spPr>
-          <a:xfrm>
-            <a:off x="719882" y="5916216"/>
-            <a:ext cx="2700218" cy="788491"/>
+          <p:cNvPr id="14" name="Text 10"/>
+          <p:cNvSpPr txBox="1"/>
+          <p:nvPr/>
+        </p:nvSpPr>
+        <p:spPr>
+          <a:xfrm>
+            <a:off x="719882" y="6179046"/>
+            <a:ext cx="2700218" cy="525661"/>
           </a:xfrm>
           <a:prstGeom prst="rect">
             <a:avLst/>
@@ -2878,7 +2945,7 @@
                 <a:ea typeface="EB Garamond" pitchFamily="34" charset="-122"/>
                 <a:cs typeface="EB Garamond" pitchFamily="34" charset="-120"/>
               </a:rPr>
-              <a:t>“Quem cuida de tudo somos nós. Você aproveita a praia, descansa e vive a experiência.”</a:t>
+              <a:t>“Uma marca que acompanha pessoas. Um lugar que recebe pessoas.”</a:t>
             </a:r>
             <a:endParaRPr lang="en-US" sz="1500" dirty="0"/>
           </a:p>
@@ -2886,7 +2953,7 @@
       </p:sp>
       <p:sp>
         <p:nvSpPr>
-          <p:cNvPr id="16" name="Text 12"/>
+          <p:cNvPr id="15" name="Text 11"/>
           <p:cNvSpPr txBox="1"/>
           <p:nvPr/>
         </p:nvSpPr>
@@ -2920,7 +2987,7 @@
                 <a:ea typeface="Jost Light" pitchFamily="34" charset="-122"/>
                 <a:cs typeface="Jost Light" pitchFamily="34" charset="-120"/>
               </a:rPr>
-              <a:t>Permanecemos à disposição para conversar, receber a sua visita e apresentar pessoalmente aquilo que construímos ao longo destes mais de vinte anos.</a:t>
+              <a:t>Gostaríamos de apresentar oficialmente a Pousada Camburi à Victorinox Brasil e abrir uma conversa sobre possibilidades de relacionamento entre nossas empresas.</a:t>
             </a:r>
             <a:endParaRPr lang="en-US" sz="1260" dirty="0"/>
           </a:p>
@@ -2928,14 +2995,426 @@
       </p:sp>
       <p:sp>
         <p:nvSpPr>
+          <p:cNvPr id="16" name="Text 12"/>
+          <p:cNvSpPr txBox="1"/>
+          <p:nvPr/>
+        </p:nvSpPr>
+        <p:spPr>
+          <a:xfrm>
+            <a:off x="4463802" y="2304157"/>
+            <a:ext cx="5553998" cy="490240"/>
+          </a:xfrm>
+          <a:prstGeom prst="rect">
+            <a:avLst/>
+          </a:prstGeom>
+          <a:noFill/>
+          <a:ln/>
+        </p:spPr>
+        <p:txBody>
+          <a:bodyPr wrap="square" lIns="0" tIns="0" rIns="0" bIns="0" rtlCol="0" anchor="t"/>
+          <a:lstStyle/>
+          <a:p>
+            <a:pPr algn="l" indent="0" marL="0">
+              <a:lnSpc>
+                <a:spcPts val="1929"/>
+              </a:lnSpc>
+              <a:buNone/>
+            </a:pPr>
+            <a:r>
+              <a:rPr lang="en-US" sz="1060" dirty="0">
+                <a:solidFill>
+                  <a:srgbClr val="5A6672"/>
+                </a:solidFill>
+                <a:latin typeface="Jost" pitchFamily="34" charset="0"/>
+                <a:ea typeface="Jost" pitchFamily="34" charset="-122"/>
+                <a:cs typeface="Jost" pitchFamily="34" charset="-120"/>
+              </a:rPr>
+              <a:t>Temos muito respeito pela história e pelo posicionamento da Victorinox, e acreditamos que existe uma afinidade verdadeira entre nossas marcas.</a:t>
+            </a:r>
+            <a:endParaRPr lang="en-US" sz="1060" dirty="0"/>
+          </a:p>
+        </p:txBody>
+      </p:sp>
+      <p:sp>
+        <p:nvSpPr>
           <p:cNvPr id="17" name="Text 13"/>
           <p:cNvSpPr txBox="1"/>
           <p:nvPr/>
         </p:nvSpPr>
         <p:spPr>
           <a:xfrm>
-            <a:off x="4463802" y="2727722"/>
-            <a:ext cx="1593830" cy="114300"/>
+            <a:off x="4463802" y="2992338"/>
+            <a:ext cx="5553998" cy="735360"/>
+          </a:xfrm>
+          <a:prstGeom prst="rect">
+            <a:avLst/>
+          </a:prstGeom>
+          <a:noFill/>
+          <a:ln/>
+        </p:spPr>
+        <p:txBody>
+          <a:bodyPr wrap="square" lIns="0" tIns="0" rIns="0" bIns="0" rtlCol="0" anchor="t"/>
+          <a:lstStyle/>
+          <a:p>
+            <a:pPr algn="l" indent="0" marL="0">
+              <a:lnSpc>
+                <a:spcPts val="1929"/>
+              </a:lnSpc>
+              <a:buNone/>
+            </a:pPr>
+            <a:r>
+              <a:rPr lang="en-US" sz="1060" dirty="0">
+                <a:solidFill>
+                  <a:srgbClr val="5A6672"/>
+                </a:solidFill>
+                <a:latin typeface="Jost" pitchFamily="34" charset="0"/>
+                <a:ea typeface="Jost" pitchFamily="34" charset="-122"/>
+                <a:cs typeface="Jost" pitchFamily="34" charset="-120"/>
+              </a:rPr>
+              <a:t>A Pousada Camburi possui uma história construída com pessoas. A Victorinox possui uma história construída com produtos que acompanham pessoas. Talvez seja justamente aí que exista uma oportunidade.</a:t>
+            </a:r>
+            <a:endParaRPr lang="en-US" sz="1060" dirty="0"/>
+          </a:p>
+        </p:txBody>
+      </p:sp>
+      <p:sp>
+        <p:nvSpPr>
+          <p:cNvPr id="18" name="Text 14"/>
+          <p:cNvSpPr txBox="1"/>
+          <p:nvPr/>
+        </p:nvSpPr>
+        <p:spPr>
+          <a:xfrm>
+            <a:off x="4463802" y="3925639"/>
+            <a:ext cx="5553998" cy="735360"/>
+          </a:xfrm>
+          <a:prstGeom prst="rect">
+            <a:avLst/>
+          </a:prstGeom>
+          <a:noFill/>
+          <a:ln/>
+        </p:spPr>
+        <p:txBody>
+          <a:bodyPr wrap="square" lIns="0" tIns="0" rIns="0" bIns="0" rtlCol="0" anchor="t"/>
+          <a:lstStyle/>
+          <a:p>
+            <a:pPr algn="l" indent="0" marL="0">
+              <a:lnSpc>
+                <a:spcPts val="1929"/>
+              </a:lnSpc>
+              <a:buNone/>
+            </a:pPr>
+            <a:r>
+              <a:rPr lang="en-US" sz="1060" dirty="0">
+                <a:solidFill>
+                  <a:srgbClr val="5A6672"/>
+                </a:solidFill>
+                <a:latin typeface="Jost" pitchFamily="34" charset="0"/>
+                <a:ea typeface="Jost" pitchFamily="34" charset="-122"/>
+                <a:cs typeface="Jost" pitchFamily="34" charset="-120"/>
+              </a:rPr>
+              <a:t>Será uma grande satisfação receber representantes da Victorinox em Camburi, apresentar pessoalmente nossa pousada, nossa equipe, nossa história e conversar sobre as possibilidades que podemos construir juntos.</a:t>
+            </a:r>
+            <a:endParaRPr lang="en-US" sz="1060" dirty="0"/>
+          </a:p>
+        </p:txBody>
+      </p:sp>
+      <p:sp>
+        <p:nvSpPr>
+          <p:cNvPr id="19" name="Text 15"/>
+          <p:cNvSpPr txBox="1"/>
+          <p:nvPr/>
+        </p:nvSpPr>
+        <p:spPr>
+          <a:xfrm>
+            <a:off x="4463802" y="6424017"/>
+            <a:ext cx="5553998" cy="280690"/>
+          </a:xfrm>
+          <a:prstGeom prst="rect">
+            <a:avLst/>
+          </a:prstGeom>
+          <a:noFill/>
+          <a:ln/>
+        </p:spPr>
+        <p:txBody>
+          <a:bodyPr wrap="square" lIns="0" tIns="0" rIns="0" bIns="0" rtlCol="0" anchor="t"/>
+          <a:lstStyle/>
+          <a:p>
+            <a:pPr algn="l" indent="0" marL="0">
+              <a:lnSpc>
+                <a:spcPts val="2210"/>
+              </a:lnSpc>
+              <a:buNone/>
+            </a:pPr>
+            <a:r>
+              <a:rPr lang="en-US" sz="1700" dirty="0">
+                <a:solidFill>
+                  <a:srgbClr val="16222E"/>
+                </a:solidFill>
+                <a:latin typeface="EB Garamond" pitchFamily="34" charset="0"/>
+                <a:ea typeface="EB Garamond" pitchFamily="34" charset="-122"/>
+                <a:cs typeface="EB Garamond" pitchFamily="34" charset="-120"/>
+              </a:rPr>
+              <a:t>E uma experiência que pode unir as duas.</a:t>
+            </a:r>
+            <a:endParaRPr lang="en-US" sz="1700" dirty="0"/>
+          </a:p>
+        </p:txBody>
+      </p:sp>
+      <p:sp>
+        <p:nvSpPr>
+          <p:cNvPr id="20" name="Text 16"/>
+          <p:cNvSpPr txBox="1"/>
+          <p:nvPr/>
+        </p:nvSpPr>
+        <p:spPr>
+          <a:xfrm>
+            <a:off x="719882" y="6962924"/>
+            <a:ext cx="3137922" cy="114300"/>
+          </a:xfrm>
+          <a:prstGeom prst="rect">
+            <a:avLst/>
+          </a:prstGeom>
+          <a:noFill/>
+          <a:ln/>
+        </p:spPr>
+        <p:txBody>
+          <a:bodyPr wrap="square" lIns="0" tIns="0" rIns="0" bIns="0" rtlCol="0" anchor="t"/>
+          <a:lstStyle/>
+          <a:p>
+            <a:pPr algn="l" indent="0" marL="0">
+              <a:lnSpc>
+                <a:spcPts val="792"/>
+              </a:lnSpc>
+              <a:buNone/>
+            </a:pPr>
+            <a:r>
+              <a:rPr lang="en-US" sz="660" spc="92" kern="0" dirty="0">
+                <a:solidFill>
+                  <a:srgbClr val="8C959D"/>
+                </a:solidFill>
+                <a:latin typeface="Jost" pitchFamily="34" charset="0"/>
+                <a:ea typeface="Jost" pitchFamily="34" charset="-122"/>
+                <a:cs typeface="Jost" pitchFamily="34" charset="-120"/>
+              </a:rPr>
+              <a:t>POUSADA CAMBURI | CARTA DE APRESENTAÇÃO À VICTORINOX</a:t>
+            </a:r>
+            <a:endParaRPr lang="en-US" sz="660" dirty="0"/>
+          </a:p>
+        </p:txBody>
+      </p:sp>
+    </p:spTree>
+  </p:cSld>
+  <p:clrMapOvr>
+    <a:masterClrMapping/>
+  </p:clrMapOvr>
+</p:sld>
+</file>
+
+<file path=ppt/slides/slide11.xml><?xml version="1.0" encoding="utf-8"?>
+<p:sld xmlns:a="http://schemas.openxmlformats.org/drawingml/2006/main" xmlns:r="http://schemas.openxmlformats.org/officeDocument/2006/relationships" xmlns:p="http://schemas.openxmlformats.org/presentationml/2006/main">
+  <p:cSld name="Slide 11">
+    <p:bg>
+      <p:bgPr>
+        <a:solidFill>
+          <a:srgbClr val="FFFFFF"/>
+        </a:solidFill>
+      </p:bgPr>
+    </p:bg>
+    <p:spTree>
+      <p:nvGrpSpPr>
+        <p:cNvPr id="1" name=""/>
+        <p:cNvGrpSpPr/>
+        <p:nvPr/>
+      </p:nvGrpSpPr>
+      <p:grpSpPr>
+        <a:xfrm>
+          <a:off x="0" y="0"/>
+          <a:ext cx="0" cy="0"/>
+          <a:chOff x="0" y="0"/>
+          <a:chExt cx="0" cy="0"/>
+        </a:xfrm>
+      </p:grpSpPr>
+      <p:sp>
+        <p:nvSpPr>
+          <p:cNvPr id="2" name="Shape 0"/>
+          <p:cNvSpPr/>
+          <p:nvPr/>
+        </p:nvSpPr>
+        <p:spPr>
+          <a:xfrm>
+            <a:off x="0" y="0"/>
+            <a:ext cx="10691961" cy="7559873"/>
+          </a:xfrm>
+          <a:prstGeom prst="rect">
+            <a:avLst/>
+          </a:prstGeom>
+          <a:solidFill>
+            <a:srgbClr val="FFFFFF"/>
+          </a:solidFill>
+          <a:ln/>
+        </p:spPr>
+      </p:sp>
+      <p:sp>
+        <p:nvSpPr>
+          <p:cNvPr id="3" name="Shape 1"/>
+          <p:cNvSpPr/>
+          <p:nvPr/>
+        </p:nvSpPr>
+        <p:spPr>
+          <a:xfrm>
+            <a:off x="719882" y="1007715"/>
+            <a:ext cx="9252198" cy="9525"/>
+          </a:xfrm>
+          <a:prstGeom prst="rect">
+            <a:avLst/>
+          </a:prstGeom>
+          <a:solidFill>
+            <a:srgbClr val="E2DFD9"/>
+          </a:solidFill>
+          <a:ln/>
+        </p:spPr>
+      </p:sp>
+      <p:sp>
+        <p:nvSpPr>
+          <p:cNvPr id="4" name="Shape 2"/>
+          <p:cNvSpPr/>
+          <p:nvPr/>
+        </p:nvSpPr>
+        <p:spPr>
+          <a:xfrm>
+            <a:off x="3878312" y="1341239"/>
+            <a:ext cx="9525" cy="5363468"/>
+          </a:xfrm>
+          <a:prstGeom prst="rect">
+            <a:avLst/>
+          </a:prstGeom>
+          <a:solidFill>
+            <a:srgbClr val="E2DFD9"/>
+          </a:solidFill>
+          <a:ln/>
+        </p:spPr>
+      </p:sp>
+      <p:sp>
+        <p:nvSpPr>
+          <p:cNvPr id="5" name="Shape 3"/>
+          <p:cNvSpPr/>
+          <p:nvPr/>
+        </p:nvSpPr>
+        <p:spPr>
+          <a:xfrm>
+            <a:off x="719882" y="6180386"/>
+            <a:ext cx="2654498" cy="9525"/>
+          </a:xfrm>
+          <a:prstGeom prst="rect">
+            <a:avLst/>
+          </a:prstGeom>
+          <a:solidFill>
+            <a:srgbClr val="C1121C"/>
+          </a:solidFill>
+          <a:ln/>
+        </p:spPr>
+      </p:sp>
+      <p:sp>
+        <p:nvSpPr>
+          <p:cNvPr id="6" name="Shape 4"/>
+          <p:cNvSpPr/>
+          <p:nvPr/>
+        </p:nvSpPr>
+        <p:spPr>
+          <a:xfrm>
+            <a:off x="4463802" y="5010001"/>
+            <a:ext cx="5508278" cy="1694706"/>
+          </a:xfrm>
+          <a:prstGeom prst="roundRect">
+            <a:avLst>
+              <a:gd name="adj" fmla="val 6373"/>
+            </a:avLst>
+          </a:prstGeom>
+          <a:solidFill>
+            <a:srgbClr val="16283C"/>
+          </a:solidFill>
+          <a:ln/>
+        </p:spPr>
+      </p:sp>
+      <p:sp>
+        <p:nvSpPr>
+          <p:cNvPr id="7" name="Shape 5"/>
+          <p:cNvSpPr/>
+          <p:nvPr/>
+        </p:nvSpPr>
+        <p:spPr>
+          <a:xfrm>
+            <a:off x="719882" y="6704707"/>
+            <a:ext cx="9252198" cy="9525"/>
+          </a:xfrm>
+          <a:prstGeom prst="rect">
+            <a:avLst/>
+          </a:prstGeom>
+          <a:solidFill>
+            <a:srgbClr val="E2DFD9"/>
+          </a:solidFill>
+          <a:ln/>
+        </p:spPr>
+      </p:sp>
+      <p:pic>
+        <p:nvPicPr>
+          <p:cNvPr id="8" name="Image 0" descr="/home/user/SkillsClaude/apresentacao-victorinox/build/logos/logo-pc.png">    </p:cNvPr>
+          <p:cNvPicPr>
+            <a:picLocks noChangeAspect="1"/>
+          </p:cNvPicPr>
+          <p:nvPr/>
+        </p:nvPicPr>
+        <p:blipFill>
+          <a:blip r:embed="rId1"/>
+          <a:stretch>
+            <a:fillRect/>
+          </a:stretch>
+        </p:blipFill>
+        <p:spPr>
+          <a:xfrm>
+            <a:off x="719882" y="467916"/>
+            <a:ext cx="1478905" cy="413891"/>
+          </a:xfrm>
+          <a:prstGeom prst="rect">
+            <a:avLst/>
+          </a:prstGeom>
+        </p:spPr>
+      </p:pic>
+      <p:pic>
+        <p:nvPicPr>
+          <p:cNvPr id="9" name="Image 1" descr="/home/user/SkillsClaude/apresentacao-victorinox/build/logos/logo-vx.png">    </p:cNvPr>
+          <p:cNvPicPr>
+            <a:picLocks noChangeAspect="1"/>
+          </p:cNvPicPr>
+          <p:nvPr/>
+        </p:nvPicPr>
+        <p:blipFill>
+          <a:blip r:embed="rId2"/>
+          <a:stretch>
+            <a:fillRect/>
+          </a:stretch>
+        </p:blipFill>
+        <p:spPr>
+          <a:xfrm>
+            <a:off x="9420374" y="6840141"/>
+            <a:ext cx="551706" cy="359866"/>
+          </a:xfrm>
+          <a:prstGeom prst="rect">
+            <a:avLst/>
+          </a:prstGeom>
+        </p:spPr>
+      </p:pic>
+      <p:sp>
+        <p:nvSpPr>
+          <p:cNvPr id="10" name="Text 6"/>
+          <p:cNvSpPr txBox="1"/>
+          <p:nvPr/>
+        </p:nvSpPr>
+        <p:spPr>
+          <a:xfrm>
+            <a:off x="7619405" y="748457"/>
+            <a:ext cx="1969026" cy="114300"/>
           </a:xfrm>
           <a:prstGeom prst="rect">
             <a:avLst/>
@@ -2954,15 +3433,15 @@
               <a:buNone/>
             </a:pPr>
             <a:r>
-              <a:rPr lang="en-US" sz="640" spc="154" kern="0" dirty="0">
-                <a:solidFill>
-                  <a:srgbClr val="C1121C"/>
+              <a:rPr lang="en-US" sz="640" spc="166" kern="0" dirty="0">
+                <a:solidFill>
+                  <a:srgbClr val="8C959D"/>
                 </a:solidFill>
                 <a:latin typeface="Jost Medium" pitchFamily="34" charset="0"/>
                 <a:ea typeface="Jost Medium" pitchFamily="34" charset="-122"/>
                 <a:cs typeface="Jost Medium" pitchFamily="34" charset="-120"/>
               </a:rPr>
-              <a:t>CONVERSA</a:t>
+              <a:t>POUSADA CAMBURI × VICTORINOX</a:t>
             </a:r>
             <a:endParaRPr lang="en-US" sz="640" dirty="0"/>
           </a:p>
@@ -2970,625 +3449,499 @@
       </p:sp>
       <p:sp>
         <p:nvSpPr>
-          <p:cNvPr id="18" name="Text 14"/>
-          <p:cNvSpPr txBox="1"/>
-          <p:nvPr/>
-        </p:nvSpPr>
-        <p:spPr>
-          <a:xfrm>
-            <a:off x="4463802" y="2935486"/>
-            <a:ext cx="1593830" cy="471190"/>
-          </a:xfrm>
-          <a:prstGeom prst="rect">
-            <a:avLst/>
-          </a:prstGeom>
-          <a:noFill/>
-          <a:ln/>
-        </p:spPr>
-        <p:txBody>
-          <a:bodyPr wrap="square" lIns="0" tIns="0" rIns="0" bIns="0" rtlCol="0" anchor="t"/>
-          <a:lstStyle/>
-          <a:p>
-            <a:pPr algn="l" indent="0" marL="0">
-              <a:lnSpc>
-                <a:spcPts val="1856"/>
-              </a:lnSpc>
-              <a:buNone/>
-            </a:pPr>
-            <a:r>
-              <a:rPr lang="en-US" sz="1600" dirty="0">
-                <a:solidFill>
-                  <a:srgbClr val="16222E"/>
+          <p:cNvPr id="11" name="Text 7"/>
+          <p:cNvSpPr txBox="1"/>
+          <p:nvPr/>
+        </p:nvSpPr>
+        <p:spPr>
+          <a:xfrm>
+            <a:off x="9794677" y="672257"/>
+            <a:ext cx="223123" cy="209550"/>
+          </a:xfrm>
+          <a:prstGeom prst="rect">
+            <a:avLst/>
+          </a:prstGeom>
+          <a:noFill/>
+          <a:ln/>
+        </p:spPr>
+        <p:txBody>
+          <a:bodyPr wrap="square" lIns="0" tIns="0" rIns="0" bIns="0" rtlCol="0" anchor="t"/>
+          <a:lstStyle/>
+          <a:p>
+            <a:pPr algn="l" indent="0" marL="0">
+              <a:lnSpc>
+                <a:spcPts val="1560"/>
+              </a:lnSpc>
+              <a:buNone/>
+            </a:pPr>
+            <a:r>
+              <a:rPr lang="en-US" sz="1300" spc="52" kern="0" dirty="0">
+                <a:solidFill>
+                  <a:srgbClr val="C1121C"/>
                 </a:solidFill>
                 <a:latin typeface="EB Garamond Medium" pitchFamily="34" charset="0"/>
                 <a:ea typeface="EB Garamond Medium" pitchFamily="34" charset="-122"/>
                 <a:cs typeface="EB Garamond Medium" pitchFamily="34" charset="-120"/>
               </a:rPr>
-              <a:t>Por telefone ou vídeo</a:t>
-            </a:r>
-            <a:endParaRPr lang="en-US" sz="1600" dirty="0"/>
-          </a:p>
-        </p:txBody>
-      </p:sp>
-      <p:sp>
-        <p:nvSpPr>
-          <p:cNvPr id="19" name="Text 15"/>
-          <p:cNvSpPr txBox="1"/>
-          <p:nvPr/>
-        </p:nvSpPr>
-        <p:spPr>
-          <a:xfrm>
-            <a:off x="4463802" y="3485852"/>
-            <a:ext cx="1593830" cy="379214"/>
-          </a:xfrm>
-          <a:prstGeom prst="rect">
-            <a:avLst/>
-          </a:prstGeom>
-          <a:noFill/>
-          <a:ln/>
-        </p:spPr>
-        <p:txBody>
-          <a:bodyPr wrap="square" lIns="0" tIns="0" rIns="0" bIns="0" rtlCol="0" anchor="t"/>
-          <a:lstStyle/>
-          <a:p>
-            <a:pPr algn="l" indent="0" marL="0">
-              <a:lnSpc>
-                <a:spcPts val="1494"/>
-              </a:lnSpc>
-              <a:buNone/>
-            </a:pPr>
-            <a:r>
-              <a:rPr lang="en-US" sz="900" dirty="0">
-                <a:solidFill>
-                  <a:srgbClr val="5A6672"/>
+              <a:t>11</a:t>
+            </a:r>
+            <a:endParaRPr lang="en-US" sz="1300" dirty="0"/>
+          </a:p>
+        </p:txBody>
+      </p:sp>
+      <p:sp>
+        <p:nvSpPr>
+          <p:cNvPr id="12" name="Text 8"/>
+          <p:cNvSpPr txBox="1"/>
+          <p:nvPr/>
+        </p:nvSpPr>
+        <p:spPr>
+          <a:xfrm>
+            <a:off x="719882" y="1341239"/>
+            <a:ext cx="2700218" cy="114300"/>
+          </a:xfrm>
+          <a:prstGeom prst="rect">
+            <a:avLst/>
+          </a:prstGeom>
+          <a:noFill/>
+          <a:ln/>
+        </p:spPr>
+        <p:txBody>
+          <a:bodyPr wrap="square" lIns="0" tIns="0" rIns="0" bIns="0" rtlCol="0" anchor="t"/>
+          <a:lstStyle/>
+          <a:p>
+            <a:pPr algn="l" indent="0" marL="0">
+              <a:lnSpc>
+                <a:spcPts val="792"/>
+              </a:lnSpc>
+              <a:buNone/>
+            </a:pPr>
+            <a:r>
+              <a:rPr lang="en-US" sz="660" spc="172" kern="0" dirty="0">
+                <a:solidFill>
+                  <a:srgbClr val="C1121C"/>
+                </a:solidFill>
+                <a:latin typeface="Jost Medium" pitchFamily="34" charset="0"/>
+                <a:ea typeface="Jost Medium" pitchFamily="34" charset="-122"/>
+                <a:cs typeface="Jost Medium" pitchFamily="34" charset="-120"/>
+              </a:rPr>
+              <a:t>ATENCIOSAMENTE</a:t>
+            </a:r>
+            <a:endParaRPr lang="en-US" sz="660" dirty="0"/>
+          </a:p>
+        </p:txBody>
+      </p:sp>
+      <p:sp>
+        <p:nvSpPr>
+          <p:cNvPr id="13" name="Text 9"/>
+          <p:cNvSpPr txBox="1"/>
+          <p:nvPr/>
+        </p:nvSpPr>
+        <p:spPr>
+          <a:xfrm>
+            <a:off x="719882" y="1617464"/>
+            <a:ext cx="2700218" cy="781645"/>
+          </a:xfrm>
+          <a:prstGeom prst="rect">
+            <a:avLst/>
+          </a:prstGeom>
+          <a:noFill/>
+          <a:ln/>
+        </p:spPr>
+        <p:txBody>
+          <a:bodyPr wrap="square" lIns="0" tIns="0" rIns="0" bIns="0" rtlCol="0" anchor="t"/>
+          <a:lstStyle/>
+          <a:p>
+            <a:pPr algn="l" indent="0" marL="0">
+              <a:lnSpc>
+                <a:spcPts val="3078"/>
+              </a:lnSpc>
+              <a:buNone/>
+            </a:pPr>
+            <a:r>
+              <a:rPr lang="en-US" sz="2700" spc="-11" kern="0" dirty="0">
+                <a:solidFill>
+                  <a:srgbClr val="16222E"/>
+                </a:solidFill>
+                <a:latin typeface="EB Garamond Medium" pitchFamily="34" charset="0"/>
+                <a:ea typeface="EB Garamond Medium" pitchFamily="34" charset="-122"/>
+                <a:cs typeface="EB Garamond Medium" pitchFamily="34" charset="-120"/>
+              </a:rPr>
+              <a:t>Seu lugar em Camburi</a:t>
+            </a:r>
+            <a:endParaRPr lang="en-US" sz="2700" dirty="0"/>
+          </a:p>
+        </p:txBody>
+      </p:sp>
+      <p:sp>
+        <p:nvSpPr>
+          <p:cNvPr id="14" name="Text 10"/>
+          <p:cNvSpPr txBox="1"/>
+          <p:nvPr/>
+        </p:nvSpPr>
+        <p:spPr>
+          <a:xfrm>
+            <a:off x="719882" y="6441877"/>
+            <a:ext cx="2700218" cy="262830"/>
+          </a:xfrm>
+          <a:prstGeom prst="rect">
+            <a:avLst/>
+          </a:prstGeom>
+          <a:noFill/>
+          <a:ln/>
+        </p:spPr>
+        <p:txBody>
+          <a:bodyPr wrap="square" lIns="0" tIns="0" rIns="0" bIns="0" rtlCol="0" anchor="t"/>
+          <a:lstStyle/>
+          <a:p>
+            <a:pPr algn="l" indent="0" marL="0">
+              <a:lnSpc>
+                <a:spcPts val="2070"/>
+              </a:lnSpc>
+              <a:buNone/>
+            </a:pPr>
+            <a:r>
+              <a:rPr lang="en-US" sz="1500" i="1" spc="3" kern="0" dirty="0">
+                <a:solidFill>
+                  <a:srgbClr val="16222E"/>
+                </a:solidFill>
+                <a:latin typeface="EB Garamond" pitchFamily="34" charset="0"/>
+                <a:ea typeface="EB Garamond" pitchFamily="34" charset="-122"/>
+                <a:cs typeface="EB Garamond" pitchFamily="34" charset="-120"/>
+              </a:rPr>
+              <a:t>“Quem cuida de tudo somos nós.”</a:t>
+            </a:r>
+            <a:endParaRPr lang="en-US" sz="1500" dirty="0"/>
+          </a:p>
+        </p:txBody>
+      </p:sp>
+      <p:sp>
+        <p:nvSpPr>
+          <p:cNvPr id="15" name="Text 11"/>
+          <p:cNvSpPr txBox="1"/>
+          <p:nvPr/>
+        </p:nvSpPr>
+        <p:spPr>
+          <a:xfrm>
+            <a:off x="4463802" y="1341239"/>
+            <a:ext cx="5553998" cy="265509"/>
+          </a:xfrm>
+          <a:prstGeom prst="rect">
+            <a:avLst/>
+          </a:prstGeom>
+          <a:noFill/>
+          <a:ln/>
+        </p:spPr>
+        <p:txBody>
+          <a:bodyPr wrap="square" lIns="0" tIns="0" rIns="0" bIns="0" rtlCol="0" anchor="t"/>
+          <a:lstStyle/>
+          <a:p>
+            <a:pPr algn="l" indent="0" marL="0">
+              <a:lnSpc>
+                <a:spcPts val="2092"/>
+              </a:lnSpc>
+              <a:buNone/>
+            </a:pPr>
+            <a:r>
+              <a:rPr lang="en-US" sz="1260" dirty="0">
+                <a:solidFill>
+                  <a:srgbClr val="2E3A45"/>
+                </a:solidFill>
+                <a:latin typeface="Jost Light" pitchFamily="34" charset="0"/>
+                <a:ea typeface="Jost Light" pitchFamily="34" charset="-122"/>
+                <a:cs typeface="Jost Light" pitchFamily="34" charset="-120"/>
+              </a:rPr>
+              <a:t>Você aproveita a praia, descansa e vive a experiência.</a:t>
+            </a:r>
+            <a:endParaRPr lang="en-US" sz="1260" dirty="0"/>
+          </a:p>
+        </p:txBody>
+      </p:sp>
+      <p:sp>
+        <p:nvSpPr>
+          <p:cNvPr id="16" name="Text 12"/>
+          <p:cNvSpPr txBox="1"/>
+          <p:nvPr/>
+        </p:nvSpPr>
+        <p:spPr>
+          <a:xfrm>
+            <a:off x="4859685" y="5369868"/>
+            <a:ext cx="2714804" cy="114300"/>
+          </a:xfrm>
+          <a:prstGeom prst="rect">
+            <a:avLst/>
+          </a:prstGeom>
+          <a:noFill/>
+          <a:ln/>
+        </p:spPr>
+        <p:txBody>
+          <a:bodyPr wrap="square" lIns="0" tIns="0" rIns="0" bIns="0" rtlCol="0" anchor="t"/>
+          <a:lstStyle/>
+          <a:p>
+            <a:pPr algn="l" indent="0" marL="0">
+              <a:lnSpc>
+                <a:spcPts val="744"/>
+              </a:lnSpc>
+              <a:buNone/>
+            </a:pPr>
+            <a:r>
+              <a:rPr lang="en-US" sz="620" spc="161" kern="0" dirty="0">
+                <a:solidFill>
+                  <a:srgbClr val="8FB2CC"/>
+                </a:solidFill>
+                <a:latin typeface="Jost Medium" pitchFamily="34" charset="0"/>
+                <a:ea typeface="Jost Medium" pitchFamily="34" charset="-122"/>
+                <a:cs typeface="Jost Medium" pitchFamily="34" charset="-120"/>
+              </a:rPr>
+              <a:t>ATENCIOSAMENTE</a:t>
+            </a:r>
+            <a:endParaRPr lang="en-US" sz="620" dirty="0"/>
+          </a:p>
+        </p:txBody>
+      </p:sp>
+      <p:sp>
+        <p:nvSpPr>
+          <p:cNvPr id="17" name="Text 13"/>
+          <p:cNvSpPr txBox="1"/>
+          <p:nvPr/>
+        </p:nvSpPr>
+        <p:spPr>
+          <a:xfrm>
+            <a:off x="4859685" y="5592068"/>
+            <a:ext cx="2714804" cy="318343"/>
+          </a:xfrm>
+          <a:prstGeom prst="rect">
+            <a:avLst/>
+          </a:prstGeom>
+          <a:noFill/>
+          <a:ln/>
+        </p:spPr>
+        <p:txBody>
+          <a:bodyPr wrap="square" lIns="0" tIns="0" rIns="0" bIns="0" rtlCol="0" anchor="t"/>
+          <a:lstStyle/>
+          <a:p>
+            <a:pPr algn="l" indent="0" marL="0">
+              <a:lnSpc>
+                <a:spcPts val="2508"/>
+              </a:lnSpc>
+              <a:buNone/>
+            </a:pPr>
+            <a:r>
+              <a:rPr lang="en-US" sz="2200" spc="9" kern="0" dirty="0">
+                <a:solidFill>
+                  <a:srgbClr val="FFFFFF"/>
+                </a:solidFill>
+                <a:latin typeface="EB Garamond" pitchFamily="34" charset="0"/>
+                <a:ea typeface="EB Garamond" pitchFamily="34" charset="-122"/>
+                <a:cs typeface="EB Garamond" pitchFamily="34" charset="-120"/>
+              </a:rPr>
+              <a:t>Rodrigo Roberto Sulina</a:t>
+            </a:r>
+            <a:endParaRPr lang="en-US" sz="2200" dirty="0"/>
+          </a:p>
+        </p:txBody>
+      </p:sp>
+      <p:sp>
+        <p:nvSpPr>
+          <p:cNvPr id="18" name="Text 14"/>
+          <p:cNvSpPr txBox="1"/>
+          <p:nvPr/>
+        </p:nvSpPr>
+        <p:spPr>
+          <a:xfrm>
+            <a:off x="4859685" y="5982295"/>
+            <a:ext cx="2714804" cy="362545"/>
+          </a:xfrm>
+          <a:prstGeom prst="rect">
+            <a:avLst/>
+          </a:prstGeom>
+          <a:noFill/>
+          <a:ln/>
+        </p:spPr>
+        <p:txBody>
+          <a:bodyPr wrap="square" lIns="0" tIns="0" rIns="0" bIns="0" rtlCol="0" anchor="t"/>
+          <a:lstStyle/>
+          <a:p>
+            <a:pPr algn="l" indent="0" marL="0">
+              <a:lnSpc>
+                <a:spcPts val="1428"/>
+              </a:lnSpc>
+              <a:buNone/>
+            </a:pPr>
+            <a:r>
+              <a:rPr lang="en-US" sz="840" spc="50" kern="0" dirty="0">
+                <a:solidFill>
+                  <a:srgbClr val="B9CBD9"/>
                 </a:solidFill>
                 <a:latin typeface="Jost" pitchFamily="34" charset="0"/>
                 <a:ea typeface="Jost" pitchFamily="34" charset="-122"/>
                 <a:cs typeface="Jost" pitchFamily="34" charset="-120"/>
               </a:rPr>
-              <a:t>Um primeiro alinhamento, antes de qualquer deslocamento.</a:t>
-            </a:r>
-            <a:endParaRPr lang="en-US" sz="900" dirty="0"/>
-          </a:p>
-        </p:txBody>
-      </p:sp>
-      <p:sp>
-        <p:nvSpPr>
-          <p:cNvPr id="20" name="Text 16"/>
-          <p:cNvSpPr txBox="1"/>
-          <p:nvPr/>
-        </p:nvSpPr>
-        <p:spPr>
-          <a:xfrm>
-            <a:off x="6443811" y="2727722"/>
-            <a:ext cx="1593830" cy="114300"/>
-          </a:xfrm>
-          <a:prstGeom prst="rect">
-            <a:avLst/>
-          </a:prstGeom>
-          <a:noFill/>
-          <a:ln/>
-        </p:spPr>
-        <p:txBody>
-          <a:bodyPr wrap="square" lIns="0" tIns="0" rIns="0" bIns="0" rtlCol="0" anchor="t"/>
-          <a:lstStyle/>
-          <a:p>
-            <a:pPr algn="l" indent="0" marL="0">
-              <a:lnSpc>
-                <a:spcPts val="768"/>
-              </a:lnSpc>
-              <a:buNone/>
-            </a:pPr>
-            <a:r>
-              <a:rPr lang="en-US" sz="640" spc="154" kern="0" dirty="0">
-                <a:solidFill>
-                  <a:srgbClr val="C1121C"/>
+              <a:t>Pousada Camburi</a:t>
+            </a:r>
+            <a:endParaRPr lang="en-US" sz="840" dirty="0"/>
+          </a:p>
+          <a:p>
+            <a:pPr algn="l" indent="0" marL="0">
+              <a:lnSpc>
+                <a:spcPts val="1428"/>
+              </a:lnSpc>
+              <a:buNone/>
+            </a:pPr>
+            <a:r>
+              <a:rPr lang="en-US" sz="840" spc="50" kern="0" dirty="0">
+                <a:solidFill>
+                  <a:srgbClr val="B9CBD9"/>
+                </a:solidFill>
+                <a:latin typeface="Jost" pitchFamily="34" charset="0"/>
+                <a:ea typeface="Jost" pitchFamily="34" charset="-122"/>
+                <a:cs typeface="Jost" pitchFamily="34" charset="-120"/>
+              </a:rPr>
+              <a:t>Desde 22 de agosto de 2002</a:t>
+            </a:r>
+            <a:endParaRPr lang="en-US" sz="840" dirty="0"/>
+          </a:p>
+        </p:txBody>
+      </p:sp>
+      <p:sp>
+        <p:nvSpPr>
+          <p:cNvPr id="19" name="Text 15"/>
+          <p:cNvSpPr txBox="1"/>
+          <p:nvPr/>
+        </p:nvSpPr>
+        <p:spPr>
+          <a:xfrm>
+            <a:off x="7842915" y="5410200"/>
+            <a:ext cx="1733282" cy="894159"/>
+          </a:xfrm>
+          <a:prstGeom prst="rect">
+            <a:avLst/>
+          </a:prstGeom>
+          <a:noFill/>
+          <a:ln/>
+        </p:spPr>
+        <p:txBody>
+          <a:bodyPr wrap="square" lIns="0" tIns="0" rIns="0" bIns="0" rtlCol="0" anchor="t"/>
+          <a:lstStyle/>
+          <a:p>
+            <a:pPr algn="r" indent="0" marL="0">
+              <a:lnSpc>
+                <a:spcPts val="1760"/>
+              </a:lnSpc>
+              <a:buNone/>
+            </a:pPr>
+            <a:r>
+              <a:rPr lang="en-US" sz="640" spc="128" kern="0" dirty="0">
+                <a:solidFill>
+                  <a:srgbClr val="8FB2CC"/>
                 </a:solidFill>
                 <a:latin typeface="Jost Medium" pitchFamily="34" charset="0"/>
                 <a:ea typeface="Jost Medium" pitchFamily="34" charset="-122"/>
                 <a:cs typeface="Jost Medium" pitchFamily="34" charset="-120"/>
               </a:rPr>
-              <a:t>VISITA</a:t>
-            </a:r>
-            <a:endParaRPr lang="en-US" sz="640" dirty="0"/>
-          </a:p>
-        </p:txBody>
-      </p:sp>
-      <p:sp>
-        <p:nvSpPr>
-          <p:cNvPr id="21" name="Text 17"/>
-          <p:cNvSpPr txBox="1"/>
-          <p:nvPr/>
-        </p:nvSpPr>
-        <p:spPr>
-          <a:xfrm>
-            <a:off x="6443811" y="2935486"/>
-            <a:ext cx="1593830" cy="471190"/>
-          </a:xfrm>
-          <a:prstGeom prst="rect">
-            <a:avLst/>
-          </a:prstGeom>
-          <a:noFill/>
-          <a:ln/>
-        </p:spPr>
-        <p:txBody>
-          <a:bodyPr wrap="square" lIns="0" tIns="0" rIns="0" bIns="0" rtlCol="0" anchor="t"/>
-          <a:lstStyle/>
-          <a:p>
-            <a:pPr algn="l" indent="0" marL="0">
-              <a:lnSpc>
-                <a:spcPts val="1856"/>
-              </a:lnSpc>
-              <a:buNone/>
-            </a:pPr>
-            <a:r>
-              <a:rPr lang="en-US" sz="1600" dirty="0">
-                <a:solidFill>
-                  <a:srgbClr val="16222E"/>
-                </a:solidFill>
-                <a:latin typeface="EB Garamond Medium" pitchFamily="34" charset="0"/>
-                <a:ea typeface="EB Garamond Medium" pitchFamily="34" charset="-122"/>
-                <a:cs typeface="EB Garamond Medium" pitchFamily="34" charset="-120"/>
-              </a:rPr>
-              <a:t>Quando for conveniente</a:t>
-            </a:r>
-            <a:endParaRPr lang="en-US" sz="1600" dirty="0"/>
-          </a:p>
-        </p:txBody>
-      </p:sp>
-      <p:sp>
-        <p:nvSpPr>
-          <p:cNvPr id="22" name="Text 18"/>
-          <p:cNvSpPr txBox="1"/>
-          <p:nvPr/>
-        </p:nvSpPr>
-        <p:spPr>
-          <a:xfrm>
-            <a:off x="6443811" y="3485852"/>
-            <a:ext cx="1593830" cy="568821"/>
-          </a:xfrm>
-          <a:prstGeom prst="rect">
-            <a:avLst/>
-          </a:prstGeom>
-          <a:noFill/>
-          <a:ln/>
-        </p:spPr>
-        <p:txBody>
-          <a:bodyPr wrap="square" lIns="0" tIns="0" rIns="0" bIns="0" rtlCol="0" anchor="t"/>
-          <a:lstStyle/>
-          <a:p>
-            <a:pPr algn="l" indent="0" marL="0">
-              <a:lnSpc>
-                <a:spcPts val="1494"/>
-              </a:lnSpc>
-              <a:buNone/>
-            </a:pPr>
-            <a:r>
-              <a:rPr lang="en-US" sz="900" dirty="0">
-                <a:solidFill>
-                  <a:srgbClr val="5A6672"/>
+              <a:t>TEL.</a:t>
+            </a:r>
+            <a:pPr algn="r" indent="0" marL="0">
+              <a:lnSpc>
+                <a:spcPts val="1760"/>
+              </a:lnSpc>
+              <a:buNone/>
+            </a:pPr>
+            <a:r>
+              <a:rPr lang="en-US" sz="880" spc="18" kern="0" dirty="0">
+                <a:solidFill>
+                  <a:srgbClr val="E6EDF3"/>
                 </a:solidFill>
                 <a:latin typeface="Jost" pitchFamily="34" charset="0"/>
                 <a:ea typeface="Jost" pitchFamily="34" charset="-122"/>
                 <a:cs typeface="Jost" pitchFamily="34" charset="-120"/>
               </a:rPr>
-              <a:t>Recebemos a equipe da Victorinox em Camburi, com hora marcada.</a:t>
-            </a:r>
-            <a:endParaRPr lang="en-US" sz="900" dirty="0"/>
-          </a:p>
-        </p:txBody>
-      </p:sp>
-      <p:sp>
-        <p:nvSpPr>
-          <p:cNvPr id="23" name="Text 19"/>
-          <p:cNvSpPr txBox="1"/>
-          <p:nvPr/>
-        </p:nvSpPr>
-        <p:spPr>
-          <a:xfrm>
-            <a:off x="8423821" y="2727722"/>
-            <a:ext cx="1593830" cy="114300"/>
-          </a:xfrm>
-          <a:prstGeom prst="rect">
-            <a:avLst/>
-          </a:prstGeom>
-          <a:noFill/>
-          <a:ln/>
-        </p:spPr>
-        <p:txBody>
-          <a:bodyPr wrap="square" lIns="0" tIns="0" rIns="0" bIns="0" rtlCol="0" anchor="t"/>
-          <a:lstStyle/>
-          <a:p>
-            <a:pPr algn="l" indent="0" marL="0">
-              <a:lnSpc>
-                <a:spcPts val="768"/>
-              </a:lnSpc>
-              <a:buNone/>
-            </a:pPr>
-            <a:r>
-              <a:rPr lang="en-US" sz="640" spc="154" kern="0" dirty="0">
-                <a:solidFill>
-                  <a:srgbClr val="C1121C"/>
+              <a:t> (12) 99795-2066</a:t>
+            </a:r>
+            <a:endParaRPr lang="en-US" sz="640" dirty="0"/>
+          </a:p>
+          <a:p>
+            <a:pPr algn="r" indent="0" marL="0">
+              <a:lnSpc>
+                <a:spcPts val="1760"/>
+              </a:lnSpc>
+              <a:buNone/>
+            </a:pPr>
+            <a:r>
+              <a:rPr lang="en-US" sz="640" spc="128" kern="0" dirty="0">
+                <a:solidFill>
+                  <a:srgbClr val="8FB2CC"/>
                 </a:solidFill>
                 <a:latin typeface="Jost Medium" pitchFamily="34" charset="0"/>
                 <a:ea typeface="Jost Medium" pitchFamily="34" charset="-122"/>
                 <a:cs typeface="Jost Medium" pitchFamily="34" charset="-120"/>
               </a:rPr>
-              <a:t>DETALHAMENTO</a:t>
-            </a:r>
-            <a:endParaRPr lang="en-US" sz="640" dirty="0"/>
-          </a:p>
-        </p:txBody>
-      </p:sp>
-      <p:sp>
-        <p:nvSpPr>
-          <p:cNvPr id="24" name="Text 20"/>
-          <p:cNvSpPr txBox="1"/>
-          <p:nvPr/>
-        </p:nvSpPr>
-        <p:spPr>
-          <a:xfrm>
-            <a:off x="8423821" y="2935486"/>
-            <a:ext cx="1593830" cy="471190"/>
-          </a:xfrm>
-          <a:prstGeom prst="rect">
-            <a:avLst/>
-          </a:prstGeom>
-          <a:noFill/>
-          <a:ln/>
-        </p:spPr>
-        <p:txBody>
-          <a:bodyPr wrap="square" lIns="0" tIns="0" rIns="0" bIns="0" rtlCol="0" anchor="t"/>
-          <a:lstStyle/>
-          <a:p>
-            <a:pPr algn="l" indent="0" marL="0">
-              <a:lnSpc>
-                <a:spcPts val="1856"/>
-              </a:lnSpc>
-              <a:buNone/>
-            </a:pPr>
-            <a:r>
-              <a:rPr lang="en-US" sz="1600" dirty="0">
-                <a:solidFill>
-                  <a:srgbClr val="16222E"/>
-                </a:solidFill>
-                <a:latin typeface="EB Garamond Medium" pitchFamily="34" charset="0"/>
-                <a:ea typeface="EB Garamond Medium" pitchFamily="34" charset="-122"/>
-                <a:cs typeface="EB Garamond Medium" pitchFamily="34" charset="-120"/>
-              </a:rPr>
-              <a:t>Documento próprio</a:t>
-            </a:r>
-            <a:endParaRPr lang="en-US" sz="1600" dirty="0"/>
-          </a:p>
-        </p:txBody>
-      </p:sp>
-      <p:sp>
-        <p:nvSpPr>
-          <p:cNvPr id="25" name="Text 21"/>
-          <p:cNvSpPr txBox="1"/>
-          <p:nvPr/>
-        </p:nvSpPr>
-        <p:spPr>
-          <a:xfrm>
-            <a:off x="8423821" y="3485852"/>
-            <a:ext cx="1593830" cy="568821"/>
-          </a:xfrm>
-          <a:prstGeom prst="rect">
-            <a:avLst/>
-          </a:prstGeom>
-          <a:noFill/>
-          <a:ln/>
-        </p:spPr>
-        <p:txBody>
-          <a:bodyPr wrap="square" lIns="0" tIns="0" rIns="0" bIns="0" rtlCol="0" anchor="t"/>
-          <a:lstStyle/>
-          <a:p>
-            <a:pPr algn="l" indent="0" marL="0">
-              <a:lnSpc>
-                <a:spcPts val="1494"/>
-              </a:lnSpc>
-              <a:buNone/>
-            </a:pPr>
-            <a:r>
-              <a:rPr lang="en-US" sz="900" dirty="0">
-                <a:solidFill>
-                  <a:srgbClr val="5A6672"/>
+              <a:t>TEL.</a:t>
+            </a:r>
+            <a:pPr algn="r" indent="0" marL="0">
+              <a:lnSpc>
+                <a:spcPts val="1760"/>
+              </a:lnSpc>
+              <a:buNone/>
+            </a:pPr>
+            <a:r>
+              <a:rPr lang="en-US" sz="880" spc="18" kern="0" dirty="0">
+                <a:solidFill>
+                  <a:srgbClr val="E6EDF3"/>
                 </a:solidFill>
                 <a:latin typeface="Jost" pitchFamily="34" charset="0"/>
                 <a:ea typeface="Jost" pitchFamily="34" charset="-122"/>
                 <a:cs typeface="Jost" pitchFamily="34" charset="-120"/>
               </a:rPr>
-              <a:t>A proposta de experiência segue em apresentação separada.</a:t>
-            </a:r>
-            <a:endParaRPr lang="en-US" sz="900" dirty="0"/>
-          </a:p>
-        </p:txBody>
-      </p:sp>
-      <p:sp>
-        <p:nvSpPr>
-          <p:cNvPr id="26" name="Text 22"/>
-          <p:cNvSpPr txBox="1"/>
-          <p:nvPr/>
-        </p:nvSpPr>
-        <p:spPr>
-          <a:xfrm>
-            <a:off x="4859685" y="5369868"/>
-            <a:ext cx="2714804" cy="114300"/>
-          </a:xfrm>
-          <a:prstGeom prst="rect">
-            <a:avLst/>
-          </a:prstGeom>
-          <a:noFill/>
-          <a:ln/>
-        </p:spPr>
-        <p:txBody>
-          <a:bodyPr wrap="square" lIns="0" tIns="0" rIns="0" bIns="0" rtlCol="0" anchor="t"/>
-          <a:lstStyle/>
-          <a:p>
-            <a:pPr algn="l" indent="0" marL="0">
-              <a:lnSpc>
-                <a:spcPts val="744"/>
-              </a:lnSpc>
-              <a:buNone/>
-            </a:pPr>
-            <a:r>
-              <a:rPr lang="en-US" sz="620" spc="161" kern="0" dirty="0">
-                <a:solidFill>
-                  <a:srgbClr val="8FB2CC"/>
-                </a:solidFill>
-                <a:latin typeface="Jost Medium" pitchFamily="34" charset="0"/>
-                <a:ea typeface="Jost Medium" pitchFamily="34" charset="-122"/>
-                <a:cs typeface="Jost Medium" pitchFamily="34" charset="-120"/>
-              </a:rPr>
-              <a:t>CONTATO</a:t>
-            </a:r>
-            <a:endParaRPr lang="en-US" sz="620" dirty="0"/>
-          </a:p>
-        </p:txBody>
-      </p:sp>
-      <p:sp>
-        <p:nvSpPr>
-          <p:cNvPr id="27" name="Text 23"/>
-          <p:cNvSpPr txBox="1"/>
-          <p:nvPr/>
-        </p:nvSpPr>
-        <p:spPr>
-          <a:xfrm>
-            <a:off x="4859685" y="5592068"/>
-            <a:ext cx="2714804" cy="318343"/>
-          </a:xfrm>
-          <a:prstGeom prst="rect">
-            <a:avLst/>
-          </a:prstGeom>
-          <a:noFill/>
-          <a:ln/>
-        </p:spPr>
-        <p:txBody>
-          <a:bodyPr wrap="square" lIns="0" tIns="0" rIns="0" bIns="0" rtlCol="0" anchor="t"/>
-          <a:lstStyle/>
-          <a:p>
-            <a:pPr algn="l" indent="0" marL="0">
-              <a:lnSpc>
-                <a:spcPts val="2508"/>
-              </a:lnSpc>
-              <a:buNone/>
-            </a:pPr>
-            <a:r>
-              <a:rPr lang="en-US" sz="2200" spc="9" kern="0" dirty="0">
-                <a:solidFill>
-                  <a:srgbClr val="FFFFFF"/>
-                </a:solidFill>
-                <a:latin typeface="EB Garamond" pitchFamily="34" charset="0"/>
-                <a:ea typeface="EB Garamond" pitchFamily="34" charset="-122"/>
-                <a:cs typeface="EB Garamond" pitchFamily="34" charset="-120"/>
-              </a:rPr>
-              <a:t>Rodrigo Roberto Sulina</a:t>
-            </a:r>
-            <a:endParaRPr lang="en-US" sz="2200" dirty="0"/>
-          </a:p>
-        </p:txBody>
-      </p:sp>
-      <p:sp>
-        <p:nvSpPr>
-          <p:cNvPr id="28" name="Text 24"/>
-          <p:cNvSpPr txBox="1"/>
-          <p:nvPr/>
-        </p:nvSpPr>
-        <p:spPr>
-          <a:xfrm>
-            <a:off x="4859685" y="5982295"/>
-            <a:ext cx="2714804" cy="362545"/>
-          </a:xfrm>
-          <a:prstGeom prst="rect">
-            <a:avLst/>
-          </a:prstGeom>
-          <a:noFill/>
-          <a:ln/>
-        </p:spPr>
-        <p:txBody>
-          <a:bodyPr wrap="square" lIns="0" tIns="0" rIns="0" bIns="0" rtlCol="0" anchor="t"/>
-          <a:lstStyle/>
-          <a:p>
-            <a:pPr algn="l" indent="0" marL="0">
-              <a:lnSpc>
-                <a:spcPts val="1428"/>
-              </a:lnSpc>
-              <a:buNone/>
-            </a:pPr>
-            <a:r>
-              <a:rPr lang="en-US" sz="840" spc="50" kern="0" dirty="0">
-                <a:solidFill>
-                  <a:srgbClr val="B9CBD9"/>
+              <a:t> (12) 99769-8399</a:t>
+            </a:r>
+            <a:endParaRPr lang="en-US" sz="640" dirty="0"/>
+          </a:p>
+          <a:p>
+            <a:pPr algn="r" indent="0" marL="0">
+              <a:lnSpc>
+                <a:spcPts val="1760"/>
+              </a:lnSpc>
+              <a:buNone/>
+            </a:pPr>
+            <a:r>
+              <a:rPr lang="en-US" sz="880" spc="18" kern="0" dirty="0">
+                <a:solidFill>
+                  <a:srgbClr val="E6EDF3"/>
                 </a:solidFill>
                 <a:latin typeface="Jost" pitchFamily="34" charset="0"/>
                 <a:ea typeface="Jost" pitchFamily="34" charset="-122"/>
                 <a:cs typeface="Jost" pitchFamily="34" charset="-120"/>
               </a:rPr>
-              <a:t>Gestão de Reservas e Comercial</a:t>
-            </a:r>
-            <a:endParaRPr lang="en-US" sz="840" dirty="0"/>
-          </a:p>
-          <a:p>
-            <a:pPr algn="l" indent="0" marL="0">
-              <a:lnSpc>
-                <a:spcPts val="1428"/>
-              </a:lnSpc>
-              <a:buNone/>
-            </a:pPr>
-            <a:r>
-              <a:rPr lang="en-US" sz="840" spc="50" kern="0" dirty="0">
-                <a:solidFill>
-                  <a:srgbClr val="B9CBD9"/>
+              <a:t> camburi@pousadacamburi.com.br</a:t>
+            </a:r>
+            <a:endParaRPr lang="en-US" sz="640" dirty="0"/>
+          </a:p>
+          <a:p>
+            <a:pPr algn="r" indent="0" marL="0">
+              <a:lnSpc>
+                <a:spcPts val="1760"/>
+              </a:lnSpc>
+              <a:buNone/>
+            </a:pPr>
+            <a:r>
+              <a:rPr lang="en-US" sz="880" spc="18" kern="0" dirty="0">
+                <a:solidFill>
+                  <a:srgbClr val="E6EDF3"/>
                 </a:solidFill>
                 <a:latin typeface="Jost" pitchFamily="34" charset="0"/>
                 <a:ea typeface="Jost" pitchFamily="34" charset="-122"/>
                 <a:cs typeface="Jost" pitchFamily="34" charset="-120"/>
               </a:rPr>
-              <a:t>Pousada Camburi · desde 22 de agosto de 2002</a:t>
-            </a:r>
-            <a:endParaRPr lang="en-US" sz="840" dirty="0"/>
-          </a:p>
-        </p:txBody>
-      </p:sp>
-      <p:sp>
-        <p:nvSpPr>
-          <p:cNvPr id="29" name="Text 25"/>
-          <p:cNvSpPr txBox="1"/>
-          <p:nvPr/>
-        </p:nvSpPr>
-        <p:spPr>
-          <a:xfrm>
-            <a:off x="7842915" y="5410200"/>
-            <a:ext cx="1733282" cy="894159"/>
-          </a:xfrm>
-          <a:prstGeom prst="rect">
-            <a:avLst/>
-          </a:prstGeom>
-          <a:noFill/>
-          <a:ln/>
-        </p:spPr>
-        <p:txBody>
-          <a:bodyPr wrap="square" lIns="0" tIns="0" rIns="0" bIns="0" rtlCol="0" anchor="t"/>
-          <a:lstStyle/>
-          <a:p>
-            <a:pPr algn="r" indent="0" marL="0">
-              <a:lnSpc>
-                <a:spcPts val="1760"/>
-              </a:lnSpc>
-              <a:buNone/>
-            </a:pPr>
-            <a:r>
-              <a:rPr lang="en-US" sz="640" spc="128" kern="0" dirty="0">
-                <a:solidFill>
-                  <a:srgbClr val="8FB2CC"/>
-                </a:solidFill>
-                <a:latin typeface="Jost Medium" pitchFamily="34" charset="0"/>
-                <a:ea typeface="Jost Medium" pitchFamily="34" charset="-122"/>
-                <a:cs typeface="Jost Medium" pitchFamily="34" charset="-120"/>
-              </a:rPr>
-              <a:t>TEL.</a:t>
-            </a:r>
-            <a:pPr algn="r" indent="0" marL="0">
-              <a:lnSpc>
-                <a:spcPts val="1760"/>
-              </a:lnSpc>
-              <a:buNone/>
-            </a:pPr>
-            <a:r>
-              <a:rPr lang="en-US" sz="880" spc="18" kern="0" dirty="0">
-                <a:solidFill>
-                  <a:srgbClr val="E6EDF3"/>
-                </a:solidFill>
-                <a:latin typeface="Jost" pitchFamily="34" charset="0"/>
-                <a:ea typeface="Jost" pitchFamily="34" charset="-122"/>
-                <a:cs typeface="Jost" pitchFamily="34" charset="-120"/>
-              </a:rPr>
-              <a:t> (12) 99795-2066</a:t>
+              <a:t> rrsulina@pousadacamburi.com.br </a:t>
             </a:r>
             <a:endParaRPr lang="en-US" sz="640" dirty="0"/>
           </a:p>
-          <a:p>
-            <a:pPr algn="r" indent="0" marL="0">
-              <a:lnSpc>
-                <a:spcPts val="1760"/>
-              </a:lnSpc>
-              <a:buNone/>
-            </a:pPr>
-            <a:r>
-              <a:rPr lang="en-US" sz="640" spc="128" kern="0" dirty="0">
-                <a:solidFill>
-                  <a:srgbClr val="8FB2CC"/>
-                </a:solidFill>
-                <a:latin typeface="Jost Medium" pitchFamily="34" charset="0"/>
-                <a:ea typeface="Jost Medium" pitchFamily="34" charset="-122"/>
-                <a:cs typeface="Jost Medium" pitchFamily="34" charset="-120"/>
-              </a:rPr>
-              <a:t>TEL.</a:t>
-            </a:r>
-            <a:pPr algn="r" indent="0" marL="0">
-              <a:lnSpc>
-                <a:spcPts val="1760"/>
-              </a:lnSpc>
-              <a:buNone/>
-            </a:pPr>
-            <a:r>
-              <a:rPr lang="en-US" sz="880" spc="18" kern="0" dirty="0">
-                <a:solidFill>
-                  <a:srgbClr val="E6EDF3"/>
-                </a:solidFill>
-                <a:latin typeface="Jost" pitchFamily="34" charset="0"/>
-                <a:ea typeface="Jost" pitchFamily="34" charset="-122"/>
-                <a:cs typeface="Jost" pitchFamily="34" charset="-120"/>
-              </a:rPr>
-              <a:t> (12) 99769-8399</a:t>
-            </a:r>
-            <a:endParaRPr lang="en-US" sz="640" dirty="0"/>
-          </a:p>
-          <a:p>
-            <a:pPr algn="r" indent="0" marL="0">
-              <a:lnSpc>
-                <a:spcPts val="1760"/>
-              </a:lnSpc>
-              <a:buNone/>
-            </a:pPr>
-            <a:r>
-              <a:rPr lang="en-US" sz="880" spc="18" kern="0" dirty="0">
-                <a:solidFill>
-                  <a:srgbClr val="E6EDF3"/>
-                </a:solidFill>
-                <a:latin typeface="Jost" pitchFamily="34" charset="0"/>
-                <a:ea typeface="Jost" pitchFamily="34" charset="-122"/>
-                <a:cs typeface="Jost" pitchFamily="34" charset="-120"/>
-              </a:rPr>
-              <a:t> camburi@pousadacamburi.com.br</a:t>
-            </a:r>
-            <a:endParaRPr lang="en-US" sz="640" dirty="0"/>
-          </a:p>
-          <a:p>
-            <a:pPr algn="r" indent="0" marL="0">
-              <a:lnSpc>
-                <a:spcPts val="1760"/>
-              </a:lnSpc>
-              <a:buNone/>
-            </a:pPr>
-            <a:r>
-              <a:rPr lang="en-US" sz="880" spc="18" kern="0" dirty="0">
-                <a:solidFill>
-                  <a:srgbClr val="E6EDF3"/>
-                </a:solidFill>
-                <a:latin typeface="Jost" pitchFamily="34" charset="0"/>
-                <a:ea typeface="Jost" pitchFamily="34" charset="-122"/>
-                <a:cs typeface="Jost" pitchFamily="34" charset="-120"/>
-              </a:rPr>
-              <a:t> rrsulina@pousadacamburi.com.br </a:t>
-            </a:r>
-            <a:endParaRPr lang="en-US" sz="640" dirty="0"/>
-          </a:p>
-        </p:txBody>
-      </p:sp>
-      <p:sp>
-        <p:nvSpPr>
-          <p:cNvPr id="30" name="Text 26"/>
+        </p:txBody>
+      </p:sp>
+      <p:sp>
+        <p:nvSpPr>
+          <p:cNvPr id="20" name="Text 16"/>
           <p:cNvSpPr txBox="1"/>
           <p:nvPr/>
         </p:nvSpPr>
@@ -3748,7 +4101,7 @@
         </p:nvSpPr>
         <p:spPr>
           <a:xfrm>
-            <a:off x="4463802" y="5080248"/>
+            <a:off x="4463802" y="5883771"/>
             <a:ext cx="5508278" cy="9525"/>
           </a:xfrm>
           <a:prstGeom prst="rect">
@@ -3948,7 +4301,7 @@
                 <a:ea typeface="Jost Medium" pitchFamily="34" charset="-122"/>
                 <a:cs typeface="Jost Medium" pitchFamily="34" charset="-120"/>
               </a:rPr>
-              <a:t>A ORIGEM</a:t>
+              <a:t>CARTA DE APRESENTAÇÃO</a:t>
             </a:r>
             <a:endParaRPr lang="en-US" sz="660" dirty="0"/>
           </a:p>
@@ -3963,7 +4316,7 @@
         <p:spPr>
           <a:xfrm>
             <a:off x="719882" y="1617464"/>
-            <a:ext cx="2700218" cy="1172468"/>
+            <a:ext cx="2700218" cy="1954113"/>
           </a:xfrm>
           <a:prstGeom prst="rect">
             <a:avLst/>
@@ -3990,7 +4343,7 @@
                 <a:ea typeface="EB Garamond Medium" pitchFamily="34" charset="-122"/>
                 <a:cs typeface="EB Garamond Medium" pitchFamily="34" charset="-120"/>
               </a:rPr>
-              <a:t>Mais de vinte anos dedicados à arte de receber</a:t>
+              <a:t>Uma história de hospitalidade, qualidade e experiências há mais de 20 anos</a:t>
             </a:r>
             <a:endParaRPr lang="en-US" sz="2700" dirty="0"/>
           </a:p>
@@ -4047,7 +4400,69 @@
         <p:spPr>
           <a:xfrm>
             <a:off x="4463802" y="1341239"/>
-            <a:ext cx="5553998" cy="531019"/>
+            <a:ext cx="5553998" cy="457795"/>
+          </a:xfrm>
+          <a:prstGeom prst="rect">
+            <a:avLst/>
+          </a:prstGeom>
+          <a:noFill/>
+          <a:ln/>
+        </p:spPr>
+        <p:txBody>
+          <a:bodyPr wrap="square" lIns="0" tIns="0" rIns="0" bIns="0" rtlCol="0" anchor="t"/>
+          <a:lstStyle/>
+          <a:p>
+            <a:pPr algn="l" indent="0" marL="0">
+              <a:lnSpc>
+                <a:spcPts val="1802"/>
+              </a:lnSpc>
+              <a:buNone/>
+            </a:pPr>
+            <a:r>
+              <a:rPr lang="en-US" sz="1060" dirty="0">
+                <a:solidFill>
+                  <a:srgbClr val="16222E"/>
+                </a:solidFill>
+                <a:latin typeface="Jost Medium" pitchFamily="34" charset="0"/>
+                <a:ea typeface="Jost Medium" pitchFamily="34" charset="-122"/>
+                <a:cs typeface="Jost Medium" pitchFamily="34" charset="-120"/>
+              </a:rPr>
+              <a:t>À Victorinox Brasil</a:t>
+            </a:r>
+            <a:endParaRPr lang="en-US" sz="1060" dirty="0"/>
+          </a:p>
+          <a:p>
+            <a:pPr algn="l" indent="0" marL="0">
+              <a:lnSpc>
+                <a:spcPts val="1802"/>
+              </a:lnSpc>
+              <a:buNone/>
+            </a:pPr>
+            <a:r>
+              <a:rPr lang="en-US" sz="1060" dirty="0">
+                <a:solidFill>
+                  <a:srgbClr val="16222E"/>
+                </a:solidFill>
+                <a:latin typeface="Jost Medium" pitchFamily="34" charset="0"/>
+                <a:ea typeface="Jost Medium" pitchFamily="34" charset="-122"/>
+                <a:cs typeface="Jost Medium" pitchFamily="34" charset="-120"/>
+              </a:rPr>
+              <a:t>Prezados Senhores,</a:t>
+            </a:r>
+            <a:endParaRPr lang="en-US" sz="1060" dirty="0"/>
+          </a:p>
+        </p:txBody>
+      </p:sp>
+      <p:sp>
+        <p:nvSpPr>
+          <p:cNvPr id="16" name="Text 12"/>
+          <p:cNvSpPr txBox="1"/>
+          <p:nvPr/>
+        </p:nvSpPr>
+        <p:spPr>
+          <a:xfrm>
+            <a:off x="4463802" y="2032992"/>
+            <a:ext cx="5553998" cy="1062038"/>
           </a:xfrm>
           <a:prstGeom prst="rect">
             <a:avLst/>
@@ -4074,7 +4489,7 @@
                 <a:ea typeface="Jost Light" pitchFamily="34" charset="-122"/>
                 <a:cs typeface="Jost Light" pitchFamily="34" charset="-120"/>
               </a:rPr>
-              <a:t>Nossa história começou em 22 de agosto de 2002. Desde então, construímos nossa trajetória sobre um princípio muito simples.</a:t>
+              <a:t>É com grande satisfação que apresentamos a Pousada Camburi, uma empresa genuinamente brasileira, estabelecida em Camburi, São Sebastião, no litoral norte do Estado de São Paulo, e que há mais de duas décadas dedica-se à arte de receber pessoas.</a:t>
             </a:r>
             <a:endParaRPr lang="en-US" sz="1260" dirty="0"/>
           </a:p>
@@ -4082,13 +4497,13 @@
       </p:sp>
       <p:sp>
         <p:nvSpPr>
-          <p:cNvPr id="16" name="Text 12"/>
-          <p:cNvSpPr txBox="1"/>
-          <p:nvPr/>
-        </p:nvSpPr>
-        <p:spPr>
-          <a:xfrm>
-            <a:off x="4463802" y="2304157"/>
+          <p:cNvPr id="17" name="Text 13"/>
+          <p:cNvSpPr txBox="1"/>
+          <p:nvPr/>
+        </p:nvSpPr>
+        <p:spPr>
+          <a:xfrm>
+            <a:off x="4463802" y="3526929"/>
             <a:ext cx="5553998" cy="735360"/>
           </a:xfrm>
           <a:prstGeom prst="rect">
@@ -4116,7 +4531,7 @@
                 <a:ea typeface="Jost" pitchFamily="34" charset="-122"/>
                 <a:cs typeface="Jost" pitchFamily="34" charset="-120"/>
               </a:rPr>
-              <a:t>Ao longo desses mais de vinte anos, a Pousada Camburi deixou de ser apenas um empreendimento de hospedagem e passou a construir algo que consideramos ainda mais valioso: relacionamentos duradouros com nossos hóspedes.</a:t>
+              <a:t>Nossa história começou em 22 de agosto de 2002. Desde então, construímos nossa trajetória com um princípio muito simples: receber cada hóspede como alguém que estamos verdadeiramente felizes em receber.</a:t>
             </a:r>
             <a:endParaRPr lang="en-US" sz="1060" dirty="0"/>
           </a:p>
@@ -4124,13 +4539,13 @@
       </p:sp>
       <p:sp>
         <p:nvSpPr>
-          <p:cNvPr id="17" name="Text 13"/>
-          <p:cNvSpPr txBox="1"/>
-          <p:nvPr/>
-        </p:nvSpPr>
-        <p:spPr>
-          <a:xfrm>
-            <a:off x="4463802" y="3237458"/>
+          <p:cNvPr id="18" name="Text 14"/>
+          <p:cNvSpPr txBox="1"/>
+          <p:nvPr/>
+        </p:nvSpPr>
+        <p:spPr>
+          <a:xfrm>
+            <a:off x="4463802" y="4460230"/>
             <a:ext cx="5553998" cy="735360"/>
           </a:xfrm>
           <a:prstGeom prst="rect">
@@ -4158,7 +4573,7 @@
                 <a:ea typeface="Jost" pitchFamily="34" charset="-122"/>
                 <a:cs typeface="Jost" pitchFamily="34" charset="-120"/>
               </a:rPr>
-              <a:t>Temos clientes que retornam há muitos anos, famílias que cresceram conosco e pessoas que fizeram da pousada parte de suas histórias e de seus momentos especiais. Esse relacionamento é, para nós, uma das maiores conquistas da nossa empresa.</a:t>
+              <a:t>Ao longo desses mais de 20 anos, a Pousada Camburi deixou de ser apenas um empreendimento de hospedagem e passou a construir algo que consideramos ainda mais valioso: relacionamentos duradouros com nossos hóspedes.</a:t>
             </a:r>
             <a:endParaRPr lang="en-US" sz="1060" dirty="0"/>
           </a:p>
@@ -4166,117 +4581,33 @@
       </p:sp>
       <p:sp>
         <p:nvSpPr>
-          <p:cNvPr id="18" name="Text 14"/>
-          <p:cNvSpPr txBox="1"/>
-          <p:nvPr/>
-        </p:nvSpPr>
-        <p:spPr>
-          <a:xfrm>
-            <a:off x="4463802" y="5377755"/>
-            <a:ext cx="1593830" cy="114300"/>
-          </a:xfrm>
-          <a:prstGeom prst="rect">
-            <a:avLst/>
-          </a:prstGeom>
-          <a:noFill/>
-          <a:ln/>
-        </p:spPr>
-        <p:txBody>
-          <a:bodyPr wrap="square" lIns="0" tIns="0" rIns="0" bIns="0" rtlCol="0" anchor="t"/>
-          <a:lstStyle/>
-          <a:p>
-            <a:pPr algn="l" indent="0" marL="0">
-              <a:lnSpc>
-                <a:spcPts val="768"/>
-              </a:lnSpc>
-              <a:buNone/>
-            </a:pPr>
-            <a:r>
-              <a:rPr lang="en-US" sz="640" spc="154" kern="0" dirty="0">
-                <a:solidFill>
-                  <a:srgbClr val="C1121C"/>
-                </a:solidFill>
-                <a:latin typeface="Jost Medium" pitchFamily="34" charset="0"/>
-                <a:ea typeface="Jost Medium" pitchFamily="34" charset="-122"/>
-                <a:cs typeface="Jost Medium" pitchFamily="34" charset="-120"/>
-              </a:rPr>
-              <a:t>FUNDAÇÃO</a:t>
-            </a:r>
-            <a:endParaRPr lang="en-US" sz="640" dirty="0"/>
-          </a:p>
-        </p:txBody>
-      </p:sp>
-      <p:sp>
-        <p:nvSpPr>
           <p:cNvPr id="19" name="Text 15"/>
           <p:cNvSpPr txBox="1"/>
           <p:nvPr/>
         </p:nvSpPr>
         <p:spPr>
           <a:xfrm>
-            <a:off x="4463802" y="5585520"/>
-            <a:ext cx="1593830" cy="471190"/>
-          </a:xfrm>
-          <a:prstGeom prst="rect">
-            <a:avLst/>
-          </a:prstGeom>
-          <a:noFill/>
-          <a:ln/>
-        </p:spPr>
-        <p:txBody>
-          <a:bodyPr wrap="square" lIns="0" tIns="0" rIns="0" bIns="0" rtlCol="0" anchor="t"/>
-          <a:lstStyle/>
-          <a:p>
-            <a:pPr algn="l" indent="0" marL="0">
-              <a:lnSpc>
-                <a:spcPts val="1856"/>
-              </a:lnSpc>
-              <a:buNone/>
-            </a:pPr>
-            <a:r>
-              <a:rPr lang="en-US" sz="1600" dirty="0">
-                <a:solidFill>
-                  <a:srgbClr val="16222E"/>
-                </a:solidFill>
-                <a:latin typeface="EB Garamond Medium" pitchFamily="34" charset="0"/>
-                <a:ea typeface="EB Garamond Medium" pitchFamily="34" charset="-122"/>
-                <a:cs typeface="EB Garamond Medium" pitchFamily="34" charset="-120"/>
-              </a:rPr>
-              <a:t>22 de agosto de 2002</a:t>
-            </a:r>
-            <a:endParaRPr lang="en-US" sz="1600" dirty="0"/>
-          </a:p>
-        </p:txBody>
-      </p:sp>
-      <p:sp>
-        <p:nvSpPr>
-          <p:cNvPr id="20" name="Text 16"/>
-          <p:cNvSpPr txBox="1"/>
-          <p:nvPr/>
-        </p:nvSpPr>
-        <p:spPr>
-          <a:xfrm>
-            <a:off x="4463802" y="6135886"/>
-            <a:ext cx="1593830" cy="379214"/>
-          </a:xfrm>
-          <a:prstGeom prst="rect">
-            <a:avLst/>
-          </a:prstGeom>
-          <a:noFill/>
-          <a:ln/>
-        </p:spPr>
-        <p:txBody>
-          <a:bodyPr wrap="square" lIns="0" tIns="0" rIns="0" bIns="0" rtlCol="0" anchor="t"/>
-          <a:lstStyle/>
-          <a:p>
-            <a:pPr algn="l" indent="0" marL="0">
-              <a:lnSpc>
-                <a:spcPts val="1494"/>
-              </a:lnSpc>
-              <a:buNone/>
-            </a:pPr>
-            <a:r>
-              <a:rPr lang="en-US" sz="900" dirty="0">
+            <a:off x="4463802" y="5393531"/>
+            <a:ext cx="5553998" cy="490240"/>
+          </a:xfrm>
+          <a:prstGeom prst="rect">
+            <a:avLst/>
+          </a:prstGeom>
+          <a:noFill/>
+          <a:ln/>
+        </p:spPr>
+        <p:txBody>
+          <a:bodyPr wrap="square" lIns="0" tIns="0" rIns="0" bIns="0" rtlCol="0" anchor="t"/>
+          <a:lstStyle/>
+          <a:p>
+            <a:pPr algn="l" indent="0" marL="0">
+              <a:lnSpc>
+                <a:spcPts val="1929"/>
+              </a:lnSpc>
+              <a:buNone/>
+            </a:pPr>
+            <a:r>
+              <a:rPr lang="en-US" sz="1060" dirty="0">
                 <a:solidFill>
                   <a:srgbClr val="5A6672"/>
                 </a:solidFill>
@@ -4284,267 +4615,57 @@
                 <a:ea typeface="Jost" pitchFamily="34" charset="-122"/>
                 <a:cs typeface="Jost" pitchFamily="34" charset="-120"/>
               </a:rPr>
-              <a:t>O início de uma operação que nunca foi interrompida.</a:t>
-            </a:r>
-            <a:endParaRPr lang="en-US" sz="900" dirty="0"/>
+              <a:t>Temos clientes que retornam há muitos anos, famílias que cresceram conosco e pessoas que fizeram da Pousada Camburi parte de suas histórias e de seus momentos especiais.</a:t>
+            </a:r>
+            <a:endParaRPr lang="en-US" sz="1060" dirty="0"/>
+          </a:p>
+        </p:txBody>
+      </p:sp>
+      <p:sp>
+        <p:nvSpPr>
+          <p:cNvPr id="20" name="Text 16"/>
+          <p:cNvSpPr txBox="1"/>
+          <p:nvPr/>
+        </p:nvSpPr>
+        <p:spPr>
+          <a:xfrm>
+            <a:off x="4463802" y="6181279"/>
+            <a:ext cx="5553998" cy="561380"/>
+          </a:xfrm>
+          <a:prstGeom prst="rect">
+            <a:avLst/>
+          </a:prstGeom>
+          <a:noFill/>
+          <a:ln/>
+        </p:spPr>
+        <p:txBody>
+          <a:bodyPr wrap="square" lIns="0" tIns="0" rIns="0" bIns="0" rtlCol="0" anchor="t"/>
+          <a:lstStyle/>
+          <a:p>
+            <a:pPr algn="l" indent="0" marL="0">
+              <a:lnSpc>
+                <a:spcPts val="2210"/>
+              </a:lnSpc>
+              <a:buNone/>
+            </a:pPr>
+            <a:r>
+              <a:rPr lang="en-US" sz="1700" dirty="0">
+                <a:solidFill>
+                  <a:srgbClr val="16222E"/>
+                </a:solidFill>
+                <a:latin typeface="EB Garamond" pitchFamily="34" charset="0"/>
+                <a:ea typeface="EB Garamond" pitchFamily="34" charset="-122"/>
+                <a:cs typeface="EB Garamond" pitchFamily="34" charset="-120"/>
+              </a:rPr>
+              <a:t>Esse relacionamento é, para nós, uma das maiores conquistas da nossa empresa.</a:t>
+            </a:r>
+            <a:endParaRPr lang="en-US" sz="1700" dirty="0"/>
           </a:p>
         </p:txBody>
       </p:sp>
       <p:sp>
         <p:nvSpPr>
           <p:cNvPr id="21" name="Text 17"/>
-          <p:cNvSpPr txBox="1"/>
-          <p:nvPr/>
-        </p:nvSpPr>
-        <p:spPr>
-          <a:xfrm>
-            <a:off x="6443811" y="5377755"/>
-            <a:ext cx="1593830" cy="114300"/>
-          </a:xfrm>
-          <a:prstGeom prst="rect">
-            <a:avLst/>
-          </a:prstGeom>
-          <a:noFill/>
-          <a:ln/>
-        </p:spPr>
-        <p:txBody>
-          <a:bodyPr wrap="square" lIns="0" tIns="0" rIns="0" bIns="0" rtlCol="0" anchor="t"/>
-          <a:lstStyle/>
-          <a:p>
-            <a:pPr algn="l" indent="0" marL="0">
-              <a:lnSpc>
-                <a:spcPts val="768"/>
-              </a:lnSpc>
-              <a:buNone/>
-            </a:pPr>
-            <a:r>
-              <a:rPr lang="en-US" sz="640" spc="154" kern="0" dirty="0">
-                <a:solidFill>
-                  <a:srgbClr val="C1121C"/>
-                </a:solidFill>
-                <a:latin typeface="Jost Medium" pitchFamily="34" charset="0"/>
-                <a:ea typeface="Jost Medium" pitchFamily="34" charset="-122"/>
-                <a:cs typeface="Jost Medium" pitchFamily="34" charset="-120"/>
-              </a:rPr>
-              <a:t>TRAJETÓRIA</a:t>
-            </a:r>
-            <a:endParaRPr lang="en-US" sz="640" dirty="0"/>
-          </a:p>
-        </p:txBody>
-      </p:sp>
-      <p:sp>
-        <p:nvSpPr>
-          <p:cNvPr id="22" name="Text 18"/>
-          <p:cNvSpPr txBox="1"/>
-          <p:nvPr/>
-        </p:nvSpPr>
-        <p:spPr>
-          <a:xfrm>
-            <a:off x="6443811" y="5585520"/>
-            <a:ext cx="1593830" cy="471190"/>
-          </a:xfrm>
-          <a:prstGeom prst="rect">
-            <a:avLst/>
-          </a:prstGeom>
-          <a:noFill/>
-          <a:ln/>
-        </p:spPr>
-        <p:txBody>
-          <a:bodyPr wrap="square" lIns="0" tIns="0" rIns="0" bIns="0" rtlCol="0" anchor="t"/>
-          <a:lstStyle/>
-          <a:p>
-            <a:pPr algn="l" indent="0" marL="0">
-              <a:lnSpc>
-                <a:spcPts val="1856"/>
-              </a:lnSpc>
-              <a:buNone/>
-            </a:pPr>
-            <a:r>
-              <a:rPr lang="en-US" sz="1600" dirty="0">
-                <a:solidFill>
-                  <a:srgbClr val="16222E"/>
-                </a:solidFill>
-                <a:latin typeface="EB Garamond Medium" pitchFamily="34" charset="0"/>
-                <a:ea typeface="EB Garamond Medium" pitchFamily="34" charset="-122"/>
-                <a:cs typeface="EB Garamond Medium" pitchFamily="34" charset="-120"/>
-              </a:rPr>
-              <a:t>Mais de duas décadas</a:t>
-            </a:r>
-            <a:endParaRPr lang="en-US" sz="1600" dirty="0"/>
-          </a:p>
-        </p:txBody>
-      </p:sp>
-      <p:sp>
-        <p:nvSpPr>
-          <p:cNvPr id="23" name="Text 19"/>
-          <p:cNvSpPr txBox="1"/>
-          <p:nvPr/>
-        </p:nvSpPr>
-        <p:spPr>
-          <a:xfrm>
-            <a:off x="6443811" y="6135886"/>
-            <a:ext cx="1593830" cy="568821"/>
-          </a:xfrm>
-          <a:prstGeom prst="rect">
-            <a:avLst/>
-          </a:prstGeom>
-          <a:noFill/>
-          <a:ln/>
-        </p:spPr>
-        <p:txBody>
-          <a:bodyPr wrap="square" lIns="0" tIns="0" rIns="0" bIns="0" rtlCol="0" anchor="t"/>
-          <a:lstStyle/>
-          <a:p>
-            <a:pPr algn="l" indent="0" marL="0">
-              <a:lnSpc>
-                <a:spcPts val="1494"/>
-              </a:lnSpc>
-              <a:buNone/>
-            </a:pPr>
-            <a:r>
-              <a:rPr lang="en-US" sz="900" dirty="0">
-                <a:solidFill>
-                  <a:srgbClr val="5A6672"/>
-                </a:solidFill>
-                <a:latin typeface="Jost" pitchFamily="34" charset="0"/>
-                <a:ea typeface="Jost" pitchFamily="34" charset="-122"/>
-                <a:cs typeface="Jost" pitchFamily="34" charset="-120"/>
-              </a:rPr>
-              <a:t>Construídas hóspede a hóspede, temporada após temporada.</a:t>
-            </a:r>
-            <a:endParaRPr lang="en-US" sz="900" dirty="0"/>
-          </a:p>
-        </p:txBody>
-      </p:sp>
-      <p:sp>
-        <p:nvSpPr>
-          <p:cNvPr id="24" name="Text 20"/>
-          <p:cNvSpPr txBox="1"/>
-          <p:nvPr/>
-        </p:nvSpPr>
-        <p:spPr>
-          <a:xfrm>
-            <a:off x="8423821" y="5377755"/>
-            <a:ext cx="1593830" cy="114300"/>
-          </a:xfrm>
-          <a:prstGeom prst="rect">
-            <a:avLst/>
-          </a:prstGeom>
-          <a:noFill/>
-          <a:ln/>
-        </p:spPr>
-        <p:txBody>
-          <a:bodyPr wrap="square" lIns="0" tIns="0" rIns="0" bIns="0" rtlCol="0" anchor="t"/>
-          <a:lstStyle/>
-          <a:p>
-            <a:pPr algn="l" indent="0" marL="0">
-              <a:lnSpc>
-                <a:spcPts val="768"/>
-              </a:lnSpc>
-              <a:buNone/>
-            </a:pPr>
-            <a:r>
-              <a:rPr lang="en-US" sz="640" spc="154" kern="0" dirty="0">
-                <a:solidFill>
-                  <a:srgbClr val="C1121C"/>
-                </a:solidFill>
-                <a:latin typeface="Jost Medium" pitchFamily="34" charset="0"/>
-                <a:ea typeface="Jost Medium" pitchFamily="34" charset="-122"/>
-                <a:cs typeface="Jost Medium" pitchFamily="34" charset="-120"/>
-              </a:rPr>
-              <a:t>CONQUISTA</a:t>
-            </a:r>
-            <a:endParaRPr lang="en-US" sz="640" dirty="0"/>
-          </a:p>
-        </p:txBody>
-      </p:sp>
-      <p:sp>
-        <p:nvSpPr>
-          <p:cNvPr id="25" name="Text 21"/>
-          <p:cNvSpPr txBox="1"/>
-          <p:nvPr/>
-        </p:nvSpPr>
-        <p:spPr>
-          <a:xfrm>
-            <a:off x="8423821" y="5585520"/>
-            <a:ext cx="1593830" cy="471190"/>
-          </a:xfrm>
-          <a:prstGeom prst="rect">
-            <a:avLst/>
-          </a:prstGeom>
-          <a:noFill/>
-          <a:ln/>
-        </p:spPr>
-        <p:txBody>
-          <a:bodyPr wrap="square" lIns="0" tIns="0" rIns="0" bIns="0" rtlCol="0" anchor="t"/>
-          <a:lstStyle/>
-          <a:p>
-            <a:pPr algn="l" indent="0" marL="0">
-              <a:lnSpc>
-                <a:spcPts val="1856"/>
-              </a:lnSpc>
-              <a:buNone/>
-            </a:pPr>
-            <a:r>
-              <a:rPr lang="en-US" sz="1600" dirty="0">
-                <a:solidFill>
-                  <a:srgbClr val="16222E"/>
-                </a:solidFill>
-                <a:latin typeface="EB Garamond Medium" pitchFamily="34" charset="0"/>
-                <a:ea typeface="EB Garamond Medium" pitchFamily="34" charset="-122"/>
-                <a:cs typeface="EB Garamond Medium" pitchFamily="34" charset="-120"/>
-              </a:rPr>
-              <a:t>Relacionamentos duradouros</a:t>
-            </a:r>
-            <a:endParaRPr lang="en-US" sz="1600" dirty="0"/>
-          </a:p>
-        </p:txBody>
-      </p:sp>
-      <p:sp>
-        <p:nvSpPr>
-          <p:cNvPr id="26" name="Text 22"/>
-          <p:cNvSpPr txBox="1"/>
-          <p:nvPr/>
-        </p:nvSpPr>
-        <p:spPr>
-          <a:xfrm>
-            <a:off x="8423821" y="6135886"/>
-            <a:ext cx="1593830" cy="568821"/>
-          </a:xfrm>
-          <a:prstGeom prst="rect">
-            <a:avLst/>
-          </a:prstGeom>
-          <a:noFill/>
-          <a:ln/>
-        </p:spPr>
-        <p:txBody>
-          <a:bodyPr wrap="square" lIns="0" tIns="0" rIns="0" bIns="0" rtlCol="0" anchor="t"/>
-          <a:lstStyle/>
-          <a:p>
-            <a:pPr algn="l" indent="0" marL="0">
-              <a:lnSpc>
-                <a:spcPts val="1494"/>
-              </a:lnSpc>
-              <a:buNone/>
-            </a:pPr>
-            <a:r>
-              <a:rPr lang="en-US" sz="900" dirty="0">
-                <a:solidFill>
-                  <a:srgbClr val="5A6672"/>
-                </a:solidFill>
-                <a:latin typeface="Jost" pitchFamily="34" charset="0"/>
-                <a:ea typeface="Jost" pitchFamily="34" charset="-122"/>
-                <a:cs typeface="Jost" pitchFamily="34" charset="-120"/>
-              </a:rPr>
-              <a:t>Clientes que voltam há anos e famílias que cresceram conosco.</a:t>
-            </a:r>
-            <a:endParaRPr lang="en-US" sz="900" dirty="0"/>
-          </a:p>
-        </p:txBody>
-      </p:sp>
-      <p:sp>
-        <p:nvSpPr>
-          <p:cNvPr id="27" name="Text 23"/>
           <p:cNvSpPr txBox="1"/>
           <p:nvPr/>
         </p:nvSpPr>
@@ -4684,7 +4805,7 @@
         </p:nvSpPr>
         <p:spPr>
           <a:xfrm>
-            <a:off x="719882" y="5391894"/>
+            <a:off x="719882" y="5917555"/>
             <a:ext cx="2654498" cy="9525"/>
           </a:xfrm>
           <a:prstGeom prst="rect">
@@ -4704,7 +4825,7 @@
         </p:nvSpPr>
         <p:spPr>
           <a:xfrm>
-            <a:off x="4463802" y="5315843"/>
+            <a:off x="4463802" y="6126510"/>
             <a:ext cx="5508278" cy="9525"/>
           </a:xfrm>
           <a:prstGeom prst="rect">
@@ -4960,8 +5081,8 @@
         </p:nvSpPr>
         <p:spPr>
           <a:xfrm>
-            <a:off x="719882" y="5653385"/>
-            <a:ext cx="2700218" cy="1051322"/>
+            <a:off x="719882" y="6179046"/>
+            <a:ext cx="2700218" cy="525661"/>
           </a:xfrm>
           <a:prstGeom prst="rect">
             <a:avLst/>
@@ -4988,7 +5109,7 @@
                 <a:ea typeface="EB Garamond" pitchFamily="34" charset="-122"/>
                 <a:cs typeface="EB Garamond" pitchFamily="34" charset="-120"/>
               </a:rPr>
-              <a:t>“Não buscamos criar uma experiência artificial. Buscamos permitir que o hóspede viva Camburi.”</a:t>
+              <a:t>“Não buscamos criar uma experiência artificial.”</a:t>
             </a:r>
             <a:endParaRPr lang="en-US" sz="1500" dirty="0"/>
           </a:p>
@@ -5003,7 +5124,7 @@
         <p:spPr>
           <a:xfrm>
             <a:off x="4463802" y="1341239"/>
-            <a:ext cx="5553998" cy="265509"/>
+            <a:ext cx="5553998" cy="531019"/>
           </a:xfrm>
           <a:prstGeom prst="rect">
             <a:avLst/>
@@ -5030,7 +5151,7 @@
                 <a:ea typeface="Jost Light" pitchFamily="34" charset="-122"/>
                 <a:cs typeface="Jost Light" pitchFamily="34" charset="-120"/>
               </a:rPr>
-              <a:t>A Pousada Camburi está em uma das regiões mais especiais do litoral paulista.</a:t>
+              <a:t>A Pousada Camburi está localizada em uma das regiões mais especiais do litoral paulista.</a:t>
             </a:r>
             <a:endParaRPr lang="en-US" sz="1260" dirty="0"/>
           </a:p>
@@ -5044,8 +5165,8 @@
         </p:nvSpPr>
         <p:spPr>
           <a:xfrm>
-            <a:off x="4463802" y="2038648"/>
-            <a:ext cx="5553998" cy="735360"/>
+            <a:off x="4463802" y="2304157"/>
+            <a:ext cx="5553998" cy="490240"/>
           </a:xfrm>
           <a:prstGeom prst="rect">
             <a:avLst/>
@@ -5072,7 +5193,7 @@
                 <a:ea typeface="Jost" pitchFamily="34" charset="-122"/>
                 <a:cs typeface="Jost" pitchFamily="34" charset="-120"/>
               </a:rPr>
-              <a:t>Camburi reúne praia, Mata Atlântica, gastronomia, natureza, esportes, cultura e uma atmosfera que convida as pessoas a desacelerarem. A pousada fica a poucos minutos a pé da praia, em meio à vegetação exuberante característica da região.</a:t>
+              <a:t>Camburi reúne praia, Mata Atlântica, gastronomia, natureza, esportes, cultura e uma atmosfera que convida as pessoas a desacelerarem.</a:t>
             </a:r>
             <a:endParaRPr lang="en-US" sz="1060" dirty="0"/>
           </a:p>
@@ -5086,8 +5207,8 @@
         </p:nvSpPr>
         <p:spPr>
           <a:xfrm>
-            <a:off x="4463802" y="2971949"/>
-            <a:ext cx="5553998" cy="735360"/>
+            <a:off x="4463802" y="2992338"/>
+            <a:ext cx="5553998" cy="490240"/>
           </a:xfrm>
           <a:prstGeom prst="rect">
             <a:avLst/>
@@ -5114,7 +5235,7 @@
                 <a:ea typeface="Jost" pitchFamily="34" charset="-122"/>
                 <a:cs typeface="Jost" pitchFamily="34" charset="-120"/>
               </a:rPr>
-              <a:t>Nossa proposta sempre foi oferecer uma hospedagem que respeitasse esse ambiente. Por isso a pousada tem identidade própria, com arquitetura e decoração de inspiração rústica, integradas ao entorno e à natureza.</a:t>
+              <a:t>A pousada está situada a poucos minutos a pé da Praia de Camburi, em meio à vegetação exuberante característica da região.</a:t>
             </a:r>
             <a:endParaRPr lang="en-US" sz="1060" dirty="0"/>
           </a:p>
@@ -5128,111 +5249,27 @@
         </p:nvSpPr>
         <p:spPr>
           <a:xfrm>
-            <a:off x="4463802" y="5613350"/>
-            <a:ext cx="1593830" cy="114300"/>
-          </a:xfrm>
-          <a:prstGeom prst="rect">
-            <a:avLst/>
-          </a:prstGeom>
-          <a:noFill/>
-          <a:ln/>
-        </p:spPr>
-        <p:txBody>
-          <a:bodyPr wrap="square" lIns="0" tIns="0" rIns="0" bIns="0" rtlCol="0" anchor="t"/>
-          <a:lstStyle/>
-          <a:p>
-            <a:pPr algn="l" indent="0" marL="0">
-              <a:lnSpc>
-                <a:spcPts val="768"/>
-              </a:lnSpc>
-              <a:buNone/>
-            </a:pPr>
-            <a:r>
-              <a:rPr lang="en-US" sz="640" spc="154" kern="0" dirty="0">
-                <a:solidFill>
-                  <a:srgbClr val="C1121C"/>
-                </a:solidFill>
-                <a:latin typeface="Jost Medium" pitchFamily="34" charset="0"/>
-                <a:ea typeface="Jost Medium" pitchFamily="34" charset="-122"/>
-                <a:cs typeface="Jost Medium" pitchFamily="34" charset="-120"/>
-              </a:rPr>
-              <a:t>LOCALIZAÇÃO</a:t>
-            </a:r>
-            <a:endParaRPr lang="en-US" sz="640" dirty="0"/>
-          </a:p>
-        </p:txBody>
-      </p:sp>
-      <p:sp>
-        <p:nvSpPr>
-          <p:cNvPr id="19" name="Text 15"/>
-          <p:cNvSpPr txBox="1"/>
-          <p:nvPr/>
-        </p:nvSpPr>
-        <p:spPr>
-          <a:xfrm>
-            <a:off x="4463802" y="5821114"/>
-            <a:ext cx="1593830" cy="235595"/>
-          </a:xfrm>
-          <a:prstGeom prst="rect">
-            <a:avLst/>
-          </a:prstGeom>
-          <a:noFill/>
-          <a:ln/>
-        </p:spPr>
-        <p:txBody>
-          <a:bodyPr wrap="square" lIns="0" tIns="0" rIns="0" bIns="0" rtlCol="0" anchor="t"/>
-          <a:lstStyle/>
-          <a:p>
-            <a:pPr algn="l" indent="0" marL="0">
-              <a:lnSpc>
-                <a:spcPts val="1856"/>
-              </a:lnSpc>
-              <a:buNone/>
-            </a:pPr>
-            <a:r>
-              <a:rPr lang="en-US" sz="1600" dirty="0">
-                <a:solidFill>
-                  <a:srgbClr val="16222E"/>
-                </a:solidFill>
-                <a:latin typeface="EB Garamond Medium" pitchFamily="34" charset="0"/>
-                <a:ea typeface="EB Garamond Medium" pitchFamily="34" charset="-122"/>
-                <a:cs typeface="EB Garamond Medium" pitchFamily="34" charset="-120"/>
-              </a:rPr>
-              <a:t>A pé da praia</a:t>
-            </a:r>
-            <a:endParaRPr lang="en-US" sz="1600" dirty="0"/>
-          </a:p>
-        </p:txBody>
-      </p:sp>
-      <p:sp>
-        <p:nvSpPr>
-          <p:cNvPr id="20" name="Text 16"/>
-          <p:cNvSpPr txBox="1"/>
-          <p:nvPr/>
-        </p:nvSpPr>
-        <p:spPr>
-          <a:xfrm>
-            <a:off x="4463802" y="6135886"/>
-            <a:ext cx="1593830" cy="379214"/>
-          </a:xfrm>
-          <a:prstGeom prst="rect">
-            <a:avLst/>
-          </a:prstGeom>
-          <a:noFill/>
-          <a:ln/>
-        </p:spPr>
-        <p:txBody>
-          <a:bodyPr wrap="square" lIns="0" tIns="0" rIns="0" bIns="0" rtlCol="0" anchor="t"/>
-          <a:lstStyle/>
-          <a:p>
-            <a:pPr algn="l" indent="0" marL="0">
-              <a:lnSpc>
-                <a:spcPts val="1494"/>
-              </a:lnSpc>
-              <a:buNone/>
-            </a:pPr>
-            <a:r>
-              <a:rPr lang="en-US" sz="900" dirty="0">
+            <a:off x="4463802" y="3680520"/>
+            <a:ext cx="5553998" cy="735360"/>
+          </a:xfrm>
+          <a:prstGeom prst="rect">
+            <a:avLst/>
+          </a:prstGeom>
+          <a:noFill/>
+          <a:ln/>
+        </p:spPr>
+        <p:txBody>
+          <a:bodyPr wrap="square" lIns="0" tIns="0" rIns="0" bIns="0" rtlCol="0" anchor="t"/>
+          <a:lstStyle/>
+          <a:p>
+            <a:pPr algn="l" indent="0" marL="0">
+              <a:lnSpc>
+                <a:spcPts val="1929"/>
+              </a:lnSpc>
+              <a:buNone/>
+            </a:pPr>
+            <a:r>
+              <a:rPr lang="en-US" sz="1060" dirty="0">
                 <a:solidFill>
                   <a:srgbClr val="5A6672"/>
                 </a:solidFill>
@@ -5240,267 +5277,57 @@
                 <a:ea typeface="Jost" pitchFamily="34" charset="-122"/>
                 <a:cs typeface="Jost" pitchFamily="34" charset="-120"/>
               </a:rPr>
-              <a:t>Poucos minutos de caminhada até a Praia de Camburi.</a:t>
-            </a:r>
-            <a:endParaRPr lang="en-US" sz="900" dirty="0"/>
-          </a:p>
-        </p:txBody>
-      </p:sp>
-      <p:sp>
-        <p:nvSpPr>
-          <p:cNvPr id="21" name="Text 17"/>
-          <p:cNvSpPr txBox="1"/>
-          <p:nvPr/>
-        </p:nvSpPr>
-        <p:spPr>
-          <a:xfrm>
-            <a:off x="6443811" y="5613350"/>
-            <a:ext cx="1593830" cy="114300"/>
-          </a:xfrm>
-          <a:prstGeom prst="rect">
-            <a:avLst/>
-          </a:prstGeom>
-          <a:noFill/>
-          <a:ln/>
-        </p:spPr>
-        <p:txBody>
-          <a:bodyPr wrap="square" lIns="0" tIns="0" rIns="0" bIns="0" rtlCol="0" anchor="t"/>
-          <a:lstStyle/>
-          <a:p>
-            <a:pPr algn="l" indent="0" marL="0">
-              <a:lnSpc>
-                <a:spcPts val="768"/>
-              </a:lnSpc>
-              <a:buNone/>
-            </a:pPr>
-            <a:r>
-              <a:rPr lang="en-US" sz="640" spc="154" kern="0" dirty="0">
-                <a:solidFill>
-                  <a:srgbClr val="C1121C"/>
-                </a:solidFill>
-                <a:latin typeface="Jost Medium" pitchFamily="34" charset="0"/>
-                <a:ea typeface="Jost Medium" pitchFamily="34" charset="-122"/>
-                <a:cs typeface="Jost Medium" pitchFamily="34" charset="-120"/>
-              </a:rPr>
-              <a:t>ENTORNO</a:t>
-            </a:r>
-            <a:endParaRPr lang="en-US" sz="640" dirty="0"/>
-          </a:p>
-        </p:txBody>
-      </p:sp>
-      <p:sp>
-        <p:nvSpPr>
-          <p:cNvPr id="22" name="Text 18"/>
-          <p:cNvSpPr txBox="1"/>
-          <p:nvPr/>
-        </p:nvSpPr>
-        <p:spPr>
-          <a:xfrm>
-            <a:off x="6443811" y="5821114"/>
-            <a:ext cx="1593830" cy="235595"/>
-          </a:xfrm>
-          <a:prstGeom prst="rect">
-            <a:avLst/>
-          </a:prstGeom>
-          <a:noFill/>
-          <a:ln/>
-        </p:spPr>
-        <p:txBody>
-          <a:bodyPr wrap="square" lIns="0" tIns="0" rIns="0" bIns="0" rtlCol="0" anchor="t"/>
-          <a:lstStyle/>
-          <a:p>
-            <a:pPr algn="l" indent="0" marL="0">
-              <a:lnSpc>
-                <a:spcPts val="1856"/>
-              </a:lnSpc>
-              <a:buNone/>
-            </a:pPr>
-            <a:r>
-              <a:rPr lang="en-US" sz="1600" dirty="0">
+              <a:t>Nossa proposta sempre foi oferecer uma hospedagem que respeitasse esse ambiente. Por isso, a Pousada Camburi possui uma identidade própria, com arquitetura e decoração de inspiração rústica, integradas ao entorno e à natureza.</a:t>
+            </a:r>
+            <a:endParaRPr lang="en-US" sz="1060" dirty="0"/>
+          </a:p>
+        </p:txBody>
+      </p:sp>
+      <p:sp>
+        <p:nvSpPr>
+          <p:cNvPr id="19" name="Text 15"/>
+          <p:cNvSpPr txBox="1"/>
+          <p:nvPr/>
+        </p:nvSpPr>
+        <p:spPr>
+          <a:xfrm>
+            <a:off x="4463802" y="6424017"/>
+            <a:ext cx="5553998" cy="280690"/>
+          </a:xfrm>
+          <a:prstGeom prst="rect">
+            <a:avLst/>
+          </a:prstGeom>
+          <a:noFill/>
+          <a:ln/>
+        </p:spPr>
+        <p:txBody>
+          <a:bodyPr wrap="square" lIns="0" tIns="0" rIns="0" bIns="0" rtlCol="0" anchor="t"/>
+          <a:lstStyle/>
+          <a:p>
+            <a:pPr algn="l" indent="0" marL="0">
+              <a:lnSpc>
+                <a:spcPts val="2210"/>
+              </a:lnSpc>
+              <a:buNone/>
+            </a:pPr>
+            <a:r>
+              <a:rPr lang="en-US" sz="1700" dirty="0">
                 <a:solidFill>
                   <a:srgbClr val="16222E"/>
                 </a:solidFill>
-                <a:latin typeface="EB Garamond Medium" pitchFamily="34" charset="0"/>
-                <a:ea typeface="EB Garamond Medium" pitchFamily="34" charset="-122"/>
-                <a:cs typeface="EB Garamond Medium" pitchFamily="34" charset="-120"/>
-              </a:rPr>
-              <a:t>Mata Atlântica</a:t>
-            </a:r>
-            <a:endParaRPr lang="en-US" sz="1600" dirty="0"/>
-          </a:p>
-        </p:txBody>
-      </p:sp>
-      <p:sp>
-        <p:nvSpPr>
-          <p:cNvPr id="23" name="Text 19"/>
-          <p:cNvSpPr txBox="1"/>
-          <p:nvPr/>
-        </p:nvSpPr>
-        <p:spPr>
-          <a:xfrm>
-            <a:off x="6443811" y="6135886"/>
-            <a:ext cx="1593830" cy="568821"/>
-          </a:xfrm>
-          <a:prstGeom prst="rect">
-            <a:avLst/>
-          </a:prstGeom>
-          <a:noFill/>
-          <a:ln/>
-        </p:spPr>
-        <p:txBody>
-          <a:bodyPr wrap="square" lIns="0" tIns="0" rIns="0" bIns="0" rtlCol="0" anchor="t"/>
-          <a:lstStyle/>
-          <a:p>
-            <a:pPr algn="l" indent="0" marL="0">
-              <a:lnSpc>
-                <a:spcPts val="1494"/>
-              </a:lnSpc>
-              <a:buNone/>
-            </a:pPr>
-            <a:r>
-              <a:rPr lang="en-US" sz="900" dirty="0">
-                <a:solidFill>
-                  <a:srgbClr val="5A6672"/>
-                </a:solidFill>
-                <a:latin typeface="Jost" pitchFamily="34" charset="0"/>
-                <a:ea typeface="Jost" pitchFamily="34" charset="-122"/>
-                <a:cs typeface="Jost" pitchFamily="34" charset="-120"/>
-              </a:rPr>
-              <a:t>Vegetação exuberante, característica do litoral norte paulista.</a:t>
-            </a:r>
-            <a:endParaRPr lang="en-US" sz="900" dirty="0"/>
-          </a:p>
-        </p:txBody>
-      </p:sp>
-      <p:sp>
-        <p:nvSpPr>
-          <p:cNvPr id="24" name="Text 20"/>
-          <p:cNvSpPr txBox="1"/>
-          <p:nvPr/>
-        </p:nvSpPr>
-        <p:spPr>
-          <a:xfrm>
-            <a:off x="8423821" y="5613350"/>
-            <a:ext cx="1593830" cy="114300"/>
-          </a:xfrm>
-          <a:prstGeom prst="rect">
-            <a:avLst/>
-          </a:prstGeom>
-          <a:noFill/>
-          <a:ln/>
-        </p:spPr>
-        <p:txBody>
-          <a:bodyPr wrap="square" lIns="0" tIns="0" rIns="0" bIns="0" rtlCol="0" anchor="t"/>
-          <a:lstStyle/>
-          <a:p>
-            <a:pPr algn="l" indent="0" marL="0">
-              <a:lnSpc>
-                <a:spcPts val="768"/>
-              </a:lnSpc>
-              <a:buNone/>
-            </a:pPr>
-            <a:r>
-              <a:rPr lang="en-US" sz="640" spc="154" kern="0" dirty="0">
-                <a:solidFill>
-                  <a:srgbClr val="C1121C"/>
-                </a:solidFill>
-                <a:latin typeface="Jost Medium" pitchFamily="34" charset="0"/>
-                <a:ea typeface="Jost Medium" pitchFamily="34" charset="-122"/>
-                <a:cs typeface="Jost Medium" pitchFamily="34" charset="-120"/>
-              </a:rPr>
-              <a:t>IDENTIDADE</a:t>
-            </a:r>
-            <a:endParaRPr lang="en-US" sz="640" dirty="0"/>
-          </a:p>
-        </p:txBody>
-      </p:sp>
-      <p:sp>
-        <p:nvSpPr>
-          <p:cNvPr id="25" name="Text 21"/>
-          <p:cNvSpPr txBox="1"/>
-          <p:nvPr/>
-        </p:nvSpPr>
-        <p:spPr>
-          <a:xfrm>
-            <a:off x="8423821" y="5821114"/>
-            <a:ext cx="1593830" cy="235595"/>
-          </a:xfrm>
-          <a:prstGeom prst="rect">
-            <a:avLst/>
-          </a:prstGeom>
-          <a:noFill/>
-          <a:ln/>
-        </p:spPr>
-        <p:txBody>
-          <a:bodyPr wrap="square" lIns="0" tIns="0" rIns="0" bIns="0" rtlCol="0" anchor="t"/>
-          <a:lstStyle/>
-          <a:p>
-            <a:pPr algn="l" indent="0" marL="0">
-              <a:lnSpc>
-                <a:spcPts val="1856"/>
-              </a:lnSpc>
-              <a:buNone/>
-            </a:pPr>
-            <a:r>
-              <a:rPr lang="en-US" sz="1600" dirty="0">
-                <a:solidFill>
-                  <a:srgbClr val="16222E"/>
-                </a:solidFill>
-                <a:latin typeface="EB Garamond Medium" pitchFamily="34" charset="0"/>
-                <a:ea typeface="EB Garamond Medium" pitchFamily="34" charset="-122"/>
-                <a:cs typeface="EB Garamond Medium" pitchFamily="34" charset="-120"/>
-              </a:rPr>
-              <a:t>Inspiração rústica</a:t>
-            </a:r>
-            <a:endParaRPr lang="en-US" sz="1600" dirty="0"/>
-          </a:p>
-        </p:txBody>
-      </p:sp>
-      <p:sp>
-        <p:nvSpPr>
-          <p:cNvPr id="26" name="Text 22"/>
-          <p:cNvSpPr txBox="1"/>
-          <p:nvPr/>
-        </p:nvSpPr>
-        <p:spPr>
-          <a:xfrm>
-            <a:off x="8423821" y="6135886"/>
-            <a:ext cx="1593830" cy="568821"/>
-          </a:xfrm>
-          <a:prstGeom prst="rect">
-            <a:avLst/>
-          </a:prstGeom>
-          <a:noFill/>
-          <a:ln/>
-        </p:spPr>
-        <p:txBody>
-          <a:bodyPr wrap="square" lIns="0" tIns="0" rIns="0" bIns="0" rtlCol="0" anchor="t"/>
-          <a:lstStyle/>
-          <a:p>
-            <a:pPr algn="l" indent="0" marL="0">
-              <a:lnSpc>
-                <a:spcPts val="1494"/>
-              </a:lnSpc>
-              <a:buNone/>
-            </a:pPr>
-            <a:r>
-              <a:rPr lang="en-US" sz="900" dirty="0">
-                <a:solidFill>
-                  <a:srgbClr val="5A6672"/>
-                </a:solidFill>
-                <a:latin typeface="Jost" pitchFamily="34" charset="0"/>
-                <a:ea typeface="Jost" pitchFamily="34" charset="-122"/>
-                <a:cs typeface="Jost" pitchFamily="34" charset="-120"/>
-              </a:rPr>
-              <a:t>Arquitetura e decoração integradas à paisagem, sem artifício.</a:t>
-            </a:r>
-            <a:endParaRPr lang="en-US" sz="900" dirty="0"/>
-          </a:p>
-        </p:txBody>
-      </p:sp>
-      <p:sp>
-        <p:nvSpPr>
-          <p:cNvPr id="27" name="Text 23"/>
+                <a:latin typeface="EB Garamond" pitchFamily="34" charset="0"/>
+                <a:ea typeface="EB Garamond" pitchFamily="34" charset="-122"/>
+                <a:cs typeface="EB Garamond" pitchFamily="34" charset="-120"/>
+              </a:rPr>
+              <a:t>Buscamos permitir que o hóspede viva Camburi.</a:t>
+            </a:r>
+            <a:endParaRPr lang="en-US" sz="1700" dirty="0"/>
+          </a:p>
+        </p:txBody>
+      </p:sp>
+      <p:sp>
+        <p:nvSpPr>
+          <p:cNvPr id="20" name="Text 16"/>
           <p:cNvSpPr txBox="1"/>
           <p:nvPr/>
         </p:nvSpPr>
@@ -5640,7 +5467,7 @@
         </p:nvSpPr>
         <p:spPr>
           <a:xfrm>
-            <a:off x="719882" y="5654725"/>
+            <a:off x="719882" y="5917555"/>
             <a:ext cx="2654498" cy="9525"/>
           </a:xfrm>
           <a:prstGeom prst="rect">
@@ -5748,7 +5575,7 @@
         </p:nvSpPr>
         <p:spPr>
           <a:xfrm>
-            <a:off x="4463802" y="6035427"/>
+            <a:off x="4463802" y="6126510"/>
             <a:ext cx="5508278" cy="9525"/>
           </a:xfrm>
           <a:prstGeom prst="rect">
@@ -6046,8 +5873,8 @@
         </p:nvSpPr>
         <p:spPr>
           <a:xfrm>
-            <a:off x="719882" y="5916216"/>
-            <a:ext cx="2700218" cy="788491"/>
+            <a:off x="719882" y="6179046"/>
+            <a:ext cx="2700218" cy="525661"/>
           </a:xfrm>
           <a:prstGeom prst="rect">
             <a:avLst/>
@@ -6074,7 +5901,7 @@
                 <a:ea typeface="EB Garamond" pitchFamily="34" charset="-122"/>
                 <a:cs typeface="EB Garamond" pitchFamily="34" charset="-120"/>
               </a:rPr>
-              <a:t>“Os números são apenas uma parte da história. O que importa são os comentários.”</a:t>
+              <a:t>“Nossa reputação digital demonstra a consistência desse trabalho.”</a:t>
             </a:r>
             <a:endParaRPr lang="en-US" sz="1500" dirty="0"/>
           </a:p>
@@ -6424,8 +6251,8 @@
         </p:nvSpPr>
         <p:spPr>
           <a:xfrm>
-            <a:off x="4463802" y="2787104"/>
-            <a:ext cx="5553998" cy="490240"/>
+            <a:off x="4463802" y="2823121"/>
+            <a:ext cx="5553998" cy="245120"/>
           </a:xfrm>
           <a:prstGeom prst="rect">
             <a:avLst/>
@@ -6452,7 +6279,7 @@
                 <a:ea typeface="Jost" pitchFamily="34" charset="-122"/>
                 <a:cs typeface="Jost" pitchFamily="34" charset="-120"/>
               </a:rPr>
-              <a:t>Hóspedes destacam a localização, a limpeza, o café da manhã, o serviço de praia, o conforto e, principalmente, o atendimento e a atenção da equipe.</a:t>
+              <a:t>Atualmente, nossa reputação digital demonstra a consistência desse trabalho.</a:t>
             </a:r>
             <a:endParaRPr lang="en-US" sz="1060" dirty="0"/>
           </a:p>
@@ -6466,8 +6293,8 @@
         </p:nvSpPr>
         <p:spPr>
           <a:xfrm>
-            <a:off x="4463802" y="3475286"/>
-            <a:ext cx="5553998" cy="980480"/>
+            <a:off x="4463802" y="3266182"/>
+            <a:ext cx="5553998" cy="245120"/>
           </a:xfrm>
           <a:prstGeom prst="rect">
             <a:avLst/>
@@ -6494,7 +6321,7 @@
                 <a:ea typeface="Jost" pitchFamily="34" charset="-122"/>
                 <a:cs typeface="Jost" pitchFamily="34" charset="-120"/>
               </a:rPr>
-              <a:t>Uma avaliação recente no Tripadvisor descreve a experiência como uma agradável surpresa e ressalta a proximidade da praia, o ambiente cercado pela Mata Atlântica, o estilo rústico, o conforto dos quartos e a atenção dos proprietários — registrando que há clientes que frequentam a pousada há cerca de vinte anos.</a:t>
+              <a:t>No Google, a Pousada Camburi possui avaliação de 4,8 estrelas, baseada em 292 avaliações.</a:t>
             </a:r>
             <a:endParaRPr lang="en-US" sz="1060" dirty="0"/>
           </a:p>
@@ -6508,8 +6335,8 @@
         </p:nvSpPr>
         <p:spPr>
           <a:xfrm>
-            <a:off x="4463802" y="4653707"/>
-            <a:ext cx="5553998" cy="735360"/>
+            <a:off x="4463802" y="3709243"/>
+            <a:ext cx="5553998" cy="490240"/>
           </a:xfrm>
           <a:prstGeom prst="rect">
             <a:avLst/>
@@ -6536,7 +6363,7 @@
                 <a:ea typeface="Jost" pitchFamily="34" charset="-122"/>
                 <a:cs typeface="Jost" pitchFamily="34" charset="-120"/>
               </a:rPr>
-              <a:t>Outra avaliação recente no Google observa que a experiência começa antes mesmo do check-in: a chegada, as malas, o veículo, as boas-vindas e a atenção permanente com o bem-estar dos hóspedes.</a:t>
+              <a:t>No Tripadvisor, possui 4,7 estrelas, com 136 avaliações, estando atualmente entre as pousadas mais bem avaliadas de Camburi.</a:t>
             </a:r>
             <a:endParaRPr lang="en-US" sz="1060" dirty="0"/>
           </a:p>
@@ -6550,85 +6377,43 @@
         </p:nvSpPr>
         <p:spPr>
           <a:xfrm>
-            <a:off x="4463802" y="6296918"/>
-            <a:ext cx="5553998" cy="114300"/>
-          </a:xfrm>
-          <a:prstGeom prst="rect">
-            <a:avLst/>
-          </a:prstGeom>
-          <a:noFill/>
-          <a:ln/>
-        </p:spPr>
-        <p:txBody>
-          <a:bodyPr wrap="square" lIns="0" tIns="0" rIns="0" bIns="0" rtlCol="0" anchor="t"/>
-          <a:lstStyle/>
-          <a:p>
-            <a:pPr algn="l" indent="0" marL="0">
-              <a:lnSpc>
-                <a:spcPts val="744"/>
-              </a:lnSpc>
-              <a:buNone/>
-            </a:pPr>
-            <a:r>
-              <a:rPr lang="en-US" sz="620" spc="149" kern="0" dirty="0">
-                <a:solidFill>
-                  <a:srgbClr val="8C959D"/>
-                </a:solidFill>
-                <a:latin typeface="Jost Medium" pitchFamily="34" charset="0"/>
-                <a:ea typeface="Jost Medium" pitchFamily="34" charset="-122"/>
-                <a:cs typeface="Jost Medium" pitchFamily="34" charset="-120"/>
-              </a:rPr>
-              <a:t>FONTES CONSULTADAS EM AGOSTO DE 2026</a:t>
-            </a:r>
-            <a:endParaRPr lang="en-US" sz="620" dirty="0"/>
+            <a:off x="4463802" y="6424017"/>
+            <a:ext cx="5553998" cy="280690"/>
+          </a:xfrm>
+          <a:prstGeom prst="rect">
+            <a:avLst/>
+          </a:prstGeom>
+          <a:noFill/>
+          <a:ln/>
+        </p:spPr>
+        <p:txBody>
+          <a:bodyPr wrap="square" lIns="0" tIns="0" rIns="0" bIns="0" rtlCol="0" anchor="t"/>
+          <a:lstStyle/>
+          <a:p>
+            <a:pPr algn="l" indent="0" marL="0">
+              <a:lnSpc>
+                <a:spcPts val="2210"/>
+              </a:lnSpc>
+              <a:buNone/>
+            </a:pPr>
+            <a:r>
+              <a:rPr lang="en-US" sz="1700" dirty="0">
+                <a:solidFill>
+                  <a:srgbClr val="16222E"/>
+                </a:solidFill>
+                <a:latin typeface="EB Garamond" pitchFamily="34" charset="0"/>
+                <a:ea typeface="EB Garamond" pitchFamily="34" charset="-122"/>
+                <a:cs typeface="EB Garamond" pitchFamily="34" charset="-120"/>
+              </a:rPr>
+              <a:t>Mas, para nós, os números são apenas uma parte da história.</a:t>
+            </a:r>
+            <a:endParaRPr lang="en-US" sz="1700" dirty="0"/>
           </a:p>
         </p:txBody>
       </p:sp>
       <p:sp>
         <p:nvSpPr>
           <p:cNvPr id="32" name="Text 28"/>
-          <p:cNvSpPr txBox="1"/>
-          <p:nvPr/>
-        </p:nvSpPr>
-        <p:spPr>
-          <a:xfrm>
-            <a:off x="4463802" y="6519118"/>
-            <a:ext cx="5553998" cy="185589"/>
-          </a:xfrm>
-          <a:prstGeom prst="rect">
-            <a:avLst/>
-          </a:prstGeom>
-          <a:noFill/>
-          <a:ln/>
-        </p:spPr>
-        <p:txBody>
-          <a:bodyPr wrap="square" lIns="0" tIns="0" rIns="0" bIns="0" rtlCol="0" anchor="t"/>
-          <a:lstStyle/>
-          <a:p>
-            <a:pPr algn="l" indent="0" marL="0">
-              <a:lnSpc>
-                <a:spcPts val="1462"/>
-              </a:lnSpc>
-              <a:buNone/>
-            </a:pPr>
-            <a:r>
-              <a:rPr lang="en-US" sz="840" dirty="0">
-                <a:solidFill>
-                  <a:srgbClr val="8C959D"/>
-                </a:solidFill>
-                <a:latin typeface="Jost" pitchFamily="34" charset="0"/>
-                <a:ea typeface="Jost" pitchFamily="34" charset="-122"/>
-                <a:cs typeface="Jost" pitchFamily="34" charset="-120"/>
-              </a:rPr>
-              <a:t>Avaliações públicas da Pousada Camburi no Google, no Tripadvisor e no Restaurant Guru.</a:t>
-            </a:r>
-            <a:endParaRPr lang="en-US" sz="840" dirty="0"/>
-          </a:p>
-        </p:txBody>
-      </p:sp>
-      <p:sp>
-        <p:nvSpPr>
-          <p:cNvPr id="33" name="Text 29"/>
           <p:cNvSpPr txBox="1"/>
           <p:nvPr/>
         </p:nvSpPr>
@@ -6788,7 +6573,7 @@
         </p:nvSpPr>
         <p:spPr>
           <a:xfrm>
-            <a:off x="4463802" y="1341239"/>
+            <a:off x="4463802" y="6035427"/>
             <a:ext cx="5508278" cy="9525"/>
           </a:xfrm>
           <a:prstGeom prst="rect">
@@ -6808,106 +6593,6 @@
         </p:nvSpPr>
         <p:spPr>
           <a:xfrm>
-            <a:off x="4463802" y="2412057"/>
-            <a:ext cx="5508278" cy="9525"/>
-          </a:xfrm>
-          <a:prstGeom prst="rect">
-            <a:avLst/>
-          </a:prstGeom>
-          <a:solidFill>
-            <a:srgbClr val="E2DFD9"/>
-          </a:solidFill>
-          <a:ln/>
-        </p:spPr>
-      </p:sp>
-      <p:sp>
-        <p:nvSpPr>
-          <p:cNvPr id="8" name="Shape 6"/>
-          <p:cNvSpPr/>
-          <p:nvPr/>
-        </p:nvSpPr>
-        <p:spPr>
-          <a:xfrm>
-            <a:off x="4463802" y="3482876"/>
-            <a:ext cx="5508278" cy="9525"/>
-          </a:xfrm>
-          <a:prstGeom prst="rect">
-            <a:avLst/>
-          </a:prstGeom>
-          <a:solidFill>
-            <a:srgbClr val="E2DFD9"/>
-          </a:solidFill>
-          <a:ln/>
-        </p:spPr>
-      </p:sp>
-      <p:sp>
-        <p:nvSpPr>
-          <p:cNvPr id="9" name="Shape 7"/>
-          <p:cNvSpPr/>
-          <p:nvPr/>
-        </p:nvSpPr>
-        <p:spPr>
-          <a:xfrm>
-            <a:off x="4463802" y="4553694"/>
-            <a:ext cx="5508278" cy="9525"/>
-          </a:xfrm>
-          <a:prstGeom prst="rect">
-            <a:avLst/>
-          </a:prstGeom>
-          <a:solidFill>
-            <a:srgbClr val="E2DFD9"/>
-          </a:solidFill>
-          <a:ln/>
-        </p:spPr>
-      </p:sp>
-      <p:sp>
-        <p:nvSpPr>
-          <p:cNvPr id="10" name="Shape 8"/>
-          <p:cNvSpPr/>
-          <p:nvPr/>
-        </p:nvSpPr>
-        <p:spPr>
-          <a:xfrm>
-            <a:off x="4463802" y="5624513"/>
-            <a:ext cx="5508278" cy="9525"/>
-          </a:xfrm>
-          <a:prstGeom prst="rect">
-            <a:avLst/>
-          </a:prstGeom>
-          <a:solidFill>
-            <a:srgbClr val="E2DFD9"/>
-          </a:solidFill>
-          <a:ln/>
-        </p:spPr>
-      </p:sp>
-      <p:sp>
-        <p:nvSpPr>
-          <p:cNvPr id="11" name="Shape 9"/>
-          <p:cNvSpPr/>
-          <p:nvPr/>
-        </p:nvSpPr>
-        <p:spPr>
-          <a:xfrm>
-            <a:off x="4463802" y="6695331"/>
-            <a:ext cx="5508278" cy="9525"/>
-          </a:xfrm>
-          <a:prstGeom prst="rect">
-            <a:avLst/>
-          </a:prstGeom>
-          <a:solidFill>
-            <a:srgbClr val="E2DFD9"/>
-          </a:solidFill>
-          <a:ln/>
-        </p:spPr>
-      </p:sp>
-      <p:sp>
-        <p:nvSpPr>
-          <p:cNvPr id="12" name="Shape 10"/>
-          <p:cNvSpPr/>
-          <p:nvPr/>
-        </p:nvSpPr>
-        <p:spPr>
-          <a:xfrm>
             <a:off x="719882" y="6704707"/>
             <a:ext cx="9252198" cy="9525"/>
           </a:xfrm>
@@ -6922,7 +6607,7 @@
       </p:sp>
       <p:pic>
         <p:nvPicPr>
-          <p:cNvPr id="13" name="Image 0" descr="/home/user/SkillsClaude/apresentacao-victorinox/build/logos/logo-pc.png">    </p:cNvPr>
+          <p:cNvPr id="8" name="Image 0" descr="/home/user/SkillsClaude/apresentacao-victorinox/build/logos/logo-pc.png">    </p:cNvPr>
           <p:cNvPicPr>
             <a:picLocks noChangeAspect="1"/>
           </p:cNvPicPr>
@@ -6946,7 +6631,7 @@
       </p:pic>
       <p:pic>
         <p:nvPicPr>
-          <p:cNvPr id="14" name="Image 1" descr="/home/user/SkillsClaude/apresentacao-victorinox/build/logos/logo-vx.png">    </p:cNvPr>
+          <p:cNvPr id="9" name="Image 1" descr="/home/user/SkillsClaude/apresentacao-victorinox/build/logos/logo-vx.png">    </p:cNvPr>
           <p:cNvPicPr>
             <a:picLocks noChangeAspect="1"/>
           </p:cNvPicPr>
@@ -6970,7 +6655,7 @@
       </p:pic>
       <p:sp>
         <p:nvSpPr>
-          <p:cNvPr id="15" name="Text 11"/>
+          <p:cNvPr id="10" name="Text 6"/>
           <p:cNvSpPr txBox="1"/>
           <p:nvPr/>
         </p:nvSpPr>
@@ -7012,7 +6697,7 @@
       </p:sp>
       <p:sp>
         <p:nvSpPr>
-          <p:cNvPr id="16" name="Text 12"/>
+          <p:cNvPr id="11" name="Text 7"/>
           <p:cNvSpPr txBox="1"/>
           <p:nvPr/>
         </p:nvSpPr>
@@ -7054,7 +6739,7 @@
       </p:sp>
       <p:sp>
         <p:nvSpPr>
-          <p:cNvPr id="17" name="Text 13"/>
+          <p:cNvPr id="12" name="Text 8"/>
           <p:cNvSpPr txBox="1"/>
           <p:nvPr/>
         </p:nvSpPr>
@@ -7088,7 +6773,7 @@
                 <a:ea typeface="Jost Medium" pitchFamily="34" charset="-122"/>
                 <a:cs typeface="Jost Medium" pitchFamily="34" charset="-120"/>
               </a:rPr>
-              <a:t>A PRÁTICA</a:t>
+              <a:t>A EXPERIÊNCIA DOS NOSSOS HÓSPEDES</a:t>
             </a:r>
             <a:endParaRPr lang="en-US" sz="660" dirty="0"/>
           </a:p>
@@ -7096,14 +6781,14 @@
       </p:sp>
       <p:sp>
         <p:nvSpPr>
-          <p:cNvPr id="18" name="Text 14"/>
+          <p:cNvPr id="13" name="Text 9"/>
           <p:cNvSpPr txBox="1"/>
           <p:nvPr/>
         </p:nvSpPr>
         <p:spPr>
           <a:xfrm>
             <a:off x="719882" y="1617464"/>
-            <a:ext cx="2700218" cy="781645"/>
+            <a:ext cx="2700218" cy="1172468"/>
           </a:xfrm>
           <a:prstGeom prst="rect">
             <a:avLst/>
@@ -7130,7 +6815,7 @@
                 <a:ea typeface="EB Garamond Medium" pitchFamily="34" charset="-122"/>
                 <a:cs typeface="EB Garamond Medium" pitchFamily="34" charset="-120"/>
               </a:rPr>
-              <a:t>Qualidade está nos detalhes</a:t>
+              <a:t>O que realmente importa são os comentários</a:t>
             </a:r>
             <a:endParaRPr lang="en-US" sz="2700" dirty="0"/>
           </a:p>
@@ -7138,14 +6823,98 @@
       </p:sp>
       <p:sp>
         <p:nvSpPr>
-          <p:cNvPr id="19" name="Text 15"/>
-          <p:cNvSpPr txBox="1"/>
-          <p:nvPr/>
-        </p:nvSpPr>
-        <p:spPr>
-          <a:xfrm>
-            <a:off x="719882" y="2615059"/>
-            <a:ext cx="2700218" cy="490240"/>
+          <p:cNvPr id="14" name="Text 10"/>
+          <p:cNvSpPr txBox="1"/>
+          <p:nvPr/>
+        </p:nvSpPr>
+        <p:spPr>
+          <a:xfrm>
+            <a:off x="719882" y="5916216"/>
+            <a:ext cx="2700218" cy="788491"/>
+          </a:xfrm>
+          <a:prstGeom prst="rect">
+            <a:avLst/>
+          </a:prstGeom>
+          <a:noFill/>
+          <a:ln/>
+        </p:spPr>
+        <p:txBody>
+          <a:bodyPr wrap="square" lIns="0" tIns="0" rIns="0" bIns="0" rtlCol="0" anchor="t"/>
+          <a:lstStyle/>
+          <a:p>
+            <a:pPr algn="l" indent="0" marL="0">
+              <a:lnSpc>
+                <a:spcPts val="2070"/>
+              </a:lnSpc>
+              <a:buNone/>
+            </a:pPr>
+            <a:r>
+              <a:rPr lang="en-US" sz="1500" i="1" spc="3" kern="0" dirty="0">
+                <a:solidFill>
+                  <a:srgbClr val="16222E"/>
+                </a:solidFill>
+                <a:latin typeface="EB Garamond" pitchFamily="34" charset="0"/>
+                <a:ea typeface="EB Garamond" pitchFamily="34" charset="-122"/>
+                <a:cs typeface="EB Garamond" pitchFamily="34" charset="-120"/>
+              </a:rPr>
+              <a:t>“É exatamente esse tipo de reconhecimento que buscamos construir diariamente.”</a:t>
+            </a:r>
+            <a:endParaRPr lang="en-US" sz="1500" dirty="0"/>
+          </a:p>
+        </p:txBody>
+      </p:sp>
+      <p:sp>
+        <p:nvSpPr>
+          <p:cNvPr id="15" name="Text 11"/>
+          <p:cNvSpPr txBox="1"/>
+          <p:nvPr/>
+        </p:nvSpPr>
+        <p:spPr>
+          <a:xfrm>
+            <a:off x="4463802" y="1341239"/>
+            <a:ext cx="5553998" cy="531019"/>
+          </a:xfrm>
+          <a:prstGeom prst="rect">
+            <a:avLst/>
+          </a:prstGeom>
+          <a:noFill/>
+          <a:ln/>
+        </p:spPr>
+        <p:txBody>
+          <a:bodyPr wrap="square" lIns="0" tIns="0" rIns="0" bIns="0" rtlCol="0" anchor="t"/>
+          <a:lstStyle/>
+          <a:p>
+            <a:pPr algn="l" indent="0" marL="0">
+              <a:lnSpc>
+                <a:spcPts val="2092"/>
+              </a:lnSpc>
+              <a:buNone/>
+            </a:pPr>
+            <a:r>
+              <a:rPr lang="en-US" sz="1260" dirty="0">
+                <a:solidFill>
+                  <a:srgbClr val="2E3A45"/>
+                </a:solidFill>
+                <a:latin typeface="Jost Light" pitchFamily="34" charset="0"/>
+                <a:ea typeface="Jost Light" pitchFamily="34" charset="-122"/>
+                <a:cs typeface="Jost Light" pitchFamily="34" charset="-120"/>
+              </a:rPr>
+              <a:t>Hóspedes destacam nossa localização, limpeza, café da manhã, serviço de praia, conforto e, principalmente, o atendimento e a atenção da equipe.</a:t>
+            </a:r>
+            <a:endParaRPr lang="en-US" sz="1260" dirty="0"/>
+          </a:p>
+        </p:txBody>
+      </p:sp>
+      <p:sp>
+        <p:nvSpPr>
+          <p:cNvPr id="16" name="Text 12"/>
+          <p:cNvSpPr txBox="1"/>
+          <p:nvPr/>
+        </p:nvSpPr>
+        <p:spPr>
+          <a:xfrm>
+            <a:off x="4463802" y="2304157"/>
+            <a:ext cx="5553998" cy="1225600"/>
           </a:xfrm>
           <a:prstGeom prst="rect">
             <a:avLst/>
@@ -7172,7 +6941,7 @@
                 <a:ea typeface="Jost" pitchFamily="34" charset="-122"/>
                 <a:cs typeface="Jost" pitchFamily="34" charset="-120"/>
               </a:rPr>
-              <a:t>Hospitalidade não está apenas na estrutura física. Ela está nos detalhes.</a:t>
+              <a:t>Uma avaliação recente no Tripadvisor, por exemplo, descreve a experiência como uma agradável surpresa e destaca a proximidade da praia, o ambiente cercado pela Mata Atlântica, o estilo rústico, o conforto dos quartos, o café da manhã, o serviço de praia e a atenção dos proprietários. O hóspede ainda registra que existem clientes que frequentam a pousada há aproximadamente 20 anos.</a:t>
             </a:r>
             <a:endParaRPr lang="en-US" sz="1060" dirty="0"/>
           </a:p>
@@ -7180,554 +6949,133 @@
       </p:sp>
       <p:sp>
         <p:nvSpPr>
-          <p:cNvPr id="20" name="Text 16"/>
-          <p:cNvSpPr txBox="1"/>
-          <p:nvPr/>
-        </p:nvSpPr>
-        <p:spPr>
-          <a:xfrm>
-            <a:off x="719882" y="5916216"/>
-            <a:ext cx="2700218" cy="788491"/>
-          </a:xfrm>
-          <a:prstGeom prst="rect">
-            <a:avLst/>
-          </a:prstGeom>
-          <a:noFill/>
-          <a:ln/>
-        </p:spPr>
-        <p:txBody>
-          <a:bodyPr wrap="square" lIns="0" tIns="0" rIns="0" bIns="0" rtlCol="0" anchor="t"/>
-          <a:lstStyle/>
-          <a:p>
-            <a:pPr algn="l" indent="0" marL="0">
-              <a:lnSpc>
-                <a:spcPts val="2070"/>
-              </a:lnSpc>
-              <a:buNone/>
-            </a:pPr>
-            <a:r>
-              <a:rPr lang="en-US" sz="1500" i="1" spc="3" kern="0" dirty="0">
-                <a:solidFill>
-                  <a:srgbClr val="16222E"/>
-                </a:solidFill>
-                <a:latin typeface="EB Garamond" pitchFamily="34" charset="0"/>
-                <a:ea typeface="EB Garamond" pitchFamily="34" charset="-122"/>
-                <a:cs typeface="EB Garamond" pitchFamily="34" charset="-120"/>
-              </a:rPr>
-              <a:t>“Essa filosofia orientou a construção da pousada ao longo de mais de duas décadas.”</a:t>
-            </a:r>
-            <a:endParaRPr lang="en-US" sz="1500" dirty="0"/>
-          </a:p>
-        </p:txBody>
-      </p:sp>
-      <p:sp>
-        <p:nvSpPr>
-          <p:cNvPr id="21" name="Text 17"/>
-          <p:cNvSpPr txBox="1"/>
-          <p:nvPr/>
-        </p:nvSpPr>
-        <p:spPr>
-          <a:xfrm>
-            <a:off x="4463802" y="1752749"/>
-            <a:ext cx="477619" cy="257175"/>
-          </a:xfrm>
-          <a:prstGeom prst="rect">
-            <a:avLst/>
-          </a:prstGeom>
-          <a:noFill/>
-          <a:ln/>
-        </p:spPr>
-        <p:txBody>
-          <a:bodyPr wrap="square" lIns="0" tIns="0" rIns="0" bIns="0" rtlCol="0" anchor="t"/>
-          <a:lstStyle/>
-          <a:p>
-            <a:pPr algn="l" indent="0" marL="0">
-              <a:lnSpc>
-                <a:spcPts val="1920"/>
-              </a:lnSpc>
-              <a:buNone/>
-            </a:pPr>
-            <a:r>
-              <a:rPr lang="en-US" sz="1600" dirty="0">
-                <a:solidFill>
-                  <a:srgbClr val="C1121C"/>
-                </a:solidFill>
-                <a:latin typeface="EB Garamond" pitchFamily="34" charset="0"/>
-                <a:ea typeface="EB Garamond" pitchFamily="34" charset="-122"/>
-                <a:cs typeface="EB Garamond" pitchFamily="34" charset="-120"/>
-              </a:rPr>
-              <a:t>01</a:t>
-            </a:r>
-            <a:endParaRPr lang="en-US" sz="1600" dirty="0"/>
-          </a:p>
-        </p:txBody>
-      </p:sp>
-      <p:sp>
-        <p:nvSpPr>
-          <p:cNvPr id="22" name="Text 18"/>
-          <p:cNvSpPr txBox="1"/>
-          <p:nvPr/>
-        </p:nvSpPr>
-        <p:spPr>
-          <a:xfrm>
-            <a:off x="4895701" y="1651695"/>
-            <a:ext cx="5122099" cy="459284"/>
-          </a:xfrm>
-          <a:prstGeom prst="rect">
-            <a:avLst/>
-          </a:prstGeom>
-          <a:noFill/>
-          <a:ln/>
-        </p:spPr>
-        <p:txBody>
-          <a:bodyPr wrap="square" lIns="0" tIns="0" rIns="0" bIns="0" rtlCol="0" anchor="t"/>
-          <a:lstStyle/>
-          <a:p>
-            <a:pPr algn="l" indent="0" marL="0">
-              <a:lnSpc>
-                <a:spcPts val="1810"/>
-              </a:lnSpc>
-              <a:buNone/>
-            </a:pPr>
-            <a:r>
-              <a:rPr lang="en-US" sz="1040" dirty="0">
-                <a:solidFill>
-                  <a:srgbClr val="16222E"/>
+          <p:cNvPr id="17" name="Text 13"/>
+          <p:cNvSpPr txBox="1"/>
+          <p:nvPr/>
+        </p:nvSpPr>
+        <p:spPr>
+          <a:xfrm>
+            <a:off x="4463802" y="3727698"/>
+            <a:ext cx="5553998" cy="735360"/>
+          </a:xfrm>
+          <a:prstGeom prst="rect">
+            <a:avLst/>
+          </a:prstGeom>
+          <a:noFill/>
+          <a:ln/>
+        </p:spPr>
+        <p:txBody>
+          <a:bodyPr wrap="square" lIns="0" tIns="0" rIns="0" bIns="0" rtlCol="0" anchor="t"/>
+          <a:lstStyle/>
+          <a:p>
+            <a:pPr algn="l" indent="0" marL="0">
+              <a:lnSpc>
+                <a:spcPts val="1929"/>
+              </a:lnSpc>
+              <a:buNone/>
+            </a:pPr>
+            <a:r>
+              <a:rPr lang="en-US" sz="1060" dirty="0">
+                <a:solidFill>
+                  <a:srgbClr val="5A6672"/>
+                </a:solidFill>
+                <a:latin typeface="Jost" pitchFamily="34" charset="0"/>
+                <a:ea typeface="Jost" pitchFamily="34" charset="-122"/>
+                <a:cs typeface="Jost" pitchFamily="34" charset="-120"/>
+              </a:rPr>
+              <a:t>Outra avaliação recente publicada no Google ressalta que a experiência começa antes mesmo do check-in, destacando o cuidado com a chegada, as malas, o veículo, as explicações de boas-vindas e a atenção permanente da equipe com o bem-estar dos hóspedes.</a:t>
+            </a:r>
+            <a:endParaRPr lang="en-US" sz="1060" dirty="0"/>
+          </a:p>
+        </p:txBody>
+      </p:sp>
+      <p:sp>
+        <p:nvSpPr>
+          <p:cNvPr id="18" name="Text 14"/>
+          <p:cNvSpPr txBox="1"/>
+          <p:nvPr/>
+        </p:nvSpPr>
+        <p:spPr>
+          <a:xfrm>
+            <a:off x="4463802" y="6296918"/>
+            <a:ext cx="5553998" cy="114300"/>
+          </a:xfrm>
+          <a:prstGeom prst="rect">
+            <a:avLst/>
+          </a:prstGeom>
+          <a:noFill/>
+          <a:ln/>
+        </p:spPr>
+        <p:txBody>
+          <a:bodyPr wrap="square" lIns="0" tIns="0" rIns="0" bIns="0" rtlCol="0" anchor="t"/>
+          <a:lstStyle/>
+          <a:p>
+            <a:pPr algn="l" indent="0" marL="0">
+              <a:lnSpc>
+                <a:spcPts val="744"/>
+              </a:lnSpc>
+              <a:buNone/>
+            </a:pPr>
+            <a:r>
+              <a:rPr lang="en-US" sz="620" spc="149" kern="0" dirty="0">
+                <a:solidFill>
+                  <a:srgbClr val="8C959D"/>
                 </a:solidFill>
                 <a:latin typeface="Jost Medium" pitchFamily="34" charset="0"/>
                 <a:ea typeface="Jost Medium" pitchFamily="34" charset="-122"/>
                 <a:cs typeface="Jost Medium" pitchFamily="34" charset="-120"/>
               </a:rPr>
-              <a:t>Receber o hóspede pelo nome</a:t>
-            </a:r>
-            <a:pPr algn="l" indent="0" marL="0">
-              <a:lnSpc>
-                <a:spcPts val="1810"/>
-              </a:lnSpc>
-              <a:buNone/>
-            </a:pPr>
-            <a:r>
-              <a:rPr lang="en-US" sz="1040" dirty="0">
-                <a:solidFill>
-                  <a:srgbClr val="5A6672"/>
+              <a:t>FONTES CITADAS NA CARTA ORIGINAL</a:t>
+            </a:r>
+            <a:endParaRPr lang="en-US" sz="620" dirty="0"/>
+          </a:p>
+        </p:txBody>
+      </p:sp>
+      <p:sp>
+        <p:nvSpPr>
+          <p:cNvPr id="19" name="Text 15"/>
+          <p:cNvSpPr txBox="1"/>
+          <p:nvPr/>
+        </p:nvSpPr>
+        <p:spPr>
+          <a:xfrm>
+            <a:off x="4463802" y="6519118"/>
+            <a:ext cx="5553998" cy="185589"/>
+          </a:xfrm>
+          <a:prstGeom prst="rect">
+            <a:avLst/>
+          </a:prstGeom>
+          <a:noFill/>
+          <a:ln/>
+        </p:spPr>
+        <p:txBody>
+          <a:bodyPr wrap="square" lIns="0" tIns="0" rIns="0" bIns="0" rtlCol="0" anchor="t"/>
+          <a:lstStyle/>
+          <a:p>
+            <a:pPr algn="l" indent="0" marL="0">
+              <a:lnSpc>
+                <a:spcPts val="1462"/>
+              </a:lnSpc>
+              <a:buNone/>
+            </a:pPr>
+            <a:r>
+              <a:rPr lang="en-US" sz="840" dirty="0">
+                <a:solidFill>
+                  <a:srgbClr val="8C959D"/>
                 </a:solidFill>
                 <a:latin typeface="Jost" pitchFamily="34" charset="0"/>
                 <a:ea typeface="Jost" pitchFamily="34" charset="-122"/>
                 <a:cs typeface="Jost" pitchFamily="34" charset="-120"/>
               </a:rPr>
-              <a:t> e perceber aquilo de que ele precisa antes mesmo que peça.</a:t>
-            </a:r>
-            <a:endParaRPr lang="en-US" sz="1040" dirty="0"/>
-          </a:p>
-        </p:txBody>
-      </p:sp>
-      <p:sp>
-        <p:nvSpPr>
-          <p:cNvPr id="23" name="Text 19"/>
-          <p:cNvSpPr txBox="1"/>
-          <p:nvPr/>
-        </p:nvSpPr>
-        <p:spPr>
-          <a:xfrm>
-            <a:off x="4463802" y="2823567"/>
-            <a:ext cx="477619" cy="257175"/>
-          </a:xfrm>
-          <a:prstGeom prst="rect">
-            <a:avLst/>
-          </a:prstGeom>
-          <a:noFill/>
-          <a:ln/>
-        </p:spPr>
-        <p:txBody>
-          <a:bodyPr wrap="square" lIns="0" tIns="0" rIns="0" bIns="0" rtlCol="0" anchor="t"/>
-          <a:lstStyle/>
-          <a:p>
-            <a:pPr algn="l" indent="0" marL="0">
-              <a:lnSpc>
-                <a:spcPts val="1920"/>
-              </a:lnSpc>
-              <a:buNone/>
-            </a:pPr>
-            <a:r>
-              <a:rPr lang="en-US" sz="1600" dirty="0">
-                <a:solidFill>
-                  <a:srgbClr val="C1121C"/>
-                </a:solidFill>
-                <a:latin typeface="EB Garamond" pitchFamily="34" charset="0"/>
-                <a:ea typeface="EB Garamond" pitchFamily="34" charset="-122"/>
-                <a:cs typeface="EB Garamond" pitchFamily="34" charset="-120"/>
-              </a:rPr>
-              <a:t>02</a:t>
-            </a:r>
-            <a:endParaRPr lang="en-US" sz="1600" dirty="0"/>
-          </a:p>
-        </p:txBody>
-      </p:sp>
-      <p:sp>
-        <p:nvSpPr>
-          <p:cNvPr id="24" name="Text 20"/>
-          <p:cNvSpPr txBox="1"/>
-          <p:nvPr/>
-        </p:nvSpPr>
-        <p:spPr>
-          <a:xfrm>
-            <a:off x="4895701" y="2837408"/>
-            <a:ext cx="5122099" cy="229642"/>
-          </a:xfrm>
-          <a:prstGeom prst="rect">
-            <a:avLst/>
-          </a:prstGeom>
-          <a:noFill/>
-          <a:ln/>
-        </p:spPr>
-        <p:txBody>
-          <a:bodyPr wrap="square" lIns="0" tIns="0" rIns="0" bIns="0" rtlCol="0" anchor="t"/>
-          <a:lstStyle/>
-          <a:p>
-            <a:pPr algn="l" indent="0" marL="0">
-              <a:lnSpc>
-                <a:spcPts val="1810"/>
-              </a:lnSpc>
-              <a:buNone/>
-            </a:pPr>
-            <a:r>
-              <a:rPr lang="en-US" sz="1040" dirty="0">
-                <a:solidFill>
-                  <a:srgbClr val="16222E"/>
-                </a:solidFill>
-                <a:latin typeface="Jost Medium" pitchFamily="34" charset="0"/>
-                <a:ea typeface="Jost Medium" pitchFamily="34" charset="-122"/>
-                <a:cs typeface="Jost Medium" pitchFamily="34" charset="-120"/>
-              </a:rPr>
-              <a:t>Cuidar do quarto</a:t>
-            </a:r>
-            <a:pPr algn="l" indent="0" marL="0">
-              <a:lnSpc>
-                <a:spcPts val="1810"/>
-              </a:lnSpc>
-              <a:buNone/>
-            </a:pPr>
-            <a:r>
-              <a:rPr lang="en-US" sz="1040" dirty="0">
-                <a:solidFill>
-                  <a:srgbClr val="5A6672"/>
-                </a:solidFill>
-                <a:latin typeface="Jost" pitchFamily="34" charset="0"/>
-                <a:ea typeface="Jost" pitchFamily="34" charset="-122"/>
-                <a:cs typeface="Jost" pitchFamily="34" charset="-120"/>
-              </a:rPr>
-              <a:t> e preparar um bom café da manhã.</a:t>
-            </a:r>
-            <a:endParaRPr lang="en-US" sz="1040" dirty="0"/>
-          </a:p>
-        </p:txBody>
-      </p:sp>
-      <p:sp>
-        <p:nvSpPr>
-          <p:cNvPr id="25" name="Text 21"/>
-          <p:cNvSpPr txBox="1"/>
-          <p:nvPr/>
-        </p:nvSpPr>
-        <p:spPr>
-          <a:xfrm>
-            <a:off x="4463802" y="3894386"/>
-            <a:ext cx="477619" cy="257175"/>
-          </a:xfrm>
-          <a:prstGeom prst="rect">
-            <a:avLst/>
-          </a:prstGeom>
-          <a:noFill/>
-          <a:ln/>
-        </p:spPr>
-        <p:txBody>
-          <a:bodyPr wrap="square" lIns="0" tIns="0" rIns="0" bIns="0" rtlCol="0" anchor="t"/>
-          <a:lstStyle/>
-          <a:p>
-            <a:pPr algn="l" indent="0" marL="0">
-              <a:lnSpc>
-                <a:spcPts val="1920"/>
-              </a:lnSpc>
-              <a:buNone/>
-            </a:pPr>
-            <a:r>
-              <a:rPr lang="en-US" sz="1600" dirty="0">
-                <a:solidFill>
-                  <a:srgbClr val="C1121C"/>
-                </a:solidFill>
-                <a:latin typeface="EB Garamond" pitchFamily="34" charset="0"/>
-                <a:ea typeface="EB Garamond" pitchFamily="34" charset="-122"/>
-                <a:cs typeface="EB Garamond" pitchFamily="34" charset="-120"/>
-              </a:rPr>
-              <a:t>03</a:t>
-            </a:r>
-            <a:endParaRPr lang="en-US" sz="1600" dirty="0"/>
-          </a:p>
-        </p:txBody>
-      </p:sp>
-      <p:sp>
-        <p:nvSpPr>
-          <p:cNvPr id="26" name="Text 22"/>
-          <p:cNvSpPr txBox="1"/>
-          <p:nvPr/>
-        </p:nvSpPr>
-        <p:spPr>
-          <a:xfrm>
-            <a:off x="4895701" y="3908227"/>
-            <a:ext cx="5122099" cy="229642"/>
-          </a:xfrm>
-          <a:prstGeom prst="rect">
-            <a:avLst/>
-          </a:prstGeom>
-          <a:noFill/>
-          <a:ln/>
-        </p:spPr>
-        <p:txBody>
-          <a:bodyPr wrap="square" lIns="0" tIns="0" rIns="0" bIns="0" rtlCol="0" anchor="t"/>
-          <a:lstStyle/>
-          <a:p>
-            <a:pPr algn="l" indent="0" marL="0">
-              <a:lnSpc>
-                <a:spcPts val="1810"/>
-              </a:lnSpc>
-              <a:buNone/>
-            </a:pPr>
-            <a:r>
-              <a:rPr lang="en-US" sz="1040" dirty="0">
-                <a:solidFill>
-                  <a:srgbClr val="16222E"/>
-                </a:solidFill>
-                <a:latin typeface="Jost Medium" pitchFamily="34" charset="0"/>
-                <a:ea typeface="Jost Medium" pitchFamily="34" charset="-122"/>
-                <a:cs typeface="Jost Medium" pitchFamily="34" charset="-120"/>
-              </a:rPr>
-              <a:t>Oferecer conforto na praia</a:t>
-            </a:r>
-            <a:pPr algn="l" indent="0" marL="0">
-              <a:lnSpc>
-                <a:spcPts val="1810"/>
-              </a:lnSpc>
-              <a:buNone/>
-            </a:pPr>
-            <a:r>
-              <a:rPr lang="en-US" sz="1040" dirty="0">
-                <a:solidFill>
-                  <a:srgbClr val="5A6672"/>
-                </a:solidFill>
-                <a:latin typeface="Jost" pitchFamily="34" charset="0"/>
-                <a:ea typeface="Jost" pitchFamily="34" charset="-122"/>
-                <a:cs typeface="Jost" pitchFamily="34" charset="-120"/>
-              </a:rPr>
-              <a:t> e ajudar com uma mala.</a:t>
-            </a:r>
-            <a:endParaRPr lang="en-US" sz="1040" dirty="0"/>
-          </a:p>
-        </p:txBody>
-      </p:sp>
-      <p:sp>
-        <p:nvSpPr>
-          <p:cNvPr id="27" name="Text 23"/>
-          <p:cNvSpPr txBox="1"/>
-          <p:nvPr/>
-        </p:nvSpPr>
-        <p:spPr>
-          <a:xfrm>
-            <a:off x="4463802" y="4965204"/>
-            <a:ext cx="477619" cy="257175"/>
-          </a:xfrm>
-          <a:prstGeom prst="rect">
-            <a:avLst/>
-          </a:prstGeom>
-          <a:noFill/>
-          <a:ln/>
-        </p:spPr>
-        <p:txBody>
-          <a:bodyPr wrap="square" lIns="0" tIns="0" rIns="0" bIns="0" rtlCol="0" anchor="t"/>
-          <a:lstStyle/>
-          <a:p>
-            <a:pPr algn="l" indent="0" marL="0">
-              <a:lnSpc>
-                <a:spcPts val="1920"/>
-              </a:lnSpc>
-              <a:buNone/>
-            </a:pPr>
-            <a:r>
-              <a:rPr lang="en-US" sz="1600" dirty="0">
-                <a:solidFill>
-                  <a:srgbClr val="C1121C"/>
-                </a:solidFill>
-                <a:latin typeface="EB Garamond" pitchFamily="34" charset="0"/>
-                <a:ea typeface="EB Garamond" pitchFamily="34" charset="-122"/>
-                <a:cs typeface="EB Garamond" pitchFamily="34" charset="-120"/>
-              </a:rPr>
-              <a:t>04</a:t>
-            </a:r>
-            <a:endParaRPr lang="en-US" sz="1600" dirty="0"/>
-          </a:p>
-        </p:txBody>
-      </p:sp>
-      <p:sp>
-        <p:nvSpPr>
-          <p:cNvPr id="28" name="Text 24"/>
-          <p:cNvSpPr txBox="1"/>
-          <p:nvPr/>
-        </p:nvSpPr>
-        <p:spPr>
-          <a:xfrm>
-            <a:off x="4895701" y="4979045"/>
-            <a:ext cx="5122099" cy="229642"/>
-          </a:xfrm>
-          <a:prstGeom prst="rect">
-            <a:avLst/>
-          </a:prstGeom>
-          <a:noFill/>
-          <a:ln/>
-        </p:spPr>
-        <p:txBody>
-          <a:bodyPr wrap="square" lIns="0" tIns="0" rIns="0" bIns="0" rtlCol="0" anchor="t"/>
-          <a:lstStyle/>
-          <a:p>
-            <a:pPr algn="l" indent="0" marL="0">
-              <a:lnSpc>
-                <a:spcPts val="1810"/>
-              </a:lnSpc>
-              <a:buNone/>
-            </a:pPr>
-            <a:r>
-              <a:rPr lang="en-US" sz="1040" dirty="0">
-                <a:solidFill>
-                  <a:srgbClr val="16222E"/>
-                </a:solidFill>
-                <a:latin typeface="Jost Medium" pitchFamily="34" charset="0"/>
-                <a:ea typeface="Jost Medium" pitchFamily="34" charset="-122"/>
-                <a:cs typeface="Jost Medium" pitchFamily="34" charset="-120"/>
-              </a:rPr>
-              <a:t>Lembrar uma preferência</a:t>
-            </a:r>
-            <a:pPr algn="l" indent="0" marL="0">
-              <a:lnSpc>
-                <a:spcPts val="1810"/>
-              </a:lnSpc>
-              <a:buNone/>
-            </a:pPr>
-            <a:r>
-              <a:rPr lang="en-US" sz="1040" dirty="0">
-                <a:solidFill>
-                  <a:srgbClr val="5A6672"/>
-                </a:solidFill>
-                <a:latin typeface="Jost" pitchFamily="34" charset="0"/>
-                <a:ea typeface="Jost" pitchFamily="34" charset="-122"/>
-                <a:cs typeface="Jost" pitchFamily="34" charset="-120"/>
-              </a:rPr>
-              <a:t> e resolver rapidamente um pequeno problema.</a:t>
-            </a:r>
-            <a:endParaRPr lang="en-US" sz="1040" dirty="0"/>
-          </a:p>
-        </p:txBody>
-      </p:sp>
-      <p:sp>
-        <p:nvSpPr>
-          <p:cNvPr id="29" name="Text 25"/>
-          <p:cNvSpPr txBox="1"/>
-          <p:nvPr/>
-        </p:nvSpPr>
-        <p:spPr>
-          <a:xfrm>
-            <a:off x="4463802" y="6036022"/>
-            <a:ext cx="477619" cy="257175"/>
-          </a:xfrm>
-          <a:prstGeom prst="rect">
-            <a:avLst/>
-          </a:prstGeom>
-          <a:noFill/>
-          <a:ln/>
-        </p:spPr>
-        <p:txBody>
-          <a:bodyPr wrap="square" lIns="0" tIns="0" rIns="0" bIns="0" rtlCol="0" anchor="t"/>
-          <a:lstStyle/>
-          <a:p>
-            <a:pPr algn="l" indent="0" marL="0">
-              <a:lnSpc>
-                <a:spcPts val="1920"/>
-              </a:lnSpc>
-              <a:buNone/>
-            </a:pPr>
-            <a:r>
-              <a:rPr lang="en-US" sz="1600" dirty="0">
-                <a:solidFill>
-                  <a:srgbClr val="C1121C"/>
-                </a:solidFill>
-                <a:latin typeface="EB Garamond" pitchFamily="34" charset="0"/>
-                <a:ea typeface="EB Garamond" pitchFamily="34" charset="-122"/>
-                <a:cs typeface="EB Garamond" pitchFamily="34" charset="-120"/>
-              </a:rPr>
-              <a:t>05</a:t>
-            </a:r>
-            <a:endParaRPr lang="en-US" sz="1600" dirty="0"/>
-          </a:p>
-        </p:txBody>
-      </p:sp>
-      <p:sp>
-        <p:nvSpPr>
-          <p:cNvPr id="30" name="Text 26"/>
-          <p:cNvSpPr txBox="1"/>
-          <p:nvPr/>
-        </p:nvSpPr>
-        <p:spPr>
-          <a:xfrm>
-            <a:off x="4895701" y="6049863"/>
-            <a:ext cx="5122099" cy="229642"/>
-          </a:xfrm>
-          <a:prstGeom prst="rect">
-            <a:avLst/>
-          </a:prstGeom>
-          <a:noFill/>
-          <a:ln/>
-        </p:spPr>
-        <p:txBody>
-          <a:bodyPr wrap="square" lIns="0" tIns="0" rIns="0" bIns="0" rtlCol="0" anchor="t"/>
-          <a:lstStyle/>
-          <a:p>
-            <a:pPr algn="l" indent="0" marL="0">
-              <a:lnSpc>
-                <a:spcPts val="1810"/>
-              </a:lnSpc>
-              <a:buNone/>
-            </a:pPr>
-            <a:r>
-              <a:rPr lang="en-US" sz="1040" dirty="0">
-                <a:solidFill>
-                  <a:srgbClr val="16222E"/>
-                </a:solidFill>
-                <a:latin typeface="Jost Medium" pitchFamily="34" charset="0"/>
-                <a:ea typeface="Jost Medium" pitchFamily="34" charset="-122"/>
-                <a:cs typeface="Jost Medium" pitchFamily="34" charset="-120"/>
-              </a:rPr>
-              <a:t>Fazer com que uma pessoa</a:t>
-            </a:r>
-            <a:pPr algn="l" indent="0" marL="0">
-              <a:lnSpc>
-                <a:spcPts val="1810"/>
-              </a:lnSpc>
-              <a:buNone/>
-            </a:pPr>
-            <a:r>
-              <a:rPr lang="en-US" sz="1040" dirty="0">
-                <a:solidFill>
-                  <a:srgbClr val="5A6672"/>
-                </a:solidFill>
-                <a:latin typeface="Jost" pitchFamily="34" charset="0"/>
-                <a:ea typeface="Jost" pitchFamily="34" charset="-122"/>
-                <a:cs typeface="Jost" pitchFamily="34" charset="-120"/>
-              </a:rPr>
-              <a:t> que chegou como hóspede queira voltar como amigo.</a:t>
-            </a:r>
-            <a:endParaRPr lang="en-US" sz="1040" dirty="0"/>
-          </a:p>
-        </p:txBody>
-      </p:sp>
-      <p:sp>
-        <p:nvSpPr>
-          <p:cNvPr id="31" name="Text 27"/>
+              <a:t>google.com.br · tripadvisor.com.br · restaurantguru.com.br</a:t>
+            </a:r>
+            <a:endParaRPr lang="en-US" sz="840" dirty="0"/>
+          </a:p>
+        </p:txBody>
+      </p:sp>
+      <p:sp>
+        <p:nvSpPr>
+          <p:cNvPr id="20" name="Text 16"/>
           <p:cNvSpPr txBox="1"/>
           <p:nvPr/>
         </p:nvSpPr>
@@ -7887,7 +7235,7 @@
         </p:nvSpPr>
         <p:spPr>
           <a:xfrm>
-            <a:off x="4463802" y="5080248"/>
+            <a:off x="4463802" y="1341239"/>
             <a:ext cx="5508278" cy="9525"/>
           </a:xfrm>
           <a:prstGeom prst="rect">
@@ -7907,6 +7255,186 @@
         </p:nvSpPr>
         <p:spPr>
           <a:xfrm>
+            <a:off x="4463802" y="1936105"/>
+            <a:ext cx="5508278" cy="9525"/>
+          </a:xfrm>
+          <a:prstGeom prst="rect">
+            <a:avLst/>
+          </a:prstGeom>
+          <a:solidFill>
+            <a:srgbClr val="E2DFD9"/>
+          </a:solidFill>
+          <a:ln/>
+        </p:spPr>
+      </p:sp>
+      <p:sp>
+        <p:nvSpPr>
+          <p:cNvPr id="8" name="Shape 6"/>
+          <p:cNvSpPr/>
+          <p:nvPr/>
+        </p:nvSpPr>
+        <p:spPr>
+          <a:xfrm>
+            <a:off x="4463802" y="2530971"/>
+            <a:ext cx="5508278" cy="9525"/>
+          </a:xfrm>
+          <a:prstGeom prst="rect">
+            <a:avLst/>
+          </a:prstGeom>
+          <a:solidFill>
+            <a:srgbClr val="E2DFD9"/>
+          </a:solidFill>
+          <a:ln/>
+        </p:spPr>
+      </p:sp>
+      <p:sp>
+        <p:nvSpPr>
+          <p:cNvPr id="9" name="Shape 7"/>
+          <p:cNvSpPr/>
+          <p:nvPr/>
+        </p:nvSpPr>
+        <p:spPr>
+          <a:xfrm>
+            <a:off x="4463802" y="3125837"/>
+            <a:ext cx="5508278" cy="9525"/>
+          </a:xfrm>
+          <a:prstGeom prst="rect">
+            <a:avLst/>
+          </a:prstGeom>
+          <a:solidFill>
+            <a:srgbClr val="E2DFD9"/>
+          </a:solidFill>
+          <a:ln/>
+        </p:spPr>
+      </p:sp>
+      <p:sp>
+        <p:nvSpPr>
+          <p:cNvPr id="10" name="Shape 8"/>
+          <p:cNvSpPr/>
+          <p:nvPr/>
+        </p:nvSpPr>
+        <p:spPr>
+          <a:xfrm>
+            <a:off x="4463802" y="3720703"/>
+            <a:ext cx="5508278" cy="9525"/>
+          </a:xfrm>
+          <a:prstGeom prst="rect">
+            <a:avLst/>
+          </a:prstGeom>
+          <a:solidFill>
+            <a:srgbClr val="E2DFD9"/>
+          </a:solidFill>
+          <a:ln/>
+        </p:spPr>
+      </p:sp>
+      <p:sp>
+        <p:nvSpPr>
+          <p:cNvPr id="11" name="Shape 9"/>
+          <p:cNvSpPr/>
+          <p:nvPr/>
+        </p:nvSpPr>
+        <p:spPr>
+          <a:xfrm>
+            <a:off x="4463802" y="4315569"/>
+            <a:ext cx="5508278" cy="9525"/>
+          </a:xfrm>
+          <a:prstGeom prst="rect">
+            <a:avLst/>
+          </a:prstGeom>
+          <a:solidFill>
+            <a:srgbClr val="E2DFD9"/>
+          </a:solidFill>
+          <a:ln/>
+        </p:spPr>
+      </p:sp>
+      <p:sp>
+        <p:nvSpPr>
+          <p:cNvPr id="12" name="Shape 10"/>
+          <p:cNvSpPr/>
+          <p:nvPr/>
+        </p:nvSpPr>
+        <p:spPr>
+          <a:xfrm>
+            <a:off x="4463802" y="4910435"/>
+            <a:ext cx="5508278" cy="9525"/>
+          </a:xfrm>
+          <a:prstGeom prst="rect">
+            <a:avLst/>
+          </a:prstGeom>
+          <a:solidFill>
+            <a:srgbClr val="E2DFD9"/>
+          </a:solidFill>
+          <a:ln/>
+        </p:spPr>
+      </p:sp>
+      <p:sp>
+        <p:nvSpPr>
+          <p:cNvPr id="13" name="Shape 11"/>
+          <p:cNvSpPr/>
+          <p:nvPr/>
+        </p:nvSpPr>
+        <p:spPr>
+          <a:xfrm>
+            <a:off x="4463802" y="5505301"/>
+            <a:ext cx="5508278" cy="9525"/>
+          </a:xfrm>
+          <a:prstGeom prst="rect">
+            <a:avLst/>
+          </a:prstGeom>
+          <a:solidFill>
+            <a:srgbClr val="E2DFD9"/>
+          </a:solidFill>
+          <a:ln/>
+        </p:spPr>
+      </p:sp>
+      <p:sp>
+        <p:nvSpPr>
+          <p:cNvPr id="14" name="Shape 12"/>
+          <p:cNvSpPr/>
+          <p:nvPr/>
+        </p:nvSpPr>
+        <p:spPr>
+          <a:xfrm>
+            <a:off x="4463802" y="6100167"/>
+            <a:ext cx="5508278" cy="9525"/>
+          </a:xfrm>
+          <a:prstGeom prst="rect">
+            <a:avLst/>
+          </a:prstGeom>
+          <a:solidFill>
+            <a:srgbClr val="E2DFD9"/>
+          </a:solidFill>
+          <a:ln/>
+        </p:spPr>
+      </p:sp>
+      <p:sp>
+        <p:nvSpPr>
+          <p:cNvPr id="15" name="Shape 13"/>
+          <p:cNvSpPr/>
+          <p:nvPr/>
+        </p:nvSpPr>
+        <p:spPr>
+          <a:xfrm>
+            <a:off x="4463802" y="6695033"/>
+            <a:ext cx="5508278" cy="9525"/>
+          </a:xfrm>
+          <a:prstGeom prst="rect">
+            <a:avLst/>
+          </a:prstGeom>
+          <a:solidFill>
+            <a:srgbClr val="E2DFD9"/>
+          </a:solidFill>
+          <a:ln/>
+        </p:spPr>
+      </p:sp>
+      <p:sp>
+        <p:nvSpPr>
+          <p:cNvPr id="16" name="Shape 14"/>
+          <p:cNvSpPr/>
+          <p:nvPr/>
+        </p:nvSpPr>
+        <p:spPr>
+          <a:xfrm>
             <a:off x="719882" y="6704707"/>
             <a:ext cx="9252198" cy="9525"/>
           </a:xfrm>
@@ -7921,7 +7449,7 @@
       </p:sp>
       <p:pic>
         <p:nvPicPr>
-          <p:cNvPr id="8" name="Image 0" descr="/home/user/SkillsClaude/apresentacao-victorinox/build/logos/logo-pc.png">    </p:cNvPr>
+          <p:cNvPr id="17" name="Image 0" descr="/home/user/SkillsClaude/apresentacao-victorinox/build/logos/logo-pc.png">    </p:cNvPr>
           <p:cNvPicPr>
             <a:picLocks noChangeAspect="1"/>
           </p:cNvPicPr>
@@ -7945,7 +7473,7 @@
       </p:pic>
       <p:pic>
         <p:nvPicPr>
-          <p:cNvPr id="9" name="Image 1" descr="/home/user/SkillsClaude/apresentacao-victorinox/build/logos/logo-vx.png">    </p:cNvPr>
+          <p:cNvPr id="18" name="Image 1" descr="/home/user/SkillsClaude/apresentacao-victorinox/build/logos/logo-vx.png">    </p:cNvPr>
           <p:cNvPicPr>
             <a:picLocks noChangeAspect="1"/>
           </p:cNvPicPr>
@@ -7969,7 +7497,7 @@
       </p:pic>
       <p:sp>
         <p:nvSpPr>
-          <p:cNvPr id="10" name="Text 6"/>
+          <p:cNvPr id="19" name="Text 15"/>
           <p:cNvSpPr txBox="1"/>
           <p:nvPr/>
         </p:nvSpPr>
@@ -8011,7 +7539,7 @@
       </p:sp>
       <p:sp>
         <p:nvSpPr>
-          <p:cNvPr id="11" name="Text 7"/>
+          <p:cNvPr id="20" name="Text 16"/>
           <p:cNvSpPr txBox="1"/>
           <p:nvPr/>
         </p:nvSpPr>
@@ -8053,7 +7581,7 @@
       </p:sp>
       <p:sp>
         <p:nvSpPr>
-          <p:cNvPr id="12" name="Text 8"/>
+          <p:cNvPr id="21" name="Text 17"/>
           <p:cNvSpPr txBox="1"/>
           <p:nvPr/>
         </p:nvSpPr>
@@ -8087,7 +7615,7 @@
                 <a:ea typeface="Jost Medium" pitchFamily="34" charset="-122"/>
                 <a:cs typeface="Jost Medium" pitchFamily="34" charset="-120"/>
               </a:rPr>
-              <a:t>SOLIDEZ</a:t>
+              <a:t>HOSPITALIDADE</a:t>
             </a:r>
             <a:endParaRPr lang="en-US" sz="660" dirty="0"/>
           </a:p>
@@ -8095,7 +7623,7 @@
       </p:sp>
       <p:sp>
         <p:nvSpPr>
-          <p:cNvPr id="13" name="Text 9"/>
+          <p:cNvPr id="22" name="Text 18"/>
           <p:cNvSpPr txBox="1"/>
           <p:nvPr/>
         </p:nvSpPr>
@@ -8129,7 +7657,7 @@
                 <a:ea typeface="EB Garamond Medium" pitchFamily="34" charset="-122"/>
                 <a:cs typeface="EB Garamond Medium" pitchFamily="34" charset="-120"/>
               </a:rPr>
-              <a:t>Uma empresa consolidada</a:t>
+              <a:t>Qualidade está nos detalhes</a:t>
             </a:r>
             <a:endParaRPr lang="en-US" sz="2700" dirty="0"/>
           </a:p>
@@ -8137,7 +7665,49 @@
       </p:sp>
       <p:sp>
         <p:nvSpPr>
-          <p:cNvPr id="14" name="Text 10"/>
+          <p:cNvPr id="23" name="Text 19"/>
+          <p:cNvSpPr txBox="1"/>
+          <p:nvPr/>
+        </p:nvSpPr>
+        <p:spPr>
+          <a:xfrm>
+            <a:off x="719882" y="2615059"/>
+            <a:ext cx="2700218" cy="735360"/>
+          </a:xfrm>
+          <a:prstGeom prst="rect">
+            <a:avLst/>
+          </a:prstGeom>
+          <a:noFill/>
+          <a:ln/>
+        </p:spPr>
+        <p:txBody>
+          <a:bodyPr wrap="square" lIns="0" tIns="0" rIns="0" bIns="0" rtlCol="0" anchor="t"/>
+          <a:lstStyle/>
+          <a:p>
+            <a:pPr algn="l" indent="0" marL="0">
+              <a:lnSpc>
+                <a:spcPts val="1929"/>
+              </a:lnSpc>
+              <a:buNone/>
+            </a:pPr>
+            <a:r>
+              <a:rPr lang="en-US" sz="1060" dirty="0">
+                <a:solidFill>
+                  <a:srgbClr val="5A6672"/>
+                </a:solidFill>
+                <a:latin typeface="Jost" pitchFamily="34" charset="0"/>
+                <a:ea typeface="Jost" pitchFamily="34" charset="-122"/>
+                <a:cs typeface="Jost" pitchFamily="34" charset="-120"/>
+              </a:rPr>
+              <a:t>Acreditamos que hospitalidade não está apenas na estrutura física. Ela está nos detalhes.</a:t>
+            </a:r>
+            <a:endParaRPr lang="en-US" sz="1060" dirty="0"/>
+          </a:p>
+        </p:txBody>
+      </p:sp>
+      <p:sp>
+        <p:nvSpPr>
+          <p:cNvPr id="24" name="Text 20"/>
           <p:cNvSpPr txBox="1"/>
           <p:nvPr/>
         </p:nvSpPr>
@@ -8171,7 +7741,7 @@
                 <a:ea typeface="EB Garamond" pitchFamily="34" charset="-122"/>
                 <a:cs typeface="EB Garamond" pitchFamily="34" charset="-120"/>
               </a:rPr>
-              <a:t>“Confiança não é conquistada em uma campanha publicitária. É construída ao longo do tempo.”</a:t>
+              <a:t>“Essa filosofia orientou a construção da Pousada Camburi ao longo de mais de duas décadas.”</a:t>
             </a:r>
             <a:endParaRPr lang="en-US" sz="1500" dirty="0"/>
           </a:p>
@@ -8179,75 +7749,75 @@
       </p:sp>
       <p:sp>
         <p:nvSpPr>
-          <p:cNvPr id="15" name="Text 11"/>
-          <p:cNvSpPr txBox="1"/>
-          <p:nvPr/>
-        </p:nvSpPr>
-        <p:spPr>
-          <a:xfrm>
-            <a:off x="4463802" y="1341239"/>
-            <a:ext cx="5553998" cy="265509"/>
-          </a:xfrm>
-          <a:prstGeom prst="rect">
-            <a:avLst/>
-          </a:prstGeom>
-          <a:noFill/>
-          <a:ln/>
-        </p:spPr>
-        <p:txBody>
-          <a:bodyPr wrap="square" lIns="0" tIns="0" rIns="0" bIns="0" rtlCol="0" anchor="t"/>
-          <a:lstStyle/>
-          <a:p>
-            <a:pPr algn="l" indent="0" marL="0">
-              <a:lnSpc>
-                <a:spcPts val="2092"/>
-              </a:lnSpc>
-              <a:buNone/>
-            </a:pPr>
-            <a:r>
-              <a:rPr lang="en-US" sz="1260" dirty="0">
-                <a:solidFill>
-                  <a:srgbClr val="2E3A45"/>
-                </a:solidFill>
-                <a:latin typeface="Jost Light" pitchFamily="34" charset="0"/>
-                <a:ea typeface="Jost Light" pitchFamily="34" charset="-122"/>
-                <a:cs typeface="Jost Light" pitchFamily="34" charset="-120"/>
-              </a:rPr>
-              <a:t>São mais de vinte anos de operação contínua.</a:t>
-            </a:r>
-            <a:endParaRPr lang="en-US" sz="1260" dirty="0"/>
-          </a:p>
-        </p:txBody>
-      </p:sp>
-      <p:sp>
-        <p:nvSpPr>
-          <p:cNvPr id="16" name="Text 12"/>
-          <p:cNvSpPr txBox="1"/>
-          <p:nvPr/>
-        </p:nvSpPr>
-        <p:spPr>
-          <a:xfrm>
-            <a:off x="4463802" y="2038648"/>
-            <a:ext cx="5553998" cy="735360"/>
-          </a:xfrm>
-          <a:prstGeom prst="rect">
-            <a:avLst/>
-          </a:prstGeom>
-          <a:noFill/>
-          <a:ln/>
-        </p:spPr>
-        <p:txBody>
-          <a:bodyPr wrap="square" lIns="0" tIns="0" rIns="0" bIns="0" rtlCol="0" anchor="t"/>
-          <a:lstStyle/>
-          <a:p>
-            <a:pPr algn="l" indent="0" marL="0">
-              <a:lnSpc>
-                <a:spcPts val="1929"/>
-              </a:lnSpc>
-              <a:buNone/>
-            </a:pPr>
-            <a:r>
-              <a:rPr lang="en-US" sz="1060" dirty="0">
+          <p:cNvPr id="25" name="Text 21"/>
+          <p:cNvSpPr txBox="1"/>
+          <p:nvPr/>
+        </p:nvSpPr>
+        <p:spPr>
+          <a:xfrm>
+            <a:off x="4463802" y="1514773"/>
+            <a:ext cx="477619" cy="257175"/>
+          </a:xfrm>
+          <a:prstGeom prst="rect">
+            <a:avLst/>
+          </a:prstGeom>
+          <a:noFill/>
+          <a:ln/>
+        </p:spPr>
+        <p:txBody>
+          <a:bodyPr wrap="square" lIns="0" tIns="0" rIns="0" bIns="0" rtlCol="0" anchor="t"/>
+          <a:lstStyle/>
+          <a:p>
+            <a:pPr algn="l" indent="0" marL="0">
+              <a:lnSpc>
+                <a:spcPts val="1920"/>
+              </a:lnSpc>
+              <a:buNone/>
+            </a:pPr>
+            <a:r>
+              <a:rPr lang="en-US" sz="1600" dirty="0">
+                <a:solidFill>
+                  <a:srgbClr val="C1121C"/>
+                </a:solidFill>
+                <a:latin typeface="EB Garamond" pitchFamily="34" charset="0"/>
+                <a:ea typeface="EB Garamond" pitchFamily="34" charset="-122"/>
+                <a:cs typeface="EB Garamond" pitchFamily="34" charset="-120"/>
+              </a:rPr>
+              <a:t>01</a:t>
+            </a:r>
+            <a:endParaRPr lang="en-US" sz="1600" dirty="0"/>
+          </a:p>
+        </p:txBody>
+      </p:sp>
+      <p:sp>
+        <p:nvSpPr>
+          <p:cNvPr id="26" name="Text 22"/>
+          <p:cNvSpPr txBox="1"/>
+          <p:nvPr/>
+        </p:nvSpPr>
+        <p:spPr>
+          <a:xfrm>
+            <a:off x="4895701" y="1528614"/>
+            <a:ext cx="5122099" cy="229642"/>
+          </a:xfrm>
+          <a:prstGeom prst="rect">
+            <a:avLst/>
+          </a:prstGeom>
+          <a:noFill/>
+          <a:ln/>
+        </p:spPr>
+        <p:txBody>
+          <a:bodyPr wrap="square" lIns="0" tIns="0" rIns="0" bIns="0" rtlCol="0" anchor="t"/>
+          <a:lstStyle/>
+          <a:p>
+            <a:pPr algn="l" indent="0" marL="0">
+              <a:lnSpc>
+                <a:spcPts val="1810"/>
+              </a:lnSpc>
+              <a:buNone/>
+            </a:pPr>
+            <a:r>
+              <a:rPr lang="en-US" sz="1040" dirty="0">
                 <a:solidFill>
                   <a:srgbClr val="5A6672"/>
                 </a:solidFill>
@@ -8255,41 +7825,83 @@
                 <a:ea typeface="Jost" pitchFamily="34" charset="-122"/>
                 <a:cs typeface="Jost" pitchFamily="34" charset="-120"/>
               </a:rPr>
-              <a:t>Mais de duas décadas enfrentando diferentes momentos da economia, mudanças no comportamento dos consumidores, transformações no turismo e novas formas de comunicação. E permanecemos aqui.</a:t>
-            </a:r>
-            <a:endParaRPr lang="en-US" sz="1060" dirty="0"/>
-          </a:p>
-        </p:txBody>
-      </p:sp>
-      <p:sp>
-        <p:nvSpPr>
-          <p:cNvPr id="17" name="Text 13"/>
-          <p:cNvSpPr txBox="1"/>
-          <p:nvPr/>
-        </p:nvSpPr>
-        <p:spPr>
-          <a:xfrm>
-            <a:off x="4463802" y="2971949"/>
-            <a:ext cx="5553998" cy="490240"/>
-          </a:xfrm>
-          <a:prstGeom prst="rect">
-            <a:avLst/>
-          </a:prstGeom>
-          <a:noFill/>
-          <a:ln/>
-        </p:spPr>
-        <p:txBody>
-          <a:bodyPr wrap="square" lIns="0" tIns="0" rIns="0" bIns="0" rtlCol="0" anchor="t"/>
-          <a:lstStyle/>
-          <a:p>
-            <a:pPr algn="l" indent="0" marL="0">
-              <a:lnSpc>
-                <a:spcPts val="1929"/>
-              </a:lnSpc>
-              <a:buNone/>
-            </a:pPr>
-            <a:r>
-              <a:rPr lang="en-US" sz="1060" dirty="0">
+              <a:t>Está em receber o hóspede pelo nome.</a:t>
+            </a:r>
+            <a:endParaRPr lang="en-US" sz="1040" dirty="0"/>
+          </a:p>
+        </p:txBody>
+      </p:sp>
+      <p:sp>
+        <p:nvSpPr>
+          <p:cNvPr id="27" name="Text 23"/>
+          <p:cNvSpPr txBox="1"/>
+          <p:nvPr/>
+        </p:nvSpPr>
+        <p:spPr>
+          <a:xfrm>
+            <a:off x="4463802" y="2109639"/>
+            <a:ext cx="477619" cy="257175"/>
+          </a:xfrm>
+          <a:prstGeom prst="rect">
+            <a:avLst/>
+          </a:prstGeom>
+          <a:noFill/>
+          <a:ln/>
+        </p:spPr>
+        <p:txBody>
+          <a:bodyPr wrap="square" lIns="0" tIns="0" rIns="0" bIns="0" rtlCol="0" anchor="t"/>
+          <a:lstStyle/>
+          <a:p>
+            <a:pPr algn="l" indent="0" marL="0">
+              <a:lnSpc>
+                <a:spcPts val="1920"/>
+              </a:lnSpc>
+              <a:buNone/>
+            </a:pPr>
+            <a:r>
+              <a:rPr lang="en-US" sz="1600" dirty="0">
+                <a:solidFill>
+                  <a:srgbClr val="C1121C"/>
+                </a:solidFill>
+                <a:latin typeface="EB Garamond" pitchFamily="34" charset="0"/>
+                <a:ea typeface="EB Garamond" pitchFamily="34" charset="-122"/>
+                <a:cs typeface="EB Garamond" pitchFamily="34" charset="-120"/>
+              </a:rPr>
+              <a:t>02</a:t>
+            </a:r>
+            <a:endParaRPr lang="en-US" sz="1600" dirty="0"/>
+          </a:p>
+        </p:txBody>
+      </p:sp>
+      <p:sp>
+        <p:nvSpPr>
+          <p:cNvPr id="28" name="Text 24"/>
+          <p:cNvSpPr txBox="1"/>
+          <p:nvPr/>
+        </p:nvSpPr>
+        <p:spPr>
+          <a:xfrm>
+            <a:off x="4895701" y="2123480"/>
+            <a:ext cx="5122099" cy="229642"/>
+          </a:xfrm>
+          <a:prstGeom prst="rect">
+            <a:avLst/>
+          </a:prstGeom>
+          <a:noFill/>
+          <a:ln/>
+        </p:spPr>
+        <p:txBody>
+          <a:bodyPr wrap="square" lIns="0" tIns="0" rIns="0" bIns="0" rtlCol="0" anchor="t"/>
+          <a:lstStyle/>
+          <a:p>
+            <a:pPr algn="l" indent="0" marL="0">
+              <a:lnSpc>
+                <a:spcPts val="1810"/>
+              </a:lnSpc>
+              <a:buNone/>
+            </a:pPr>
+            <a:r>
+              <a:rPr lang="en-US" sz="1040" dirty="0">
                 <a:solidFill>
                   <a:srgbClr val="5A6672"/>
                 </a:solidFill>
@@ -8297,41 +7909,83 @@
                 <a:ea typeface="Jost" pitchFamily="34" charset="-122"/>
                 <a:cs typeface="Jost" pitchFamily="34" charset="-120"/>
               </a:rPr>
-              <a:t>Cuidando da empresa. Cuidando da nossa equipe. Cuidando dos nossos hóspedes. Cuidando do patrimônio que construímos.</a:t>
-            </a:r>
-            <a:endParaRPr lang="en-US" sz="1060" dirty="0"/>
-          </a:p>
-        </p:txBody>
-      </p:sp>
-      <p:sp>
-        <p:nvSpPr>
-          <p:cNvPr id="18" name="Text 14"/>
-          <p:cNvSpPr txBox="1"/>
-          <p:nvPr/>
-        </p:nvSpPr>
-        <p:spPr>
-          <a:xfrm>
-            <a:off x="4463802" y="3660130"/>
-            <a:ext cx="5553998" cy="490240"/>
-          </a:xfrm>
-          <a:prstGeom prst="rect">
-            <a:avLst/>
-          </a:prstGeom>
-          <a:noFill/>
-          <a:ln/>
-        </p:spPr>
-        <p:txBody>
-          <a:bodyPr wrap="square" lIns="0" tIns="0" rIns="0" bIns="0" rtlCol="0" anchor="t"/>
-          <a:lstStyle/>
-          <a:p>
-            <a:pPr algn="l" indent="0" marL="0">
-              <a:lnSpc>
-                <a:spcPts val="1929"/>
-              </a:lnSpc>
-              <a:buNone/>
-            </a:pPr>
-            <a:r>
-              <a:rPr lang="en-US" sz="1060" dirty="0">
+              <a:t>Em perceber aquilo de que ele precisa antes mesmo que peça.</a:t>
+            </a:r>
+            <a:endParaRPr lang="en-US" sz="1040" dirty="0"/>
+          </a:p>
+        </p:txBody>
+      </p:sp>
+      <p:sp>
+        <p:nvSpPr>
+          <p:cNvPr id="29" name="Text 25"/>
+          <p:cNvSpPr txBox="1"/>
+          <p:nvPr/>
+        </p:nvSpPr>
+        <p:spPr>
+          <a:xfrm>
+            <a:off x="4463802" y="2704505"/>
+            <a:ext cx="477619" cy="257175"/>
+          </a:xfrm>
+          <a:prstGeom prst="rect">
+            <a:avLst/>
+          </a:prstGeom>
+          <a:noFill/>
+          <a:ln/>
+        </p:spPr>
+        <p:txBody>
+          <a:bodyPr wrap="square" lIns="0" tIns="0" rIns="0" bIns="0" rtlCol="0" anchor="t"/>
+          <a:lstStyle/>
+          <a:p>
+            <a:pPr algn="l" indent="0" marL="0">
+              <a:lnSpc>
+                <a:spcPts val="1920"/>
+              </a:lnSpc>
+              <a:buNone/>
+            </a:pPr>
+            <a:r>
+              <a:rPr lang="en-US" sz="1600" dirty="0">
+                <a:solidFill>
+                  <a:srgbClr val="C1121C"/>
+                </a:solidFill>
+                <a:latin typeface="EB Garamond" pitchFamily="34" charset="0"/>
+                <a:ea typeface="EB Garamond" pitchFamily="34" charset="-122"/>
+                <a:cs typeface="EB Garamond" pitchFamily="34" charset="-120"/>
+              </a:rPr>
+              <a:t>03</a:t>
+            </a:r>
+            <a:endParaRPr lang="en-US" sz="1600" dirty="0"/>
+          </a:p>
+        </p:txBody>
+      </p:sp>
+      <p:sp>
+        <p:nvSpPr>
+          <p:cNvPr id="30" name="Text 26"/>
+          <p:cNvSpPr txBox="1"/>
+          <p:nvPr/>
+        </p:nvSpPr>
+        <p:spPr>
+          <a:xfrm>
+            <a:off x="4895701" y="2718346"/>
+            <a:ext cx="5122099" cy="229642"/>
+          </a:xfrm>
+          <a:prstGeom prst="rect">
+            <a:avLst/>
+          </a:prstGeom>
+          <a:noFill/>
+          <a:ln/>
+        </p:spPr>
+        <p:txBody>
+          <a:bodyPr wrap="square" lIns="0" tIns="0" rIns="0" bIns="0" rtlCol="0" anchor="t"/>
+          <a:lstStyle/>
+          <a:p>
+            <a:pPr algn="l" indent="0" marL="0">
+              <a:lnSpc>
+                <a:spcPts val="1810"/>
+              </a:lnSpc>
+              <a:buNone/>
+            </a:pPr>
+            <a:r>
+              <a:rPr lang="en-US" sz="1040" dirty="0">
                 <a:solidFill>
                   <a:srgbClr val="5A6672"/>
                 </a:solidFill>
@@ -8339,91 +7993,49 @@
                 <a:ea typeface="Jost" pitchFamily="34" charset="-122"/>
                 <a:cs typeface="Jost" pitchFamily="34" charset="-120"/>
               </a:rPr>
-              <a:t>Essa longevidade nos ensinou algo que talvez seja justamente o que mais nos aproxima da filosofia da Victorinox.</a:t>
-            </a:r>
-            <a:endParaRPr lang="en-US" sz="1060" dirty="0"/>
-          </a:p>
-        </p:txBody>
-      </p:sp>
-      <p:sp>
-        <p:nvSpPr>
-          <p:cNvPr id="19" name="Text 15"/>
-          <p:cNvSpPr txBox="1"/>
-          <p:nvPr/>
-        </p:nvSpPr>
-        <p:spPr>
-          <a:xfrm>
-            <a:off x="4463802" y="5377755"/>
-            <a:ext cx="1593830" cy="114300"/>
-          </a:xfrm>
-          <a:prstGeom prst="rect">
-            <a:avLst/>
-          </a:prstGeom>
-          <a:noFill/>
-          <a:ln/>
-        </p:spPr>
-        <p:txBody>
-          <a:bodyPr wrap="square" lIns="0" tIns="0" rIns="0" bIns="0" rtlCol="0" anchor="t"/>
-          <a:lstStyle/>
-          <a:p>
-            <a:pPr algn="l" indent="0" marL="0">
-              <a:lnSpc>
-                <a:spcPts val="768"/>
-              </a:lnSpc>
-              <a:buNone/>
-            </a:pPr>
-            <a:r>
-              <a:rPr lang="en-US" sz="640" spc="154" kern="0" dirty="0">
+              <a:t>Em cuidar do quarto.</a:t>
+            </a:r>
+            <a:endParaRPr lang="en-US" sz="1040" dirty="0"/>
+          </a:p>
+        </p:txBody>
+      </p:sp>
+      <p:sp>
+        <p:nvSpPr>
+          <p:cNvPr id="31" name="Text 27"/>
+          <p:cNvSpPr txBox="1"/>
+          <p:nvPr/>
+        </p:nvSpPr>
+        <p:spPr>
+          <a:xfrm>
+            <a:off x="4463802" y="3299371"/>
+            <a:ext cx="477619" cy="257175"/>
+          </a:xfrm>
+          <a:prstGeom prst="rect">
+            <a:avLst/>
+          </a:prstGeom>
+          <a:noFill/>
+          <a:ln/>
+        </p:spPr>
+        <p:txBody>
+          <a:bodyPr wrap="square" lIns="0" tIns="0" rIns="0" bIns="0" rtlCol="0" anchor="t"/>
+          <a:lstStyle/>
+          <a:p>
+            <a:pPr algn="l" indent="0" marL="0">
+              <a:lnSpc>
+                <a:spcPts val="1920"/>
+              </a:lnSpc>
+              <a:buNone/>
+            </a:pPr>
+            <a:r>
+              <a:rPr lang="en-US" sz="1600" dirty="0">
                 <a:solidFill>
                   <a:srgbClr val="C1121C"/>
                 </a:solidFill>
-                <a:latin typeface="Jost Medium" pitchFamily="34" charset="0"/>
-                <a:ea typeface="Jost Medium" pitchFamily="34" charset="-122"/>
-                <a:cs typeface="Jost Medium" pitchFamily="34" charset="-120"/>
-              </a:rPr>
-              <a:t>OPERAÇÃO</a:t>
-            </a:r>
-            <a:endParaRPr lang="en-US" sz="640" dirty="0"/>
-          </a:p>
-        </p:txBody>
-      </p:sp>
-      <p:sp>
-        <p:nvSpPr>
-          <p:cNvPr id="20" name="Text 16"/>
-          <p:cNvSpPr txBox="1"/>
-          <p:nvPr/>
-        </p:nvSpPr>
-        <p:spPr>
-          <a:xfrm>
-            <a:off x="4463802" y="5585520"/>
-            <a:ext cx="1593830" cy="471190"/>
-          </a:xfrm>
-          <a:prstGeom prst="rect">
-            <a:avLst/>
-          </a:prstGeom>
-          <a:noFill/>
-          <a:ln/>
-        </p:spPr>
-        <p:txBody>
-          <a:bodyPr wrap="square" lIns="0" tIns="0" rIns="0" bIns="0" rtlCol="0" anchor="t"/>
-          <a:lstStyle/>
-          <a:p>
-            <a:pPr algn="l" indent="0" marL="0">
-              <a:lnSpc>
-                <a:spcPts val="1856"/>
-              </a:lnSpc>
-              <a:buNone/>
-            </a:pPr>
-            <a:r>
-              <a:rPr lang="en-US" sz="1600" dirty="0">
-                <a:solidFill>
-                  <a:srgbClr val="16222E"/>
-                </a:solidFill>
-                <a:latin typeface="EB Garamond Medium" pitchFamily="34" charset="0"/>
-                <a:ea typeface="EB Garamond Medium" pitchFamily="34" charset="-122"/>
-                <a:cs typeface="EB Garamond Medium" pitchFamily="34" charset="-120"/>
-              </a:rPr>
-              <a:t>Contínua desde 2002</a:t>
+                <a:latin typeface="EB Garamond" pitchFamily="34" charset="0"/>
+                <a:ea typeface="EB Garamond" pitchFamily="34" charset="-122"/>
+                <a:cs typeface="EB Garamond" pitchFamily="34" charset="-120"/>
+              </a:rPr>
+              <a:t>04</a:t>
             </a:r>
             <a:endParaRPr lang="en-US" sz="1600" dirty="0"/>
           </a:p>
@@ -8431,33 +8043,33 @@
       </p:sp>
       <p:sp>
         <p:nvSpPr>
-          <p:cNvPr id="21" name="Text 17"/>
-          <p:cNvSpPr txBox="1"/>
-          <p:nvPr/>
-        </p:nvSpPr>
-        <p:spPr>
-          <a:xfrm>
-            <a:off x="4463802" y="6135886"/>
-            <a:ext cx="1593830" cy="379214"/>
-          </a:xfrm>
-          <a:prstGeom prst="rect">
-            <a:avLst/>
-          </a:prstGeom>
-          <a:noFill/>
-          <a:ln/>
-        </p:spPr>
-        <p:txBody>
-          <a:bodyPr wrap="square" lIns="0" tIns="0" rIns="0" bIns="0" rtlCol="0" anchor="t"/>
-          <a:lstStyle/>
-          <a:p>
-            <a:pPr algn="l" indent="0" marL="0">
-              <a:lnSpc>
-                <a:spcPts val="1494"/>
-              </a:lnSpc>
-              <a:buNone/>
-            </a:pPr>
-            <a:r>
-              <a:rPr lang="en-US" sz="900" dirty="0">
+          <p:cNvPr id="32" name="Text 28"/>
+          <p:cNvSpPr txBox="1"/>
+          <p:nvPr/>
+        </p:nvSpPr>
+        <p:spPr>
+          <a:xfrm>
+            <a:off x="4895701" y="3313212"/>
+            <a:ext cx="5122099" cy="229642"/>
+          </a:xfrm>
+          <a:prstGeom prst="rect">
+            <a:avLst/>
+          </a:prstGeom>
+          <a:noFill/>
+          <a:ln/>
+        </p:spPr>
+        <p:txBody>
+          <a:bodyPr wrap="square" lIns="0" tIns="0" rIns="0" bIns="0" rtlCol="0" anchor="t"/>
+          <a:lstStyle/>
+          <a:p>
+            <a:pPr algn="l" indent="0" marL="0">
+              <a:lnSpc>
+                <a:spcPts val="1810"/>
+              </a:lnSpc>
+              <a:buNone/>
+            </a:pPr>
+            <a:r>
+              <a:rPr lang="en-US" sz="1040" dirty="0">
                 <a:solidFill>
                   <a:srgbClr val="5A6672"/>
                 </a:solidFill>
@@ -8465,91 +8077,49 @@
                 <a:ea typeface="Jost" pitchFamily="34" charset="-122"/>
                 <a:cs typeface="Jost" pitchFamily="34" charset="-120"/>
               </a:rPr>
-              <a:t>Atravessando ciclos distintos da economia e do turismo.</a:t>
-            </a:r>
-            <a:endParaRPr lang="en-US" sz="900" dirty="0"/>
-          </a:p>
-        </p:txBody>
-      </p:sp>
-      <p:sp>
-        <p:nvSpPr>
-          <p:cNvPr id="22" name="Text 18"/>
-          <p:cNvSpPr txBox="1"/>
-          <p:nvPr/>
-        </p:nvSpPr>
-        <p:spPr>
-          <a:xfrm>
-            <a:off x="6443811" y="5377755"/>
-            <a:ext cx="1593830" cy="114300"/>
-          </a:xfrm>
-          <a:prstGeom prst="rect">
-            <a:avLst/>
-          </a:prstGeom>
-          <a:noFill/>
-          <a:ln/>
-        </p:spPr>
-        <p:txBody>
-          <a:bodyPr wrap="square" lIns="0" tIns="0" rIns="0" bIns="0" rtlCol="0" anchor="t"/>
-          <a:lstStyle/>
-          <a:p>
-            <a:pPr algn="l" indent="0" marL="0">
-              <a:lnSpc>
-                <a:spcPts val="768"/>
-              </a:lnSpc>
-              <a:buNone/>
-            </a:pPr>
-            <a:r>
-              <a:rPr lang="en-US" sz="640" spc="154" kern="0" dirty="0">
+              <a:t>Em preparar um bom café da manhã.</a:t>
+            </a:r>
+            <a:endParaRPr lang="en-US" sz="1040" dirty="0"/>
+          </a:p>
+        </p:txBody>
+      </p:sp>
+      <p:sp>
+        <p:nvSpPr>
+          <p:cNvPr id="33" name="Text 29"/>
+          <p:cNvSpPr txBox="1"/>
+          <p:nvPr/>
+        </p:nvSpPr>
+        <p:spPr>
+          <a:xfrm>
+            <a:off x="4463802" y="3894237"/>
+            <a:ext cx="477619" cy="257175"/>
+          </a:xfrm>
+          <a:prstGeom prst="rect">
+            <a:avLst/>
+          </a:prstGeom>
+          <a:noFill/>
+          <a:ln/>
+        </p:spPr>
+        <p:txBody>
+          <a:bodyPr wrap="square" lIns="0" tIns="0" rIns="0" bIns="0" rtlCol="0" anchor="t"/>
+          <a:lstStyle/>
+          <a:p>
+            <a:pPr algn="l" indent="0" marL="0">
+              <a:lnSpc>
+                <a:spcPts val="1920"/>
+              </a:lnSpc>
+              <a:buNone/>
+            </a:pPr>
+            <a:r>
+              <a:rPr lang="en-US" sz="1600" dirty="0">
                 <a:solidFill>
                   <a:srgbClr val="C1121C"/>
                 </a:solidFill>
-                <a:latin typeface="Jost Medium" pitchFamily="34" charset="0"/>
-                <a:ea typeface="Jost Medium" pitchFamily="34" charset="-122"/>
-                <a:cs typeface="Jost Medium" pitchFamily="34" charset="-120"/>
-              </a:rPr>
-              <a:t>CUIDADO</a:t>
-            </a:r>
-            <a:endParaRPr lang="en-US" sz="640" dirty="0"/>
-          </a:p>
-        </p:txBody>
-      </p:sp>
-      <p:sp>
-        <p:nvSpPr>
-          <p:cNvPr id="23" name="Text 19"/>
-          <p:cNvSpPr txBox="1"/>
-          <p:nvPr/>
-        </p:nvSpPr>
-        <p:spPr>
-          <a:xfrm>
-            <a:off x="6443811" y="5585520"/>
-            <a:ext cx="1593830" cy="471190"/>
-          </a:xfrm>
-          <a:prstGeom prst="rect">
-            <a:avLst/>
-          </a:prstGeom>
-          <a:noFill/>
-          <a:ln/>
-        </p:spPr>
-        <p:txBody>
-          <a:bodyPr wrap="square" lIns="0" tIns="0" rIns="0" bIns="0" rtlCol="0" anchor="t"/>
-          <a:lstStyle/>
-          <a:p>
-            <a:pPr algn="l" indent="0" marL="0">
-              <a:lnSpc>
-                <a:spcPts val="1856"/>
-              </a:lnSpc>
-              <a:buNone/>
-            </a:pPr>
-            <a:r>
-              <a:rPr lang="en-US" sz="1600" dirty="0">
-                <a:solidFill>
-                  <a:srgbClr val="16222E"/>
-                </a:solidFill>
-                <a:latin typeface="EB Garamond Medium" pitchFamily="34" charset="0"/>
-                <a:ea typeface="EB Garamond Medium" pitchFamily="34" charset="-122"/>
-                <a:cs typeface="EB Garamond Medium" pitchFamily="34" charset="-120"/>
-              </a:rPr>
-              <a:t>Empresa, equipe e hóspedes</a:t>
+                <a:latin typeface="EB Garamond" pitchFamily="34" charset="0"/>
+                <a:ea typeface="EB Garamond" pitchFamily="34" charset="-122"/>
+                <a:cs typeface="EB Garamond" pitchFamily="34" charset="-120"/>
+              </a:rPr>
+              <a:t>05</a:t>
             </a:r>
             <a:endParaRPr lang="en-US" sz="1600" dirty="0"/>
           </a:p>
@@ -8557,33 +8127,33 @@
       </p:sp>
       <p:sp>
         <p:nvSpPr>
-          <p:cNvPr id="24" name="Text 20"/>
-          <p:cNvSpPr txBox="1"/>
-          <p:nvPr/>
-        </p:nvSpPr>
-        <p:spPr>
-          <a:xfrm>
-            <a:off x="6443811" y="6135886"/>
-            <a:ext cx="1593830" cy="379214"/>
-          </a:xfrm>
-          <a:prstGeom prst="rect">
-            <a:avLst/>
-          </a:prstGeom>
-          <a:noFill/>
-          <a:ln/>
-        </p:spPr>
-        <p:txBody>
-          <a:bodyPr wrap="square" lIns="0" tIns="0" rIns="0" bIns="0" rtlCol="0" anchor="t"/>
-          <a:lstStyle/>
-          <a:p>
-            <a:pPr algn="l" indent="0" marL="0">
-              <a:lnSpc>
-                <a:spcPts val="1494"/>
-              </a:lnSpc>
-              <a:buNone/>
-            </a:pPr>
-            <a:r>
-              <a:rPr lang="en-US" sz="900" dirty="0">
+          <p:cNvPr id="34" name="Text 30"/>
+          <p:cNvSpPr txBox="1"/>
+          <p:nvPr/>
+        </p:nvSpPr>
+        <p:spPr>
+          <a:xfrm>
+            <a:off x="4895701" y="3908078"/>
+            <a:ext cx="5122099" cy="229642"/>
+          </a:xfrm>
+          <a:prstGeom prst="rect">
+            <a:avLst/>
+          </a:prstGeom>
+          <a:noFill/>
+          <a:ln/>
+        </p:spPr>
+        <p:txBody>
+          <a:bodyPr wrap="square" lIns="0" tIns="0" rIns="0" bIns="0" rtlCol="0" anchor="t"/>
+          <a:lstStyle/>
+          <a:p>
+            <a:pPr algn="l" indent="0" marL="0">
+              <a:lnSpc>
+                <a:spcPts val="1810"/>
+              </a:lnSpc>
+              <a:buNone/>
+            </a:pPr>
+            <a:r>
+              <a:rPr lang="en-US" sz="1040" dirty="0">
                 <a:solidFill>
                   <a:srgbClr val="5A6672"/>
                 </a:solidFill>
@@ -8591,91 +8161,49 @@
                 <a:ea typeface="Jost" pitchFamily="34" charset="-122"/>
                 <a:cs typeface="Jost" pitchFamily="34" charset="-120"/>
               </a:rPr>
-              <a:t>E o patrimônio construído ao longo de todo esse período.</a:t>
-            </a:r>
-            <a:endParaRPr lang="en-US" sz="900" dirty="0"/>
-          </a:p>
-        </p:txBody>
-      </p:sp>
-      <p:sp>
-        <p:nvSpPr>
-          <p:cNvPr id="25" name="Text 21"/>
-          <p:cNvSpPr txBox="1"/>
-          <p:nvPr/>
-        </p:nvSpPr>
-        <p:spPr>
-          <a:xfrm>
-            <a:off x="8423821" y="5377755"/>
-            <a:ext cx="1593830" cy="114300"/>
-          </a:xfrm>
-          <a:prstGeom prst="rect">
-            <a:avLst/>
-          </a:prstGeom>
-          <a:noFill/>
-          <a:ln/>
-        </p:spPr>
-        <p:txBody>
-          <a:bodyPr wrap="square" lIns="0" tIns="0" rIns="0" bIns="0" rtlCol="0" anchor="t"/>
-          <a:lstStyle/>
-          <a:p>
-            <a:pPr algn="l" indent="0" marL="0">
-              <a:lnSpc>
-                <a:spcPts val="768"/>
-              </a:lnSpc>
-              <a:buNone/>
-            </a:pPr>
-            <a:r>
-              <a:rPr lang="en-US" sz="640" spc="154" kern="0" dirty="0">
+              <a:t>Em oferecer conforto na praia.</a:t>
+            </a:r>
+            <a:endParaRPr lang="en-US" sz="1040" dirty="0"/>
+          </a:p>
+        </p:txBody>
+      </p:sp>
+      <p:sp>
+        <p:nvSpPr>
+          <p:cNvPr id="35" name="Text 31"/>
+          <p:cNvSpPr txBox="1"/>
+          <p:nvPr/>
+        </p:nvSpPr>
+        <p:spPr>
+          <a:xfrm>
+            <a:off x="4463802" y="4489103"/>
+            <a:ext cx="477619" cy="257175"/>
+          </a:xfrm>
+          <a:prstGeom prst="rect">
+            <a:avLst/>
+          </a:prstGeom>
+          <a:noFill/>
+          <a:ln/>
+        </p:spPr>
+        <p:txBody>
+          <a:bodyPr wrap="square" lIns="0" tIns="0" rIns="0" bIns="0" rtlCol="0" anchor="t"/>
+          <a:lstStyle/>
+          <a:p>
+            <a:pPr algn="l" indent="0" marL="0">
+              <a:lnSpc>
+                <a:spcPts val="1920"/>
+              </a:lnSpc>
+              <a:buNone/>
+            </a:pPr>
+            <a:r>
+              <a:rPr lang="en-US" sz="1600" dirty="0">
                 <a:solidFill>
                   <a:srgbClr val="C1121C"/>
                 </a:solidFill>
-                <a:latin typeface="Jost Medium" pitchFamily="34" charset="0"/>
-                <a:ea typeface="Jost Medium" pitchFamily="34" charset="-122"/>
-                <a:cs typeface="Jost Medium" pitchFamily="34" charset="-120"/>
-              </a:rPr>
-              <a:t>APRENDIZADO</a:t>
-            </a:r>
-            <a:endParaRPr lang="en-US" sz="640" dirty="0"/>
-          </a:p>
-        </p:txBody>
-      </p:sp>
-      <p:sp>
-        <p:nvSpPr>
-          <p:cNvPr id="26" name="Text 22"/>
-          <p:cNvSpPr txBox="1"/>
-          <p:nvPr/>
-        </p:nvSpPr>
-        <p:spPr>
-          <a:xfrm>
-            <a:off x="8423821" y="5585520"/>
-            <a:ext cx="1593830" cy="471190"/>
-          </a:xfrm>
-          <a:prstGeom prst="rect">
-            <a:avLst/>
-          </a:prstGeom>
-          <a:noFill/>
-          <a:ln/>
-        </p:spPr>
-        <p:txBody>
-          <a:bodyPr wrap="square" lIns="0" tIns="0" rIns="0" bIns="0" rtlCol="0" anchor="t"/>
-          <a:lstStyle/>
-          <a:p>
-            <a:pPr algn="l" indent="0" marL="0">
-              <a:lnSpc>
-                <a:spcPts val="1856"/>
-              </a:lnSpc>
-              <a:buNone/>
-            </a:pPr>
-            <a:r>
-              <a:rPr lang="en-US" sz="1600" dirty="0">
-                <a:solidFill>
-                  <a:srgbClr val="16222E"/>
-                </a:solidFill>
-                <a:latin typeface="EB Garamond Medium" pitchFamily="34" charset="0"/>
-                <a:ea typeface="EB Garamond Medium" pitchFamily="34" charset="-122"/>
-                <a:cs typeface="EB Garamond Medium" pitchFamily="34" charset="-120"/>
-              </a:rPr>
-              <a:t>Confiança leva tempo</a:t>
+                <a:latin typeface="EB Garamond" pitchFamily="34" charset="0"/>
+                <a:ea typeface="EB Garamond" pitchFamily="34" charset="-122"/>
+                <a:cs typeface="EB Garamond" pitchFamily="34" charset="-120"/>
+              </a:rPr>
+              <a:t>06</a:t>
             </a:r>
             <a:endParaRPr lang="en-US" sz="1600" dirty="0"/>
           </a:p>
@@ -8683,33 +8211,33 @@
       </p:sp>
       <p:sp>
         <p:nvSpPr>
-          <p:cNvPr id="27" name="Text 23"/>
-          <p:cNvSpPr txBox="1"/>
-          <p:nvPr/>
-        </p:nvSpPr>
-        <p:spPr>
-          <a:xfrm>
-            <a:off x="8423821" y="6135886"/>
-            <a:ext cx="1593830" cy="568821"/>
-          </a:xfrm>
-          <a:prstGeom prst="rect">
-            <a:avLst/>
-          </a:prstGeom>
-          <a:noFill/>
-          <a:ln/>
-        </p:spPr>
-        <p:txBody>
-          <a:bodyPr wrap="square" lIns="0" tIns="0" rIns="0" bIns="0" rtlCol="0" anchor="t"/>
-          <a:lstStyle/>
-          <a:p>
-            <a:pPr algn="l" indent="0" marL="0">
-              <a:lnSpc>
-                <a:spcPts val="1494"/>
-              </a:lnSpc>
-              <a:buNone/>
-            </a:pPr>
-            <a:r>
-              <a:rPr lang="en-US" sz="900" dirty="0">
+          <p:cNvPr id="36" name="Text 32"/>
+          <p:cNvSpPr txBox="1"/>
+          <p:nvPr/>
+        </p:nvSpPr>
+        <p:spPr>
+          <a:xfrm>
+            <a:off x="4895701" y="4502944"/>
+            <a:ext cx="5122099" cy="229642"/>
+          </a:xfrm>
+          <a:prstGeom prst="rect">
+            <a:avLst/>
+          </a:prstGeom>
+          <a:noFill/>
+          <a:ln/>
+        </p:spPr>
+        <p:txBody>
+          <a:bodyPr wrap="square" lIns="0" tIns="0" rIns="0" bIns="0" rtlCol="0" anchor="t"/>
+          <a:lstStyle/>
+          <a:p>
+            <a:pPr algn="l" indent="0" marL="0">
+              <a:lnSpc>
+                <a:spcPts val="1810"/>
+              </a:lnSpc>
+              <a:buNone/>
+            </a:pPr>
+            <a:r>
+              <a:rPr lang="en-US" sz="1040" dirty="0">
                 <a:solidFill>
                   <a:srgbClr val="5A6672"/>
                 </a:solidFill>
@@ -8717,15 +8245,267 @@
                 <a:ea typeface="Jost" pitchFamily="34" charset="-122"/>
                 <a:cs typeface="Jost" pitchFamily="34" charset="-120"/>
               </a:rPr>
-              <a:t>Não se conquista em campanha; constrói-se na repetição.</a:t>
-            </a:r>
-            <a:endParaRPr lang="en-US" sz="900" dirty="0"/>
-          </a:p>
-        </p:txBody>
-      </p:sp>
-      <p:sp>
-        <p:nvSpPr>
-          <p:cNvPr id="28" name="Text 24"/>
+              <a:t>Em ajudar com uma mala.</a:t>
+            </a:r>
+            <a:endParaRPr lang="en-US" sz="1040" dirty="0"/>
+          </a:p>
+        </p:txBody>
+      </p:sp>
+      <p:sp>
+        <p:nvSpPr>
+          <p:cNvPr id="37" name="Text 33"/>
+          <p:cNvSpPr txBox="1"/>
+          <p:nvPr/>
+        </p:nvSpPr>
+        <p:spPr>
+          <a:xfrm>
+            <a:off x="4463802" y="5083969"/>
+            <a:ext cx="477619" cy="257175"/>
+          </a:xfrm>
+          <a:prstGeom prst="rect">
+            <a:avLst/>
+          </a:prstGeom>
+          <a:noFill/>
+          <a:ln/>
+        </p:spPr>
+        <p:txBody>
+          <a:bodyPr wrap="square" lIns="0" tIns="0" rIns="0" bIns="0" rtlCol="0" anchor="t"/>
+          <a:lstStyle/>
+          <a:p>
+            <a:pPr algn="l" indent="0" marL="0">
+              <a:lnSpc>
+                <a:spcPts val="1920"/>
+              </a:lnSpc>
+              <a:buNone/>
+            </a:pPr>
+            <a:r>
+              <a:rPr lang="en-US" sz="1600" dirty="0">
+                <a:solidFill>
+                  <a:srgbClr val="C1121C"/>
+                </a:solidFill>
+                <a:latin typeface="EB Garamond" pitchFamily="34" charset="0"/>
+                <a:ea typeface="EB Garamond" pitchFamily="34" charset="-122"/>
+                <a:cs typeface="EB Garamond" pitchFamily="34" charset="-120"/>
+              </a:rPr>
+              <a:t>07</a:t>
+            </a:r>
+            <a:endParaRPr lang="en-US" sz="1600" dirty="0"/>
+          </a:p>
+        </p:txBody>
+      </p:sp>
+      <p:sp>
+        <p:nvSpPr>
+          <p:cNvPr id="38" name="Text 34"/>
+          <p:cNvSpPr txBox="1"/>
+          <p:nvPr/>
+        </p:nvSpPr>
+        <p:spPr>
+          <a:xfrm>
+            <a:off x="4895701" y="5097810"/>
+            <a:ext cx="5122099" cy="229642"/>
+          </a:xfrm>
+          <a:prstGeom prst="rect">
+            <a:avLst/>
+          </a:prstGeom>
+          <a:noFill/>
+          <a:ln/>
+        </p:spPr>
+        <p:txBody>
+          <a:bodyPr wrap="square" lIns="0" tIns="0" rIns="0" bIns="0" rtlCol="0" anchor="t"/>
+          <a:lstStyle/>
+          <a:p>
+            <a:pPr algn="l" indent="0" marL="0">
+              <a:lnSpc>
+                <a:spcPts val="1810"/>
+              </a:lnSpc>
+              <a:buNone/>
+            </a:pPr>
+            <a:r>
+              <a:rPr lang="en-US" sz="1040" dirty="0">
+                <a:solidFill>
+                  <a:srgbClr val="5A6672"/>
+                </a:solidFill>
+                <a:latin typeface="Jost" pitchFamily="34" charset="0"/>
+                <a:ea typeface="Jost" pitchFamily="34" charset="-122"/>
+                <a:cs typeface="Jost" pitchFamily="34" charset="-120"/>
+              </a:rPr>
+              <a:t>Em lembrar uma preferência.</a:t>
+            </a:r>
+            <a:endParaRPr lang="en-US" sz="1040" dirty="0"/>
+          </a:p>
+        </p:txBody>
+      </p:sp>
+      <p:sp>
+        <p:nvSpPr>
+          <p:cNvPr id="39" name="Text 35"/>
+          <p:cNvSpPr txBox="1"/>
+          <p:nvPr/>
+        </p:nvSpPr>
+        <p:spPr>
+          <a:xfrm>
+            <a:off x="4463802" y="5678835"/>
+            <a:ext cx="477619" cy="257175"/>
+          </a:xfrm>
+          <a:prstGeom prst="rect">
+            <a:avLst/>
+          </a:prstGeom>
+          <a:noFill/>
+          <a:ln/>
+        </p:spPr>
+        <p:txBody>
+          <a:bodyPr wrap="square" lIns="0" tIns="0" rIns="0" bIns="0" rtlCol="0" anchor="t"/>
+          <a:lstStyle/>
+          <a:p>
+            <a:pPr algn="l" indent="0" marL="0">
+              <a:lnSpc>
+                <a:spcPts val="1920"/>
+              </a:lnSpc>
+              <a:buNone/>
+            </a:pPr>
+            <a:r>
+              <a:rPr lang="en-US" sz="1600" dirty="0">
+                <a:solidFill>
+                  <a:srgbClr val="C1121C"/>
+                </a:solidFill>
+                <a:latin typeface="EB Garamond" pitchFamily="34" charset="0"/>
+                <a:ea typeface="EB Garamond" pitchFamily="34" charset="-122"/>
+                <a:cs typeface="EB Garamond" pitchFamily="34" charset="-120"/>
+              </a:rPr>
+              <a:t>08</a:t>
+            </a:r>
+            <a:endParaRPr lang="en-US" sz="1600" dirty="0"/>
+          </a:p>
+        </p:txBody>
+      </p:sp>
+      <p:sp>
+        <p:nvSpPr>
+          <p:cNvPr id="40" name="Text 36"/>
+          <p:cNvSpPr txBox="1"/>
+          <p:nvPr/>
+        </p:nvSpPr>
+        <p:spPr>
+          <a:xfrm>
+            <a:off x="4895701" y="5692676"/>
+            <a:ext cx="5122099" cy="229642"/>
+          </a:xfrm>
+          <a:prstGeom prst="rect">
+            <a:avLst/>
+          </a:prstGeom>
+          <a:noFill/>
+          <a:ln/>
+        </p:spPr>
+        <p:txBody>
+          <a:bodyPr wrap="square" lIns="0" tIns="0" rIns="0" bIns="0" rtlCol="0" anchor="t"/>
+          <a:lstStyle/>
+          <a:p>
+            <a:pPr algn="l" indent="0" marL="0">
+              <a:lnSpc>
+                <a:spcPts val="1810"/>
+              </a:lnSpc>
+              <a:buNone/>
+            </a:pPr>
+            <a:r>
+              <a:rPr lang="en-US" sz="1040" dirty="0">
+                <a:solidFill>
+                  <a:srgbClr val="5A6672"/>
+                </a:solidFill>
+                <a:latin typeface="Jost" pitchFamily="34" charset="0"/>
+                <a:ea typeface="Jost" pitchFamily="34" charset="-122"/>
+                <a:cs typeface="Jost" pitchFamily="34" charset="-120"/>
+              </a:rPr>
+              <a:t>Em resolver rapidamente um pequeno problema.</a:t>
+            </a:r>
+            <a:endParaRPr lang="en-US" sz="1040" dirty="0"/>
+          </a:p>
+        </p:txBody>
+      </p:sp>
+      <p:sp>
+        <p:nvSpPr>
+          <p:cNvPr id="41" name="Text 37"/>
+          <p:cNvSpPr txBox="1"/>
+          <p:nvPr/>
+        </p:nvSpPr>
+        <p:spPr>
+          <a:xfrm>
+            <a:off x="4463802" y="6273701"/>
+            <a:ext cx="477619" cy="257175"/>
+          </a:xfrm>
+          <a:prstGeom prst="rect">
+            <a:avLst/>
+          </a:prstGeom>
+          <a:noFill/>
+          <a:ln/>
+        </p:spPr>
+        <p:txBody>
+          <a:bodyPr wrap="square" lIns="0" tIns="0" rIns="0" bIns="0" rtlCol="0" anchor="t"/>
+          <a:lstStyle/>
+          <a:p>
+            <a:pPr algn="l" indent="0" marL="0">
+              <a:lnSpc>
+                <a:spcPts val="1920"/>
+              </a:lnSpc>
+              <a:buNone/>
+            </a:pPr>
+            <a:r>
+              <a:rPr lang="en-US" sz="1600" dirty="0">
+                <a:solidFill>
+                  <a:srgbClr val="C1121C"/>
+                </a:solidFill>
+                <a:latin typeface="EB Garamond" pitchFamily="34" charset="0"/>
+                <a:ea typeface="EB Garamond" pitchFamily="34" charset="-122"/>
+                <a:cs typeface="EB Garamond" pitchFamily="34" charset="-120"/>
+              </a:rPr>
+              <a:t>09</a:t>
+            </a:r>
+            <a:endParaRPr lang="en-US" sz="1600" dirty="0"/>
+          </a:p>
+        </p:txBody>
+      </p:sp>
+      <p:sp>
+        <p:nvSpPr>
+          <p:cNvPr id="42" name="Text 38"/>
+          <p:cNvSpPr txBox="1"/>
+          <p:nvPr/>
+        </p:nvSpPr>
+        <p:spPr>
+          <a:xfrm>
+            <a:off x="4895701" y="6287542"/>
+            <a:ext cx="5122099" cy="229642"/>
+          </a:xfrm>
+          <a:prstGeom prst="rect">
+            <a:avLst/>
+          </a:prstGeom>
+          <a:noFill/>
+          <a:ln/>
+        </p:spPr>
+        <p:txBody>
+          <a:bodyPr wrap="square" lIns="0" tIns="0" rIns="0" bIns="0" rtlCol="0" anchor="t"/>
+          <a:lstStyle/>
+          <a:p>
+            <a:pPr algn="l" indent="0" marL="0">
+              <a:lnSpc>
+                <a:spcPts val="1810"/>
+              </a:lnSpc>
+              <a:buNone/>
+            </a:pPr>
+            <a:r>
+              <a:rPr lang="en-US" sz="1040" dirty="0">
+                <a:solidFill>
+                  <a:srgbClr val="5A6672"/>
+                </a:solidFill>
+                <a:latin typeface="Jost" pitchFamily="34" charset="0"/>
+                <a:ea typeface="Jost" pitchFamily="34" charset="-122"/>
+                <a:cs typeface="Jost" pitchFamily="34" charset="-120"/>
+              </a:rPr>
+              <a:t>Em fazer com que uma pessoa que chegou como hóspede queira voltar como amigo.</a:t>
+            </a:r>
+            <a:endParaRPr lang="en-US" sz="1040" dirty="0"/>
+          </a:p>
+        </p:txBody>
+      </p:sp>
+      <p:sp>
+        <p:nvSpPr>
+          <p:cNvPr id="43" name="Text 39"/>
           <p:cNvSpPr txBox="1"/>
           <p:nvPr/>
         </p:nvSpPr>
@@ -8885,16 +8665,14 @@
         </p:nvSpPr>
         <p:spPr>
           <a:xfrm>
-            <a:off x="4463802" y="2382441"/>
-            <a:ext cx="964704" cy="367903"/>
-          </a:xfrm>
-          <a:prstGeom prst="roundRect">
-            <a:avLst>
-              <a:gd name="adj" fmla="val 50000"/>
-            </a:avLst>
-          </a:prstGeom>
-          <a:solidFill>
-            <a:srgbClr val="FAF8F5"/>
+            <a:off x="4463802" y="5845820"/>
+            <a:ext cx="5508278" cy="9525"/>
+          </a:xfrm>
+          <a:prstGeom prst="rect">
+            <a:avLst/>
+          </a:prstGeom>
+          <a:solidFill>
+            <a:srgbClr val="E2DFD9"/>
           </a:solidFill>
           <a:ln/>
         </p:spPr>
@@ -8907,698 +8685,6 @@
         </p:nvSpPr>
         <p:spPr>
           <a:xfrm>
-            <a:off x="4463802" y="2382441"/>
-            <a:ext cx="964704" cy="9525"/>
-          </a:xfrm>
-          <a:prstGeom prst="rect">
-            <a:avLst/>
-          </a:prstGeom>
-          <a:solidFill>
-            <a:srgbClr val="E2DFD9"/>
-          </a:solidFill>
-          <a:ln/>
-        </p:spPr>
-      </p:sp>
-      <p:sp>
-        <p:nvSpPr>
-          <p:cNvPr id="8" name="Shape 6"/>
-          <p:cNvSpPr/>
-          <p:nvPr/>
-        </p:nvSpPr>
-        <p:spPr>
-          <a:xfrm>
-            <a:off x="5418981" y="2382441"/>
-            <a:ext cx="9525" cy="367903"/>
-          </a:xfrm>
-          <a:prstGeom prst="rect">
-            <a:avLst/>
-          </a:prstGeom>
-          <a:solidFill>
-            <a:srgbClr val="E2DFD9"/>
-          </a:solidFill>
-          <a:ln/>
-        </p:spPr>
-      </p:sp>
-      <p:sp>
-        <p:nvSpPr>
-          <p:cNvPr id="9" name="Shape 7"/>
-          <p:cNvSpPr/>
-          <p:nvPr/>
-        </p:nvSpPr>
-        <p:spPr>
-          <a:xfrm>
-            <a:off x="4463802" y="2740819"/>
-            <a:ext cx="964704" cy="9525"/>
-          </a:xfrm>
-          <a:prstGeom prst="rect">
-            <a:avLst/>
-          </a:prstGeom>
-          <a:solidFill>
-            <a:srgbClr val="E2DFD9"/>
-          </a:solidFill>
-          <a:ln/>
-        </p:spPr>
-      </p:sp>
-      <p:sp>
-        <p:nvSpPr>
-          <p:cNvPr id="10" name="Shape 8"/>
-          <p:cNvSpPr/>
-          <p:nvPr/>
-        </p:nvSpPr>
-        <p:spPr>
-          <a:xfrm>
-            <a:off x="4463802" y="2382441"/>
-            <a:ext cx="9525" cy="367903"/>
-          </a:xfrm>
-          <a:prstGeom prst="rect">
-            <a:avLst/>
-          </a:prstGeom>
-          <a:solidFill>
-            <a:srgbClr val="E2DFD9"/>
-          </a:solidFill>
-          <a:ln/>
-        </p:spPr>
-      </p:sp>
-      <p:sp>
-        <p:nvSpPr>
-          <p:cNvPr id="11" name="Shape 9"/>
-          <p:cNvSpPr/>
-          <p:nvPr/>
-        </p:nvSpPr>
-        <p:spPr>
-          <a:xfrm>
-            <a:off x="5536406" y="2382441"/>
-            <a:ext cx="1178719" cy="367903"/>
-          </a:xfrm>
-          <a:prstGeom prst="roundRect">
-            <a:avLst>
-              <a:gd name="adj" fmla="val 50000"/>
-            </a:avLst>
-          </a:prstGeom>
-          <a:solidFill>
-            <a:srgbClr val="FAF8F5"/>
-          </a:solidFill>
-          <a:ln/>
-        </p:spPr>
-      </p:sp>
-      <p:sp>
-        <p:nvSpPr>
-          <p:cNvPr id="12" name="Shape 10"/>
-          <p:cNvSpPr/>
-          <p:nvPr/>
-        </p:nvSpPr>
-        <p:spPr>
-          <a:xfrm>
-            <a:off x="5536406" y="2382441"/>
-            <a:ext cx="1178719" cy="9525"/>
-          </a:xfrm>
-          <a:prstGeom prst="rect">
-            <a:avLst/>
-          </a:prstGeom>
-          <a:solidFill>
-            <a:srgbClr val="E2DFD9"/>
-          </a:solidFill>
-          <a:ln/>
-        </p:spPr>
-      </p:sp>
-      <p:sp>
-        <p:nvSpPr>
-          <p:cNvPr id="13" name="Shape 11"/>
-          <p:cNvSpPr/>
-          <p:nvPr/>
-        </p:nvSpPr>
-        <p:spPr>
-          <a:xfrm>
-            <a:off x="6705600" y="2382441"/>
-            <a:ext cx="9525" cy="367903"/>
-          </a:xfrm>
-          <a:prstGeom prst="rect">
-            <a:avLst/>
-          </a:prstGeom>
-          <a:solidFill>
-            <a:srgbClr val="E2DFD9"/>
-          </a:solidFill>
-          <a:ln/>
-        </p:spPr>
-      </p:sp>
-      <p:sp>
-        <p:nvSpPr>
-          <p:cNvPr id="14" name="Shape 12"/>
-          <p:cNvSpPr/>
-          <p:nvPr/>
-        </p:nvSpPr>
-        <p:spPr>
-          <a:xfrm>
-            <a:off x="5536406" y="2740819"/>
-            <a:ext cx="1178719" cy="9525"/>
-          </a:xfrm>
-          <a:prstGeom prst="rect">
-            <a:avLst/>
-          </a:prstGeom>
-          <a:solidFill>
-            <a:srgbClr val="E2DFD9"/>
-          </a:solidFill>
-          <a:ln/>
-        </p:spPr>
-      </p:sp>
-      <p:sp>
-        <p:nvSpPr>
-          <p:cNvPr id="15" name="Shape 13"/>
-          <p:cNvSpPr/>
-          <p:nvPr/>
-        </p:nvSpPr>
-        <p:spPr>
-          <a:xfrm>
-            <a:off x="5536406" y="2382441"/>
-            <a:ext cx="9525" cy="367903"/>
-          </a:xfrm>
-          <a:prstGeom prst="rect">
-            <a:avLst/>
-          </a:prstGeom>
-          <a:solidFill>
-            <a:srgbClr val="E2DFD9"/>
-          </a:solidFill>
-          <a:ln/>
-        </p:spPr>
-      </p:sp>
-      <p:sp>
-        <p:nvSpPr>
-          <p:cNvPr id="16" name="Shape 14"/>
-          <p:cNvSpPr/>
-          <p:nvPr/>
-        </p:nvSpPr>
-        <p:spPr>
-          <a:xfrm>
-            <a:off x="6823025" y="2382441"/>
-            <a:ext cx="1090017" cy="367903"/>
-          </a:xfrm>
-          <a:prstGeom prst="roundRect">
-            <a:avLst>
-              <a:gd name="adj" fmla="val 50000"/>
-            </a:avLst>
-          </a:prstGeom>
-          <a:solidFill>
-            <a:srgbClr val="FAF8F5"/>
-          </a:solidFill>
-          <a:ln/>
-        </p:spPr>
-      </p:sp>
-      <p:sp>
-        <p:nvSpPr>
-          <p:cNvPr id="17" name="Shape 15"/>
-          <p:cNvSpPr/>
-          <p:nvPr/>
-        </p:nvSpPr>
-        <p:spPr>
-          <a:xfrm>
-            <a:off x="6823025" y="2382441"/>
-            <a:ext cx="1090017" cy="9525"/>
-          </a:xfrm>
-          <a:prstGeom prst="rect">
-            <a:avLst/>
-          </a:prstGeom>
-          <a:solidFill>
-            <a:srgbClr val="E2DFD9"/>
-          </a:solidFill>
-          <a:ln/>
-        </p:spPr>
-      </p:sp>
-      <p:sp>
-        <p:nvSpPr>
-          <p:cNvPr id="18" name="Shape 16"/>
-          <p:cNvSpPr/>
-          <p:nvPr/>
-        </p:nvSpPr>
-        <p:spPr>
-          <a:xfrm>
-            <a:off x="7903518" y="2382441"/>
-            <a:ext cx="9525" cy="367903"/>
-          </a:xfrm>
-          <a:prstGeom prst="rect">
-            <a:avLst/>
-          </a:prstGeom>
-          <a:solidFill>
-            <a:srgbClr val="E2DFD9"/>
-          </a:solidFill>
-          <a:ln/>
-        </p:spPr>
-      </p:sp>
-      <p:sp>
-        <p:nvSpPr>
-          <p:cNvPr id="19" name="Shape 17"/>
-          <p:cNvSpPr/>
-          <p:nvPr/>
-        </p:nvSpPr>
-        <p:spPr>
-          <a:xfrm>
-            <a:off x="6823025" y="2740819"/>
-            <a:ext cx="1090017" cy="9525"/>
-          </a:xfrm>
-          <a:prstGeom prst="rect">
-            <a:avLst/>
-          </a:prstGeom>
-          <a:solidFill>
-            <a:srgbClr val="E2DFD9"/>
-          </a:solidFill>
-          <a:ln/>
-        </p:spPr>
-      </p:sp>
-      <p:sp>
-        <p:nvSpPr>
-          <p:cNvPr id="20" name="Shape 18"/>
-          <p:cNvSpPr/>
-          <p:nvPr/>
-        </p:nvSpPr>
-        <p:spPr>
-          <a:xfrm>
-            <a:off x="6823025" y="2382441"/>
-            <a:ext cx="9525" cy="367903"/>
-          </a:xfrm>
-          <a:prstGeom prst="rect">
-            <a:avLst/>
-          </a:prstGeom>
-          <a:solidFill>
-            <a:srgbClr val="E2DFD9"/>
-          </a:solidFill>
-          <a:ln/>
-        </p:spPr>
-      </p:sp>
-      <p:sp>
-        <p:nvSpPr>
-          <p:cNvPr id="21" name="Shape 19"/>
-          <p:cNvSpPr/>
-          <p:nvPr/>
-        </p:nvSpPr>
-        <p:spPr>
-          <a:xfrm>
-            <a:off x="8020943" y="2382441"/>
-            <a:ext cx="1201787" cy="367903"/>
-          </a:xfrm>
-          <a:prstGeom prst="roundRect">
-            <a:avLst>
-              <a:gd name="adj" fmla="val 50000"/>
-            </a:avLst>
-          </a:prstGeom>
-          <a:solidFill>
-            <a:srgbClr val="FAF8F5"/>
-          </a:solidFill>
-          <a:ln/>
-        </p:spPr>
-      </p:sp>
-      <p:sp>
-        <p:nvSpPr>
-          <p:cNvPr id="22" name="Shape 20"/>
-          <p:cNvSpPr/>
-          <p:nvPr/>
-        </p:nvSpPr>
-        <p:spPr>
-          <a:xfrm>
-            <a:off x="8020943" y="2382441"/>
-            <a:ext cx="1201787" cy="9525"/>
-          </a:xfrm>
-          <a:prstGeom prst="rect">
-            <a:avLst/>
-          </a:prstGeom>
-          <a:solidFill>
-            <a:srgbClr val="E2DFD9"/>
-          </a:solidFill>
-          <a:ln/>
-        </p:spPr>
-      </p:sp>
-      <p:sp>
-        <p:nvSpPr>
-          <p:cNvPr id="23" name="Shape 21"/>
-          <p:cNvSpPr/>
-          <p:nvPr/>
-        </p:nvSpPr>
-        <p:spPr>
-          <a:xfrm>
-            <a:off x="9213205" y="2382441"/>
-            <a:ext cx="9525" cy="367903"/>
-          </a:xfrm>
-          <a:prstGeom prst="rect">
-            <a:avLst/>
-          </a:prstGeom>
-          <a:solidFill>
-            <a:srgbClr val="E2DFD9"/>
-          </a:solidFill>
-          <a:ln/>
-        </p:spPr>
-      </p:sp>
-      <p:sp>
-        <p:nvSpPr>
-          <p:cNvPr id="24" name="Shape 22"/>
-          <p:cNvSpPr/>
-          <p:nvPr/>
-        </p:nvSpPr>
-        <p:spPr>
-          <a:xfrm>
-            <a:off x="8020943" y="2740819"/>
-            <a:ext cx="1201787" cy="9525"/>
-          </a:xfrm>
-          <a:prstGeom prst="rect">
-            <a:avLst/>
-          </a:prstGeom>
-          <a:solidFill>
-            <a:srgbClr val="E2DFD9"/>
-          </a:solidFill>
-          <a:ln/>
-        </p:spPr>
-      </p:sp>
-      <p:sp>
-        <p:nvSpPr>
-          <p:cNvPr id="25" name="Shape 23"/>
-          <p:cNvSpPr/>
-          <p:nvPr/>
-        </p:nvSpPr>
-        <p:spPr>
-          <a:xfrm>
-            <a:off x="8020943" y="2382441"/>
-            <a:ext cx="9525" cy="367903"/>
-          </a:xfrm>
-          <a:prstGeom prst="rect">
-            <a:avLst/>
-          </a:prstGeom>
-          <a:solidFill>
-            <a:srgbClr val="E2DFD9"/>
-          </a:solidFill>
-          <a:ln/>
-        </p:spPr>
-      </p:sp>
-      <p:sp>
-        <p:nvSpPr>
-          <p:cNvPr id="26" name="Shape 24"/>
-          <p:cNvSpPr/>
-          <p:nvPr/>
-        </p:nvSpPr>
-        <p:spPr>
-          <a:xfrm>
-            <a:off x="4463802" y="2858244"/>
-            <a:ext cx="1495574" cy="367903"/>
-          </a:xfrm>
-          <a:prstGeom prst="roundRect">
-            <a:avLst>
-              <a:gd name="adj" fmla="val 50000"/>
-            </a:avLst>
-          </a:prstGeom>
-          <a:solidFill>
-            <a:srgbClr val="FAF8F5"/>
-          </a:solidFill>
-          <a:ln/>
-        </p:spPr>
-      </p:sp>
-      <p:sp>
-        <p:nvSpPr>
-          <p:cNvPr id="27" name="Shape 25"/>
-          <p:cNvSpPr/>
-          <p:nvPr/>
-        </p:nvSpPr>
-        <p:spPr>
-          <a:xfrm>
-            <a:off x="4463802" y="2858244"/>
-            <a:ext cx="1495574" cy="9525"/>
-          </a:xfrm>
-          <a:prstGeom prst="rect">
-            <a:avLst/>
-          </a:prstGeom>
-          <a:solidFill>
-            <a:srgbClr val="E2DFD9"/>
-          </a:solidFill>
-          <a:ln/>
-        </p:spPr>
-      </p:sp>
-      <p:sp>
-        <p:nvSpPr>
-          <p:cNvPr id="28" name="Shape 26"/>
-          <p:cNvSpPr/>
-          <p:nvPr/>
-        </p:nvSpPr>
-        <p:spPr>
-          <a:xfrm>
-            <a:off x="5949851" y="2858244"/>
-            <a:ext cx="9525" cy="367903"/>
-          </a:xfrm>
-          <a:prstGeom prst="rect">
-            <a:avLst/>
-          </a:prstGeom>
-          <a:solidFill>
-            <a:srgbClr val="E2DFD9"/>
-          </a:solidFill>
-          <a:ln/>
-        </p:spPr>
-      </p:sp>
-      <p:sp>
-        <p:nvSpPr>
-          <p:cNvPr id="29" name="Shape 27"/>
-          <p:cNvSpPr/>
-          <p:nvPr/>
-        </p:nvSpPr>
-        <p:spPr>
-          <a:xfrm>
-            <a:off x="4463802" y="3216622"/>
-            <a:ext cx="1495574" cy="9525"/>
-          </a:xfrm>
-          <a:prstGeom prst="rect">
-            <a:avLst/>
-          </a:prstGeom>
-          <a:solidFill>
-            <a:srgbClr val="E2DFD9"/>
-          </a:solidFill>
-          <a:ln/>
-        </p:spPr>
-      </p:sp>
-      <p:sp>
-        <p:nvSpPr>
-          <p:cNvPr id="30" name="Shape 28"/>
-          <p:cNvSpPr/>
-          <p:nvPr/>
-        </p:nvSpPr>
-        <p:spPr>
-          <a:xfrm>
-            <a:off x="4463802" y="2858244"/>
-            <a:ext cx="9525" cy="367903"/>
-          </a:xfrm>
-          <a:prstGeom prst="rect">
-            <a:avLst/>
-          </a:prstGeom>
-          <a:solidFill>
-            <a:srgbClr val="E2DFD9"/>
-          </a:solidFill>
-          <a:ln/>
-        </p:spPr>
-      </p:sp>
-      <p:sp>
-        <p:nvSpPr>
-          <p:cNvPr id="31" name="Shape 29"/>
-          <p:cNvSpPr/>
-          <p:nvPr/>
-        </p:nvSpPr>
-        <p:spPr>
-          <a:xfrm>
-            <a:off x="6067276" y="2858244"/>
-            <a:ext cx="1640086" cy="367903"/>
-          </a:xfrm>
-          <a:prstGeom prst="roundRect">
-            <a:avLst>
-              <a:gd name="adj" fmla="val 50000"/>
-            </a:avLst>
-          </a:prstGeom>
-          <a:solidFill>
-            <a:srgbClr val="FAF8F5"/>
-          </a:solidFill>
-          <a:ln/>
-        </p:spPr>
-      </p:sp>
-      <p:sp>
-        <p:nvSpPr>
-          <p:cNvPr id="32" name="Shape 30"/>
-          <p:cNvSpPr/>
-          <p:nvPr/>
-        </p:nvSpPr>
-        <p:spPr>
-          <a:xfrm>
-            <a:off x="6067276" y="2858244"/>
-            <a:ext cx="1640086" cy="9525"/>
-          </a:xfrm>
-          <a:prstGeom prst="rect">
-            <a:avLst/>
-          </a:prstGeom>
-          <a:solidFill>
-            <a:srgbClr val="E2DFD9"/>
-          </a:solidFill>
-          <a:ln/>
-        </p:spPr>
-      </p:sp>
-      <p:sp>
-        <p:nvSpPr>
-          <p:cNvPr id="33" name="Shape 31"/>
-          <p:cNvSpPr/>
-          <p:nvPr/>
-        </p:nvSpPr>
-        <p:spPr>
-          <a:xfrm>
-            <a:off x="7697837" y="2858244"/>
-            <a:ext cx="9525" cy="367903"/>
-          </a:xfrm>
-          <a:prstGeom prst="rect">
-            <a:avLst/>
-          </a:prstGeom>
-          <a:solidFill>
-            <a:srgbClr val="E2DFD9"/>
-          </a:solidFill>
-          <a:ln/>
-        </p:spPr>
-      </p:sp>
-      <p:sp>
-        <p:nvSpPr>
-          <p:cNvPr id="34" name="Shape 32"/>
-          <p:cNvSpPr/>
-          <p:nvPr/>
-        </p:nvSpPr>
-        <p:spPr>
-          <a:xfrm>
-            <a:off x="6067276" y="3216622"/>
-            <a:ext cx="1640086" cy="9525"/>
-          </a:xfrm>
-          <a:prstGeom prst="rect">
-            <a:avLst/>
-          </a:prstGeom>
-          <a:solidFill>
-            <a:srgbClr val="E2DFD9"/>
-          </a:solidFill>
-          <a:ln/>
-        </p:spPr>
-      </p:sp>
-      <p:sp>
-        <p:nvSpPr>
-          <p:cNvPr id="35" name="Shape 33"/>
-          <p:cNvSpPr/>
-          <p:nvPr/>
-        </p:nvSpPr>
-        <p:spPr>
-          <a:xfrm>
-            <a:off x="6067276" y="2858244"/>
-            <a:ext cx="9525" cy="367903"/>
-          </a:xfrm>
-          <a:prstGeom prst="rect">
-            <a:avLst/>
-          </a:prstGeom>
-          <a:solidFill>
-            <a:srgbClr val="E2DFD9"/>
-          </a:solidFill>
-          <a:ln/>
-        </p:spPr>
-      </p:sp>
-      <p:sp>
-        <p:nvSpPr>
-          <p:cNvPr id="36" name="Shape 34"/>
-          <p:cNvSpPr/>
-          <p:nvPr/>
-        </p:nvSpPr>
-        <p:spPr>
-          <a:xfrm>
-            <a:off x="4463802" y="3334048"/>
-            <a:ext cx="2356545" cy="367903"/>
-          </a:xfrm>
-          <a:prstGeom prst="roundRect">
-            <a:avLst>
-              <a:gd name="adj" fmla="val 50000"/>
-            </a:avLst>
-          </a:prstGeom>
-          <a:solidFill>
-            <a:srgbClr val="FAF8F5"/>
-          </a:solidFill>
-          <a:ln/>
-        </p:spPr>
-      </p:sp>
-      <p:sp>
-        <p:nvSpPr>
-          <p:cNvPr id="37" name="Shape 35"/>
-          <p:cNvSpPr/>
-          <p:nvPr/>
-        </p:nvSpPr>
-        <p:spPr>
-          <a:xfrm>
-            <a:off x="4463802" y="3334048"/>
-            <a:ext cx="2356545" cy="9525"/>
-          </a:xfrm>
-          <a:prstGeom prst="rect">
-            <a:avLst/>
-          </a:prstGeom>
-          <a:solidFill>
-            <a:srgbClr val="E2DFD9"/>
-          </a:solidFill>
-          <a:ln/>
-        </p:spPr>
-      </p:sp>
-      <p:sp>
-        <p:nvSpPr>
-          <p:cNvPr id="38" name="Shape 36"/>
-          <p:cNvSpPr/>
-          <p:nvPr/>
-        </p:nvSpPr>
-        <p:spPr>
-          <a:xfrm>
-            <a:off x="6810821" y="3334048"/>
-            <a:ext cx="9525" cy="367903"/>
-          </a:xfrm>
-          <a:prstGeom prst="rect">
-            <a:avLst/>
-          </a:prstGeom>
-          <a:solidFill>
-            <a:srgbClr val="E2DFD9"/>
-          </a:solidFill>
-          <a:ln/>
-        </p:spPr>
-      </p:sp>
-      <p:sp>
-        <p:nvSpPr>
-          <p:cNvPr id="39" name="Shape 37"/>
-          <p:cNvSpPr/>
-          <p:nvPr/>
-        </p:nvSpPr>
-        <p:spPr>
-          <a:xfrm>
-            <a:off x="4463802" y="3692426"/>
-            <a:ext cx="2356545" cy="9525"/>
-          </a:xfrm>
-          <a:prstGeom prst="rect">
-            <a:avLst/>
-          </a:prstGeom>
-          <a:solidFill>
-            <a:srgbClr val="E2DFD9"/>
-          </a:solidFill>
-          <a:ln/>
-        </p:spPr>
-      </p:sp>
-      <p:sp>
-        <p:nvSpPr>
-          <p:cNvPr id="40" name="Shape 38"/>
-          <p:cNvSpPr/>
-          <p:nvPr/>
-        </p:nvSpPr>
-        <p:spPr>
-          <a:xfrm>
-            <a:off x="4463802" y="3334048"/>
-            <a:ext cx="9525" cy="367903"/>
-          </a:xfrm>
-          <a:prstGeom prst="rect">
-            <a:avLst/>
-          </a:prstGeom>
-          <a:solidFill>
-            <a:srgbClr val="E2DFD9"/>
-          </a:solidFill>
-          <a:ln/>
-        </p:spPr>
-      </p:sp>
-      <p:sp>
-        <p:nvSpPr>
-          <p:cNvPr id="41" name="Shape 39"/>
-          <p:cNvSpPr/>
-          <p:nvPr/>
-        </p:nvSpPr>
-        <p:spPr>
-          <a:xfrm>
             <a:off x="719882" y="6704707"/>
             <a:ext cx="9252198" cy="9525"/>
           </a:xfrm>
@@ -9613,7 +8699,7 @@
       </p:sp>
       <p:pic>
         <p:nvPicPr>
-          <p:cNvPr id="42" name="Image 0" descr="/home/user/SkillsClaude/apresentacao-victorinox/build/logos/logo-pc.png">    </p:cNvPr>
+          <p:cNvPr id="8" name="Image 0" descr="/home/user/SkillsClaude/apresentacao-victorinox/build/logos/logo-pc.png">    </p:cNvPr>
           <p:cNvPicPr>
             <a:picLocks noChangeAspect="1"/>
           </p:cNvPicPr>
@@ -9637,7 +8723,7 @@
       </p:pic>
       <p:pic>
         <p:nvPicPr>
-          <p:cNvPr id="43" name="Image 1" descr="/home/user/SkillsClaude/apresentacao-victorinox/build/logos/logo-vx.png">    </p:cNvPr>
+          <p:cNvPr id="9" name="Image 1" descr="/home/user/SkillsClaude/apresentacao-victorinox/build/logos/logo-vx.png">    </p:cNvPr>
           <p:cNvPicPr>
             <a:picLocks noChangeAspect="1"/>
           </p:cNvPicPr>
@@ -9661,7 +8747,7 @@
       </p:pic>
       <p:sp>
         <p:nvSpPr>
-          <p:cNvPr id="44" name="Text 40"/>
+          <p:cNvPr id="10" name="Text 6"/>
           <p:cNvSpPr txBox="1"/>
           <p:nvPr/>
         </p:nvSpPr>
@@ -9703,7 +8789,7 @@
       </p:sp>
       <p:sp>
         <p:nvSpPr>
-          <p:cNvPr id="45" name="Text 41"/>
+          <p:cNvPr id="11" name="Text 7"/>
           <p:cNvSpPr txBox="1"/>
           <p:nvPr/>
         </p:nvSpPr>
@@ -9745,7 +8831,7 @@
       </p:sp>
       <p:sp>
         <p:nvSpPr>
-          <p:cNvPr id="46" name="Text 42"/>
+          <p:cNvPr id="12" name="Text 8"/>
           <p:cNvSpPr txBox="1"/>
           <p:nvPr/>
         </p:nvSpPr>
@@ -9779,7 +8865,7 @@
                 <a:ea typeface="Jost Medium" pitchFamily="34" charset="-122"/>
                 <a:cs typeface="Jost Medium" pitchFamily="34" charset="-120"/>
               </a:rPr>
-              <a:t>AFINIDADE</a:t>
+              <a:t>TRAJETÓRIA</a:t>
             </a:r>
             <a:endParaRPr lang="en-US" sz="660" dirty="0"/>
           </a:p>
@@ -9787,7 +8873,7 @@
       </p:sp>
       <p:sp>
         <p:nvSpPr>
-          <p:cNvPr id="47" name="Text 43"/>
+          <p:cNvPr id="13" name="Text 9"/>
           <p:cNvSpPr txBox="1"/>
           <p:nvPr/>
         </p:nvSpPr>
@@ -9821,7 +8907,7 @@
                 <a:ea typeface="EB Garamond Medium" pitchFamily="34" charset="-122"/>
                 <a:cs typeface="EB Garamond Medium" pitchFamily="34" charset="-120"/>
               </a:rPr>
-              <a:t>Por que Victorinox?</a:t>
+              <a:t>Uma empresa consolidada</a:t>
             </a:r>
             <a:endParaRPr lang="en-US" sz="2700" dirty="0"/>
           </a:p>
@@ -9829,7 +8915,7 @@
       </p:sp>
       <p:sp>
         <p:nvSpPr>
-          <p:cNvPr id="48" name="Text 44"/>
+          <p:cNvPr id="14" name="Text 10"/>
           <p:cNvSpPr txBox="1"/>
           <p:nvPr/>
         </p:nvSpPr>
@@ -9863,7 +8949,7 @@
                 <a:ea typeface="EB Garamond" pitchFamily="34" charset="-122"/>
                 <a:cs typeface="EB Garamond" pitchFamily="34" charset="-120"/>
               </a:rPr>
-              <a:t>“Um bom produto não precisa apenas funcionar bem. Ele precisa gerar confiança.”</a:t>
+              <a:t>“Confiança não é conquistada em uma campanha publicitária; é construída ao longo do tempo.”</a:t>
             </a:r>
             <a:endParaRPr lang="en-US" sz="1500" dirty="0"/>
           </a:p>
@@ -9871,14 +8957,14 @@
       </p:sp>
       <p:sp>
         <p:nvSpPr>
-          <p:cNvPr id="49" name="Text 45"/>
+          <p:cNvPr id="15" name="Text 11"/>
           <p:cNvSpPr txBox="1"/>
           <p:nvPr/>
         </p:nvSpPr>
         <p:spPr>
           <a:xfrm>
             <a:off x="4463802" y="1341239"/>
-            <a:ext cx="5553998" cy="531019"/>
+            <a:ext cx="5553998" cy="265509"/>
           </a:xfrm>
           <a:prstGeom prst="rect">
             <a:avLst/>
@@ -9905,7 +8991,7 @@
                 <a:ea typeface="Jost Light" pitchFamily="34" charset="-122"/>
                 <a:cs typeface="Jost Light" pitchFamily="34" charset="-120"/>
               </a:rPr>
-              <a:t>Admiramos a Victorinox justamente porque reconhecemos na marca valores que também procuramos praticar.</a:t>
+              <a:t>São mais de 20 anos de operação contínua.</a:t>
             </a:r>
             <a:endParaRPr lang="en-US" sz="1260" dirty="0"/>
           </a:p>
@@ -9913,377 +8999,125 @@
       </p:sp>
       <p:sp>
         <p:nvSpPr>
-          <p:cNvPr id="50" name="Text 46"/>
-          <p:cNvSpPr txBox="1"/>
-          <p:nvPr/>
-        </p:nvSpPr>
-        <p:spPr>
-          <a:xfrm>
-            <a:off x="4463802" y="2106216"/>
-            <a:ext cx="5553998" cy="114300"/>
-          </a:xfrm>
-          <a:prstGeom prst="rect">
-            <a:avLst/>
-          </a:prstGeom>
-          <a:noFill/>
-          <a:ln/>
-        </p:spPr>
-        <p:txBody>
-          <a:bodyPr wrap="square" lIns="0" tIns="0" rIns="0" bIns="0" rtlCol="0" anchor="t"/>
-          <a:lstStyle/>
-          <a:p>
-            <a:pPr algn="l" indent="0" marL="0">
-              <a:lnSpc>
-                <a:spcPts val="792"/>
-              </a:lnSpc>
-              <a:buNone/>
-            </a:pPr>
-            <a:r>
-              <a:rPr lang="en-US" sz="660" spc="172" kern="0" dirty="0">
-                <a:solidFill>
-                  <a:srgbClr val="C1121C"/>
-                </a:solidFill>
-                <a:latin typeface="Jost Medium" pitchFamily="34" charset="0"/>
-                <a:ea typeface="Jost Medium" pitchFamily="34" charset="-122"/>
-                <a:cs typeface="Jost Medium" pitchFamily="34" charset="-120"/>
-              </a:rPr>
-              <a:t>VALORES QUE COMPARTILHAMOS</a:t>
-            </a:r>
-            <a:endParaRPr lang="en-US" sz="660" dirty="0"/>
-          </a:p>
-        </p:txBody>
-      </p:sp>
-      <p:sp>
-        <p:nvSpPr>
-          <p:cNvPr id="51" name="Text 47"/>
-          <p:cNvSpPr txBox="1"/>
-          <p:nvPr/>
-        </p:nvSpPr>
-        <p:spPr>
-          <a:xfrm>
-            <a:off x="4679802" y="2476041"/>
-            <a:ext cx="578423" cy="274303"/>
-          </a:xfrm>
-          <a:prstGeom prst="rect">
-            <a:avLst/>
-          </a:prstGeom>
-          <a:noFill/>
-          <a:ln/>
-        </p:spPr>
-        <p:txBody>
-          <a:bodyPr wrap="square" lIns="0" tIns="0" rIns="0" bIns="0" rtlCol="0" anchor="t"/>
-          <a:lstStyle/>
-          <a:p>
-            <a:pPr algn="l" indent="0" marL="0">
-              <a:lnSpc>
-                <a:spcPts val="1056"/>
-              </a:lnSpc>
-              <a:buNone/>
-            </a:pPr>
-            <a:r>
-              <a:rPr lang="en-US" sz="880" spc="18" kern="0" dirty="0">
-                <a:solidFill>
-                  <a:srgbClr val="2E3A45"/>
+          <p:cNvPr id="16" name="Text 12"/>
+          <p:cNvSpPr txBox="1"/>
+          <p:nvPr/>
+        </p:nvSpPr>
+        <p:spPr>
+          <a:xfrm>
+            <a:off x="4463802" y="2038648"/>
+            <a:ext cx="5553998" cy="490240"/>
+          </a:xfrm>
+          <a:prstGeom prst="rect">
+            <a:avLst/>
+          </a:prstGeom>
+          <a:noFill/>
+          <a:ln/>
+        </p:spPr>
+        <p:txBody>
+          <a:bodyPr wrap="square" lIns="0" tIns="0" rIns="0" bIns="0" rtlCol="0" anchor="t"/>
+          <a:lstStyle/>
+          <a:p>
+            <a:pPr algn="l" indent="0" marL="0">
+              <a:lnSpc>
+                <a:spcPts val="1929"/>
+              </a:lnSpc>
+              <a:buNone/>
+            </a:pPr>
+            <a:r>
+              <a:rPr lang="en-US" sz="1060" dirty="0">
+                <a:solidFill>
+                  <a:srgbClr val="5A6672"/>
                 </a:solidFill>
                 <a:latin typeface="Jost" pitchFamily="34" charset="0"/>
                 <a:ea typeface="Jost" pitchFamily="34" charset="-122"/>
                 <a:cs typeface="Jost" pitchFamily="34" charset="-120"/>
               </a:rPr>
-              <a:t>Qualidade</a:t>
-            </a:r>
-            <a:endParaRPr lang="en-US" sz="880" dirty="0"/>
-          </a:p>
-        </p:txBody>
-      </p:sp>
-      <p:sp>
-        <p:nvSpPr>
-          <p:cNvPr id="52" name="Text 48"/>
-          <p:cNvSpPr txBox="1"/>
-          <p:nvPr/>
-        </p:nvSpPr>
-        <p:spPr>
-          <a:xfrm>
-            <a:off x="5752407" y="2476041"/>
-            <a:ext cx="792438" cy="274303"/>
-          </a:xfrm>
-          <a:prstGeom prst="rect">
-            <a:avLst/>
-          </a:prstGeom>
-          <a:noFill/>
-          <a:ln/>
-        </p:spPr>
-        <p:txBody>
-          <a:bodyPr wrap="square" lIns="0" tIns="0" rIns="0" bIns="0" rtlCol="0" anchor="t"/>
-          <a:lstStyle/>
-          <a:p>
-            <a:pPr algn="l" indent="0" marL="0">
-              <a:lnSpc>
-                <a:spcPts val="1056"/>
-              </a:lnSpc>
-              <a:buNone/>
-            </a:pPr>
-            <a:r>
-              <a:rPr lang="en-US" sz="880" spc="18" kern="0" dirty="0">
-                <a:solidFill>
-                  <a:srgbClr val="2E3A45"/>
+              <a:t>Mais de duas décadas enfrentando diferentes momentos da economia, mudanças no comportamento dos consumidores, transformações no turismo e novas formas de comunicação.</a:t>
+            </a:r>
+            <a:endParaRPr lang="en-US" sz="1060" dirty="0"/>
+          </a:p>
+        </p:txBody>
+      </p:sp>
+      <p:sp>
+        <p:nvSpPr>
+          <p:cNvPr id="17" name="Text 13"/>
+          <p:cNvSpPr txBox="1"/>
+          <p:nvPr/>
+        </p:nvSpPr>
+        <p:spPr>
+          <a:xfrm>
+            <a:off x="4463802" y="2726829"/>
+            <a:ext cx="5553998" cy="490240"/>
+          </a:xfrm>
+          <a:prstGeom prst="rect">
+            <a:avLst/>
+          </a:prstGeom>
+          <a:noFill/>
+          <a:ln/>
+        </p:spPr>
+        <p:txBody>
+          <a:bodyPr wrap="square" lIns="0" tIns="0" rIns="0" bIns="0" rtlCol="0" anchor="t"/>
+          <a:lstStyle/>
+          <a:p>
+            <a:pPr algn="l" indent="0" marL="0">
+              <a:lnSpc>
+                <a:spcPts val="1929"/>
+              </a:lnSpc>
+              <a:buNone/>
+            </a:pPr>
+            <a:r>
+              <a:rPr lang="en-US" sz="1060" dirty="0">
+                <a:solidFill>
+                  <a:srgbClr val="5A6672"/>
                 </a:solidFill>
                 <a:latin typeface="Jost" pitchFamily="34" charset="0"/>
                 <a:ea typeface="Jost" pitchFamily="34" charset="-122"/>
                 <a:cs typeface="Jost" pitchFamily="34" charset="-120"/>
               </a:rPr>
-              <a:t>Confiabilidade</a:t>
-            </a:r>
-            <a:endParaRPr lang="en-US" sz="880" dirty="0"/>
-          </a:p>
-        </p:txBody>
-      </p:sp>
-      <p:sp>
-        <p:nvSpPr>
-          <p:cNvPr id="53" name="Text 49"/>
-          <p:cNvSpPr txBox="1"/>
-          <p:nvPr/>
-        </p:nvSpPr>
-        <p:spPr>
-          <a:xfrm>
-            <a:off x="7039026" y="2476041"/>
-            <a:ext cx="703737" cy="274303"/>
-          </a:xfrm>
-          <a:prstGeom prst="rect">
-            <a:avLst/>
-          </a:prstGeom>
-          <a:noFill/>
-          <a:ln/>
-        </p:spPr>
-        <p:txBody>
-          <a:bodyPr wrap="square" lIns="0" tIns="0" rIns="0" bIns="0" rtlCol="0" anchor="t"/>
-          <a:lstStyle/>
-          <a:p>
-            <a:pPr algn="l" indent="0" marL="0">
-              <a:lnSpc>
-                <a:spcPts val="1056"/>
-              </a:lnSpc>
-              <a:buNone/>
-            </a:pPr>
-            <a:r>
-              <a:rPr lang="en-US" sz="880" spc="18" kern="0" dirty="0">
-                <a:solidFill>
-                  <a:srgbClr val="2E3A45"/>
+              <a:t>E permanecemos aqui. Cuidando da empresa. Cuidando da nossa equipe. Cuidando dos nossos hóspedes. Cuidando do patrimônio que construímos.</a:t>
+            </a:r>
+            <a:endParaRPr lang="en-US" sz="1060" dirty="0"/>
+          </a:p>
+        </p:txBody>
+      </p:sp>
+      <p:sp>
+        <p:nvSpPr>
+          <p:cNvPr id="18" name="Text 14"/>
+          <p:cNvSpPr txBox="1"/>
+          <p:nvPr/>
+        </p:nvSpPr>
+        <p:spPr>
+          <a:xfrm>
+            <a:off x="4463802" y="3415010"/>
+            <a:ext cx="5553998" cy="490240"/>
+          </a:xfrm>
+          <a:prstGeom prst="rect">
+            <a:avLst/>
+          </a:prstGeom>
+          <a:noFill/>
+          <a:ln/>
+        </p:spPr>
+        <p:txBody>
+          <a:bodyPr wrap="square" lIns="0" tIns="0" rIns="0" bIns="0" rtlCol="0" anchor="t"/>
+          <a:lstStyle/>
+          <a:p>
+            <a:pPr algn="l" indent="0" marL="0">
+              <a:lnSpc>
+                <a:spcPts val="1929"/>
+              </a:lnSpc>
+              <a:buNone/>
+            </a:pPr>
+            <a:r>
+              <a:rPr lang="en-US" sz="1060" dirty="0">
+                <a:solidFill>
+                  <a:srgbClr val="5A6672"/>
                 </a:solidFill>
                 <a:latin typeface="Jost" pitchFamily="34" charset="0"/>
                 <a:ea typeface="Jost" pitchFamily="34" charset="-122"/>
                 <a:cs typeface="Jost" pitchFamily="34" charset="-120"/>
               </a:rPr>
-              <a:t>Durabilidade</a:t>
-            </a:r>
-            <a:endParaRPr lang="en-US" sz="880" dirty="0"/>
-          </a:p>
-        </p:txBody>
-      </p:sp>
-      <p:sp>
-        <p:nvSpPr>
-          <p:cNvPr id="54" name="Text 50"/>
-          <p:cNvSpPr txBox="1"/>
-          <p:nvPr/>
-        </p:nvSpPr>
-        <p:spPr>
-          <a:xfrm>
-            <a:off x="8236943" y="2476041"/>
-            <a:ext cx="815506" cy="274303"/>
-          </a:xfrm>
-          <a:prstGeom prst="rect">
-            <a:avLst/>
-          </a:prstGeom>
-          <a:noFill/>
-          <a:ln/>
-        </p:spPr>
-        <p:txBody>
-          <a:bodyPr wrap="square" lIns="0" tIns="0" rIns="0" bIns="0" rtlCol="0" anchor="t"/>
-          <a:lstStyle/>
-          <a:p>
-            <a:pPr algn="l" indent="0" marL="0">
-              <a:lnSpc>
-                <a:spcPts val="1056"/>
-              </a:lnSpc>
-              <a:buNone/>
-            </a:pPr>
-            <a:r>
-              <a:rPr lang="en-US" sz="880" spc="18" kern="0" dirty="0">
-                <a:solidFill>
-                  <a:srgbClr val="2E3A45"/>
-                </a:solidFill>
-                <a:latin typeface="Jost" pitchFamily="34" charset="0"/>
-                <a:ea typeface="Jost" pitchFamily="34" charset="-122"/>
-                <a:cs typeface="Jost" pitchFamily="34" charset="-120"/>
-              </a:rPr>
-              <a:t>Funcionalidade</a:t>
-            </a:r>
-            <a:endParaRPr lang="en-US" sz="880" dirty="0"/>
-          </a:p>
-        </p:txBody>
-      </p:sp>
-      <p:sp>
-        <p:nvSpPr>
-          <p:cNvPr id="55" name="Text 51"/>
-          <p:cNvSpPr txBox="1"/>
-          <p:nvPr/>
-        </p:nvSpPr>
-        <p:spPr>
-          <a:xfrm>
-            <a:off x="4679802" y="2951844"/>
-            <a:ext cx="1109293" cy="274303"/>
-          </a:xfrm>
-          <a:prstGeom prst="rect">
-            <a:avLst/>
-          </a:prstGeom>
-          <a:noFill/>
-          <a:ln/>
-        </p:spPr>
-        <p:txBody>
-          <a:bodyPr wrap="square" lIns="0" tIns="0" rIns="0" bIns="0" rtlCol="0" anchor="t"/>
-          <a:lstStyle/>
-          <a:p>
-            <a:pPr algn="l" indent="0" marL="0">
-              <a:lnSpc>
-                <a:spcPts val="1056"/>
-              </a:lnSpc>
-              <a:buNone/>
-            </a:pPr>
-            <a:r>
-              <a:rPr lang="en-US" sz="880" spc="18" kern="0" dirty="0">
-                <a:solidFill>
-                  <a:srgbClr val="2E3A45"/>
-                </a:solidFill>
-                <a:latin typeface="Jost" pitchFamily="34" charset="0"/>
-                <a:ea typeface="Jost" pitchFamily="34" charset="-122"/>
-                <a:cs typeface="Jost" pitchFamily="34" charset="-120"/>
-              </a:rPr>
-              <a:t>Atenção aos detalhes</a:t>
-            </a:r>
-            <a:endParaRPr lang="en-US" sz="880" dirty="0"/>
-          </a:p>
-        </p:txBody>
-      </p:sp>
-      <p:sp>
-        <p:nvSpPr>
-          <p:cNvPr id="56" name="Text 52"/>
-          <p:cNvSpPr txBox="1"/>
-          <p:nvPr/>
-        </p:nvSpPr>
-        <p:spPr>
-          <a:xfrm>
-            <a:off x="6283277" y="2951844"/>
-            <a:ext cx="1253805" cy="274303"/>
-          </a:xfrm>
-          <a:prstGeom prst="rect">
-            <a:avLst/>
-          </a:prstGeom>
-          <a:noFill/>
-          <a:ln/>
-        </p:spPr>
-        <p:txBody>
-          <a:bodyPr wrap="square" lIns="0" tIns="0" rIns="0" bIns="0" rtlCol="0" anchor="t"/>
-          <a:lstStyle/>
-          <a:p>
-            <a:pPr algn="l" indent="0" marL="0">
-              <a:lnSpc>
-                <a:spcPts val="1056"/>
-              </a:lnSpc>
-              <a:buNone/>
-            </a:pPr>
-            <a:r>
-              <a:rPr lang="en-US" sz="880" spc="18" kern="0" dirty="0">
-                <a:solidFill>
-                  <a:srgbClr val="2E3A45"/>
-                </a:solidFill>
-                <a:latin typeface="Jost" pitchFamily="34" charset="0"/>
-                <a:ea typeface="Jost" pitchFamily="34" charset="-122"/>
-                <a:cs typeface="Jost" pitchFamily="34" charset="-120"/>
-              </a:rPr>
-              <a:t>Respeito ao consumidor</a:t>
-            </a:r>
-            <a:endParaRPr lang="en-US" sz="880" dirty="0"/>
-          </a:p>
-        </p:txBody>
-      </p:sp>
-      <p:sp>
-        <p:nvSpPr>
-          <p:cNvPr id="57" name="Text 53"/>
-          <p:cNvSpPr txBox="1"/>
-          <p:nvPr/>
-        </p:nvSpPr>
-        <p:spPr>
-          <a:xfrm>
-            <a:off x="4679802" y="3427648"/>
-            <a:ext cx="1970264" cy="274303"/>
-          </a:xfrm>
-          <a:prstGeom prst="rect">
-            <a:avLst/>
-          </a:prstGeom>
-          <a:noFill/>
-          <a:ln/>
-        </p:spPr>
-        <p:txBody>
-          <a:bodyPr wrap="square" lIns="0" tIns="0" rIns="0" bIns="0" rtlCol="0" anchor="t"/>
-          <a:lstStyle/>
-          <a:p>
-            <a:pPr algn="l" indent="0" marL="0">
-              <a:lnSpc>
-                <a:spcPts val="1056"/>
-              </a:lnSpc>
-              <a:buNone/>
-            </a:pPr>
-            <a:r>
-              <a:rPr lang="en-US" sz="880" spc="18" kern="0" dirty="0">
-                <a:solidFill>
-                  <a:srgbClr val="2E3A45"/>
-                </a:solidFill>
-                <a:latin typeface="Jost" pitchFamily="34" charset="0"/>
-                <a:ea typeface="Jost" pitchFamily="34" charset="-122"/>
-                <a:cs typeface="Jost" pitchFamily="34" charset="-120"/>
-              </a:rPr>
-              <a:t>História construída ao longo do tempo</a:t>
-            </a:r>
-            <a:endParaRPr lang="en-US" sz="880" dirty="0"/>
-          </a:p>
-        </p:txBody>
-      </p:sp>
-      <p:sp>
-        <p:nvSpPr>
-          <p:cNvPr id="58" name="Text 54"/>
-          <p:cNvSpPr txBox="1"/>
-          <p:nvPr/>
-        </p:nvSpPr>
-        <p:spPr>
-          <a:xfrm>
-            <a:off x="4463802" y="4025950"/>
-            <a:ext cx="5553998" cy="490240"/>
-          </a:xfrm>
-          <a:prstGeom prst="rect">
-            <a:avLst/>
-          </a:prstGeom>
-          <a:noFill/>
-          <a:ln/>
-        </p:spPr>
-        <p:txBody>
-          <a:bodyPr wrap="square" lIns="0" tIns="0" rIns="0" bIns="0" rtlCol="0" anchor="t"/>
-          <a:lstStyle/>
-          <a:p>
-            <a:pPr algn="l" indent="0" marL="0">
-              <a:lnSpc>
-                <a:spcPts val="1929"/>
-              </a:lnSpc>
-              <a:buNone/>
-            </a:pPr>
-            <a:r>
-              <a:rPr lang="en-US" sz="1060" dirty="0">
-                <a:solidFill>
-                  <a:srgbClr val="5A6672"/>
-                </a:solidFill>
-                <a:latin typeface="Jost" pitchFamily="34" charset="0"/>
-                <a:ea typeface="Jost" pitchFamily="34" charset="-122"/>
-                <a:cs typeface="Jost" pitchFamily="34" charset="-120"/>
-              </a:rPr>
-              <a:t>A Victorinox tem tradição centenária e tornou seus produtos companheiros de pessoas em viagens, aventuras, trabalho e momentos cotidianos.</a:t>
+              <a:t>Essa longevidade nos ensinou que confiança não é conquistada em uma campanha publicitária; é construída ao longo do tempo.</a:t>
             </a:r>
             <a:endParaRPr lang="en-US" sz="1060" dirty="0"/>
           </a:p>
@@ -10291,49 +9125,49 @@
       </p:sp>
       <p:sp>
         <p:nvSpPr>
-          <p:cNvPr id="59" name="Text 55"/>
-          <p:cNvSpPr txBox="1"/>
-          <p:nvPr/>
-        </p:nvSpPr>
-        <p:spPr>
-          <a:xfrm>
-            <a:off x="4463802" y="4714131"/>
-            <a:ext cx="5553998" cy="735360"/>
-          </a:xfrm>
-          <a:prstGeom prst="rect">
-            <a:avLst/>
-          </a:prstGeom>
-          <a:noFill/>
-          <a:ln/>
-        </p:spPr>
-        <p:txBody>
-          <a:bodyPr wrap="square" lIns="0" tIns="0" rIns="0" bIns="0" rtlCol="0" anchor="t"/>
-          <a:lstStyle/>
-          <a:p>
-            <a:pPr algn="l" indent="0" marL="0">
-              <a:lnSpc>
-                <a:spcPts val="1929"/>
-              </a:lnSpc>
-              <a:buNone/>
-            </a:pPr>
-            <a:r>
-              <a:rPr lang="en-US" sz="1060" dirty="0">
-                <a:solidFill>
-                  <a:srgbClr val="5A6672"/>
-                </a:solidFill>
-                <a:latin typeface="Jost" pitchFamily="34" charset="0"/>
-                <a:ea typeface="Jost" pitchFamily="34" charset="-122"/>
-                <a:cs typeface="Jost" pitchFamily="34" charset="-120"/>
-              </a:rPr>
-              <a:t>A Pousada Camburi tem uma história muito mais jovem, mas compartilha uma convicção semelhante: um bom produto ou um bom serviço não precisa apenas funcionar bem — precisa gerar confiança. E confiança é aquilo que faz uma pessoa voltar.</a:t>
-            </a:r>
-            <a:endParaRPr lang="en-US" sz="1060" dirty="0"/>
-          </a:p>
-        </p:txBody>
-      </p:sp>
-      <p:sp>
-        <p:nvSpPr>
-          <p:cNvPr id="60" name="Text 56"/>
+          <p:cNvPr id="19" name="Text 15"/>
+          <p:cNvSpPr txBox="1"/>
+          <p:nvPr/>
+        </p:nvSpPr>
+        <p:spPr>
+          <a:xfrm>
+            <a:off x="4463802" y="6143327"/>
+            <a:ext cx="5553998" cy="561380"/>
+          </a:xfrm>
+          <a:prstGeom prst="rect">
+            <a:avLst/>
+          </a:prstGeom>
+          <a:noFill/>
+          <a:ln/>
+        </p:spPr>
+        <p:txBody>
+          <a:bodyPr wrap="square" lIns="0" tIns="0" rIns="0" bIns="0" rtlCol="0" anchor="t"/>
+          <a:lstStyle/>
+          <a:p>
+            <a:pPr algn="l" indent="0" marL="0">
+              <a:lnSpc>
+                <a:spcPts val="2210"/>
+              </a:lnSpc>
+              <a:buNone/>
+            </a:pPr>
+            <a:r>
+              <a:rPr lang="en-US" sz="1700" dirty="0">
+                <a:solidFill>
+                  <a:srgbClr val="16222E"/>
+                </a:solidFill>
+                <a:latin typeface="EB Garamond" pitchFamily="34" charset="0"/>
+                <a:ea typeface="EB Garamond" pitchFamily="34" charset="-122"/>
+                <a:cs typeface="EB Garamond" pitchFamily="34" charset="-120"/>
+              </a:rPr>
+              <a:t>E talvez seja justamente esse um dos pontos que mais nos aproximam da filosofia da Victorinox.</a:t>
+            </a:r>
+            <a:endParaRPr lang="en-US" sz="1700" dirty="0"/>
+          </a:p>
+        </p:txBody>
+      </p:sp>
+      <p:sp>
+        <p:nvSpPr>
+          <p:cNvPr id="20" name="Text 16"/>
           <p:cNvSpPr txBox="1"/>
           <p:nvPr/>
         </p:nvSpPr>
@@ -10473,7 +9307,7 @@
         </p:nvSpPr>
         <p:spPr>
           <a:xfrm>
-            <a:off x="719882" y="6180386"/>
+            <a:off x="719882" y="5654725"/>
             <a:ext cx="2654498" cy="9525"/>
           </a:xfrm>
           <a:prstGeom prst="rect">
@@ -10493,14 +9327,16 @@
         </p:nvSpPr>
         <p:spPr>
           <a:xfrm>
-            <a:off x="4463802" y="5080248"/>
-            <a:ext cx="5508278" cy="9525"/>
-          </a:xfrm>
-          <a:prstGeom prst="rect">
-            <a:avLst/>
-          </a:prstGeom>
-          <a:solidFill>
-            <a:srgbClr val="E2DFD9"/>
+            <a:off x="4463802" y="2322165"/>
+            <a:ext cx="964704" cy="367903"/>
+          </a:xfrm>
+          <a:prstGeom prst="roundRect">
+            <a:avLst>
+              <a:gd name="adj" fmla="val 50000"/>
+            </a:avLst>
+          </a:prstGeom>
+          <a:solidFill>
+            <a:srgbClr val="FAF8F5"/>
           </a:solidFill>
           <a:ln/>
         </p:spPr>
@@ -10513,6 +9349,718 @@
         </p:nvSpPr>
         <p:spPr>
           <a:xfrm>
+            <a:off x="4463802" y="2322165"/>
+            <a:ext cx="964704" cy="9525"/>
+          </a:xfrm>
+          <a:prstGeom prst="rect">
+            <a:avLst/>
+          </a:prstGeom>
+          <a:solidFill>
+            <a:srgbClr val="E2DFD9"/>
+          </a:solidFill>
+          <a:ln/>
+        </p:spPr>
+      </p:sp>
+      <p:sp>
+        <p:nvSpPr>
+          <p:cNvPr id="8" name="Shape 6"/>
+          <p:cNvSpPr/>
+          <p:nvPr/>
+        </p:nvSpPr>
+        <p:spPr>
+          <a:xfrm>
+            <a:off x="5418981" y="2322165"/>
+            <a:ext cx="9525" cy="367903"/>
+          </a:xfrm>
+          <a:prstGeom prst="rect">
+            <a:avLst/>
+          </a:prstGeom>
+          <a:solidFill>
+            <a:srgbClr val="E2DFD9"/>
+          </a:solidFill>
+          <a:ln/>
+        </p:spPr>
+      </p:sp>
+      <p:sp>
+        <p:nvSpPr>
+          <p:cNvPr id="9" name="Shape 7"/>
+          <p:cNvSpPr/>
+          <p:nvPr/>
+        </p:nvSpPr>
+        <p:spPr>
+          <a:xfrm>
+            <a:off x="4463802" y="2680543"/>
+            <a:ext cx="964704" cy="9525"/>
+          </a:xfrm>
+          <a:prstGeom prst="rect">
+            <a:avLst/>
+          </a:prstGeom>
+          <a:solidFill>
+            <a:srgbClr val="E2DFD9"/>
+          </a:solidFill>
+          <a:ln/>
+        </p:spPr>
+      </p:sp>
+      <p:sp>
+        <p:nvSpPr>
+          <p:cNvPr id="10" name="Shape 8"/>
+          <p:cNvSpPr/>
+          <p:nvPr/>
+        </p:nvSpPr>
+        <p:spPr>
+          <a:xfrm>
+            <a:off x="4463802" y="2322165"/>
+            <a:ext cx="9525" cy="367903"/>
+          </a:xfrm>
+          <a:prstGeom prst="rect">
+            <a:avLst/>
+          </a:prstGeom>
+          <a:solidFill>
+            <a:srgbClr val="E2DFD9"/>
+          </a:solidFill>
+          <a:ln/>
+        </p:spPr>
+      </p:sp>
+      <p:sp>
+        <p:nvSpPr>
+          <p:cNvPr id="11" name="Shape 9"/>
+          <p:cNvSpPr/>
+          <p:nvPr/>
+        </p:nvSpPr>
+        <p:spPr>
+          <a:xfrm>
+            <a:off x="5536406" y="2322165"/>
+            <a:ext cx="1178719" cy="367903"/>
+          </a:xfrm>
+          <a:prstGeom prst="roundRect">
+            <a:avLst>
+              <a:gd name="adj" fmla="val 50000"/>
+            </a:avLst>
+          </a:prstGeom>
+          <a:solidFill>
+            <a:srgbClr val="FAF8F5"/>
+          </a:solidFill>
+          <a:ln/>
+        </p:spPr>
+      </p:sp>
+      <p:sp>
+        <p:nvSpPr>
+          <p:cNvPr id="12" name="Shape 10"/>
+          <p:cNvSpPr/>
+          <p:nvPr/>
+        </p:nvSpPr>
+        <p:spPr>
+          <a:xfrm>
+            <a:off x="5536406" y="2322165"/>
+            <a:ext cx="1178719" cy="9525"/>
+          </a:xfrm>
+          <a:prstGeom prst="rect">
+            <a:avLst/>
+          </a:prstGeom>
+          <a:solidFill>
+            <a:srgbClr val="E2DFD9"/>
+          </a:solidFill>
+          <a:ln/>
+        </p:spPr>
+      </p:sp>
+      <p:sp>
+        <p:nvSpPr>
+          <p:cNvPr id="13" name="Shape 11"/>
+          <p:cNvSpPr/>
+          <p:nvPr/>
+        </p:nvSpPr>
+        <p:spPr>
+          <a:xfrm>
+            <a:off x="6705600" y="2322165"/>
+            <a:ext cx="9525" cy="367903"/>
+          </a:xfrm>
+          <a:prstGeom prst="rect">
+            <a:avLst/>
+          </a:prstGeom>
+          <a:solidFill>
+            <a:srgbClr val="E2DFD9"/>
+          </a:solidFill>
+          <a:ln/>
+        </p:spPr>
+      </p:sp>
+      <p:sp>
+        <p:nvSpPr>
+          <p:cNvPr id="14" name="Shape 12"/>
+          <p:cNvSpPr/>
+          <p:nvPr/>
+        </p:nvSpPr>
+        <p:spPr>
+          <a:xfrm>
+            <a:off x="5536406" y="2680543"/>
+            <a:ext cx="1178719" cy="9525"/>
+          </a:xfrm>
+          <a:prstGeom prst="rect">
+            <a:avLst/>
+          </a:prstGeom>
+          <a:solidFill>
+            <a:srgbClr val="E2DFD9"/>
+          </a:solidFill>
+          <a:ln/>
+        </p:spPr>
+      </p:sp>
+      <p:sp>
+        <p:nvSpPr>
+          <p:cNvPr id="15" name="Shape 13"/>
+          <p:cNvSpPr/>
+          <p:nvPr/>
+        </p:nvSpPr>
+        <p:spPr>
+          <a:xfrm>
+            <a:off x="5536406" y="2322165"/>
+            <a:ext cx="9525" cy="367903"/>
+          </a:xfrm>
+          <a:prstGeom prst="rect">
+            <a:avLst/>
+          </a:prstGeom>
+          <a:solidFill>
+            <a:srgbClr val="E2DFD9"/>
+          </a:solidFill>
+          <a:ln/>
+        </p:spPr>
+      </p:sp>
+      <p:sp>
+        <p:nvSpPr>
+          <p:cNvPr id="16" name="Shape 14"/>
+          <p:cNvSpPr/>
+          <p:nvPr/>
+        </p:nvSpPr>
+        <p:spPr>
+          <a:xfrm>
+            <a:off x="6823025" y="2322165"/>
+            <a:ext cx="1090017" cy="367903"/>
+          </a:xfrm>
+          <a:prstGeom prst="roundRect">
+            <a:avLst>
+              <a:gd name="adj" fmla="val 50000"/>
+            </a:avLst>
+          </a:prstGeom>
+          <a:solidFill>
+            <a:srgbClr val="FAF8F5"/>
+          </a:solidFill>
+          <a:ln/>
+        </p:spPr>
+      </p:sp>
+      <p:sp>
+        <p:nvSpPr>
+          <p:cNvPr id="17" name="Shape 15"/>
+          <p:cNvSpPr/>
+          <p:nvPr/>
+        </p:nvSpPr>
+        <p:spPr>
+          <a:xfrm>
+            <a:off x="6823025" y="2322165"/>
+            <a:ext cx="1090017" cy="9525"/>
+          </a:xfrm>
+          <a:prstGeom prst="rect">
+            <a:avLst/>
+          </a:prstGeom>
+          <a:solidFill>
+            <a:srgbClr val="E2DFD9"/>
+          </a:solidFill>
+          <a:ln/>
+        </p:spPr>
+      </p:sp>
+      <p:sp>
+        <p:nvSpPr>
+          <p:cNvPr id="18" name="Shape 16"/>
+          <p:cNvSpPr/>
+          <p:nvPr/>
+        </p:nvSpPr>
+        <p:spPr>
+          <a:xfrm>
+            <a:off x="7903518" y="2322165"/>
+            <a:ext cx="9525" cy="367903"/>
+          </a:xfrm>
+          <a:prstGeom prst="rect">
+            <a:avLst/>
+          </a:prstGeom>
+          <a:solidFill>
+            <a:srgbClr val="E2DFD9"/>
+          </a:solidFill>
+          <a:ln/>
+        </p:spPr>
+      </p:sp>
+      <p:sp>
+        <p:nvSpPr>
+          <p:cNvPr id="19" name="Shape 17"/>
+          <p:cNvSpPr/>
+          <p:nvPr/>
+        </p:nvSpPr>
+        <p:spPr>
+          <a:xfrm>
+            <a:off x="6823025" y="2680543"/>
+            <a:ext cx="1090017" cy="9525"/>
+          </a:xfrm>
+          <a:prstGeom prst="rect">
+            <a:avLst/>
+          </a:prstGeom>
+          <a:solidFill>
+            <a:srgbClr val="E2DFD9"/>
+          </a:solidFill>
+          <a:ln/>
+        </p:spPr>
+      </p:sp>
+      <p:sp>
+        <p:nvSpPr>
+          <p:cNvPr id="20" name="Shape 18"/>
+          <p:cNvSpPr/>
+          <p:nvPr/>
+        </p:nvSpPr>
+        <p:spPr>
+          <a:xfrm>
+            <a:off x="6823025" y="2322165"/>
+            <a:ext cx="9525" cy="367903"/>
+          </a:xfrm>
+          <a:prstGeom prst="rect">
+            <a:avLst/>
+          </a:prstGeom>
+          <a:solidFill>
+            <a:srgbClr val="E2DFD9"/>
+          </a:solidFill>
+          <a:ln/>
+        </p:spPr>
+      </p:sp>
+      <p:sp>
+        <p:nvSpPr>
+          <p:cNvPr id="21" name="Shape 19"/>
+          <p:cNvSpPr/>
+          <p:nvPr/>
+        </p:nvSpPr>
+        <p:spPr>
+          <a:xfrm>
+            <a:off x="8020943" y="2322165"/>
+            <a:ext cx="1201787" cy="367903"/>
+          </a:xfrm>
+          <a:prstGeom prst="roundRect">
+            <a:avLst>
+              <a:gd name="adj" fmla="val 50000"/>
+            </a:avLst>
+          </a:prstGeom>
+          <a:solidFill>
+            <a:srgbClr val="FAF8F5"/>
+          </a:solidFill>
+          <a:ln/>
+        </p:spPr>
+      </p:sp>
+      <p:sp>
+        <p:nvSpPr>
+          <p:cNvPr id="22" name="Shape 20"/>
+          <p:cNvSpPr/>
+          <p:nvPr/>
+        </p:nvSpPr>
+        <p:spPr>
+          <a:xfrm>
+            <a:off x="8020943" y="2322165"/>
+            <a:ext cx="1201787" cy="9525"/>
+          </a:xfrm>
+          <a:prstGeom prst="rect">
+            <a:avLst/>
+          </a:prstGeom>
+          <a:solidFill>
+            <a:srgbClr val="E2DFD9"/>
+          </a:solidFill>
+          <a:ln/>
+        </p:spPr>
+      </p:sp>
+      <p:sp>
+        <p:nvSpPr>
+          <p:cNvPr id="23" name="Shape 21"/>
+          <p:cNvSpPr/>
+          <p:nvPr/>
+        </p:nvSpPr>
+        <p:spPr>
+          <a:xfrm>
+            <a:off x="9213205" y="2322165"/>
+            <a:ext cx="9525" cy="367903"/>
+          </a:xfrm>
+          <a:prstGeom prst="rect">
+            <a:avLst/>
+          </a:prstGeom>
+          <a:solidFill>
+            <a:srgbClr val="E2DFD9"/>
+          </a:solidFill>
+          <a:ln/>
+        </p:spPr>
+      </p:sp>
+      <p:sp>
+        <p:nvSpPr>
+          <p:cNvPr id="24" name="Shape 22"/>
+          <p:cNvSpPr/>
+          <p:nvPr/>
+        </p:nvSpPr>
+        <p:spPr>
+          <a:xfrm>
+            <a:off x="8020943" y="2680543"/>
+            <a:ext cx="1201787" cy="9525"/>
+          </a:xfrm>
+          <a:prstGeom prst="rect">
+            <a:avLst/>
+          </a:prstGeom>
+          <a:solidFill>
+            <a:srgbClr val="E2DFD9"/>
+          </a:solidFill>
+          <a:ln/>
+        </p:spPr>
+      </p:sp>
+      <p:sp>
+        <p:nvSpPr>
+          <p:cNvPr id="25" name="Shape 23"/>
+          <p:cNvSpPr/>
+          <p:nvPr/>
+        </p:nvSpPr>
+        <p:spPr>
+          <a:xfrm>
+            <a:off x="8020943" y="2322165"/>
+            <a:ext cx="9525" cy="367903"/>
+          </a:xfrm>
+          <a:prstGeom prst="rect">
+            <a:avLst/>
+          </a:prstGeom>
+          <a:solidFill>
+            <a:srgbClr val="E2DFD9"/>
+          </a:solidFill>
+          <a:ln/>
+        </p:spPr>
+      </p:sp>
+      <p:sp>
+        <p:nvSpPr>
+          <p:cNvPr id="26" name="Shape 24"/>
+          <p:cNvSpPr/>
+          <p:nvPr/>
+        </p:nvSpPr>
+        <p:spPr>
+          <a:xfrm>
+            <a:off x="4463802" y="2797969"/>
+            <a:ext cx="1495574" cy="367903"/>
+          </a:xfrm>
+          <a:prstGeom prst="roundRect">
+            <a:avLst>
+              <a:gd name="adj" fmla="val 50000"/>
+            </a:avLst>
+          </a:prstGeom>
+          <a:solidFill>
+            <a:srgbClr val="FAF8F5"/>
+          </a:solidFill>
+          <a:ln/>
+        </p:spPr>
+      </p:sp>
+      <p:sp>
+        <p:nvSpPr>
+          <p:cNvPr id="27" name="Shape 25"/>
+          <p:cNvSpPr/>
+          <p:nvPr/>
+        </p:nvSpPr>
+        <p:spPr>
+          <a:xfrm>
+            <a:off x="4463802" y="2797969"/>
+            <a:ext cx="1495574" cy="9525"/>
+          </a:xfrm>
+          <a:prstGeom prst="rect">
+            <a:avLst/>
+          </a:prstGeom>
+          <a:solidFill>
+            <a:srgbClr val="E2DFD9"/>
+          </a:solidFill>
+          <a:ln/>
+        </p:spPr>
+      </p:sp>
+      <p:sp>
+        <p:nvSpPr>
+          <p:cNvPr id="28" name="Shape 26"/>
+          <p:cNvSpPr/>
+          <p:nvPr/>
+        </p:nvSpPr>
+        <p:spPr>
+          <a:xfrm>
+            <a:off x="5949851" y="2797969"/>
+            <a:ext cx="9525" cy="367903"/>
+          </a:xfrm>
+          <a:prstGeom prst="rect">
+            <a:avLst/>
+          </a:prstGeom>
+          <a:solidFill>
+            <a:srgbClr val="E2DFD9"/>
+          </a:solidFill>
+          <a:ln/>
+        </p:spPr>
+      </p:sp>
+      <p:sp>
+        <p:nvSpPr>
+          <p:cNvPr id="29" name="Shape 27"/>
+          <p:cNvSpPr/>
+          <p:nvPr/>
+        </p:nvSpPr>
+        <p:spPr>
+          <a:xfrm>
+            <a:off x="4463802" y="3156347"/>
+            <a:ext cx="1495574" cy="9525"/>
+          </a:xfrm>
+          <a:prstGeom prst="rect">
+            <a:avLst/>
+          </a:prstGeom>
+          <a:solidFill>
+            <a:srgbClr val="E2DFD9"/>
+          </a:solidFill>
+          <a:ln/>
+        </p:spPr>
+      </p:sp>
+      <p:sp>
+        <p:nvSpPr>
+          <p:cNvPr id="30" name="Shape 28"/>
+          <p:cNvSpPr/>
+          <p:nvPr/>
+        </p:nvSpPr>
+        <p:spPr>
+          <a:xfrm>
+            <a:off x="4463802" y="2797969"/>
+            <a:ext cx="9525" cy="367903"/>
+          </a:xfrm>
+          <a:prstGeom prst="rect">
+            <a:avLst/>
+          </a:prstGeom>
+          <a:solidFill>
+            <a:srgbClr val="E2DFD9"/>
+          </a:solidFill>
+          <a:ln/>
+        </p:spPr>
+      </p:sp>
+      <p:sp>
+        <p:nvSpPr>
+          <p:cNvPr id="31" name="Shape 29"/>
+          <p:cNvSpPr/>
+          <p:nvPr/>
+        </p:nvSpPr>
+        <p:spPr>
+          <a:xfrm>
+            <a:off x="6067276" y="2797969"/>
+            <a:ext cx="1640086" cy="367903"/>
+          </a:xfrm>
+          <a:prstGeom prst="roundRect">
+            <a:avLst>
+              <a:gd name="adj" fmla="val 50000"/>
+            </a:avLst>
+          </a:prstGeom>
+          <a:solidFill>
+            <a:srgbClr val="FAF8F5"/>
+          </a:solidFill>
+          <a:ln/>
+        </p:spPr>
+      </p:sp>
+      <p:sp>
+        <p:nvSpPr>
+          <p:cNvPr id="32" name="Shape 30"/>
+          <p:cNvSpPr/>
+          <p:nvPr/>
+        </p:nvSpPr>
+        <p:spPr>
+          <a:xfrm>
+            <a:off x="6067276" y="2797969"/>
+            <a:ext cx="1640086" cy="9525"/>
+          </a:xfrm>
+          <a:prstGeom prst="rect">
+            <a:avLst/>
+          </a:prstGeom>
+          <a:solidFill>
+            <a:srgbClr val="E2DFD9"/>
+          </a:solidFill>
+          <a:ln/>
+        </p:spPr>
+      </p:sp>
+      <p:sp>
+        <p:nvSpPr>
+          <p:cNvPr id="33" name="Shape 31"/>
+          <p:cNvSpPr/>
+          <p:nvPr/>
+        </p:nvSpPr>
+        <p:spPr>
+          <a:xfrm>
+            <a:off x="7697837" y="2797969"/>
+            <a:ext cx="9525" cy="367903"/>
+          </a:xfrm>
+          <a:prstGeom prst="rect">
+            <a:avLst/>
+          </a:prstGeom>
+          <a:solidFill>
+            <a:srgbClr val="E2DFD9"/>
+          </a:solidFill>
+          <a:ln/>
+        </p:spPr>
+      </p:sp>
+      <p:sp>
+        <p:nvSpPr>
+          <p:cNvPr id="34" name="Shape 32"/>
+          <p:cNvSpPr/>
+          <p:nvPr/>
+        </p:nvSpPr>
+        <p:spPr>
+          <a:xfrm>
+            <a:off x="6067276" y="3156347"/>
+            <a:ext cx="1640086" cy="9525"/>
+          </a:xfrm>
+          <a:prstGeom prst="rect">
+            <a:avLst/>
+          </a:prstGeom>
+          <a:solidFill>
+            <a:srgbClr val="E2DFD9"/>
+          </a:solidFill>
+          <a:ln/>
+        </p:spPr>
+      </p:sp>
+      <p:sp>
+        <p:nvSpPr>
+          <p:cNvPr id="35" name="Shape 33"/>
+          <p:cNvSpPr/>
+          <p:nvPr/>
+        </p:nvSpPr>
+        <p:spPr>
+          <a:xfrm>
+            <a:off x="6067276" y="2797969"/>
+            <a:ext cx="9525" cy="367903"/>
+          </a:xfrm>
+          <a:prstGeom prst="rect">
+            <a:avLst/>
+          </a:prstGeom>
+          <a:solidFill>
+            <a:srgbClr val="E2DFD9"/>
+          </a:solidFill>
+          <a:ln/>
+        </p:spPr>
+      </p:sp>
+      <p:sp>
+        <p:nvSpPr>
+          <p:cNvPr id="36" name="Shape 34"/>
+          <p:cNvSpPr/>
+          <p:nvPr/>
+        </p:nvSpPr>
+        <p:spPr>
+          <a:xfrm>
+            <a:off x="4463802" y="3273772"/>
+            <a:ext cx="2588419" cy="367903"/>
+          </a:xfrm>
+          <a:prstGeom prst="roundRect">
+            <a:avLst>
+              <a:gd name="adj" fmla="val 50000"/>
+            </a:avLst>
+          </a:prstGeom>
+          <a:solidFill>
+            <a:srgbClr val="FAF8F5"/>
+          </a:solidFill>
+          <a:ln/>
+        </p:spPr>
+      </p:sp>
+      <p:sp>
+        <p:nvSpPr>
+          <p:cNvPr id="37" name="Shape 35"/>
+          <p:cNvSpPr/>
+          <p:nvPr/>
+        </p:nvSpPr>
+        <p:spPr>
+          <a:xfrm>
+            <a:off x="4463802" y="3273772"/>
+            <a:ext cx="2588419" cy="9525"/>
+          </a:xfrm>
+          <a:prstGeom prst="rect">
+            <a:avLst/>
+          </a:prstGeom>
+          <a:solidFill>
+            <a:srgbClr val="E2DFD9"/>
+          </a:solidFill>
+          <a:ln/>
+        </p:spPr>
+      </p:sp>
+      <p:sp>
+        <p:nvSpPr>
+          <p:cNvPr id="38" name="Shape 36"/>
+          <p:cNvSpPr/>
+          <p:nvPr/>
+        </p:nvSpPr>
+        <p:spPr>
+          <a:xfrm>
+            <a:off x="7042696" y="3273772"/>
+            <a:ext cx="9525" cy="367903"/>
+          </a:xfrm>
+          <a:prstGeom prst="rect">
+            <a:avLst/>
+          </a:prstGeom>
+          <a:solidFill>
+            <a:srgbClr val="E2DFD9"/>
+          </a:solidFill>
+          <a:ln/>
+        </p:spPr>
+      </p:sp>
+      <p:sp>
+        <p:nvSpPr>
+          <p:cNvPr id="39" name="Shape 37"/>
+          <p:cNvSpPr/>
+          <p:nvPr/>
+        </p:nvSpPr>
+        <p:spPr>
+          <a:xfrm>
+            <a:off x="4463802" y="3632150"/>
+            <a:ext cx="2588419" cy="9525"/>
+          </a:xfrm>
+          <a:prstGeom prst="rect">
+            <a:avLst/>
+          </a:prstGeom>
+          <a:solidFill>
+            <a:srgbClr val="E2DFD9"/>
+          </a:solidFill>
+          <a:ln/>
+        </p:spPr>
+      </p:sp>
+      <p:sp>
+        <p:nvSpPr>
+          <p:cNvPr id="40" name="Shape 38"/>
+          <p:cNvSpPr/>
+          <p:nvPr/>
+        </p:nvSpPr>
+        <p:spPr>
+          <a:xfrm>
+            <a:off x="4463802" y="3273772"/>
+            <a:ext cx="9525" cy="367903"/>
+          </a:xfrm>
+          <a:prstGeom prst="rect">
+            <a:avLst/>
+          </a:prstGeom>
+          <a:solidFill>
+            <a:srgbClr val="E2DFD9"/>
+          </a:solidFill>
+          <a:ln/>
+        </p:spPr>
+      </p:sp>
+      <p:sp>
+        <p:nvSpPr>
+          <p:cNvPr id="41" name="Shape 39"/>
+          <p:cNvSpPr/>
+          <p:nvPr/>
+        </p:nvSpPr>
+        <p:spPr>
+          <a:xfrm>
+            <a:off x="4463802" y="6126510"/>
+            <a:ext cx="5508278" cy="9525"/>
+          </a:xfrm>
+          <a:prstGeom prst="rect">
+            <a:avLst/>
+          </a:prstGeom>
+          <a:solidFill>
+            <a:srgbClr val="E2DFD9"/>
+          </a:solidFill>
+          <a:ln/>
+        </p:spPr>
+      </p:sp>
+      <p:sp>
+        <p:nvSpPr>
+          <p:cNvPr id="42" name="Shape 40"/>
+          <p:cNvSpPr/>
+          <p:nvPr/>
+        </p:nvSpPr>
+        <p:spPr>
+          <a:xfrm>
             <a:off x="719882" y="6704707"/>
             <a:ext cx="9252198" cy="9525"/>
           </a:xfrm>
@@ -10527,7 +10075,7 @@
       </p:sp>
       <p:pic>
         <p:nvPicPr>
-          <p:cNvPr id="8" name="Image 0" descr="/home/user/SkillsClaude/apresentacao-victorinox/build/logos/logo-pc.png">    </p:cNvPr>
+          <p:cNvPr id="43" name="Image 0" descr="/home/user/SkillsClaude/apresentacao-victorinox/build/logos/logo-pc.png">    </p:cNvPr>
           <p:cNvPicPr>
             <a:picLocks noChangeAspect="1"/>
           </p:cNvPicPr>
@@ -10551,7 +10099,7 @@
       </p:pic>
       <p:pic>
         <p:nvPicPr>
-          <p:cNvPr id="9" name="Image 1" descr="/home/user/SkillsClaude/apresentacao-victorinox/build/logos/logo-vx.png">    </p:cNvPr>
+          <p:cNvPr id="44" name="Image 1" descr="/home/user/SkillsClaude/apresentacao-victorinox/build/logos/logo-vx.png">    </p:cNvPr>
           <p:cNvPicPr>
             <a:picLocks noChangeAspect="1"/>
           </p:cNvPicPr>
@@ -10575,7 +10123,7 @@
       </p:pic>
       <p:sp>
         <p:nvSpPr>
-          <p:cNvPr id="10" name="Text 6"/>
+          <p:cNvPr id="45" name="Text 41"/>
           <p:cNvSpPr txBox="1"/>
           <p:nvPr/>
         </p:nvSpPr>
@@ -10617,7 +10165,7 @@
       </p:sp>
       <p:sp>
         <p:nvSpPr>
-          <p:cNvPr id="11" name="Text 7"/>
+          <p:cNvPr id="46" name="Text 42"/>
           <p:cNvSpPr txBox="1"/>
           <p:nvPr/>
         </p:nvSpPr>
@@ -10659,7 +10207,7 @@
       </p:sp>
       <p:sp>
         <p:nvSpPr>
-          <p:cNvPr id="12" name="Text 8"/>
+          <p:cNvPr id="47" name="Text 43"/>
           <p:cNvSpPr txBox="1"/>
           <p:nvPr/>
         </p:nvSpPr>
@@ -10693,7 +10241,7 @@
                 <a:ea typeface="Jost Medium" pitchFamily="34" charset="-122"/>
                 <a:cs typeface="Jost Medium" pitchFamily="34" charset="-120"/>
               </a:rPr>
-              <a:t>A OPORTUNIDADE</a:t>
+              <a:t>AFINIDADE</a:t>
             </a:r>
             <a:endParaRPr lang="en-US" sz="660" dirty="0"/>
           </a:p>
@@ -10701,7 +10249,7 @@
       </p:sp>
       <p:sp>
         <p:nvSpPr>
-          <p:cNvPr id="13" name="Text 9"/>
+          <p:cNvPr id="48" name="Text 44"/>
           <p:cNvSpPr txBox="1"/>
           <p:nvPr/>
         </p:nvSpPr>
@@ -10735,7 +10283,7 @@
                 <a:ea typeface="EB Garamond Medium" pitchFamily="34" charset="-122"/>
                 <a:cs typeface="EB Garamond Medium" pitchFamily="34" charset="-120"/>
               </a:rPr>
-              <a:t>Um ambiente de experiência</a:t>
+              <a:t>Por que Victorinox?</a:t>
             </a:r>
             <a:endParaRPr lang="en-US" sz="2700" dirty="0"/>
           </a:p>
@@ -10743,14 +10291,14 @@
       </p:sp>
       <p:sp>
         <p:nvSpPr>
-          <p:cNvPr id="14" name="Text 10"/>
-          <p:cNvSpPr txBox="1"/>
-          <p:nvPr/>
-        </p:nvSpPr>
-        <p:spPr>
-          <a:xfrm>
-            <a:off x="719882" y="6441877"/>
-            <a:ext cx="2700218" cy="262830"/>
+          <p:cNvPr id="49" name="Text 45"/>
+          <p:cNvSpPr txBox="1"/>
+          <p:nvPr/>
+        </p:nvSpPr>
+        <p:spPr>
+          <a:xfrm>
+            <a:off x="719882" y="5916216"/>
+            <a:ext cx="2700218" cy="788491"/>
           </a:xfrm>
           <a:prstGeom prst="rect">
             <a:avLst/>
@@ -10777,7 +10325,7 @@
                 <a:ea typeface="EB Garamond" pitchFamily="34" charset="-122"/>
                 <a:cs typeface="EB Garamond" pitchFamily="34" charset="-120"/>
               </a:rPr>
-              <a:t>“Não simplesmente ver. Viver.”</a:t>
+              <a:t>“Um bom produto ou um bom serviço não precisa apenas funcionar bem. Ele precisa gerar confiança.”</a:t>
             </a:r>
             <a:endParaRPr lang="en-US" sz="1500" dirty="0"/>
           </a:p>
@@ -10785,7 +10333,7 @@
       </p:sp>
       <p:sp>
         <p:nvSpPr>
-          <p:cNvPr id="15" name="Text 11"/>
+          <p:cNvPr id="50" name="Text 46"/>
           <p:cNvSpPr txBox="1"/>
           <p:nvPr/>
         </p:nvSpPr>
@@ -10819,7 +10367,7 @@
                 <a:ea typeface="Jost Light" pitchFamily="34" charset="-122"/>
                 <a:cs typeface="Jost Light" pitchFamily="34" charset="-120"/>
               </a:rPr>
-              <a:t>É nesse contexto que enxergamos uma possibilidade especial de aproximação entre nossas empresas.</a:t>
+              <a:t>Admiramos a Victorinox justamente porque reconhecemos na marca valores que também procuramos praticar:</a:t>
             </a:r>
             <a:endParaRPr lang="en-US" sz="1260" dirty="0"/>
           </a:p>
@@ -10827,469 +10375,427 @@
       </p:sp>
       <p:sp>
         <p:nvSpPr>
-          <p:cNvPr id="16" name="Text 12"/>
-          <p:cNvSpPr txBox="1"/>
-          <p:nvPr/>
-        </p:nvSpPr>
-        <p:spPr>
-          <a:xfrm>
-            <a:off x="4463802" y="2304157"/>
-            <a:ext cx="5553998" cy="735360"/>
-          </a:xfrm>
-          <a:prstGeom prst="rect">
-            <a:avLst/>
-          </a:prstGeom>
-          <a:noFill/>
-          <a:ln/>
-        </p:spPr>
-        <p:txBody>
-          <a:bodyPr wrap="square" lIns="0" tIns="0" rIns="0" bIns="0" rtlCol="0" anchor="t"/>
-          <a:lstStyle/>
-          <a:p>
-            <a:pPr algn="l" indent="0" marL="0">
-              <a:lnSpc>
-                <a:spcPts val="1929"/>
-              </a:lnSpc>
-              <a:buNone/>
-            </a:pPr>
-            <a:r>
-              <a:rPr lang="en-US" sz="1060" dirty="0">
-                <a:solidFill>
-                  <a:srgbClr val="5A6672"/>
+          <p:cNvPr id="51" name="Text 47"/>
+          <p:cNvSpPr txBox="1"/>
+          <p:nvPr/>
+        </p:nvSpPr>
+        <p:spPr>
+          <a:xfrm>
+            <a:off x="4679802" y="2415765"/>
+            <a:ext cx="578423" cy="274303"/>
+          </a:xfrm>
+          <a:prstGeom prst="rect">
+            <a:avLst/>
+          </a:prstGeom>
+          <a:noFill/>
+          <a:ln/>
+        </p:spPr>
+        <p:txBody>
+          <a:bodyPr wrap="square" lIns="0" tIns="0" rIns="0" bIns="0" rtlCol="0" anchor="t"/>
+          <a:lstStyle/>
+          <a:p>
+            <a:pPr algn="l" indent="0" marL="0">
+              <a:lnSpc>
+                <a:spcPts val="1056"/>
+              </a:lnSpc>
+              <a:buNone/>
+            </a:pPr>
+            <a:r>
+              <a:rPr lang="en-US" sz="880" spc="18" kern="0" dirty="0">
+                <a:solidFill>
+                  <a:srgbClr val="2E3A45"/>
                 </a:solidFill>
                 <a:latin typeface="Jost" pitchFamily="34" charset="0"/>
                 <a:ea typeface="Jost" pitchFamily="34" charset="-122"/>
                 <a:cs typeface="Jost" pitchFamily="34" charset="-120"/>
               </a:rPr>
-              <a:t>A Pousada Camburi recebe pessoas que viajam, exploram, descansam, praticam esportes, aproveitam a natureza, desfrutam da gastronomia e compartilham momentos com familiares e amigos. É um ambiente real de experiências.</a:t>
-            </a:r>
-            <a:endParaRPr lang="en-US" sz="1060" dirty="0"/>
-          </a:p>
-        </p:txBody>
-      </p:sp>
-      <p:sp>
-        <p:nvSpPr>
-          <p:cNvPr id="17" name="Text 13"/>
-          <p:cNvSpPr txBox="1"/>
-          <p:nvPr/>
-        </p:nvSpPr>
-        <p:spPr>
-          <a:xfrm>
-            <a:off x="4463802" y="3237458"/>
-            <a:ext cx="5553998" cy="980480"/>
-          </a:xfrm>
-          <a:prstGeom prst="rect">
-            <a:avLst/>
-          </a:prstGeom>
-          <a:noFill/>
-          <a:ln/>
-        </p:spPr>
-        <p:txBody>
-          <a:bodyPr wrap="square" lIns="0" tIns="0" rIns="0" bIns="0" rtlCol="0" anchor="t"/>
-          <a:lstStyle/>
-          <a:p>
-            <a:pPr algn="l" indent="0" marL="0">
-              <a:lnSpc>
-                <a:spcPts val="1929"/>
-              </a:lnSpc>
-              <a:buNone/>
-            </a:pPr>
-            <a:r>
-              <a:rPr lang="en-US" sz="1060" dirty="0">
-                <a:solidFill>
-                  <a:srgbClr val="5A6672"/>
+              <a:t>Qualidade</a:t>
+            </a:r>
+            <a:endParaRPr lang="en-US" sz="880" dirty="0"/>
+          </a:p>
+        </p:txBody>
+      </p:sp>
+      <p:sp>
+        <p:nvSpPr>
+          <p:cNvPr id="52" name="Text 48"/>
+          <p:cNvSpPr txBox="1"/>
+          <p:nvPr/>
+        </p:nvSpPr>
+        <p:spPr>
+          <a:xfrm>
+            <a:off x="5752407" y="2415765"/>
+            <a:ext cx="792438" cy="274303"/>
+          </a:xfrm>
+          <a:prstGeom prst="rect">
+            <a:avLst/>
+          </a:prstGeom>
+          <a:noFill/>
+          <a:ln/>
+        </p:spPr>
+        <p:txBody>
+          <a:bodyPr wrap="square" lIns="0" tIns="0" rIns="0" bIns="0" rtlCol="0" anchor="t"/>
+          <a:lstStyle/>
+          <a:p>
+            <a:pPr algn="l" indent="0" marL="0">
+              <a:lnSpc>
+                <a:spcPts val="1056"/>
+              </a:lnSpc>
+              <a:buNone/>
+            </a:pPr>
+            <a:r>
+              <a:rPr lang="en-US" sz="880" spc="18" kern="0" dirty="0">
+                <a:solidFill>
+                  <a:srgbClr val="2E3A45"/>
                 </a:solidFill>
                 <a:latin typeface="Jost" pitchFamily="34" charset="0"/>
                 <a:ea typeface="Jost" pitchFamily="34" charset="-122"/>
                 <a:cs typeface="Jost" pitchFamily="34" charset="-120"/>
               </a:rPr>
-              <a:t>Um lugar onde qualidade, funcionalidade, natureza, gastronomia, viagem e hospitalidade se encontram naturalmente. Por isso acreditamos que a pousada pode ser um ambiente particularmente interessante para que clientes, colaboradores, parceiros e convidados da Victorinox conheçam, utilizem e vivenciem seus produtos em situações reais.</a:t>
-            </a:r>
-            <a:endParaRPr lang="en-US" sz="1060" dirty="0"/>
-          </a:p>
-        </p:txBody>
-      </p:sp>
-      <p:sp>
-        <p:nvSpPr>
-          <p:cNvPr id="18" name="Text 14"/>
-          <p:cNvSpPr txBox="1"/>
-          <p:nvPr/>
-        </p:nvSpPr>
-        <p:spPr>
-          <a:xfrm>
-            <a:off x="4463802" y="5377755"/>
-            <a:ext cx="1593830" cy="114300"/>
-          </a:xfrm>
-          <a:prstGeom prst="rect">
-            <a:avLst/>
-          </a:prstGeom>
-          <a:noFill/>
-          <a:ln/>
-        </p:spPr>
-        <p:txBody>
-          <a:bodyPr wrap="square" lIns="0" tIns="0" rIns="0" bIns="0" rtlCol="0" anchor="t"/>
-          <a:lstStyle/>
-          <a:p>
-            <a:pPr algn="l" indent="0" marL="0">
-              <a:lnSpc>
-                <a:spcPts val="768"/>
-              </a:lnSpc>
-              <a:buNone/>
-            </a:pPr>
-            <a:r>
-              <a:rPr lang="en-US" sz="640" spc="154" kern="0" dirty="0">
-                <a:solidFill>
-                  <a:srgbClr val="C1121C"/>
-                </a:solidFill>
-                <a:latin typeface="Jost Medium" pitchFamily="34" charset="0"/>
-                <a:ea typeface="Jost Medium" pitchFamily="34" charset="-122"/>
-                <a:cs typeface="Jost Medium" pitchFamily="34" charset="-120"/>
-              </a:rPr>
-              <a:t>PÚBLICO</a:t>
-            </a:r>
-            <a:endParaRPr lang="en-US" sz="640" dirty="0"/>
-          </a:p>
-        </p:txBody>
-      </p:sp>
-      <p:sp>
-        <p:nvSpPr>
-          <p:cNvPr id="19" name="Text 15"/>
-          <p:cNvSpPr txBox="1"/>
-          <p:nvPr/>
-        </p:nvSpPr>
-        <p:spPr>
-          <a:xfrm>
-            <a:off x="4463802" y="5585520"/>
-            <a:ext cx="1593830" cy="471190"/>
-          </a:xfrm>
-          <a:prstGeom prst="rect">
-            <a:avLst/>
-          </a:prstGeom>
-          <a:noFill/>
-          <a:ln/>
-        </p:spPr>
-        <p:txBody>
-          <a:bodyPr wrap="square" lIns="0" tIns="0" rIns="0" bIns="0" rtlCol="0" anchor="t"/>
-          <a:lstStyle/>
-          <a:p>
-            <a:pPr algn="l" indent="0" marL="0">
-              <a:lnSpc>
-                <a:spcPts val="1856"/>
-              </a:lnSpc>
-              <a:buNone/>
-            </a:pPr>
-            <a:r>
-              <a:rPr lang="en-US" sz="1600" dirty="0">
-                <a:solidFill>
-                  <a:srgbClr val="16222E"/>
-                </a:solidFill>
-                <a:latin typeface="EB Garamond Medium" pitchFamily="34" charset="0"/>
-                <a:ea typeface="EB Garamond Medium" pitchFamily="34" charset="-122"/>
-                <a:cs typeface="EB Garamond Medium" pitchFamily="34" charset="-120"/>
-              </a:rPr>
-              <a:t>Quem já viaja e explora</a:t>
-            </a:r>
-            <a:endParaRPr lang="en-US" sz="1600" dirty="0"/>
-          </a:p>
-        </p:txBody>
-      </p:sp>
-      <p:sp>
-        <p:nvSpPr>
-          <p:cNvPr id="20" name="Text 16"/>
-          <p:cNvSpPr txBox="1"/>
-          <p:nvPr/>
-        </p:nvSpPr>
-        <p:spPr>
-          <a:xfrm>
-            <a:off x="4463802" y="6135886"/>
-            <a:ext cx="1593830" cy="379214"/>
-          </a:xfrm>
-          <a:prstGeom prst="rect">
-            <a:avLst/>
-          </a:prstGeom>
-          <a:noFill/>
-          <a:ln/>
-        </p:spPr>
-        <p:txBody>
-          <a:bodyPr wrap="square" lIns="0" tIns="0" rIns="0" bIns="0" rtlCol="0" anchor="t"/>
-          <a:lstStyle/>
-          <a:p>
-            <a:pPr algn="l" indent="0" marL="0">
-              <a:lnSpc>
-                <a:spcPts val="1494"/>
-              </a:lnSpc>
-              <a:buNone/>
-            </a:pPr>
-            <a:r>
-              <a:rPr lang="en-US" sz="900" dirty="0">
-                <a:solidFill>
-                  <a:srgbClr val="5A6672"/>
+              <a:t>Confiabilidade</a:t>
+            </a:r>
+            <a:endParaRPr lang="en-US" sz="880" dirty="0"/>
+          </a:p>
+        </p:txBody>
+      </p:sp>
+      <p:sp>
+        <p:nvSpPr>
+          <p:cNvPr id="53" name="Text 49"/>
+          <p:cNvSpPr txBox="1"/>
+          <p:nvPr/>
+        </p:nvSpPr>
+        <p:spPr>
+          <a:xfrm>
+            <a:off x="7039026" y="2415765"/>
+            <a:ext cx="703737" cy="274303"/>
+          </a:xfrm>
+          <a:prstGeom prst="rect">
+            <a:avLst/>
+          </a:prstGeom>
+          <a:noFill/>
+          <a:ln/>
+        </p:spPr>
+        <p:txBody>
+          <a:bodyPr wrap="square" lIns="0" tIns="0" rIns="0" bIns="0" rtlCol="0" anchor="t"/>
+          <a:lstStyle/>
+          <a:p>
+            <a:pPr algn="l" indent="0" marL="0">
+              <a:lnSpc>
+                <a:spcPts val="1056"/>
+              </a:lnSpc>
+              <a:buNone/>
+            </a:pPr>
+            <a:r>
+              <a:rPr lang="en-US" sz="880" spc="18" kern="0" dirty="0">
+                <a:solidFill>
+                  <a:srgbClr val="2E3A45"/>
                 </a:solidFill>
                 <a:latin typeface="Jost" pitchFamily="34" charset="0"/>
                 <a:ea typeface="Jost" pitchFamily="34" charset="-122"/>
                 <a:cs typeface="Jost" pitchFamily="34" charset="-120"/>
               </a:rPr>
-              <a:t>Pessoas em movimento, na praia, na trilha e à mesa.</a:t>
-            </a:r>
-            <a:endParaRPr lang="en-US" sz="900" dirty="0"/>
-          </a:p>
-        </p:txBody>
-      </p:sp>
-      <p:sp>
-        <p:nvSpPr>
-          <p:cNvPr id="21" name="Text 17"/>
-          <p:cNvSpPr txBox="1"/>
-          <p:nvPr/>
-        </p:nvSpPr>
-        <p:spPr>
-          <a:xfrm>
-            <a:off x="6443811" y="5377755"/>
-            <a:ext cx="1593830" cy="114300"/>
-          </a:xfrm>
-          <a:prstGeom prst="rect">
-            <a:avLst/>
-          </a:prstGeom>
-          <a:noFill/>
-          <a:ln/>
-        </p:spPr>
-        <p:txBody>
-          <a:bodyPr wrap="square" lIns="0" tIns="0" rIns="0" bIns="0" rtlCol="0" anchor="t"/>
-          <a:lstStyle/>
-          <a:p>
-            <a:pPr algn="l" indent="0" marL="0">
-              <a:lnSpc>
-                <a:spcPts val="768"/>
-              </a:lnSpc>
-              <a:buNone/>
-            </a:pPr>
-            <a:r>
-              <a:rPr lang="en-US" sz="640" spc="154" kern="0" dirty="0">
-                <a:solidFill>
-                  <a:srgbClr val="C1121C"/>
-                </a:solidFill>
-                <a:latin typeface="Jost Medium" pitchFamily="34" charset="0"/>
-                <a:ea typeface="Jost Medium" pitchFamily="34" charset="-122"/>
-                <a:cs typeface="Jost Medium" pitchFamily="34" charset="-120"/>
-              </a:rPr>
-              <a:t>CONTEXTO</a:t>
-            </a:r>
-            <a:endParaRPr lang="en-US" sz="640" dirty="0"/>
-          </a:p>
-        </p:txBody>
-      </p:sp>
-      <p:sp>
-        <p:nvSpPr>
-          <p:cNvPr id="22" name="Text 18"/>
-          <p:cNvSpPr txBox="1"/>
-          <p:nvPr/>
-        </p:nvSpPr>
-        <p:spPr>
-          <a:xfrm>
-            <a:off x="6443811" y="5585520"/>
-            <a:ext cx="1593830" cy="471190"/>
-          </a:xfrm>
-          <a:prstGeom prst="rect">
-            <a:avLst/>
-          </a:prstGeom>
-          <a:noFill/>
-          <a:ln/>
-        </p:spPr>
-        <p:txBody>
-          <a:bodyPr wrap="square" lIns="0" tIns="0" rIns="0" bIns="0" rtlCol="0" anchor="t"/>
-          <a:lstStyle/>
-          <a:p>
-            <a:pPr algn="l" indent="0" marL="0">
-              <a:lnSpc>
-                <a:spcPts val="1856"/>
-              </a:lnSpc>
-              <a:buNone/>
-            </a:pPr>
-            <a:r>
-              <a:rPr lang="en-US" sz="1600" dirty="0">
-                <a:solidFill>
-                  <a:srgbClr val="16222E"/>
-                </a:solidFill>
-                <a:latin typeface="EB Garamond Medium" pitchFamily="34" charset="0"/>
-                <a:ea typeface="EB Garamond Medium" pitchFamily="34" charset="-122"/>
-                <a:cs typeface="EB Garamond Medium" pitchFamily="34" charset="-120"/>
-              </a:rPr>
-              <a:t>Uso real, não vitrine</a:t>
-            </a:r>
-            <a:endParaRPr lang="en-US" sz="1600" dirty="0"/>
-          </a:p>
-        </p:txBody>
-      </p:sp>
-      <p:sp>
-        <p:nvSpPr>
-          <p:cNvPr id="23" name="Text 19"/>
-          <p:cNvSpPr txBox="1"/>
-          <p:nvPr/>
-        </p:nvSpPr>
-        <p:spPr>
-          <a:xfrm>
-            <a:off x="6443811" y="6135886"/>
-            <a:ext cx="1593830" cy="568821"/>
-          </a:xfrm>
-          <a:prstGeom prst="rect">
-            <a:avLst/>
-          </a:prstGeom>
-          <a:noFill/>
-          <a:ln/>
-        </p:spPr>
-        <p:txBody>
-          <a:bodyPr wrap="square" lIns="0" tIns="0" rIns="0" bIns="0" rtlCol="0" anchor="t"/>
-          <a:lstStyle/>
-          <a:p>
-            <a:pPr algn="l" indent="0" marL="0">
-              <a:lnSpc>
-                <a:spcPts val="1494"/>
-              </a:lnSpc>
-              <a:buNone/>
-            </a:pPr>
-            <a:r>
-              <a:rPr lang="en-US" sz="900" dirty="0">
-                <a:solidFill>
-                  <a:srgbClr val="5A6672"/>
+              <a:t>Durabilidade</a:t>
+            </a:r>
+            <a:endParaRPr lang="en-US" sz="880" dirty="0"/>
+          </a:p>
+        </p:txBody>
+      </p:sp>
+      <p:sp>
+        <p:nvSpPr>
+          <p:cNvPr id="54" name="Text 50"/>
+          <p:cNvSpPr txBox="1"/>
+          <p:nvPr/>
+        </p:nvSpPr>
+        <p:spPr>
+          <a:xfrm>
+            <a:off x="8236943" y="2415765"/>
+            <a:ext cx="815506" cy="274303"/>
+          </a:xfrm>
+          <a:prstGeom prst="rect">
+            <a:avLst/>
+          </a:prstGeom>
+          <a:noFill/>
+          <a:ln/>
+        </p:spPr>
+        <p:txBody>
+          <a:bodyPr wrap="square" lIns="0" tIns="0" rIns="0" bIns="0" rtlCol="0" anchor="t"/>
+          <a:lstStyle/>
+          <a:p>
+            <a:pPr algn="l" indent="0" marL="0">
+              <a:lnSpc>
+                <a:spcPts val="1056"/>
+              </a:lnSpc>
+              <a:buNone/>
+            </a:pPr>
+            <a:r>
+              <a:rPr lang="en-US" sz="880" spc="18" kern="0" dirty="0">
+                <a:solidFill>
+                  <a:srgbClr val="2E3A45"/>
                 </a:solidFill>
                 <a:latin typeface="Jost" pitchFamily="34" charset="0"/>
                 <a:ea typeface="Jost" pitchFamily="34" charset="-122"/>
                 <a:cs typeface="Jost" pitchFamily="34" charset="-120"/>
               </a:rPr>
-              <a:t>O produto aparece na situação em que a sua função faz sentido.</a:t>
-            </a:r>
-            <a:endParaRPr lang="en-US" sz="900" dirty="0"/>
-          </a:p>
-        </p:txBody>
-      </p:sp>
-      <p:sp>
-        <p:nvSpPr>
-          <p:cNvPr id="24" name="Text 20"/>
-          <p:cNvSpPr txBox="1"/>
-          <p:nvPr/>
-        </p:nvSpPr>
-        <p:spPr>
-          <a:xfrm>
-            <a:off x="8423821" y="5377755"/>
-            <a:ext cx="1593830" cy="114300"/>
-          </a:xfrm>
-          <a:prstGeom prst="rect">
-            <a:avLst/>
-          </a:prstGeom>
-          <a:noFill/>
-          <a:ln/>
-        </p:spPr>
-        <p:txBody>
-          <a:bodyPr wrap="square" lIns="0" tIns="0" rIns="0" bIns="0" rtlCol="0" anchor="t"/>
-          <a:lstStyle/>
-          <a:p>
-            <a:pPr algn="l" indent="0" marL="0">
-              <a:lnSpc>
-                <a:spcPts val="768"/>
-              </a:lnSpc>
-              <a:buNone/>
-            </a:pPr>
-            <a:r>
-              <a:rPr lang="en-US" sz="640" spc="154" kern="0" dirty="0">
-                <a:solidFill>
-                  <a:srgbClr val="C1121C"/>
-                </a:solidFill>
-                <a:latin typeface="Jost Medium" pitchFamily="34" charset="0"/>
-                <a:ea typeface="Jost Medium" pitchFamily="34" charset="-122"/>
-                <a:cs typeface="Jost Medium" pitchFamily="34" charset="-120"/>
-              </a:rPr>
-              <a:t>ENCONTRO</a:t>
-            </a:r>
-            <a:endParaRPr lang="en-US" sz="640" dirty="0"/>
-          </a:p>
-        </p:txBody>
-      </p:sp>
-      <p:sp>
-        <p:nvSpPr>
-          <p:cNvPr id="25" name="Text 21"/>
-          <p:cNvSpPr txBox="1"/>
-          <p:nvPr/>
-        </p:nvSpPr>
-        <p:spPr>
-          <a:xfrm>
-            <a:off x="8423821" y="5585520"/>
-            <a:ext cx="1593830" cy="235595"/>
-          </a:xfrm>
-          <a:prstGeom prst="rect">
-            <a:avLst/>
-          </a:prstGeom>
-          <a:noFill/>
-          <a:ln/>
-        </p:spPr>
-        <p:txBody>
-          <a:bodyPr wrap="square" lIns="0" tIns="0" rIns="0" bIns="0" rtlCol="0" anchor="t"/>
-          <a:lstStyle/>
-          <a:p>
-            <a:pPr algn="l" indent="0" marL="0">
-              <a:lnSpc>
-                <a:spcPts val="1856"/>
-              </a:lnSpc>
-              <a:buNone/>
-            </a:pPr>
-            <a:r>
-              <a:rPr lang="en-US" sz="1600" dirty="0">
-                <a:solidFill>
-                  <a:srgbClr val="16222E"/>
-                </a:solidFill>
-                <a:latin typeface="EB Garamond Medium" pitchFamily="34" charset="0"/>
-                <a:ea typeface="EB Garamond Medium" pitchFamily="34" charset="-122"/>
-                <a:cs typeface="EB Garamond Medium" pitchFamily="34" charset="-120"/>
-              </a:rPr>
-              <a:t>Marca e lugar</a:t>
-            </a:r>
-            <a:endParaRPr lang="en-US" sz="1600" dirty="0"/>
-          </a:p>
-        </p:txBody>
-      </p:sp>
-      <p:sp>
-        <p:nvSpPr>
-          <p:cNvPr id="26" name="Text 22"/>
-          <p:cNvSpPr txBox="1"/>
-          <p:nvPr/>
-        </p:nvSpPr>
-        <p:spPr>
-          <a:xfrm>
-            <a:off x="8423821" y="5900291"/>
-            <a:ext cx="1593830" cy="568821"/>
-          </a:xfrm>
-          <a:prstGeom prst="rect">
-            <a:avLst/>
-          </a:prstGeom>
-          <a:noFill/>
-          <a:ln/>
-        </p:spPr>
-        <p:txBody>
-          <a:bodyPr wrap="square" lIns="0" tIns="0" rIns="0" bIns="0" rtlCol="0" anchor="t"/>
-          <a:lstStyle/>
-          <a:p>
-            <a:pPr algn="l" indent="0" marL="0">
-              <a:lnSpc>
-                <a:spcPts val="1494"/>
-              </a:lnSpc>
-              <a:buNone/>
-            </a:pPr>
-            <a:r>
-              <a:rPr lang="en-US" sz="900" dirty="0">
-                <a:solidFill>
-                  <a:srgbClr val="5A6672"/>
+              <a:t>Funcionalidade</a:t>
+            </a:r>
+            <a:endParaRPr lang="en-US" sz="880" dirty="0"/>
+          </a:p>
+        </p:txBody>
+      </p:sp>
+      <p:sp>
+        <p:nvSpPr>
+          <p:cNvPr id="55" name="Text 51"/>
+          <p:cNvSpPr txBox="1"/>
+          <p:nvPr/>
+        </p:nvSpPr>
+        <p:spPr>
+          <a:xfrm>
+            <a:off x="4679802" y="2891569"/>
+            <a:ext cx="1109293" cy="274303"/>
+          </a:xfrm>
+          <a:prstGeom prst="rect">
+            <a:avLst/>
+          </a:prstGeom>
+          <a:noFill/>
+          <a:ln/>
+        </p:spPr>
+        <p:txBody>
+          <a:bodyPr wrap="square" lIns="0" tIns="0" rIns="0" bIns="0" rtlCol="0" anchor="t"/>
+          <a:lstStyle/>
+          <a:p>
+            <a:pPr algn="l" indent="0" marL="0">
+              <a:lnSpc>
+                <a:spcPts val="1056"/>
+              </a:lnSpc>
+              <a:buNone/>
+            </a:pPr>
+            <a:r>
+              <a:rPr lang="en-US" sz="880" spc="18" kern="0" dirty="0">
+                <a:solidFill>
+                  <a:srgbClr val="2E3A45"/>
                 </a:solidFill>
                 <a:latin typeface="Jost" pitchFamily="34" charset="0"/>
                 <a:ea typeface="Jost" pitchFamily="34" charset="-122"/>
                 <a:cs typeface="Jost" pitchFamily="34" charset="-120"/>
               </a:rPr>
-              <a:t>Um ambiente onde os valores das duas empresas se reconhecem.</a:t>
-            </a:r>
-            <a:endParaRPr lang="en-US" sz="900" dirty="0"/>
-          </a:p>
-        </p:txBody>
-      </p:sp>
-      <p:sp>
-        <p:nvSpPr>
-          <p:cNvPr id="27" name="Text 23"/>
+              <a:t>Atenção aos detalhes</a:t>
+            </a:r>
+            <a:endParaRPr lang="en-US" sz="880" dirty="0"/>
+          </a:p>
+        </p:txBody>
+      </p:sp>
+      <p:sp>
+        <p:nvSpPr>
+          <p:cNvPr id="56" name="Text 52"/>
+          <p:cNvSpPr txBox="1"/>
+          <p:nvPr/>
+        </p:nvSpPr>
+        <p:spPr>
+          <a:xfrm>
+            <a:off x="6283277" y="2891569"/>
+            <a:ext cx="1253805" cy="274303"/>
+          </a:xfrm>
+          <a:prstGeom prst="rect">
+            <a:avLst/>
+          </a:prstGeom>
+          <a:noFill/>
+          <a:ln/>
+        </p:spPr>
+        <p:txBody>
+          <a:bodyPr wrap="square" lIns="0" tIns="0" rIns="0" bIns="0" rtlCol="0" anchor="t"/>
+          <a:lstStyle/>
+          <a:p>
+            <a:pPr algn="l" indent="0" marL="0">
+              <a:lnSpc>
+                <a:spcPts val="1056"/>
+              </a:lnSpc>
+              <a:buNone/>
+            </a:pPr>
+            <a:r>
+              <a:rPr lang="en-US" sz="880" spc="18" kern="0" dirty="0">
+                <a:solidFill>
+                  <a:srgbClr val="2E3A45"/>
+                </a:solidFill>
+                <a:latin typeface="Jost" pitchFamily="34" charset="0"/>
+                <a:ea typeface="Jost" pitchFamily="34" charset="-122"/>
+                <a:cs typeface="Jost" pitchFamily="34" charset="-120"/>
+              </a:rPr>
+              <a:t>Respeito ao consumidor</a:t>
+            </a:r>
+            <a:endParaRPr lang="en-US" sz="880" dirty="0"/>
+          </a:p>
+        </p:txBody>
+      </p:sp>
+      <p:sp>
+        <p:nvSpPr>
+          <p:cNvPr id="57" name="Text 53"/>
+          <p:cNvSpPr txBox="1"/>
+          <p:nvPr/>
+        </p:nvSpPr>
+        <p:spPr>
+          <a:xfrm>
+            <a:off x="4679802" y="3367372"/>
+            <a:ext cx="2202138" cy="274303"/>
+          </a:xfrm>
+          <a:prstGeom prst="rect">
+            <a:avLst/>
+          </a:prstGeom>
+          <a:noFill/>
+          <a:ln/>
+        </p:spPr>
+        <p:txBody>
+          <a:bodyPr wrap="square" lIns="0" tIns="0" rIns="0" bIns="0" rtlCol="0" anchor="t"/>
+          <a:lstStyle/>
+          <a:p>
+            <a:pPr algn="l" indent="0" marL="0">
+              <a:lnSpc>
+                <a:spcPts val="1056"/>
+              </a:lnSpc>
+              <a:buNone/>
+            </a:pPr>
+            <a:r>
+              <a:rPr lang="en-US" sz="880" spc="18" kern="0" dirty="0">
+                <a:solidFill>
+                  <a:srgbClr val="2E3A45"/>
+                </a:solidFill>
+                <a:latin typeface="Jost" pitchFamily="34" charset="0"/>
+                <a:ea typeface="Jost" pitchFamily="34" charset="-122"/>
+                <a:cs typeface="Jost" pitchFamily="34" charset="-120"/>
+              </a:rPr>
+              <a:t>Uma história construída ao longo do tempo</a:t>
+            </a:r>
+            <a:endParaRPr lang="en-US" sz="880" dirty="0"/>
+          </a:p>
+        </p:txBody>
+      </p:sp>
+      <p:sp>
+        <p:nvSpPr>
+          <p:cNvPr id="58" name="Text 54"/>
+          <p:cNvSpPr txBox="1"/>
+          <p:nvPr/>
+        </p:nvSpPr>
+        <p:spPr>
+          <a:xfrm>
+            <a:off x="4463802" y="3965674"/>
+            <a:ext cx="5553998" cy="490240"/>
+          </a:xfrm>
+          <a:prstGeom prst="rect">
+            <a:avLst/>
+          </a:prstGeom>
+          <a:noFill/>
+          <a:ln/>
+        </p:spPr>
+        <p:txBody>
+          <a:bodyPr wrap="square" lIns="0" tIns="0" rIns="0" bIns="0" rtlCol="0" anchor="t"/>
+          <a:lstStyle/>
+          <a:p>
+            <a:pPr algn="l" indent="0" marL="0">
+              <a:lnSpc>
+                <a:spcPts val="1929"/>
+              </a:lnSpc>
+              <a:buNone/>
+            </a:pPr>
+            <a:r>
+              <a:rPr lang="en-US" sz="1060" dirty="0">
+                <a:solidFill>
+                  <a:srgbClr val="5A6672"/>
+                </a:solidFill>
+                <a:latin typeface="Jost" pitchFamily="34" charset="0"/>
+                <a:ea typeface="Jost" pitchFamily="34" charset="-122"/>
+                <a:cs typeface="Jost" pitchFamily="34" charset="-120"/>
+              </a:rPr>
+              <a:t>A Victorinox possui uma tradição centenária e tornou seus produtos companheiros de pessoas em viagens, aventuras, trabalho e momentos cotidianos.</a:t>
+            </a:r>
+            <a:endParaRPr lang="en-US" sz="1060" dirty="0"/>
+          </a:p>
+        </p:txBody>
+      </p:sp>
+      <p:sp>
+        <p:nvSpPr>
+          <p:cNvPr id="59" name="Text 55"/>
+          <p:cNvSpPr txBox="1"/>
+          <p:nvPr/>
+        </p:nvSpPr>
+        <p:spPr>
+          <a:xfrm>
+            <a:off x="4463802" y="4653855"/>
+            <a:ext cx="5553998" cy="735360"/>
+          </a:xfrm>
+          <a:prstGeom prst="rect">
+            <a:avLst/>
+          </a:prstGeom>
+          <a:noFill/>
+          <a:ln/>
+        </p:spPr>
+        <p:txBody>
+          <a:bodyPr wrap="square" lIns="0" tIns="0" rIns="0" bIns="0" rtlCol="0" anchor="t"/>
+          <a:lstStyle/>
+          <a:p>
+            <a:pPr algn="l" indent="0" marL="0">
+              <a:lnSpc>
+                <a:spcPts val="1929"/>
+              </a:lnSpc>
+              <a:buNone/>
+            </a:pPr>
+            <a:r>
+              <a:rPr lang="en-US" sz="1060" dirty="0">
+                <a:solidFill>
+                  <a:srgbClr val="5A6672"/>
+                </a:solidFill>
+                <a:latin typeface="Jost" pitchFamily="34" charset="0"/>
+                <a:ea typeface="Jost" pitchFamily="34" charset="-122"/>
+                <a:cs typeface="Jost" pitchFamily="34" charset="-120"/>
+              </a:rPr>
+              <a:t>A Pousada Camburi possui uma história muito mais jovem, mas compartilha uma convicção semelhante: um bom produto ou um bom serviço não precisa apenas funcionar bem. Ele precisa gerar confiança.</a:t>
+            </a:r>
+            <a:endParaRPr lang="en-US" sz="1060" dirty="0"/>
+          </a:p>
+        </p:txBody>
+      </p:sp>
+      <p:sp>
+        <p:nvSpPr>
+          <p:cNvPr id="60" name="Text 56"/>
+          <p:cNvSpPr txBox="1"/>
+          <p:nvPr/>
+        </p:nvSpPr>
+        <p:spPr>
+          <a:xfrm>
+            <a:off x="4463802" y="6424017"/>
+            <a:ext cx="5553998" cy="280690"/>
+          </a:xfrm>
+          <a:prstGeom prst="rect">
+            <a:avLst/>
+          </a:prstGeom>
+          <a:noFill/>
+          <a:ln/>
+        </p:spPr>
+        <p:txBody>
+          <a:bodyPr wrap="square" lIns="0" tIns="0" rIns="0" bIns="0" rtlCol="0" anchor="t"/>
+          <a:lstStyle/>
+          <a:p>
+            <a:pPr algn="l" indent="0" marL="0">
+              <a:lnSpc>
+                <a:spcPts val="2210"/>
+              </a:lnSpc>
+              <a:buNone/>
+            </a:pPr>
+            <a:r>
+              <a:rPr lang="en-US" sz="1700" dirty="0">
+                <a:solidFill>
+                  <a:srgbClr val="16222E"/>
+                </a:solidFill>
+                <a:latin typeface="EB Garamond" pitchFamily="34" charset="0"/>
+                <a:ea typeface="EB Garamond" pitchFamily="34" charset="-122"/>
+                <a:cs typeface="EB Garamond" pitchFamily="34" charset="-120"/>
+              </a:rPr>
+              <a:t>E confiança é aquilo que faz uma pessoa voltar.</a:t>
+            </a:r>
+            <a:endParaRPr lang="en-US" sz="1700" dirty="0"/>
+          </a:p>
+        </p:txBody>
+      </p:sp>
+      <p:sp>
+        <p:nvSpPr>
+          <p:cNvPr id="61" name="Text 57"/>
           <p:cNvSpPr txBox="1"/>
           <p:nvPr/>
         </p:nvSpPr>
@@ -11449,7 +10955,7 @@
         </p:nvSpPr>
         <p:spPr>
           <a:xfrm>
-            <a:off x="4463802" y="5315843"/>
+            <a:off x="4463802" y="6126510"/>
             <a:ext cx="5508278" cy="9525"/>
           </a:xfrm>
           <a:prstGeom prst="rect">
@@ -11649,7 +11155,7 @@
                 <a:ea typeface="Jost Medium" pitchFamily="34" charset="-122"/>
                 <a:cs typeface="Jost Medium" pitchFamily="34" charset="-120"/>
               </a:rPr>
-              <a:t>O CONVITE</a:t>
+              <a:t>OPORTUNIDADE</a:t>
             </a:r>
             <a:endParaRPr lang="en-US" sz="660" dirty="0"/>
           </a:p>
@@ -11664,7 +11170,7 @@
         <p:spPr>
           <a:xfrm>
             <a:off x="719882" y="1617464"/>
-            <a:ext cx="2700218" cy="390823"/>
+            <a:ext cx="2700218" cy="781645"/>
           </a:xfrm>
           <a:prstGeom prst="rect">
             <a:avLst/>
@@ -11691,7 +11197,7 @@
                 <a:ea typeface="EB Garamond Medium" pitchFamily="34" charset="-122"/>
                 <a:cs typeface="EB Garamond Medium" pitchFamily="34" charset="-120"/>
               </a:rPr>
-              <a:t>Nosso convite</a:t>
+              <a:t>Um ambiente de experiência</a:t>
             </a:r>
             <a:endParaRPr lang="en-US" sz="2700" dirty="0"/>
           </a:p>
@@ -11733,7 +11239,7 @@
                 <a:ea typeface="EB Garamond" pitchFamily="34" charset="-122"/>
                 <a:cs typeface="EB Garamond" pitchFamily="34" charset="-120"/>
               </a:rPr>
-              <a:t>“Uma marca que acompanha pessoas. Um lugar que recebe pessoas.”</a:t>
+              <a:t>“É um ambiente real de experiências.”</a:t>
             </a:r>
             <a:endParaRPr lang="en-US" sz="1500" dirty="0"/>
           </a:p>
@@ -11775,7 +11281,7 @@
                 <a:ea typeface="Jost Light" pitchFamily="34" charset="-122"/>
                 <a:cs typeface="Jost Light" pitchFamily="34" charset="-120"/>
               </a:rPr>
-              <a:t>Gostaríamos de apresentar oficialmente a Pousada Camburi à Victorinox Brasil e abrir uma conversa sobre possibilidades de relacionamento entre nossas empresas.</a:t>
+              <a:t>É nesse contexto que enxergamos uma possibilidade especial de aproximação entre nossas empresas.</a:t>
             </a:r>
             <a:endParaRPr lang="en-US" sz="1260" dirty="0"/>
           </a:p>
@@ -11790,7 +11296,7 @@
         <p:spPr>
           <a:xfrm>
             <a:off x="4463802" y="2304157"/>
-            <a:ext cx="5553998" cy="490240"/>
+            <a:ext cx="5553998" cy="735360"/>
           </a:xfrm>
           <a:prstGeom prst="rect">
             <a:avLst/>
@@ -11817,7 +11323,7 @@
                 <a:ea typeface="Jost" pitchFamily="34" charset="-122"/>
                 <a:cs typeface="Jost" pitchFamily="34" charset="-120"/>
               </a:rPr>
-              <a:t>Temos muito respeito pela história e pelo posicionamento da Victorinox, e acreditamos que existe uma afinidade verdadeira entre nossas marcas.</a:t>
+              <a:t>A Pousada Camburi recebe pessoas que viajam, exploram, descansam, praticam esportes, aproveitam a natureza, desfrutam da gastronomia e compartilham momentos com familiares e amigos.</a:t>
             </a:r>
             <a:endParaRPr lang="en-US" sz="1060" dirty="0"/>
           </a:p>
@@ -11831,8 +11337,8 @@
         </p:nvSpPr>
         <p:spPr>
           <a:xfrm>
-            <a:off x="4463802" y="2992338"/>
-            <a:ext cx="5553998" cy="735360"/>
+            <a:off x="4463802" y="3237458"/>
+            <a:ext cx="5553998" cy="490240"/>
           </a:xfrm>
           <a:prstGeom prst="rect">
             <a:avLst/>
@@ -11859,7 +11365,7 @@
                 <a:ea typeface="Jost" pitchFamily="34" charset="-122"/>
                 <a:cs typeface="Jost" pitchFamily="34" charset="-120"/>
               </a:rPr>
-              <a:t>A Pousada Camburi tem uma história construída com pessoas. A Victorinox tem uma história construída com produtos que acompanham pessoas. Talvez seja justamente aí que exista uma oportunidade — e uma experiência capaz de unir as duas.</a:t>
+              <a:t>Um lugar onde qualidade, funcionalidade, natureza, gastronomia, viagem e hospitalidade podem se encontrar naturalmente.</a:t>
             </a:r>
             <a:endParaRPr lang="en-US" sz="1060" dirty="0"/>
           </a:p>
@@ -11901,7 +11407,7 @@
                 <a:ea typeface="Jost" pitchFamily="34" charset="-122"/>
                 <a:cs typeface="Jost" pitchFamily="34" charset="-120"/>
               </a:rPr>
-              <a:t>Será uma grande satisfação receber representantes da Victorinox em Camburi, apresentar pessoalmente nossa pousada, nossa equipe e nossa história, e conversar sobre o que podemos construir juntos.</a:t>
+              <a:t>Por isso, acreditamos que a Pousada Camburi pode representar um ambiente particularmente interessante para que clientes, colaboradores, parceiros e convidados da Victorinox possam conhecer, utilizar e vivenciar seus produtos dentro de situações reais.</a:t>
             </a:r>
             <a:endParaRPr lang="en-US" sz="1060" dirty="0"/>
           </a:p>
@@ -11915,379 +11421,43 @@
         </p:nvSpPr>
         <p:spPr>
           <a:xfrm>
-            <a:off x="4463802" y="5613350"/>
-            <a:ext cx="1593830" cy="114300"/>
-          </a:xfrm>
-          <a:prstGeom prst="rect">
-            <a:avLst/>
-          </a:prstGeom>
-          <a:noFill/>
-          <a:ln/>
-        </p:spPr>
-        <p:txBody>
-          <a:bodyPr wrap="square" lIns="0" tIns="0" rIns="0" bIns="0" rtlCol="0" anchor="t"/>
-          <a:lstStyle/>
-          <a:p>
-            <a:pPr algn="l" indent="0" marL="0">
-              <a:lnSpc>
-                <a:spcPts val="768"/>
-              </a:lnSpc>
-              <a:buNone/>
-            </a:pPr>
-            <a:r>
-              <a:rPr lang="en-US" sz="640" spc="154" kern="0" dirty="0">
-                <a:solidFill>
-                  <a:srgbClr val="C1121C"/>
-                </a:solidFill>
-                <a:latin typeface="Jost Medium" pitchFamily="34" charset="0"/>
-                <a:ea typeface="Jost Medium" pitchFamily="34" charset="-122"/>
-                <a:cs typeface="Jost Medium" pitchFamily="34" charset="-120"/>
-              </a:rPr>
-              <a:t>PRIMEIRO PASSO</a:t>
-            </a:r>
-            <a:endParaRPr lang="en-US" sz="640" dirty="0"/>
+            <a:off x="4463802" y="6424017"/>
+            <a:ext cx="5553998" cy="280690"/>
+          </a:xfrm>
+          <a:prstGeom prst="rect">
+            <a:avLst/>
+          </a:prstGeom>
+          <a:noFill/>
+          <a:ln/>
+        </p:spPr>
+        <p:txBody>
+          <a:bodyPr wrap="square" lIns="0" tIns="0" rIns="0" bIns="0" rtlCol="0" anchor="t"/>
+          <a:lstStyle/>
+          <a:p>
+            <a:pPr algn="l" indent="0" marL="0">
+              <a:lnSpc>
+                <a:spcPts val="2210"/>
+              </a:lnSpc>
+              <a:buNone/>
+            </a:pPr>
+            <a:r>
+              <a:rPr lang="en-US" sz="1700" dirty="0">
+                <a:solidFill>
+                  <a:srgbClr val="16222E"/>
+                </a:solidFill>
+                <a:latin typeface="EB Garamond" pitchFamily="34" charset="0"/>
+                <a:ea typeface="EB Garamond" pitchFamily="34" charset="-122"/>
+                <a:cs typeface="EB Garamond" pitchFamily="34" charset="-120"/>
+              </a:rPr>
+              <a:t>Não simplesmente ver. Viver.</a:t>
+            </a:r>
+            <a:endParaRPr lang="en-US" sz="1700" dirty="0"/>
           </a:p>
         </p:txBody>
       </p:sp>
       <p:sp>
         <p:nvSpPr>
           <p:cNvPr id="20" name="Text 16"/>
-          <p:cNvSpPr txBox="1"/>
-          <p:nvPr/>
-        </p:nvSpPr>
-        <p:spPr>
-          <a:xfrm>
-            <a:off x="4463802" y="5821114"/>
-            <a:ext cx="1593830" cy="235595"/>
-          </a:xfrm>
-          <a:prstGeom prst="rect">
-            <a:avLst/>
-          </a:prstGeom>
-          <a:noFill/>
-          <a:ln/>
-        </p:spPr>
-        <p:txBody>
-          <a:bodyPr wrap="square" lIns="0" tIns="0" rIns="0" bIns="0" rtlCol="0" anchor="t"/>
-          <a:lstStyle/>
-          <a:p>
-            <a:pPr algn="l" indent="0" marL="0">
-              <a:lnSpc>
-                <a:spcPts val="1856"/>
-              </a:lnSpc>
-              <a:buNone/>
-            </a:pPr>
-            <a:r>
-              <a:rPr lang="en-US" sz="1600" dirty="0">
-                <a:solidFill>
-                  <a:srgbClr val="16222E"/>
-                </a:solidFill>
-                <a:latin typeface="EB Garamond Medium" pitchFamily="34" charset="0"/>
-                <a:ea typeface="EB Garamond Medium" pitchFamily="34" charset="-122"/>
-                <a:cs typeface="EB Garamond Medium" pitchFamily="34" charset="-120"/>
-              </a:rPr>
-              <a:t>Uma conversa</a:t>
-            </a:r>
-            <a:endParaRPr lang="en-US" sz="1600" dirty="0"/>
-          </a:p>
-        </p:txBody>
-      </p:sp>
-      <p:sp>
-        <p:nvSpPr>
-          <p:cNvPr id="21" name="Text 17"/>
-          <p:cNvSpPr txBox="1"/>
-          <p:nvPr/>
-        </p:nvSpPr>
-        <p:spPr>
-          <a:xfrm>
-            <a:off x="4463802" y="6135886"/>
-            <a:ext cx="1593830" cy="568821"/>
-          </a:xfrm>
-          <a:prstGeom prst="rect">
-            <a:avLst/>
-          </a:prstGeom>
-          <a:noFill/>
-          <a:ln/>
-        </p:spPr>
-        <p:txBody>
-          <a:bodyPr wrap="square" lIns="0" tIns="0" rIns="0" bIns="0" rtlCol="0" anchor="t"/>
-          <a:lstStyle/>
-          <a:p>
-            <a:pPr algn="l" indent="0" marL="0">
-              <a:lnSpc>
-                <a:spcPts val="1494"/>
-              </a:lnSpc>
-              <a:buNone/>
-            </a:pPr>
-            <a:r>
-              <a:rPr lang="en-US" sz="900" dirty="0">
-                <a:solidFill>
-                  <a:srgbClr val="5A6672"/>
-                </a:solidFill>
-                <a:latin typeface="Jost" pitchFamily="34" charset="0"/>
-                <a:ea typeface="Jost" pitchFamily="34" charset="-122"/>
-                <a:cs typeface="Jost" pitchFamily="34" charset="-120"/>
-              </a:rPr>
-              <a:t>Sem compromisso, para conhecermos as expectativas de cada lado.</a:t>
-            </a:r>
-            <a:endParaRPr lang="en-US" sz="900" dirty="0"/>
-          </a:p>
-        </p:txBody>
-      </p:sp>
-      <p:sp>
-        <p:nvSpPr>
-          <p:cNvPr id="22" name="Text 18"/>
-          <p:cNvSpPr txBox="1"/>
-          <p:nvPr/>
-        </p:nvSpPr>
-        <p:spPr>
-          <a:xfrm>
-            <a:off x="6443811" y="5613350"/>
-            <a:ext cx="1593830" cy="114300"/>
-          </a:xfrm>
-          <a:prstGeom prst="rect">
-            <a:avLst/>
-          </a:prstGeom>
-          <a:noFill/>
-          <a:ln/>
-        </p:spPr>
-        <p:txBody>
-          <a:bodyPr wrap="square" lIns="0" tIns="0" rIns="0" bIns="0" rtlCol="0" anchor="t"/>
-          <a:lstStyle/>
-          <a:p>
-            <a:pPr algn="l" indent="0" marL="0">
-              <a:lnSpc>
-                <a:spcPts val="768"/>
-              </a:lnSpc>
-              <a:buNone/>
-            </a:pPr>
-            <a:r>
-              <a:rPr lang="en-US" sz="640" spc="154" kern="0" dirty="0">
-                <a:solidFill>
-                  <a:srgbClr val="C1121C"/>
-                </a:solidFill>
-                <a:latin typeface="Jost Medium" pitchFamily="34" charset="0"/>
-                <a:ea typeface="Jost Medium" pitchFamily="34" charset="-122"/>
-                <a:cs typeface="Jost Medium" pitchFamily="34" charset="-120"/>
-              </a:rPr>
-              <a:t>SEGUNDO PASSO</a:t>
-            </a:r>
-            <a:endParaRPr lang="en-US" sz="640" dirty="0"/>
-          </a:p>
-        </p:txBody>
-      </p:sp>
-      <p:sp>
-        <p:nvSpPr>
-          <p:cNvPr id="23" name="Text 19"/>
-          <p:cNvSpPr txBox="1"/>
-          <p:nvPr/>
-        </p:nvSpPr>
-        <p:spPr>
-          <a:xfrm>
-            <a:off x="6443811" y="5821114"/>
-            <a:ext cx="1593830" cy="235595"/>
-          </a:xfrm>
-          <a:prstGeom prst="rect">
-            <a:avLst/>
-          </a:prstGeom>
-          <a:noFill/>
-          <a:ln/>
-        </p:spPr>
-        <p:txBody>
-          <a:bodyPr wrap="square" lIns="0" tIns="0" rIns="0" bIns="0" rtlCol="0" anchor="t"/>
-          <a:lstStyle/>
-          <a:p>
-            <a:pPr algn="l" indent="0" marL="0">
-              <a:lnSpc>
-                <a:spcPts val="1856"/>
-              </a:lnSpc>
-              <a:buNone/>
-            </a:pPr>
-            <a:r>
-              <a:rPr lang="en-US" sz="1600" dirty="0">
-                <a:solidFill>
-                  <a:srgbClr val="16222E"/>
-                </a:solidFill>
-                <a:latin typeface="EB Garamond Medium" pitchFamily="34" charset="0"/>
-                <a:ea typeface="EB Garamond Medium" pitchFamily="34" charset="-122"/>
-                <a:cs typeface="EB Garamond Medium" pitchFamily="34" charset="-120"/>
-              </a:rPr>
-              <a:t>Uma visita</a:t>
-            </a:r>
-            <a:endParaRPr lang="en-US" sz="1600" dirty="0"/>
-          </a:p>
-        </p:txBody>
-      </p:sp>
-      <p:sp>
-        <p:nvSpPr>
-          <p:cNvPr id="24" name="Text 20"/>
-          <p:cNvSpPr txBox="1"/>
-          <p:nvPr/>
-        </p:nvSpPr>
-        <p:spPr>
-          <a:xfrm>
-            <a:off x="6443811" y="6135886"/>
-            <a:ext cx="1593830" cy="379214"/>
-          </a:xfrm>
-          <a:prstGeom prst="rect">
-            <a:avLst/>
-          </a:prstGeom>
-          <a:noFill/>
-          <a:ln/>
-        </p:spPr>
-        <p:txBody>
-          <a:bodyPr wrap="square" lIns="0" tIns="0" rIns="0" bIns="0" rtlCol="0" anchor="t"/>
-          <a:lstStyle/>
-          <a:p>
-            <a:pPr algn="l" indent="0" marL="0">
-              <a:lnSpc>
-                <a:spcPts val="1494"/>
-              </a:lnSpc>
-              <a:buNone/>
-            </a:pPr>
-            <a:r>
-              <a:rPr lang="en-US" sz="900" dirty="0">
-                <a:solidFill>
-                  <a:srgbClr val="5A6672"/>
-                </a:solidFill>
-                <a:latin typeface="Jost" pitchFamily="34" charset="0"/>
-                <a:ea typeface="Jost" pitchFamily="34" charset="-122"/>
-                <a:cs typeface="Jost" pitchFamily="34" charset="-120"/>
-              </a:rPr>
-              <a:t>Receber a equipe da Victorinox em Camburi, pessoalmente.</a:t>
-            </a:r>
-            <a:endParaRPr lang="en-US" sz="900" dirty="0"/>
-          </a:p>
-        </p:txBody>
-      </p:sp>
-      <p:sp>
-        <p:nvSpPr>
-          <p:cNvPr id="25" name="Text 21"/>
-          <p:cNvSpPr txBox="1"/>
-          <p:nvPr/>
-        </p:nvSpPr>
-        <p:spPr>
-          <a:xfrm>
-            <a:off x="8423821" y="5613350"/>
-            <a:ext cx="1593830" cy="114300"/>
-          </a:xfrm>
-          <a:prstGeom prst="rect">
-            <a:avLst/>
-          </a:prstGeom>
-          <a:noFill/>
-          <a:ln/>
-        </p:spPr>
-        <p:txBody>
-          <a:bodyPr wrap="square" lIns="0" tIns="0" rIns="0" bIns="0" rtlCol="0" anchor="t"/>
-          <a:lstStyle/>
-          <a:p>
-            <a:pPr algn="l" indent="0" marL="0">
-              <a:lnSpc>
-                <a:spcPts val="768"/>
-              </a:lnSpc>
-              <a:buNone/>
-            </a:pPr>
-            <a:r>
-              <a:rPr lang="en-US" sz="640" spc="154" kern="0" dirty="0">
-                <a:solidFill>
-                  <a:srgbClr val="C1121C"/>
-                </a:solidFill>
-                <a:latin typeface="Jost Medium" pitchFamily="34" charset="0"/>
-                <a:ea typeface="Jost Medium" pitchFamily="34" charset="-122"/>
-                <a:cs typeface="Jost Medium" pitchFamily="34" charset="-120"/>
-              </a:rPr>
-              <a:t>HORIZONTE</a:t>
-            </a:r>
-            <a:endParaRPr lang="en-US" sz="640" dirty="0"/>
-          </a:p>
-        </p:txBody>
-      </p:sp>
-      <p:sp>
-        <p:nvSpPr>
-          <p:cNvPr id="26" name="Text 22"/>
-          <p:cNvSpPr txBox="1"/>
-          <p:nvPr/>
-        </p:nvSpPr>
-        <p:spPr>
-          <a:xfrm>
-            <a:off x="8423821" y="5821114"/>
-            <a:ext cx="1593830" cy="235595"/>
-          </a:xfrm>
-          <a:prstGeom prst="rect">
-            <a:avLst/>
-          </a:prstGeom>
-          <a:noFill/>
-          <a:ln/>
-        </p:spPr>
-        <p:txBody>
-          <a:bodyPr wrap="square" lIns="0" tIns="0" rIns="0" bIns="0" rtlCol="0" anchor="t"/>
-          <a:lstStyle/>
-          <a:p>
-            <a:pPr algn="l" indent="0" marL="0">
-              <a:lnSpc>
-                <a:spcPts val="1856"/>
-              </a:lnSpc>
-              <a:buNone/>
-            </a:pPr>
-            <a:r>
-              <a:rPr lang="en-US" sz="1600" dirty="0">
-                <a:solidFill>
-                  <a:srgbClr val="16222E"/>
-                </a:solidFill>
-                <a:latin typeface="EB Garamond Medium" pitchFamily="34" charset="0"/>
-                <a:ea typeface="EB Garamond Medium" pitchFamily="34" charset="-122"/>
-                <a:cs typeface="EB Garamond Medium" pitchFamily="34" charset="-120"/>
-              </a:rPr>
-              <a:t>Uma parceria</a:t>
-            </a:r>
-            <a:endParaRPr lang="en-US" sz="1600" dirty="0"/>
-          </a:p>
-        </p:txBody>
-      </p:sp>
-      <p:sp>
-        <p:nvSpPr>
-          <p:cNvPr id="27" name="Text 23"/>
-          <p:cNvSpPr txBox="1"/>
-          <p:nvPr/>
-        </p:nvSpPr>
-        <p:spPr>
-          <a:xfrm>
-            <a:off x="8423821" y="6135886"/>
-            <a:ext cx="1593830" cy="379214"/>
-          </a:xfrm>
-          <a:prstGeom prst="rect">
-            <a:avLst/>
-          </a:prstGeom>
-          <a:noFill/>
-          <a:ln/>
-        </p:spPr>
-        <p:txBody>
-          <a:bodyPr wrap="square" lIns="0" tIns="0" rIns="0" bIns="0" rtlCol="0" anchor="t"/>
-          <a:lstStyle/>
-          <a:p>
-            <a:pPr algn="l" indent="0" marL="0">
-              <a:lnSpc>
-                <a:spcPts val="1494"/>
-              </a:lnSpc>
-              <a:buNone/>
-            </a:pPr>
-            <a:r>
-              <a:rPr lang="en-US" sz="900" dirty="0">
-                <a:solidFill>
-                  <a:srgbClr val="5A6672"/>
-                </a:solidFill>
-                <a:latin typeface="Jost" pitchFamily="34" charset="0"/>
-                <a:ea typeface="Jost" pitchFamily="34" charset="-122"/>
-                <a:cs typeface="Jost" pitchFamily="34" charset="-120"/>
-              </a:rPr>
-              <a:t>Construída no mesmo ritmo em que construímos tudo aqui.</a:t>
-            </a:r>
-            <a:endParaRPr lang="en-US" sz="900" dirty="0"/>
-          </a:p>
-        </p:txBody>
-      </p:sp>
-      <p:sp>
-        <p:nvSpPr>
-          <p:cNvPr id="28" name="Text 24"/>
           <p:cNvSpPr txBox="1"/>
           <p:nvPr/>
         </p:nvSpPr>

--- a/apresentacao-victorinox/Carta_Apresentacao_Pousada_Camburi_Victorinox.pptx
+++ b/apresentacao-victorinox/Carta_Apresentacao_Pousada_Camburi_Victorinox.pptx
@@ -15,10 +15,9 @@
     <p:sldId id="263" r:id="rId9"/>
     <p:sldId id="264" r:id="rId10"/>
     <p:sldId id="265" r:id="rId11"/>
-    <p:sldId id="266" r:id="rId12"/>
   </p:sldIdLst>
   <p:notesMasterIdLst>
-    <p:notesMasterId r:id="rId13"/>
+    <p:notesMasterId r:id="rId12"/>
   </p:notesMasterIdLst>
   <p:sldSz cx="10691961" cy="7559873"/>
   <p:notesSz cx="7559873" cy="10691961"/>
@@ -642,94 +641,6 @@
 </p:notes>
 </file>
 
-<file path=ppt/notesSlides/notesSlide11.xml><?xml version="1.0" encoding="utf-8"?>
-<p:notes xmlns:a="http://schemas.openxmlformats.org/drawingml/2006/main" xmlns:r="http://schemas.openxmlformats.org/officeDocument/2006/relationships" xmlns:p="http://schemas.openxmlformats.org/presentationml/2006/main">
-  <p:cSld>
-    <p:spTree>
-      <p:nvGrpSpPr>
-        <p:cNvPr id="1" name=""/>
-        <p:cNvGrpSpPr/>
-        <p:nvPr/>
-      </p:nvGrpSpPr>
-      <p:grpSpPr>
-        <a:xfrm>
-          <a:off x="0" y="0"/>
-          <a:ext cx="0" cy="0"/>
-          <a:chOff x="0" y="0"/>
-          <a:chExt cx="0" cy="0"/>
-        </a:xfrm>
-      </p:grpSpPr>
-      <p:sp>
-        <p:nvSpPr>
-          <p:cNvPr id="2" name="Slide Image Placeholder 1"/>
-          <p:cNvSpPr>
-            <a:spLocks noGrp="1" noRot="1" noChangeAspect="1"/>
-          </p:cNvSpPr>
-          <p:nvPr>
-            <p:ph type="sldImg"/>
-          </p:nvPr>
-        </p:nvSpPr>
-        <p:spPr/>
-      </p:sp>
-      <p:sp>
-        <p:nvSpPr>
-          <p:cNvPr id="3" name="Notes Placeholder 2"/>
-          <p:cNvSpPr>
-            <a:spLocks noGrp="1"/>
-          </p:cNvSpPr>
-          <p:nvPr>
-            <p:ph type="body" idx="1"/>
-          </p:nvPr>
-        </p:nvSpPr>
-        <p:spPr/>
-        <p:txBody>
-          <a:bodyPr/>
-          <a:lstStyle/>
-          <a:p>
-            <a:r>
-              <a:rPr lang="en-US" dirty="0"/>
-              <a:t/>
-            </a:r>
-            <a:endParaRPr lang="en-US" dirty="0"/>
-          </a:p>
-        </p:txBody>
-      </p:sp>
-      <p:sp>
-        <p:nvSpPr>
-          <p:cNvPr id="4" name="Slide Number Placeholder 3"/>
-          <p:cNvSpPr>
-            <a:spLocks noGrp="1"/>
-          </p:cNvSpPr>
-          <p:nvPr>
-            <p:ph type="sldNum" sz="quarter" idx="10"/>
-          </p:nvPr>
-        </p:nvSpPr>
-        <p:spPr/>
-        <p:txBody>
-          <a:bodyPr/>
-          <a:lstStyle/>
-          <a:p>
-            <a:fld id="{F7021451-1387-4CA6-816F-3879F97B5CBC}" type="slidenum">
-              <a:rPr lang="en-US"/>
-              <a:t>11</a:t>
-            </a:fld>
-            <a:endParaRPr lang="en-US"/>
-          </a:p>
-        </p:txBody>
-      </p:sp>
-    </p:spTree>
-    <p:extLst>
-      <p:ext uri="{BB962C8B-B14F-4D97-AF65-F5344CB8AC3E}">
-        <p14:creationId xmlns:p14="http://schemas.microsoft.com/office/powerpoint/2010/main" val="1024086991"/>
-      </p:ext>
-    </p:extLst>
-  </p:cSld>
-  <p:clrMapOvr>
-    <a:masterClrMapping/>
-  </p:clrMapOvr>
-</p:notes>
-</file>
-
 <file path=ppt/notesSlides/notesSlide2.xml><?xml version="1.0" encoding="utf-8"?>
 <p:notes xmlns:a="http://schemas.openxmlformats.org/drawingml/2006/main" xmlns:r="http://schemas.openxmlformats.org/officeDocument/2006/relationships" xmlns:p="http://schemas.openxmlformats.org/presentationml/2006/main">
   <p:cSld>
@@ -2641,7 +2552,7 @@
         </p:nvSpPr>
         <p:spPr>
           <a:xfrm>
-            <a:off x="719882" y="5917555"/>
+            <a:off x="719882" y="5654725"/>
             <a:ext cx="2654498" cy="9525"/>
           </a:xfrm>
           <a:prstGeom prst="rect">
@@ -2661,7 +2572,7 @@
         </p:nvSpPr>
         <p:spPr>
           <a:xfrm>
-            <a:off x="4463802" y="6126510"/>
+            <a:off x="4463802" y="5171033"/>
             <a:ext cx="5508278" cy="9525"/>
           </a:xfrm>
           <a:prstGeom prst="rect">
@@ -2861,7 +2772,7 @@
                 <a:ea typeface="Jost Medium" pitchFamily="34" charset="-122"/>
                 <a:cs typeface="Jost Medium" pitchFamily="34" charset="-120"/>
               </a:rPr>
-              <a:t>O CONVITE</a:t>
+              <a:t>ENCERRAMENTO</a:t>
             </a:r>
             <a:endParaRPr lang="en-US" sz="660" dirty="0"/>
           </a:p>
@@ -2876,7 +2787,7 @@
         <p:spPr>
           <a:xfrm>
             <a:off x="719882" y="1617464"/>
-            <a:ext cx="2700218" cy="390823"/>
+            <a:ext cx="2700218" cy="781645"/>
           </a:xfrm>
           <a:prstGeom prst="rect">
             <a:avLst/>
@@ -2903,7 +2814,7 @@
                 <a:ea typeface="EB Garamond Medium" pitchFamily="34" charset="-122"/>
                 <a:cs typeface="EB Garamond Medium" pitchFamily="34" charset="-120"/>
               </a:rPr>
-              <a:t>Nosso convite</a:t>
+              <a:t>Seu lugar em Camburi.</a:t>
             </a:r>
             <a:endParaRPr lang="en-US" sz="2700" dirty="0"/>
           </a:p>
@@ -2917,8 +2828,8 @@
         </p:nvSpPr>
         <p:spPr>
           <a:xfrm>
-            <a:off x="719882" y="6179046"/>
-            <a:ext cx="2700218" cy="525661"/>
+            <a:off x="719882" y="5916216"/>
+            <a:ext cx="2700218" cy="788491"/>
           </a:xfrm>
           <a:prstGeom prst="rect">
             <a:avLst/>
@@ -2945,7 +2856,7 @@
                 <a:ea typeface="EB Garamond" pitchFamily="34" charset="-122"/>
                 <a:cs typeface="EB Garamond" pitchFamily="34" charset="-120"/>
               </a:rPr>
-              <a:t>“Uma marca que acompanha pessoas. Um lugar que recebe pessoas.”</a:t>
+              <a:t>Quem cuida de tudo somos nós. Você aproveita a praia, descansa e vive a experiência.</a:t>
             </a:r>
             <a:endParaRPr lang="en-US" sz="1500" dirty="0"/>
           </a:p>
@@ -2960,7 +2871,7 @@
         <p:spPr>
           <a:xfrm>
             <a:off x="4463802" y="1341239"/>
-            <a:ext cx="5553998" cy="531019"/>
+            <a:ext cx="5553998" cy="796528"/>
           </a:xfrm>
           <a:prstGeom prst="rect">
             <a:avLst/>
@@ -2987,7 +2898,7 @@
                 <a:ea typeface="Jost Light" pitchFamily="34" charset="-122"/>
                 <a:cs typeface="Jost Light" pitchFamily="34" charset="-120"/>
               </a:rPr>
-              <a:t>Gostaríamos de apresentar oficialmente a Pousada Camburi à Victorinox Brasil e abrir uma conversa sobre possibilidades de relacionamento entre nossas empresas.</a:t>
+              <a:t>Será uma grande satisfação receber representantes da Victorinox em Camburi, apresentar pessoalmente nossa pousada, nossa equipe, nossa história e conversar sobre as possibilidades que podemos construir juntos.</a:t>
             </a:r>
             <a:endParaRPr lang="en-US" sz="1260" dirty="0"/>
           </a:p>
@@ -3001,22 +2912,22 @@
         </p:nvSpPr>
         <p:spPr>
           <a:xfrm>
-            <a:off x="4463802" y="2304157"/>
-            <a:ext cx="5553998" cy="490240"/>
-          </a:xfrm>
-          <a:prstGeom prst="rect">
-            <a:avLst/>
-          </a:prstGeom>
-          <a:noFill/>
-          <a:ln/>
-        </p:spPr>
-        <p:txBody>
-          <a:bodyPr wrap="square" lIns="0" tIns="0" rIns="0" bIns="0" rtlCol="0" anchor="t"/>
-          <a:lstStyle/>
-          <a:p>
-            <a:pPr algn="l" indent="0" marL="0">
-              <a:lnSpc>
-                <a:spcPts val="1929"/>
+            <a:off x="4463802" y="5468541"/>
+            <a:ext cx="5553998" cy="242441"/>
+          </a:xfrm>
+          <a:prstGeom prst="rect">
+            <a:avLst/>
+          </a:prstGeom>
+          <a:noFill/>
+          <a:ln/>
+        </p:spPr>
+        <p:txBody>
+          <a:bodyPr wrap="square" lIns="0" tIns="0" rIns="0" bIns="0" rtlCol="0" anchor="t"/>
+          <a:lstStyle/>
+          <a:p>
+            <a:pPr algn="l" indent="0" marL="0">
+              <a:lnSpc>
+                <a:spcPts val="1908"/>
               </a:lnSpc>
               <a:buNone/>
             </a:pPr>
@@ -3029,7 +2940,7 @@
                 <a:ea typeface="Jost" pitchFamily="34" charset="-122"/>
                 <a:cs typeface="Jost" pitchFamily="34" charset="-120"/>
               </a:rPr>
-              <a:t>Temos muito respeito pela história e pelo posicionamento da Victorinox, e acreditamos que existe uma afinidade verdadeira entre nossas marcas.</a:t>
+              <a:t>Atenciosamente,</a:t>
             </a:r>
             <a:endParaRPr lang="en-US" sz="1060" dirty="0"/>
           </a:p>
@@ -3043,899 +2954,121 @@
         </p:nvSpPr>
         <p:spPr>
           <a:xfrm>
-            <a:off x="4463802" y="2992338"/>
-            <a:ext cx="5553998" cy="735360"/>
-          </a:xfrm>
-          <a:prstGeom prst="rect">
-            <a:avLst/>
-          </a:prstGeom>
-          <a:noFill/>
-          <a:ln/>
-        </p:spPr>
-        <p:txBody>
-          <a:bodyPr wrap="square" lIns="0" tIns="0" rIns="0" bIns="0" rtlCol="0" anchor="t"/>
-          <a:lstStyle/>
-          <a:p>
-            <a:pPr algn="l" indent="0" marL="0">
-              <a:lnSpc>
-                <a:spcPts val="1929"/>
-              </a:lnSpc>
-              <a:buNone/>
-            </a:pPr>
-            <a:r>
-              <a:rPr lang="en-US" sz="1060" dirty="0">
-                <a:solidFill>
-                  <a:srgbClr val="5A6672"/>
+            <a:off x="4463802" y="5890915"/>
+            <a:ext cx="5553998" cy="350490"/>
+          </a:xfrm>
+          <a:prstGeom prst="rect">
+            <a:avLst/>
+          </a:prstGeom>
+          <a:noFill/>
+          <a:ln/>
+        </p:spPr>
+        <p:txBody>
+          <a:bodyPr wrap="square" lIns="0" tIns="0" rIns="0" bIns="0" rtlCol="0" anchor="t"/>
+          <a:lstStyle/>
+          <a:p>
+            <a:pPr algn="l" indent="0" marL="0">
+              <a:lnSpc>
+                <a:spcPts val="2760"/>
+              </a:lnSpc>
+              <a:buNone/>
+            </a:pPr>
+            <a:r>
+              <a:rPr lang="en-US" sz="2300" dirty="0">
+                <a:solidFill>
+                  <a:srgbClr val="16222E"/>
+                </a:solidFill>
+                <a:latin typeface="EB Garamond" pitchFamily="34" charset="0"/>
+                <a:ea typeface="EB Garamond" pitchFamily="34" charset="-122"/>
+                <a:cs typeface="EB Garamond" pitchFamily="34" charset="-120"/>
+              </a:rPr>
+              <a:t>Rodrigo Roberto Sulina</a:t>
+            </a:r>
+            <a:endParaRPr lang="en-US" sz="2300" dirty="0"/>
+          </a:p>
+        </p:txBody>
+      </p:sp>
+      <p:sp>
+        <p:nvSpPr>
+          <p:cNvPr id="18" name="Text 14"/>
+          <p:cNvSpPr txBox="1"/>
+          <p:nvPr/>
+        </p:nvSpPr>
+        <p:spPr>
+          <a:xfrm>
+            <a:off x="4463802" y="6349305"/>
+            <a:ext cx="5553998" cy="177701"/>
+          </a:xfrm>
+          <a:prstGeom prst="rect">
+            <a:avLst/>
+          </a:prstGeom>
+          <a:noFill/>
+          <a:ln/>
+        </p:spPr>
+        <p:txBody>
+          <a:bodyPr wrap="square" lIns="0" tIns="0" rIns="0" bIns="0" rtlCol="0" anchor="t"/>
+          <a:lstStyle/>
+          <a:p>
+            <a:pPr algn="l" indent="0" marL="0">
+              <a:lnSpc>
+                <a:spcPts val="1400"/>
+              </a:lnSpc>
+              <a:buNone/>
+            </a:pPr>
+            <a:r>
+              <a:rPr lang="en-US" sz="700" spc="140" kern="0" dirty="0">
+                <a:solidFill>
+                  <a:srgbClr val="8C959D"/>
                 </a:solidFill>
                 <a:latin typeface="Jost" pitchFamily="34" charset="0"/>
                 <a:ea typeface="Jost" pitchFamily="34" charset="-122"/>
                 <a:cs typeface="Jost" pitchFamily="34" charset="-120"/>
               </a:rPr>
-              <a:t>A Pousada Camburi possui uma história construída com pessoas. A Victorinox possui uma história construída com produtos que acompanham pessoas. Talvez seja justamente aí que exista uma oportunidade.</a:t>
-            </a:r>
-            <a:endParaRPr lang="en-US" sz="1060" dirty="0"/>
-          </a:p>
-        </p:txBody>
-      </p:sp>
-      <p:sp>
-        <p:nvSpPr>
-          <p:cNvPr id="18" name="Text 14"/>
-          <p:cNvSpPr txBox="1"/>
-          <p:nvPr/>
-        </p:nvSpPr>
-        <p:spPr>
-          <a:xfrm>
-            <a:off x="4463802" y="3925639"/>
-            <a:ext cx="5553998" cy="735360"/>
-          </a:xfrm>
-          <a:prstGeom prst="rect">
-            <a:avLst/>
-          </a:prstGeom>
-          <a:noFill/>
-          <a:ln/>
-        </p:spPr>
-        <p:txBody>
-          <a:bodyPr wrap="square" lIns="0" tIns="0" rIns="0" bIns="0" rtlCol="0" anchor="t"/>
-          <a:lstStyle/>
-          <a:p>
-            <a:pPr algn="l" indent="0" marL="0">
-              <a:lnSpc>
-                <a:spcPts val="1929"/>
-              </a:lnSpc>
-              <a:buNone/>
-            </a:pPr>
-            <a:r>
-              <a:rPr lang="en-US" sz="1060" dirty="0">
-                <a:solidFill>
-                  <a:srgbClr val="5A6672"/>
+              <a:t>POUSADA CAMBURI</a:t>
+            </a:r>
+            <a:endParaRPr lang="en-US" sz="700" dirty="0"/>
+          </a:p>
+        </p:txBody>
+      </p:sp>
+      <p:sp>
+        <p:nvSpPr>
+          <p:cNvPr id="19" name="Text 15"/>
+          <p:cNvSpPr txBox="1"/>
+          <p:nvPr/>
+        </p:nvSpPr>
+        <p:spPr>
+          <a:xfrm>
+            <a:off x="4463802" y="6527006"/>
+            <a:ext cx="5553998" cy="177701"/>
+          </a:xfrm>
+          <a:prstGeom prst="rect">
+            <a:avLst/>
+          </a:prstGeom>
+          <a:noFill/>
+          <a:ln/>
+        </p:spPr>
+        <p:txBody>
+          <a:bodyPr wrap="square" lIns="0" tIns="0" rIns="0" bIns="0" rtlCol="0" anchor="t"/>
+          <a:lstStyle/>
+          <a:p>
+            <a:pPr algn="l" indent="0" marL="0">
+              <a:lnSpc>
+                <a:spcPts val="1400"/>
+              </a:lnSpc>
+              <a:buNone/>
+            </a:pPr>
+            <a:r>
+              <a:rPr lang="en-US" sz="700" spc="140" kern="0" dirty="0">
+                <a:solidFill>
+                  <a:srgbClr val="8C959D"/>
                 </a:solidFill>
                 <a:latin typeface="Jost" pitchFamily="34" charset="0"/>
                 <a:ea typeface="Jost" pitchFamily="34" charset="-122"/>
                 <a:cs typeface="Jost" pitchFamily="34" charset="-120"/>
               </a:rPr>
-              <a:t>Será uma grande satisfação receber representantes da Victorinox em Camburi, apresentar pessoalmente nossa pousada, nossa equipe, nossa história e conversar sobre as possibilidades que podemos construir juntos.</a:t>
-            </a:r>
-            <a:endParaRPr lang="en-US" sz="1060" dirty="0"/>
-          </a:p>
-        </p:txBody>
-      </p:sp>
-      <p:sp>
-        <p:nvSpPr>
-          <p:cNvPr id="19" name="Text 15"/>
-          <p:cNvSpPr txBox="1"/>
-          <p:nvPr/>
-        </p:nvSpPr>
-        <p:spPr>
-          <a:xfrm>
-            <a:off x="4463802" y="6424017"/>
-            <a:ext cx="5553998" cy="280690"/>
-          </a:xfrm>
-          <a:prstGeom prst="rect">
-            <a:avLst/>
-          </a:prstGeom>
-          <a:noFill/>
-          <a:ln/>
-        </p:spPr>
-        <p:txBody>
-          <a:bodyPr wrap="square" lIns="0" tIns="0" rIns="0" bIns="0" rtlCol="0" anchor="t"/>
-          <a:lstStyle/>
-          <a:p>
-            <a:pPr algn="l" indent="0" marL="0">
-              <a:lnSpc>
-                <a:spcPts val="2210"/>
-              </a:lnSpc>
-              <a:buNone/>
-            </a:pPr>
-            <a:r>
-              <a:rPr lang="en-US" sz="1700" dirty="0">
-                <a:solidFill>
-                  <a:srgbClr val="16222E"/>
-                </a:solidFill>
-                <a:latin typeface="EB Garamond" pitchFamily="34" charset="0"/>
-                <a:ea typeface="EB Garamond" pitchFamily="34" charset="-122"/>
-                <a:cs typeface="EB Garamond" pitchFamily="34" charset="-120"/>
-              </a:rPr>
-              <a:t>E uma experiência que pode unir as duas.</a:t>
-            </a:r>
-            <a:endParaRPr lang="en-US" sz="1700" dirty="0"/>
-          </a:p>
-        </p:txBody>
-      </p:sp>
-      <p:sp>
-        <p:nvSpPr>
-          <p:cNvPr id="20" name="Text 16"/>
-          <p:cNvSpPr txBox="1"/>
-          <p:nvPr/>
-        </p:nvSpPr>
-        <p:spPr>
-          <a:xfrm>
-            <a:off x="719882" y="6962924"/>
-            <a:ext cx="3137922" cy="114300"/>
-          </a:xfrm>
-          <a:prstGeom prst="rect">
-            <a:avLst/>
-          </a:prstGeom>
-          <a:noFill/>
-          <a:ln/>
-        </p:spPr>
-        <p:txBody>
-          <a:bodyPr wrap="square" lIns="0" tIns="0" rIns="0" bIns="0" rtlCol="0" anchor="t"/>
-          <a:lstStyle/>
-          <a:p>
-            <a:pPr algn="l" indent="0" marL="0">
-              <a:lnSpc>
-                <a:spcPts val="792"/>
-              </a:lnSpc>
-              <a:buNone/>
-            </a:pPr>
-            <a:r>
-              <a:rPr lang="en-US" sz="660" spc="92" kern="0" dirty="0">
-                <a:solidFill>
-                  <a:srgbClr val="8C959D"/>
-                </a:solidFill>
-                <a:latin typeface="Jost" pitchFamily="34" charset="0"/>
-                <a:ea typeface="Jost" pitchFamily="34" charset="-122"/>
-                <a:cs typeface="Jost" pitchFamily="34" charset="-120"/>
-              </a:rPr>
-              <a:t>POUSADA CAMBURI | CARTA DE APRESENTAÇÃO À VICTORINOX</a:t>
-            </a:r>
-            <a:endParaRPr lang="en-US" sz="660" dirty="0"/>
-          </a:p>
-        </p:txBody>
-      </p:sp>
-    </p:spTree>
-  </p:cSld>
-  <p:clrMapOvr>
-    <a:masterClrMapping/>
-  </p:clrMapOvr>
-</p:sld>
-</file>
-
-<file path=ppt/slides/slide11.xml><?xml version="1.0" encoding="utf-8"?>
-<p:sld xmlns:a="http://schemas.openxmlformats.org/drawingml/2006/main" xmlns:r="http://schemas.openxmlformats.org/officeDocument/2006/relationships" xmlns:p="http://schemas.openxmlformats.org/presentationml/2006/main">
-  <p:cSld name="Slide 11">
-    <p:bg>
-      <p:bgPr>
-        <a:solidFill>
-          <a:srgbClr val="FFFFFF"/>
-        </a:solidFill>
-      </p:bgPr>
-    </p:bg>
-    <p:spTree>
-      <p:nvGrpSpPr>
-        <p:cNvPr id="1" name=""/>
-        <p:cNvGrpSpPr/>
-        <p:nvPr/>
-      </p:nvGrpSpPr>
-      <p:grpSpPr>
-        <a:xfrm>
-          <a:off x="0" y="0"/>
-          <a:ext cx="0" cy="0"/>
-          <a:chOff x="0" y="0"/>
-          <a:chExt cx="0" cy="0"/>
-        </a:xfrm>
-      </p:grpSpPr>
-      <p:sp>
-        <p:nvSpPr>
-          <p:cNvPr id="2" name="Shape 0"/>
-          <p:cNvSpPr/>
-          <p:nvPr/>
-        </p:nvSpPr>
-        <p:spPr>
-          <a:xfrm>
-            <a:off x="0" y="0"/>
-            <a:ext cx="10691961" cy="7559873"/>
-          </a:xfrm>
-          <a:prstGeom prst="rect">
-            <a:avLst/>
-          </a:prstGeom>
-          <a:solidFill>
-            <a:srgbClr val="FFFFFF"/>
-          </a:solidFill>
-          <a:ln/>
-        </p:spPr>
-      </p:sp>
-      <p:sp>
-        <p:nvSpPr>
-          <p:cNvPr id="3" name="Shape 1"/>
-          <p:cNvSpPr/>
-          <p:nvPr/>
-        </p:nvSpPr>
-        <p:spPr>
-          <a:xfrm>
-            <a:off x="719882" y="1007715"/>
-            <a:ext cx="9252198" cy="9525"/>
-          </a:xfrm>
-          <a:prstGeom prst="rect">
-            <a:avLst/>
-          </a:prstGeom>
-          <a:solidFill>
-            <a:srgbClr val="E2DFD9"/>
-          </a:solidFill>
-          <a:ln/>
-        </p:spPr>
-      </p:sp>
-      <p:sp>
-        <p:nvSpPr>
-          <p:cNvPr id="4" name="Shape 2"/>
-          <p:cNvSpPr/>
-          <p:nvPr/>
-        </p:nvSpPr>
-        <p:spPr>
-          <a:xfrm>
-            <a:off x="3878312" y="1341239"/>
-            <a:ext cx="9525" cy="5363468"/>
-          </a:xfrm>
-          <a:prstGeom prst="rect">
-            <a:avLst/>
-          </a:prstGeom>
-          <a:solidFill>
-            <a:srgbClr val="E2DFD9"/>
-          </a:solidFill>
-          <a:ln/>
-        </p:spPr>
-      </p:sp>
-      <p:sp>
-        <p:nvSpPr>
-          <p:cNvPr id="5" name="Shape 3"/>
-          <p:cNvSpPr/>
-          <p:nvPr/>
-        </p:nvSpPr>
-        <p:spPr>
-          <a:xfrm>
-            <a:off x="719882" y="6180386"/>
-            <a:ext cx="2654498" cy="9525"/>
-          </a:xfrm>
-          <a:prstGeom prst="rect">
-            <a:avLst/>
-          </a:prstGeom>
-          <a:solidFill>
-            <a:srgbClr val="C1121C"/>
-          </a:solidFill>
-          <a:ln/>
-        </p:spPr>
-      </p:sp>
-      <p:sp>
-        <p:nvSpPr>
-          <p:cNvPr id="6" name="Shape 4"/>
-          <p:cNvSpPr/>
-          <p:nvPr/>
-        </p:nvSpPr>
-        <p:spPr>
-          <a:xfrm>
-            <a:off x="4463802" y="5010001"/>
-            <a:ext cx="5508278" cy="1694706"/>
-          </a:xfrm>
-          <a:prstGeom prst="roundRect">
-            <a:avLst>
-              <a:gd name="adj" fmla="val 6373"/>
-            </a:avLst>
-          </a:prstGeom>
-          <a:solidFill>
-            <a:srgbClr val="16283C"/>
-          </a:solidFill>
-          <a:ln/>
-        </p:spPr>
-      </p:sp>
-      <p:sp>
-        <p:nvSpPr>
-          <p:cNvPr id="7" name="Shape 5"/>
-          <p:cNvSpPr/>
-          <p:nvPr/>
-        </p:nvSpPr>
-        <p:spPr>
-          <a:xfrm>
-            <a:off x="719882" y="6704707"/>
-            <a:ext cx="9252198" cy="9525"/>
-          </a:xfrm>
-          <a:prstGeom prst="rect">
-            <a:avLst/>
-          </a:prstGeom>
-          <a:solidFill>
-            <a:srgbClr val="E2DFD9"/>
-          </a:solidFill>
-          <a:ln/>
-        </p:spPr>
-      </p:sp>
-      <p:pic>
-        <p:nvPicPr>
-          <p:cNvPr id="8" name="Image 0" descr="/home/user/SkillsClaude/apresentacao-victorinox/build/logos/logo-pc.png">    </p:cNvPr>
-          <p:cNvPicPr>
-            <a:picLocks noChangeAspect="1"/>
-          </p:cNvPicPr>
-          <p:nvPr/>
-        </p:nvPicPr>
-        <p:blipFill>
-          <a:blip r:embed="rId1"/>
-          <a:stretch>
-            <a:fillRect/>
-          </a:stretch>
-        </p:blipFill>
-        <p:spPr>
-          <a:xfrm>
-            <a:off x="719882" y="467916"/>
-            <a:ext cx="1478905" cy="413891"/>
-          </a:xfrm>
-          <a:prstGeom prst="rect">
-            <a:avLst/>
-          </a:prstGeom>
-        </p:spPr>
-      </p:pic>
-      <p:pic>
-        <p:nvPicPr>
-          <p:cNvPr id="9" name="Image 1" descr="/home/user/SkillsClaude/apresentacao-victorinox/build/logos/logo-vx.png">    </p:cNvPr>
-          <p:cNvPicPr>
-            <a:picLocks noChangeAspect="1"/>
-          </p:cNvPicPr>
-          <p:nvPr/>
-        </p:nvPicPr>
-        <p:blipFill>
-          <a:blip r:embed="rId2"/>
-          <a:stretch>
-            <a:fillRect/>
-          </a:stretch>
-        </p:blipFill>
-        <p:spPr>
-          <a:xfrm>
-            <a:off x="9420374" y="6840141"/>
-            <a:ext cx="551706" cy="359866"/>
-          </a:xfrm>
-          <a:prstGeom prst="rect">
-            <a:avLst/>
-          </a:prstGeom>
-        </p:spPr>
-      </p:pic>
-      <p:sp>
-        <p:nvSpPr>
-          <p:cNvPr id="10" name="Text 6"/>
-          <p:cNvSpPr txBox="1"/>
-          <p:nvPr/>
-        </p:nvSpPr>
-        <p:spPr>
-          <a:xfrm>
-            <a:off x="7619405" y="748457"/>
-            <a:ext cx="1969026" cy="114300"/>
-          </a:xfrm>
-          <a:prstGeom prst="rect">
-            <a:avLst/>
-          </a:prstGeom>
-          <a:noFill/>
-          <a:ln/>
-        </p:spPr>
-        <p:txBody>
-          <a:bodyPr wrap="square" lIns="0" tIns="0" rIns="0" bIns="0" rtlCol="0" anchor="t"/>
-          <a:lstStyle/>
-          <a:p>
-            <a:pPr algn="l" indent="0" marL="0">
-              <a:lnSpc>
-                <a:spcPts val="768"/>
-              </a:lnSpc>
-              <a:buNone/>
-            </a:pPr>
-            <a:r>
-              <a:rPr lang="en-US" sz="640" spc="166" kern="0" dirty="0">
-                <a:solidFill>
-                  <a:srgbClr val="8C959D"/>
-                </a:solidFill>
-                <a:latin typeface="Jost Medium" pitchFamily="34" charset="0"/>
-                <a:ea typeface="Jost Medium" pitchFamily="34" charset="-122"/>
-                <a:cs typeface="Jost Medium" pitchFamily="34" charset="-120"/>
-              </a:rPr>
-              <a:t>POUSADA CAMBURI × VICTORINOX</a:t>
-            </a:r>
-            <a:endParaRPr lang="en-US" sz="640" dirty="0"/>
-          </a:p>
-        </p:txBody>
-      </p:sp>
-      <p:sp>
-        <p:nvSpPr>
-          <p:cNvPr id="11" name="Text 7"/>
-          <p:cNvSpPr txBox="1"/>
-          <p:nvPr/>
-        </p:nvSpPr>
-        <p:spPr>
-          <a:xfrm>
-            <a:off x="9794677" y="672257"/>
-            <a:ext cx="223123" cy="209550"/>
-          </a:xfrm>
-          <a:prstGeom prst="rect">
-            <a:avLst/>
-          </a:prstGeom>
-          <a:noFill/>
-          <a:ln/>
-        </p:spPr>
-        <p:txBody>
-          <a:bodyPr wrap="square" lIns="0" tIns="0" rIns="0" bIns="0" rtlCol="0" anchor="t"/>
-          <a:lstStyle/>
-          <a:p>
-            <a:pPr algn="l" indent="0" marL="0">
-              <a:lnSpc>
-                <a:spcPts val="1560"/>
-              </a:lnSpc>
-              <a:buNone/>
-            </a:pPr>
-            <a:r>
-              <a:rPr lang="en-US" sz="1300" spc="52" kern="0" dirty="0">
-                <a:solidFill>
-                  <a:srgbClr val="C1121C"/>
-                </a:solidFill>
-                <a:latin typeface="EB Garamond Medium" pitchFamily="34" charset="0"/>
-                <a:ea typeface="EB Garamond Medium" pitchFamily="34" charset="-122"/>
-                <a:cs typeface="EB Garamond Medium" pitchFamily="34" charset="-120"/>
-              </a:rPr>
-              <a:t>11</a:t>
-            </a:r>
-            <a:endParaRPr lang="en-US" sz="1300" dirty="0"/>
-          </a:p>
-        </p:txBody>
-      </p:sp>
-      <p:sp>
-        <p:nvSpPr>
-          <p:cNvPr id="12" name="Text 8"/>
-          <p:cNvSpPr txBox="1"/>
-          <p:nvPr/>
-        </p:nvSpPr>
-        <p:spPr>
-          <a:xfrm>
-            <a:off x="719882" y="1341239"/>
-            <a:ext cx="2700218" cy="114300"/>
-          </a:xfrm>
-          <a:prstGeom prst="rect">
-            <a:avLst/>
-          </a:prstGeom>
-          <a:noFill/>
-          <a:ln/>
-        </p:spPr>
-        <p:txBody>
-          <a:bodyPr wrap="square" lIns="0" tIns="0" rIns="0" bIns="0" rtlCol="0" anchor="t"/>
-          <a:lstStyle/>
-          <a:p>
-            <a:pPr algn="l" indent="0" marL="0">
-              <a:lnSpc>
-                <a:spcPts val="792"/>
-              </a:lnSpc>
-              <a:buNone/>
-            </a:pPr>
-            <a:r>
-              <a:rPr lang="en-US" sz="660" spc="172" kern="0" dirty="0">
-                <a:solidFill>
-                  <a:srgbClr val="C1121C"/>
-                </a:solidFill>
-                <a:latin typeface="Jost Medium" pitchFamily="34" charset="0"/>
-                <a:ea typeface="Jost Medium" pitchFamily="34" charset="-122"/>
-                <a:cs typeface="Jost Medium" pitchFamily="34" charset="-120"/>
-              </a:rPr>
-              <a:t>ATENCIOSAMENTE</a:t>
-            </a:r>
-            <a:endParaRPr lang="en-US" sz="660" dirty="0"/>
-          </a:p>
-        </p:txBody>
-      </p:sp>
-      <p:sp>
-        <p:nvSpPr>
-          <p:cNvPr id="13" name="Text 9"/>
-          <p:cNvSpPr txBox="1"/>
-          <p:nvPr/>
-        </p:nvSpPr>
-        <p:spPr>
-          <a:xfrm>
-            <a:off x="719882" y="1617464"/>
-            <a:ext cx="2700218" cy="781645"/>
-          </a:xfrm>
-          <a:prstGeom prst="rect">
-            <a:avLst/>
-          </a:prstGeom>
-          <a:noFill/>
-          <a:ln/>
-        </p:spPr>
-        <p:txBody>
-          <a:bodyPr wrap="square" lIns="0" tIns="0" rIns="0" bIns="0" rtlCol="0" anchor="t"/>
-          <a:lstStyle/>
-          <a:p>
-            <a:pPr algn="l" indent="0" marL="0">
-              <a:lnSpc>
-                <a:spcPts val="3078"/>
-              </a:lnSpc>
-              <a:buNone/>
-            </a:pPr>
-            <a:r>
-              <a:rPr lang="en-US" sz="2700" spc="-11" kern="0" dirty="0">
-                <a:solidFill>
-                  <a:srgbClr val="16222E"/>
-                </a:solidFill>
-                <a:latin typeface="EB Garamond Medium" pitchFamily="34" charset="0"/>
-                <a:ea typeface="EB Garamond Medium" pitchFamily="34" charset="-122"/>
-                <a:cs typeface="EB Garamond Medium" pitchFamily="34" charset="-120"/>
-              </a:rPr>
-              <a:t>Seu lugar em Camburi</a:t>
-            </a:r>
-            <a:endParaRPr lang="en-US" sz="2700" dirty="0"/>
-          </a:p>
-        </p:txBody>
-      </p:sp>
-      <p:sp>
-        <p:nvSpPr>
-          <p:cNvPr id="14" name="Text 10"/>
-          <p:cNvSpPr txBox="1"/>
-          <p:nvPr/>
-        </p:nvSpPr>
-        <p:spPr>
-          <a:xfrm>
-            <a:off x="719882" y="6441877"/>
-            <a:ext cx="2700218" cy="262830"/>
-          </a:xfrm>
-          <a:prstGeom prst="rect">
-            <a:avLst/>
-          </a:prstGeom>
-          <a:noFill/>
-          <a:ln/>
-        </p:spPr>
-        <p:txBody>
-          <a:bodyPr wrap="square" lIns="0" tIns="0" rIns="0" bIns="0" rtlCol="0" anchor="t"/>
-          <a:lstStyle/>
-          <a:p>
-            <a:pPr algn="l" indent="0" marL="0">
-              <a:lnSpc>
-                <a:spcPts val="2070"/>
-              </a:lnSpc>
-              <a:buNone/>
-            </a:pPr>
-            <a:r>
-              <a:rPr lang="en-US" sz="1500" i="1" spc="3" kern="0" dirty="0">
-                <a:solidFill>
-                  <a:srgbClr val="16222E"/>
-                </a:solidFill>
-                <a:latin typeface="EB Garamond" pitchFamily="34" charset="0"/>
-                <a:ea typeface="EB Garamond" pitchFamily="34" charset="-122"/>
-                <a:cs typeface="EB Garamond" pitchFamily="34" charset="-120"/>
-              </a:rPr>
-              <a:t>“Quem cuida de tudo somos nós.”</a:t>
-            </a:r>
-            <a:endParaRPr lang="en-US" sz="1500" dirty="0"/>
-          </a:p>
-        </p:txBody>
-      </p:sp>
-      <p:sp>
-        <p:nvSpPr>
-          <p:cNvPr id="15" name="Text 11"/>
-          <p:cNvSpPr txBox="1"/>
-          <p:nvPr/>
-        </p:nvSpPr>
-        <p:spPr>
-          <a:xfrm>
-            <a:off x="4463802" y="1341239"/>
-            <a:ext cx="5553998" cy="265509"/>
-          </a:xfrm>
-          <a:prstGeom prst="rect">
-            <a:avLst/>
-          </a:prstGeom>
-          <a:noFill/>
-          <a:ln/>
-        </p:spPr>
-        <p:txBody>
-          <a:bodyPr wrap="square" lIns="0" tIns="0" rIns="0" bIns="0" rtlCol="0" anchor="t"/>
-          <a:lstStyle/>
-          <a:p>
-            <a:pPr algn="l" indent="0" marL="0">
-              <a:lnSpc>
-                <a:spcPts val="2092"/>
-              </a:lnSpc>
-              <a:buNone/>
-            </a:pPr>
-            <a:r>
-              <a:rPr lang="en-US" sz="1260" dirty="0">
-                <a:solidFill>
-                  <a:srgbClr val="2E3A45"/>
-                </a:solidFill>
-                <a:latin typeface="Jost Light" pitchFamily="34" charset="0"/>
-                <a:ea typeface="Jost Light" pitchFamily="34" charset="-122"/>
-                <a:cs typeface="Jost Light" pitchFamily="34" charset="-120"/>
-              </a:rPr>
-              <a:t>Você aproveita a praia, descansa e vive a experiência.</a:t>
-            </a:r>
-            <a:endParaRPr lang="en-US" sz="1260" dirty="0"/>
-          </a:p>
-        </p:txBody>
-      </p:sp>
-      <p:sp>
-        <p:nvSpPr>
-          <p:cNvPr id="16" name="Text 12"/>
-          <p:cNvSpPr txBox="1"/>
-          <p:nvPr/>
-        </p:nvSpPr>
-        <p:spPr>
-          <a:xfrm>
-            <a:off x="4859685" y="5369868"/>
-            <a:ext cx="2714804" cy="114300"/>
-          </a:xfrm>
-          <a:prstGeom prst="rect">
-            <a:avLst/>
-          </a:prstGeom>
-          <a:noFill/>
-          <a:ln/>
-        </p:spPr>
-        <p:txBody>
-          <a:bodyPr wrap="square" lIns="0" tIns="0" rIns="0" bIns="0" rtlCol="0" anchor="t"/>
-          <a:lstStyle/>
-          <a:p>
-            <a:pPr algn="l" indent="0" marL="0">
-              <a:lnSpc>
-                <a:spcPts val="744"/>
-              </a:lnSpc>
-              <a:buNone/>
-            </a:pPr>
-            <a:r>
-              <a:rPr lang="en-US" sz="620" spc="161" kern="0" dirty="0">
-                <a:solidFill>
-                  <a:srgbClr val="8FB2CC"/>
-                </a:solidFill>
-                <a:latin typeface="Jost Medium" pitchFamily="34" charset="0"/>
-                <a:ea typeface="Jost Medium" pitchFamily="34" charset="-122"/>
-                <a:cs typeface="Jost Medium" pitchFamily="34" charset="-120"/>
-              </a:rPr>
-              <a:t>ATENCIOSAMENTE</a:t>
-            </a:r>
-            <a:endParaRPr lang="en-US" sz="620" dirty="0"/>
-          </a:p>
-        </p:txBody>
-      </p:sp>
-      <p:sp>
-        <p:nvSpPr>
-          <p:cNvPr id="17" name="Text 13"/>
-          <p:cNvSpPr txBox="1"/>
-          <p:nvPr/>
-        </p:nvSpPr>
-        <p:spPr>
-          <a:xfrm>
-            <a:off x="4859685" y="5592068"/>
-            <a:ext cx="2714804" cy="318343"/>
-          </a:xfrm>
-          <a:prstGeom prst="rect">
-            <a:avLst/>
-          </a:prstGeom>
-          <a:noFill/>
-          <a:ln/>
-        </p:spPr>
-        <p:txBody>
-          <a:bodyPr wrap="square" lIns="0" tIns="0" rIns="0" bIns="0" rtlCol="0" anchor="t"/>
-          <a:lstStyle/>
-          <a:p>
-            <a:pPr algn="l" indent="0" marL="0">
-              <a:lnSpc>
-                <a:spcPts val="2508"/>
-              </a:lnSpc>
-              <a:buNone/>
-            </a:pPr>
-            <a:r>
-              <a:rPr lang="en-US" sz="2200" spc="9" kern="0" dirty="0">
-                <a:solidFill>
-                  <a:srgbClr val="FFFFFF"/>
-                </a:solidFill>
-                <a:latin typeface="EB Garamond" pitchFamily="34" charset="0"/>
-                <a:ea typeface="EB Garamond" pitchFamily="34" charset="-122"/>
-                <a:cs typeface="EB Garamond" pitchFamily="34" charset="-120"/>
-              </a:rPr>
-              <a:t>Rodrigo Roberto Sulina</a:t>
-            </a:r>
-            <a:endParaRPr lang="en-US" sz="2200" dirty="0"/>
-          </a:p>
-        </p:txBody>
-      </p:sp>
-      <p:sp>
-        <p:nvSpPr>
-          <p:cNvPr id="18" name="Text 14"/>
-          <p:cNvSpPr txBox="1"/>
-          <p:nvPr/>
-        </p:nvSpPr>
-        <p:spPr>
-          <a:xfrm>
-            <a:off x="4859685" y="5982295"/>
-            <a:ext cx="2714804" cy="362545"/>
-          </a:xfrm>
-          <a:prstGeom prst="rect">
-            <a:avLst/>
-          </a:prstGeom>
-          <a:noFill/>
-          <a:ln/>
-        </p:spPr>
-        <p:txBody>
-          <a:bodyPr wrap="square" lIns="0" tIns="0" rIns="0" bIns="0" rtlCol="0" anchor="t"/>
-          <a:lstStyle/>
-          <a:p>
-            <a:pPr algn="l" indent="0" marL="0">
-              <a:lnSpc>
-                <a:spcPts val="1428"/>
-              </a:lnSpc>
-              <a:buNone/>
-            </a:pPr>
-            <a:r>
-              <a:rPr lang="en-US" sz="840" spc="50" kern="0" dirty="0">
-                <a:solidFill>
-                  <a:srgbClr val="B9CBD9"/>
-                </a:solidFill>
-                <a:latin typeface="Jost" pitchFamily="34" charset="0"/>
-                <a:ea typeface="Jost" pitchFamily="34" charset="-122"/>
-                <a:cs typeface="Jost" pitchFamily="34" charset="-120"/>
-              </a:rPr>
-              <a:t>Pousada Camburi</a:t>
-            </a:r>
-            <a:endParaRPr lang="en-US" sz="840" dirty="0"/>
-          </a:p>
-          <a:p>
-            <a:pPr algn="l" indent="0" marL="0">
-              <a:lnSpc>
-                <a:spcPts val="1428"/>
-              </a:lnSpc>
-              <a:buNone/>
-            </a:pPr>
-            <a:r>
-              <a:rPr lang="en-US" sz="840" spc="50" kern="0" dirty="0">
-                <a:solidFill>
-                  <a:srgbClr val="B9CBD9"/>
-                </a:solidFill>
-                <a:latin typeface="Jost" pitchFamily="34" charset="0"/>
-                <a:ea typeface="Jost" pitchFamily="34" charset="-122"/>
-                <a:cs typeface="Jost" pitchFamily="34" charset="-120"/>
-              </a:rPr>
-              <a:t>Desde 22 de agosto de 2002</a:t>
-            </a:r>
-            <a:endParaRPr lang="en-US" sz="840" dirty="0"/>
-          </a:p>
-        </p:txBody>
-      </p:sp>
-      <p:sp>
-        <p:nvSpPr>
-          <p:cNvPr id="19" name="Text 15"/>
-          <p:cNvSpPr txBox="1"/>
-          <p:nvPr/>
-        </p:nvSpPr>
-        <p:spPr>
-          <a:xfrm>
-            <a:off x="7842915" y="5410200"/>
-            <a:ext cx="1733282" cy="894159"/>
-          </a:xfrm>
-          <a:prstGeom prst="rect">
-            <a:avLst/>
-          </a:prstGeom>
-          <a:noFill/>
-          <a:ln/>
-        </p:spPr>
-        <p:txBody>
-          <a:bodyPr wrap="square" lIns="0" tIns="0" rIns="0" bIns="0" rtlCol="0" anchor="t"/>
-          <a:lstStyle/>
-          <a:p>
-            <a:pPr algn="r" indent="0" marL="0">
-              <a:lnSpc>
-                <a:spcPts val="1760"/>
-              </a:lnSpc>
-              <a:buNone/>
-            </a:pPr>
-            <a:r>
-              <a:rPr lang="en-US" sz="640" spc="128" kern="0" dirty="0">
-                <a:solidFill>
-                  <a:srgbClr val="8FB2CC"/>
-                </a:solidFill>
-                <a:latin typeface="Jost Medium" pitchFamily="34" charset="0"/>
-                <a:ea typeface="Jost Medium" pitchFamily="34" charset="-122"/>
-                <a:cs typeface="Jost Medium" pitchFamily="34" charset="-120"/>
-              </a:rPr>
-              <a:t>TEL.</a:t>
-            </a:r>
-            <a:pPr algn="r" indent="0" marL="0">
-              <a:lnSpc>
-                <a:spcPts val="1760"/>
-              </a:lnSpc>
-              <a:buNone/>
-            </a:pPr>
-            <a:r>
-              <a:rPr lang="en-US" sz="880" spc="18" kern="0" dirty="0">
-                <a:solidFill>
-                  <a:srgbClr val="E6EDF3"/>
-                </a:solidFill>
-                <a:latin typeface="Jost" pitchFamily="34" charset="0"/>
-                <a:ea typeface="Jost" pitchFamily="34" charset="-122"/>
-                <a:cs typeface="Jost" pitchFamily="34" charset="-120"/>
-              </a:rPr>
-              <a:t> (12) 99795-2066</a:t>
-            </a:r>
-            <a:endParaRPr lang="en-US" sz="640" dirty="0"/>
-          </a:p>
-          <a:p>
-            <a:pPr algn="r" indent="0" marL="0">
-              <a:lnSpc>
-                <a:spcPts val="1760"/>
-              </a:lnSpc>
-              <a:buNone/>
-            </a:pPr>
-            <a:r>
-              <a:rPr lang="en-US" sz="640" spc="128" kern="0" dirty="0">
-                <a:solidFill>
-                  <a:srgbClr val="8FB2CC"/>
-                </a:solidFill>
-                <a:latin typeface="Jost Medium" pitchFamily="34" charset="0"/>
-                <a:ea typeface="Jost Medium" pitchFamily="34" charset="-122"/>
-                <a:cs typeface="Jost Medium" pitchFamily="34" charset="-120"/>
-              </a:rPr>
-              <a:t>TEL.</a:t>
-            </a:r>
-            <a:pPr algn="r" indent="0" marL="0">
-              <a:lnSpc>
-                <a:spcPts val="1760"/>
-              </a:lnSpc>
-              <a:buNone/>
-            </a:pPr>
-            <a:r>
-              <a:rPr lang="en-US" sz="880" spc="18" kern="0" dirty="0">
-                <a:solidFill>
-                  <a:srgbClr val="E6EDF3"/>
-                </a:solidFill>
-                <a:latin typeface="Jost" pitchFamily="34" charset="0"/>
-                <a:ea typeface="Jost" pitchFamily="34" charset="-122"/>
-                <a:cs typeface="Jost" pitchFamily="34" charset="-120"/>
-              </a:rPr>
-              <a:t> (12) 99769-8399</a:t>
-            </a:r>
-            <a:endParaRPr lang="en-US" sz="640" dirty="0"/>
-          </a:p>
-          <a:p>
-            <a:pPr algn="r" indent="0" marL="0">
-              <a:lnSpc>
-                <a:spcPts val="1760"/>
-              </a:lnSpc>
-              <a:buNone/>
-            </a:pPr>
-            <a:r>
-              <a:rPr lang="en-US" sz="880" spc="18" kern="0" dirty="0">
-                <a:solidFill>
-                  <a:srgbClr val="E6EDF3"/>
-                </a:solidFill>
-                <a:latin typeface="Jost" pitchFamily="34" charset="0"/>
-                <a:ea typeface="Jost" pitchFamily="34" charset="-122"/>
-                <a:cs typeface="Jost" pitchFamily="34" charset="-120"/>
-              </a:rPr>
-              <a:t> camburi@pousadacamburi.com.br</a:t>
-            </a:r>
-            <a:endParaRPr lang="en-US" sz="640" dirty="0"/>
-          </a:p>
-          <a:p>
-            <a:pPr algn="r" indent="0" marL="0">
-              <a:lnSpc>
-                <a:spcPts val="1760"/>
-              </a:lnSpc>
-              <a:buNone/>
-            </a:pPr>
-            <a:r>
-              <a:rPr lang="en-US" sz="880" spc="18" kern="0" dirty="0">
-                <a:solidFill>
-                  <a:srgbClr val="E6EDF3"/>
-                </a:solidFill>
-                <a:latin typeface="Jost" pitchFamily="34" charset="0"/>
-                <a:ea typeface="Jost" pitchFamily="34" charset="-122"/>
-                <a:cs typeface="Jost" pitchFamily="34" charset="-120"/>
-              </a:rPr>
-              <a:t> rrsulina@pousadacamburi.com.br </a:t>
-            </a:r>
-            <a:endParaRPr lang="en-US" sz="640" dirty="0"/>
+              <a:t>DESDE 22 DE AGOSTO DE 2002</a:t>
+            </a:r>
+            <a:endParaRPr lang="en-US" sz="700" dirty="0"/>
           </a:p>
         </p:txBody>
       </p:sp>
@@ -5487,16 +4620,14 @@
         </p:nvSpPr>
         <p:spPr>
           <a:xfrm>
-            <a:off x="4463802" y="1341239"/>
-            <a:ext cx="1381125" cy="1157883"/>
-          </a:xfrm>
-          <a:prstGeom prst="roundRect">
-            <a:avLst>
-              <a:gd name="adj" fmla="val 7773"/>
-            </a:avLst>
-          </a:prstGeom>
-          <a:solidFill>
-            <a:srgbClr val="FAF8F5"/>
+            <a:off x="4463802" y="6035427"/>
+            <a:ext cx="5508278" cy="9525"/>
+          </a:xfrm>
+          <a:prstGeom prst="rect">
+            <a:avLst/>
+          </a:prstGeom>
+          <a:solidFill>
+            <a:srgbClr val="E2DFD9"/>
           </a:solidFill>
           <a:ln/>
         </p:spPr>
@@ -5509,92 +4640,6 @@
         </p:nvSpPr>
         <p:spPr>
           <a:xfrm>
-            <a:off x="6060877" y="1341239"/>
-            <a:ext cx="941189" cy="1157883"/>
-          </a:xfrm>
-          <a:prstGeom prst="roundRect">
-            <a:avLst>
-              <a:gd name="adj" fmla="val 9562"/>
-            </a:avLst>
-          </a:prstGeom>
-          <a:solidFill>
-            <a:srgbClr val="FAF8F5"/>
-          </a:solidFill>
-          <a:ln/>
-        </p:spPr>
-      </p:sp>
-      <p:sp>
-        <p:nvSpPr>
-          <p:cNvPr id="8" name="Shape 6"/>
-          <p:cNvSpPr/>
-          <p:nvPr/>
-        </p:nvSpPr>
-        <p:spPr>
-          <a:xfrm>
-            <a:off x="7218015" y="1341239"/>
-            <a:ext cx="1596926" cy="1157883"/>
-          </a:xfrm>
-          <a:prstGeom prst="roundRect">
-            <a:avLst>
-              <a:gd name="adj" fmla="val 7773"/>
-            </a:avLst>
-          </a:prstGeom>
-          <a:solidFill>
-            <a:srgbClr val="FAF8F5"/>
-          </a:solidFill>
-          <a:ln/>
-        </p:spPr>
-      </p:sp>
-      <p:sp>
-        <p:nvSpPr>
-          <p:cNvPr id="9" name="Shape 7"/>
-          <p:cNvSpPr/>
-          <p:nvPr/>
-        </p:nvSpPr>
-        <p:spPr>
-          <a:xfrm>
-            <a:off x="9030891" y="1341239"/>
-            <a:ext cx="941189" cy="1157883"/>
-          </a:xfrm>
-          <a:prstGeom prst="roundRect">
-            <a:avLst>
-              <a:gd name="adj" fmla="val 9562"/>
-            </a:avLst>
-          </a:prstGeom>
-          <a:solidFill>
-            <a:srgbClr val="FAF8F5"/>
-          </a:solidFill>
-          <a:ln/>
-        </p:spPr>
-      </p:sp>
-      <p:sp>
-        <p:nvSpPr>
-          <p:cNvPr id="10" name="Shape 8"/>
-          <p:cNvSpPr/>
-          <p:nvPr/>
-        </p:nvSpPr>
-        <p:spPr>
-          <a:xfrm>
-            <a:off x="4463802" y="6126510"/>
-            <a:ext cx="5508278" cy="9525"/>
-          </a:xfrm>
-          <a:prstGeom prst="rect">
-            <a:avLst/>
-          </a:prstGeom>
-          <a:solidFill>
-            <a:srgbClr val="E2DFD9"/>
-          </a:solidFill>
-          <a:ln/>
-        </p:spPr>
-      </p:sp>
-      <p:sp>
-        <p:nvSpPr>
-          <p:cNvPr id="11" name="Shape 9"/>
-          <p:cNvSpPr/>
-          <p:nvPr/>
-        </p:nvSpPr>
-        <p:spPr>
-          <a:xfrm>
             <a:off x="719882" y="6704707"/>
             <a:ext cx="9252198" cy="9525"/>
           </a:xfrm>
@@ -5609,7 +4654,7 @@
       </p:sp>
       <p:pic>
         <p:nvPicPr>
-          <p:cNvPr id="12" name="Image 0" descr="/home/user/SkillsClaude/apresentacao-victorinox/build/logos/logo-pc.png">    </p:cNvPr>
+          <p:cNvPr id="8" name="Image 0" descr="/home/user/SkillsClaude/apresentacao-victorinox/build/logos/logo-pc.png">    </p:cNvPr>
           <p:cNvPicPr>
             <a:picLocks noChangeAspect="1"/>
           </p:cNvPicPr>
@@ -5633,7 +4678,7 @@
       </p:pic>
       <p:pic>
         <p:nvPicPr>
-          <p:cNvPr id="13" name="Image 1" descr="/home/user/SkillsClaude/apresentacao-victorinox/build/logos/logo-vx.png">    </p:cNvPr>
+          <p:cNvPr id="9" name="Image 1" descr="/home/user/SkillsClaude/apresentacao-victorinox/build/logos/logo-vx.png">    </p:cNvPr>
           <p:cNvPicPr>
             <a:picLocks noChangeAspect="1"/>
           </p:cNvPicPr>
@@ -5657,7 +4702,7 @@
       </p:pic>
       <p:sp>
         <p:nvSpPr>
-          <p:cNvPr id="14" name="Text 10"/>
+          <p:cNvPr id="10" name="Text 6"/>
           <p:cNvSpPr txBox="1"/>
           <p:nvPr/>
         </p:nvSpPr>
@@ -5699,7 +4744,7 @@
       </p:sp>
       <p:sp>
         <p:nvSpPr>
-          <p:cNvPr id="15" name="Text 11"/>
+          <p:cNvPr id="11" name="Text 7"/>
           <p:cNvSpPr txBox="1"/>
           <p:nvPr/>
         </p:nvSpPr>
@@ -5741,7 +4786,7 @@
       </p:sp>
       <p:sp>
         <p:nvSpPr>
-          <p:cNvPr id="16" name="Text 12"/>
+          <p:cNvPr id="12" name="Text 8"/>
           <p:cNvSpPr txBox="1"/>
           <p:nvPr/>
         </p:nvSpPr>
@@ -5783,7 +4828,7 @@
       </p:sp>
       <p:sp>
         <p:nvSpPr>
-          <p:cNvPr id="17" name="Text 13"/>
+          <p:cNvPr id="13" name="Text 9"/>
           <p:cNvSpPr txBox="1"/>
           <p:nvPr/>
         </p:nvSpPr>
@@ -5825,14 +4870,14 @@
       </p:sp>
       <p:sp>
         <p:nvSpPr>
-          <p:cNvPr id="18" name="Text 14"/>
+          <p:cNvPr id="14" name="Text 10"/>
           <p:cNvSpPr txBox="1"/>
           <p:nvPr/>
         </p:nvSpPr>
         <p:spPr>
           <a:xfrm>
             <a:off x="719882" y="2615059"/>
-            <a:ext cx="2700218" cy="490240"/>
+            <a:ext cx="2700218" cy="980480"/>
           </a:xfrm>
           <a:prstGeom prst="rect">
             <a:avLst/>
@@ -5859,7 +4904,7 @@
                 <a:ea typeface="Jost" pitchFamily="34" charset="-122"/>
                 <a:cs typeface="Jost" pitchFamily="34" charset="-120"/>
               </a:rPr>
-              <a:t>A melhor maneira de falar sobre a Pousada Camburi é ouvir quem passou por aqui.</a:t>
+              <a:t>A melhor maneira de falar sobre a Pousada Camburi é ouvir quem passou por aqui. Atualmente, nossa reputação digital demonstra a consistência desse trabalho.</a:t>
             </a:r>
             <a:endParaRPr lang="en-US" sz="1060" dirty="0"/>
           </a:p>
@@ -5867,7 +4912,7 @@
       </p:sp>
       <p:sp>
         <p:nvSpPr>
-          <p:cNvPr id="19" name="Text 15"/>
+          <p:cNvPr id="15" name="Text 11"/>
           <p:cNvSpPr txBox="1"/>
           <p:nvPr/>
         </p:nvSpPr>
@@ -5901,7 +4946,7 @@
                 <a:ea typeface="EB Garamond" pitchFamily="34" charset="-122"/>
                 <a:cs typeface="EB Garamond" pitchFamily="34" charset="-120"/>
               </a:rPr>
-              <a:t>“Nossa reputação digital demonstra a consistência desse trabalho.”</a:t>
+              <a:t>“Mas, para nós, os números são apenas uma parte da história.”</a:t>
             </a:r>
             <a:endParaRPr lang="en-US" sz="1500" dirty="0"/>
           </a:p>
@@ -5909,43 +4954,211 @@
       </p:sp>
       <p:sp>
         <p:nvSpPr>
+          <p:cNvPr id="16" name="Text 12"/>
+          <p:cNvSpPr txBox="1"/>
+          <p:nvPr/>
+        </p:nvSpPr>
+        <p:spPr>
+          <a:xfrm>
+            <a:off x="4463802" y="1341239"/>
+            <a:ext cx="5553998" cy="796528"/>
+          </a:xfrm>
+          <a:prstGeom prst="rect">
+            <a:avLst/>
+          </a:prstGeom>
+          <a:noFill/>
+          <a:ln/>
+        </p:spPr>
+        <p:txBody>
+          <a:bodyPr wrap="square" lIns="0" tIns="0" rIns="0" bIns="0" rtlCol="0" anchor="t"/>
+          <a:lstStyle/>
+          <a:p>
+            <a:pPr algn="l" indent="0" marL="0">
+              <a:lnSpc>
+                <a:spcPts val="2092"/>
+              </a:lnSpc>
+              <a:buNone/>
+            </a:pPr>
+            <a:r>
+              <a:rPr lang="en-US" sz="1260" dirty="0">
+                <a:solidFill>
+                  <a:srgbClr val="2E3A45"/>
+                </a:solidFill>
+                <a:latin typeface="Jost Light" pitchFamily="34" charset="0"/>
+                <a:ea typeface="Jost Light" pitchFamily="34" charset="-122"/>
+                <a:cs typeface="Jost Light" pitchFamily="34" charset="-120"/>
+              </a:rPr>
+              <a:t>No Google, a Pousada Camburi possui avaliação de 4,8 estrelas, baseada em 292 avaliações. No Tripadvisor, possui 4,7 estrelas, com 136 avaliações, estando atualmente entre as pousadas mais bem avaliadas de Camburi.</a:t>
+            </a:r>
+            <a:endParaRPr lang="en-US" sz="1260" dirty="0"/>
+          </a:p>
+        </p:txBody>
+      </p:sp>
+      <p:sp>
+        <p:nvSpPr>
+          <p:cNvPr id="17" name="Text 13"/>
+          <p:cNvSpPr txBox="1"/>
+          <p:nvPr/>
+        </p:nvSpPr>
+        <p:spPr>
+          <a:xfrm>
+            <a:off x="4463802" y="2508498"/>
+            <a:ext cx="5553998" cy="735360"/>
+          </a:xfrm>
+          <a:prstGeom prst="rect">
+            <a:avLst/>
+          </a:prstGeom>
+          <a:noFill/>
+          <a:ln/>
+        </p:spPr>
+        <p:txBody>
+          <a:bodyPr wrap="square" lIns="0" tIns="0" rIns="0" bIns="0" rtlCol="0" anchor="t"/>
+          <a:lstStyle/>
+          <a:p>
+            <a:pPr algn="l" indent="0" marL="0">
+              <a:lnSpc>
+                <a:spcPts val="1929"/>
+              </a:lnSpc>
+              <a:buNone/>
+            </a:pPr>
+            <a:r>
+              <a:rPr lang="en-US" sz="1060" dirty="0">
+                <a:solidFill>
+                  <a:srgbClr val="5A6672"/>
+                </a:solidFill>
+                <a:latin typeface="Jost" pitchFamily="34" charset="0"/>
+                <a:ea typeface="Jost" pitchFamily="34" charset="-122"/>
+                <a:cs typeface="Jost" pitchFamily="34" charset="-120"/>
+              </a:rPr>
+              <a:t>Mas, para nós, os números são apenas uma parte da história. O que realmente importa são os comentários. Hóspedes destacam nossa localização, limpeza, café da manhã, serviço de praia, conforto e, principalmente, o atendimento e a atenção da equipe.</a:t>
+            </a:r>
+            <a:endParaRPr lang="en-US" sz="1060" dirty="0"/>
+          </a:p>
+        </p:txBody>
+      </p:sp>
+      <p:sp>
+        <p:nvSpPr>
+          <p:cNvPr id="18" name="Text 14"/>
+          <p:cNvSpPr txBox="1"/>
+          <p:nvPr/>
+        </p:nvSpPr>
+        <p:spPr>
+          <a:xfrm>
+            <a:off x="4463802" y="3380631"/>
+            <a:ext cx="5553998" cy="1225600"/>
+          </a:xfrm>
+          <a:prstGeom prst="rect">
+            <a:avLst/>
+          </a:prstGeom>
+          <a:noFill/>
+          <a:ln/>
+        </p:spPr>
+        <p:txBody>
+          <a:bodyPr wrap="square" lIns="0" tIns="0" rIns="0" bIns="0" rtlCol="0" anchor="t"/>
+          <a:lstStyle/>
+          <a:p>
+            <a:pPr algn="l" indent="0" marL="0">
+              <a:lnSpc>
+                <a:spcPts val="1929"/>
+              </a:lnSpc>
+              <a:buNone/>
+            </a:pPr>
+            <a:r>
+              <a:rPr lang="en-US" sz="1060" dirty="0">
+                <a:solidFill>
+                  <a:srgbClr val="5A6672"/>
+                </a:solidFill>
+                <a:latin typeface="Jost" pitchFamily="34" charset="0"/>
+                <a:ea typeface="Jost" pitchFamily="34" charset="-122"/>
+                <a:cs typeface="Jost" pitchFamily="34" charset="-120"/>
+              </a:rPr>
+              <a:t>Uma avaliação recente no Tripadvisor, por exemplo, descreve a experiência como uma agradável surpresa e destaca a proximidade da praia, o ambiente cercado pela Mata Atlântica, o estilo rústico, o conforto dos quartos, o café da manhã, o serviço de praia e a atenção dos proprietários. O hóspede ainda registra que existem clientes que frequentam a pousada há aproximadamente 20 anos.</a:t>
+            </a:r>
+            <a:endParaRPr lang="en-US" sz="1060" dirty="0"/>
+          </a:p>
+        </p:txBody>
+      </p:sp>
+      <p:sp>
+        <p:nvSpPr>
+          <p:cNvPr id="19" name="Text 15"/>
+          <p:cNvSpPr txBox="1"/>
+          <p:nvPr/>
+        </p:nvSpPr>
+        <p:spPr>
+          <a:xfrm>
+            <a:off x="4463802" y="4743004"/>
+            <a:ext cx="5553998" cy="735360"/>
+          </a:xfrm>
+          <a:prstGeom prst="rect">
+            <a:avLst/>
+          </a:prstGeom>
+          <a:noFill/>
+          <a:ln/>
+        </p:spPr>
+        <p:txBody>
+          <a:bodyPr wrap="square" lIns="0" tIns="0" rIns="0" bIns="0" rtlCol="0" anchor="t"/>
+          <a:lstStyle/>
+          <a:p>
+            <a:pPr algn="l" indent="0" marL="0">
+              <a:lnSpc>
+                <a:spcPts val="1929"/>
+              </a:lnSpc>
+              <a:buNone/>
+            </a:pPr>
+            <a:r>
+              <a:rPr lang="en-US" sz="1060" dirty="0">
+                <a:solidFill>
+                  <a:srgbClr val="5A6672"/>
+                </a:solidFill>
+                <a:latin typeface="Jost" pitchFamily="34" charset="0"/>
+                <a:ea typeface="Jost" pitchFamily="34" charset="-122"/>
+                <a:cs typeface="Jost" pitchFamily="34" charset="-120"/>
+              </a:rPr>
+              <a:t>Outra avaliação recente publicada no Google ressalta que a experiência começa antes mesmo do check-in, destacando o cuidado com a chegada, as malas, o veículo, as explicações de boas-vindas e a atenção permanente da equipe com o bem-estar dos hóspedes.</a:t>
+            </a:r>
+            <a:endParaRPr lang="en-US" sz="1060" dirty="0"/>
+          </a:p>
+        </p:txBody>
+      </p:sp>
+      <p:sp>
+        <p:nvSpPr>
           <p:cNvPr id="20" name="Text 16"/>
           <p:cNvSpPr txBox="1"/>
           <p:nvPr/>
         </p:nvSpPr>
         <p:spPr>
           <a:xfrm>
-            <a:off x="4584859" y="1593205"/>
-            <a:ext cx="1139011" cy="431750"/>
-          </a:xfrm>
-          <a:prstGeom prst="rect">
-            <a:avLst/>
-          </a:prstGeom>
-          <a:noFill/>
-          <a:ln/>
-        </p:spPr>
-        <p:txBody>
-          <a:bodyPr wrap="square" lIns="0" tIns="0" rIns="0" bIns="0" rtlCol="0" anchor="t"/>
-          <a:lstStyle/>
-          <a:p>
-            <a:pPr algn="ctr" indent="0" marL="0">
-              <a:lnSpc>
-                <a:spcPts val="3400"/>
-              </a:lnSpc>
-              <a:buNone/>
-            </a:pPr>
-            <a:r>
-              <a:rPr lang="en-US" sz="3400" dirty="0">
-                <a:solidFill>
-                  <a:srgbClr val="C1121C"/>
-                </a:solidFill>
-                <a:latin typeface="EB Garamond" pitchFamily="34" charset="0"/>
-                <a:ea typeface="EB Garamond" pitchFamily="34" charset="-122"/>
-                <a:cs typeface="EB Garamond" pitchFamily="34" charset="-120"/>
-              </a:rPr>
-              <a:t>4,8</a:t>
-            </a:r>
-            <a:endParaRPr lang="en-US" sz="3400" dirty="0"/>
+            <a:off x="4463802" y="5615136"/>
+            <a:ext cx="5553998" cy="245120"/>
+          </a:xfrm>
+          <a:prstGeom prst="rect">
+            <a:avLst/>
+          </a:prstGeom>
+          <a:noFill/>
+          <a:ln/>
+        </p:spPr>
+        <p:txBody>
+          <a:bodyPr wrap="square" lIns="0" tIns="0" rIns="0" bIns="0" rtlCol="0" anchor="t"/>
+          <a:lstStyle/>
+          <a:p>
+            <a:pPr algn="l" indent="0" marL="0">
+              <a:lnSpc>
+                <a:spcPts val="1929"/>
+              </a:lnSpc>
+              <a:buNone/>
+            </a:pPr>
+            <a:r>
+              <a:rPr lang="en-US" sz="1060" dirty="0">
+                <a:solidFill>
+                  <a:srgbClr val="5A6672"/>
+                </a:solidFill>
+                <a:latin typeface="Jost" pitchFamily="34" charset="0"/>
+                <a:ea typeface="Jost" pitchFamily="34" charset="-122"/>
+                <a:cs typeface="Jost" pitchFamily="34" charset="-120"/>
+              </a:rPr>
+              <a:t>É exatamente esse tipo de reconhecimento que buscamos construir diariamente.</a:t>
+            </a:r>
+            <a:endParaRPr lang="en-US" sz="1060" dirty="0"/>
           </a:p>
         </p:txBody>
       </p:sp>
@@ -5957,35 +5170,35 @@
         </p:nvSpPr>
         <p:spPr>
           <a:xfrm>
-            <a:off x="4584859" y="2132856"/>
-            <a:ext cx="1139011" cy="114300"/>
-          </a:xfrm>
-          <a:prstGeom prst="rect">
-            <a:avLst/>
-          </a:prstGeom>
-          <a:noFill/>
-          <a:ln/>
-        </p:spPr>
-        <p:txBody>
-          <a:bodyPr wrap="square" lIns="0" tIns="0" rIns="0" bIns="0" rtlCol="0" anchor="t"/>
-          <a:lstStyle/>
-          <a:p>
-            <a:pPr algn="ctr" indent="0" marL="0">
+            <a:off x="4463802" y="6296918"/>
+            <a:ext cx="5553998" cy="114300"/>
+          </a:xfrm>
+          <a:prstGeom prst="rect">
+            <a:avLst/>
+          </a:prstGeom>
+          <a:noFill/>
+          <a:ln/>
+        </p:spPr>
+        <p:txBody>
+          <a:bodyPr wrap="square" lIns="0" tIns="0" rIns="0" bIns="0" rtlCol="0" anchor="t"/>
+          <a:lstStyle/>
+          <a:p>
+            <a:pPr algn="l" indent="0" marL="0">
               <a:lnSpc>
                 <a:spcPts val="744"/>
               </a:lnSpc>
               <a:buNone/>
             </a:pPr>
             <a:r>
-              <a:rPr lang="en-US" sz="620" spc="99" kern="0" dirty="0">
-                <a:solidFill>
-                  <a:srgbClr val="5A6672"/>
+              <a:rPr lang="en-US" sz="620" spc="149" kern="0" dirty="0">
+                <a:solidFill>
+                  <a:srgbClr val="8C959D"/>
                 </a:solidFill>
                 <a:latin typeface="Jost Medium" pitchFamily="34" charset="0"/>
                 <a:ea typeface="Jost Medium" pitchFamily="34" charset="-122"/>
                 <a:cs typeface="Jost Medium" pitchFamily="34" charset="-120"/>
               </a:rPr>
-              <a:t>ESTRELAS NO GOOGLE</a:t>
+              <a:t>FONTES CITADAS NA CARTA ORIGINAL</a:t>
             </a:r>
             <a:endParaRPr lang="en-US" sz="620" dirty="0"/>
           </a:p>
@@ -5999,421 +5212,43 @@
         </p:nvSpPr>
         <p:spPr>
           <a:xfrm>
-            <a:off x="6181933" y="1593205"/>
-            <a:ext cx="699075" cy="431750"/>
-          </a:xfrm>
-          <a:prstGeom prst="rect">
-            <a:avLst/>
-          </a:prstGeom>
-          <a:noFill/>
-          <a:ln/>
-        </p:spPr>
-        <p:txBody>
-          <a:bodyPr wrap="square" lIns="0" tIns="0" rIns="0" bIns="0" rtlCol="0" anchor="t"/>
-          <a:lstStyle/>
-          <a:p>
-            <a:pPr algn="ctr" indent="0" marL="0">
-              <a:lnSpc>
-                <a:spcPts val="3400"/>
-              </a:lnSpc>
-              <a:buNone/>
-            </a:pPr>
-            <a:r>
-              <a:rPr lang="en-US" sz="3400" dirty="0">
-                <a:solidFill>
-                  <a:srgbClr val="C1121C"/>
-                </a:solidFill>
-                <a:latin typeface="EB Garamond" pitchFamily="34" charset="0"/>
-                <a:ea typeface="EB Garamond" pitchFamily="34" charset="-122"/>
-                <a:cs typeface="EB Garamond" pitchFamily="34" charset="-120"/>
-              </a:rPr>
-              <a:t>292</a:t>
-            </a:r>
-            <a:endParaRPr lang="en-US" sz="3400" dirty="0"/>
-          </a:p>
-        </p:txBody>
-      </p:sp>
-      <p:sp>
-        <p:nvSpPr>
-          <p:cNvPr id="23" name="Text 19"/>
-          <p:cNvSpPr txBox="1"/>
-          <p:nvPr/>
-        </p:nvSpPr>
-        <p:spPr>
-          <a:xfrm>
-            <a:off x="6181933" y="2132856"/>
-            <a:ext cx="699075" cy="114300"/>
-          </a:xfrm>
-          <a:prstGeom prst="rect">
-            <a:avLst/>
-          </a:prstGeom>
-          <a:noFill/>
-          <a:ln/>
-        </p:spPr>
-        <p:txBody>
-          <a:bodyPr wrap="square" lIns="0" tIns="0" rIns="0" bIns="0" rtlCol="0" anchor="t"/>
-          <a:lstStyle/>
-          <a:p>
-            <a:pPr algn="ctr" indent="0" marL="0">
-              <a:lnSpc>
-                <a:spcPts val="744"/>
-              </a:lnSpc>
-              <a:buNone/>
-            </a:pPr>
-            <a:r>
-              <a:rPr lang="en-US" sz="620" spc="99" kern="0" dirty="0">
-                <a:solidFill>
-                  <a:srgbClr val="5A6672"/>
-                </a:solidFill>
-                <a:latin typeface="Jost Medium" pitchFamily="34" charset="0"/>
-                <a:ea typeface="Jost Medium" pitchFamily="34" charset="-122"/>
-                <a:cs typeface="Jost Medium" pitchFamily="34" charset="-120"/>
-              </a:rPr>
-              <a:t>AVALIAÇÕES</a:t>
-            </a:r>
-            <a:endParaRPr lang="en-US" sz="620" dirty="0"/>
-          </a:p>
-        </p:txBody>
-      </p:sp>
-      <p:sp>
-        <p:nvSpPr>
-          <p:cNvPr id="24" name="Text 20"/>
-          <p:cNvSpPr txBox="1"/>
-          <p:nvPr/>
-        </p:nvSpPr>
-        <p:spPr>
-          <a:xfrm>
-            <a:off x="7339072" y="1593205"/>
-            <a:ext cx="1354812" cy="431750"/>
-          </a:xfrm>
-          <a:prstGeom prst="rect">
-            <a:avLst/>
-          </a:prstGeom>
-          <a:noFill/>
-          <a:ln/>
-        </p:spPr>
-        <p:txBody>
-          <a:bodyPr wrap="square" lIns="0" tIns="0" rIns="0" bIns="0" rtlCol="0" anchor="t"/>
-          <a:lstStyle/>
-          <a:p>
-            <a:pPr algn="ctr" indent="0" marL="0">
-              <a:lnSpc>
-                <a:spcPts val="3400"/>
-              </a:lnSpc>
-              <a:buNone/>
-            </a:pPr>
-            <a:r>
-              <a:rPr lang="en-US" sz="3400" dirty="0">
-                <a:solidFill>
-                  <a:srgbClr val="C1121C"/>
-                </a:solidFill>
-                <a:latin typeface="EB Garamond" pitchFamily="34" charset="0"/>
-                <a:ea typeface="EB Garamond" pitchFamily="34" charset="-122"/>
-                <a:cs typeface="EB Garamond" pitchFamily="34" charset="-120"/>
-              </a:rPr>
-              <a:t>4,7</a:t>
-            </a:r>
-            <a:endParaRPr lang="en-US" sz="3400" dirty="0"/>
-          </a:p>
-        </p:txBody>
-      </p:sp>
-      <p:sp>
-        <p:nvSpPr>
-          <p:cNvPr id="25" name="Text 21"/>
-          <p:cNvSpPr txBox="1"/>
-          <p:nvPr/>
-        </p:nvSpPr>
-        <p:spPr>
-          <a:xfrm>
-            <a:off x="7339072" y="2132856"/>
-            <a:ext cx="1354812" cy="114300"/>
-          </a:xfrm>
-          <a:prstGeom prst="rect">
-            <a:avLst/>
-          </a:prstGeom>
-          <a:noFill/>
-          <a:ln/>
-        </p:spPr>
-        <p:txBody>
-          <a:bodyPr wrap="square" lIns="0" tIns="0" rIns="0" bIns="0" rtlCol="0" anchor="t"/>
-          <a:lstStyle/>
-          <a:p>
-            <a:pPr algn="ctr" indent="0" marL="0">
-              <a:lnSpc>
-                <a:spcPts val="744"/>
-              </a:lnSpc>
-              <a:buNone/>
-            </a:pPr>
-            <a:r>
-              <a:rPr lang="en-US" sz="620" spc="99" kern="0" dirty="0">
-                <a:solidFill>
-                  <a:srgbClr val="5A6672"/>
-                </a:solidFill>
-                <a:latin typeface="Jost Medium" pitchFamily="34" charset="0"/>
-                <a:ea typeface="Jost Medium" pitchFamily="34" charset="-122"/>
-                <a:cs typeface="Jost Medium" pitchFamily="34" charset="-120"/>
-              </a:rPr>
-              <a:t>ESTRELAS NO TRIPADVISOR</a:t>
-            </a:r>
-            <a:endParaRPr lang="en-US" sz="620" dirty="0"/>
-          </a:p>
-        </p:txBody>
-      </p:sp>
-      <p:sp>
-        <p:nvSpPr>
-          <p:cNvPr id="26" name="Text 22"/>
-          <p:cNvSpPr txBox="1"/>
-          <p:nvPr/>
-        </p:nvSpPr>
-        <p:spPr>
-          <a:xfrm>
-            <a:off x="9151947" y="1593205"/>
-            <a:ext cx="699075" cy="431750"/>
-          </a:xfrm>
-          <a:prstGeom prst="rect">
-            <a:avLst/>
-          </a:prstGeom>
-          <a:noFill/>
-          <a:ln/>
-        </p:spPr>
-        <p:txBody>
-          <a:bodyPr wrap="square" lIns="0" tIns="0" rIns="0" bIns="0" rtlCol="0" anchor="t"/>
-          <a:lstStyle/>
-          <a:p>
-            <a:pPr algn="ctr" indent="0" marL="0">
-              <a:lnSpc>
-                <a:spcPts val="3400"/>
-              </a:lnSpc>
-              <a:buNone/>
-            </a:pPr>
-            <a:r>
-              <a:rPr lang="en-US" sz="3400" dirty="0">
-                <a:solidFill>
-                  <a:srgbClr val="C1121C"/>
-                </a:solidFill>
-                <a:latin typeface="EB Garamond" pitchFamily="34" charset="0"/>
-                <a:ea typeface="EB Garamond" pitchFamily="34" charset="-122"/>
-                <a:cs typeface="EB Garamond" pitchFamily="34" charset="-120"/>
-              </a:rPr>
-              <a:t>136</a:t>
-            </a:r>
-            <a:endParaRPr lang="en-US" sz="3400" dirty="0"/>
-          </a:p>
-        </p:txBody>
-      </p:sp>
-      <p:sp>
-        <p:nvSpPr>
-          <p:cNvPr id="27" name="Text 23"/>
-          <p:cNvSpPr txBox="1"/>
-          <p:nvPr/>
-        </p:nvSpPr>
-        <p:spPr>
-          <a:xfrm>
-            <a:off x="9151947" y="2132856"/>
-            <a:ext cx="699075" cy="114300"/>
-          </a:xfrm>
-          <a:prstGeom prst="rect">
-            <a:avLst/>
-          </a:prstGeom>
-          <a:noFill/>
-          <a:ln/>
-        </p:spPr>
-        <p:txBody>
-          <a:bodyPr wrap="square" lIns="0" tIns="0" rIns="0" bIns="0" rtlCol="0" anchor="t"/>
-          <a:lstStyle/>
-          <a:p>
-            <a:pPr algn="ctr" indent="0" marL="0">
-              <a:lnSpc>
-                <a:spcPts val="744"/>
-              </a:lnSpc>
-              <a:buNone/>
-            </a:pPr>
-            <a:r>
-              <a:rPr lang="en-US" sz="620" spc="99" kern="0" dirty="0">
-                <a:solidFill>
-                  <a:srgbClr val="5A6672"/>
-                </a:solidFill>
-                <a:latin typeface="Jost Medium" pitchFamily="34" charset="0"/>
-                <a:ea typeface="Jost Medium" pitchFamily="34" charset="-122"/>
-                <a:cs typeface="Jost Medium" pitchFamily="34" charset="-120"/>
-              </a:rPr>
-              <a:t>AVALIAÇÕES</a:t>
-            </a:r>
-            <a:endParaRPr lang="en-US" sz="620" dirty="0"/>
-          </a:p>
-        </p:txBody>
-      </p:sp>
-      <p:sp>
-        <p:nvSpPr>
-          <p:cNvPr id="28" name="Text 24"/>
-          <p:cNvSpPr txBox="1"/>
-          <p:nvPr/>
-        </p:nvSpPr>
-        <p:spPr>
-          <a:xfrm>
-            <a:off x="4463802" y="2823121"/>
-            <a:ext cx="5553998" cy="245120"/>
-          </a:xfrm>
-          <a:prstGeom prst="rect">
-            <a:avLst/>
-          </a:prstGeom>
-          <a:noFill/>
-          <a:ln/>
-        </p:spPr>
-        <p:txBody>
-          <a:bodyPr wrap="square" lIns="0" tIns="0" rIns="0" bIns="0" rtlCol="0" anchor="t"/>
-          <a:lstStyle/>
-          <a:p>
-            <a:pPr algn="l" indent="0" marL="0">
-              <a:lnSpc>
-                <a:spcPts val="1929"/>
-              </a:lnSpc>
-              <a:buNone/>
-            </a:pPr>
-            <a:r>
-              <a:rPr lang="en-US" sz="1060" dirty="0">
-                <a:solidFill>
-                  <a:srgbClr val="5A6672"/>
+            <a:off x="4463802" y="6519118"/>
+            <a:ext cx="5553998" cy="185589"/>
+          </a:xfrm>
+          <a:prstGeom prst="rect">
+            <a:avLst/>
+          </a:prstGeom>
+          <a:noFill/>
+          <a:ln/>
+        </p:spPr>
+        <p:txBody>
+          <a:bodyPr wrap="square" lIns="0" tIns="0" rIns="0" bIns="0" rtlCol="0" anchor="t"/>
+          <a:lstStyle/>
+          <a:p>
+            <a:pPr algn="l" indent="0" marL="0">
+              <a:lnSpc>
+                <a:spcPts val="1462"/>
+              </a:lnSpc>
+              <a:buNone/>
+            </a:pPr>
+            <a:r>
+              <a:rPr lang="en-US" sz="840" dirty="0">
+                <a:solidFill>
+                  <a:srgbClr val="8C959D"/>
                 </a:solidFill>
                 <a:latin typeface="Jost" pitchFamily="34" charset="0"/>
                 <a:ea typeface="Jost" pitchFamily="34" charset="-122"/>
                 <a:cs typeface="Jost" pitchFamily="34" charset="-120"/>
               </a:rPr>
-              <a:t>Atualmente, nossa reputação digital demonstra a consistência desse trabalho.</a:t>
-            </a:r>
-            <a:endParaRPr lang="en-US" sz="1060" dirty="0"/>
-          </a:p>
-        </p:txBody>
-      </p:sp>
-      <p:sp>
-        <p:nvSpPr>
-          <p:cNvPr id="29" name="Text 25"/>
-          <p:cNvSpPr txBox="1"/>
-          <p:nvPr/>
-        </p:nvSpPr>
-        <p:spPr>
-          <a:xfrm>
-            <a:off x="4463802" y="3266182"/>
-            <a:ext cx="5553998" cy="245120"/>
-          </a:xfrm>
-          <a:prstGeom prst="rect">
-            <a:avLst/>
-          </a:prstGeom>
-          <a:noFill/>
-          <a:ln/>
-        </p:spPr>
-        <p:txBody>
-          <a:bodyPr wrap="square" lIns="0" tIns="0" rIns="0" bIns="0" rtlCol="0" anchor="t"/>
-          <a:lstStyle/>
-          <a:p>
-            <a:pPr algn="l" indent="0" marL="0">
-              <a:lnSpc>
-                <a:spcPts val="1929"/>
-              </a:lnSpc>
-              <a:buNone/>
-            </a:pPr>
-            <a:r>
-              <a:rPr lang="en-US" sz="1060" dirty="0">
-                <a:solidFill>
-                  <a:srgbClr val="5A6672"/>
-                </a:solidFill>
-                <a:latin typeface="Jost" pitchFamily="34" charset="0"/>
-                <a:ea typeface="Jost" pitchFamily="34" charset="-122"/>
-                <a:cs typeface="Jost" pitchFamily="34" charset="-120"/>
-              </a:rPr>
-              <a:t>No Google, a Pousada Camburi possui avaliação de 4,8 estrelas, baseada em 292 avaliações.</a:t>
-            </a:r>
-            <a:endParaRPr lang="en-US" sz="1060" dirty="0"/>
-          </a:p>
-        </p:txBody>
-      </p:sp>
-      <p:sp>
-        <p:nvSpPr>
-          <p:cNvPr id="30" name="Text 26"/>
-          <p:cNvSpPr txBox="1"/>
-          <p:nvPr/>
-        </p:nvSpPr>
-        <p:spPr>
-          <a:xfrm>
-            <a:off x="4463802" y="3709243"/>
-            <a:ext cx="5553998" cy="490240"/>
-          </a:xfrm>
-          <a:prstGeom prst="rect">
-            <a:avLst/>
-          </a:prstGeom>
-          <a:noFill/>
-          <a:ln/>
-        </p:spPr>
-        <p:txBody>
-          <a:bodyPr wrap="square" lIns="0" tIns="0" rIns="0" bIns="0" rtlCol="0" anchor="t"/>
-          <a:lstStyle/>
-          <a:p>
-            <a:pPr algn="l" indent="0" marL="0">
-              <a:lnSpc>
-                <a:spcPts val="1929"/>
-              </a:lnSpc>
-              <a:buNone/>
-            </a:pPr>
-            <a:r>
-              <a:rPr lang="en-US" sz="1060" dirty="0">
-                <a:solidFill>
-                  <a:srgbClr val="5A6672"/>
-                </a:solidFill>
-                <a:latin typeface="Jost" pitchFamily="34" charset="0"/>
-                <a:ea typeface="Jost" pitchFamily="34" charset="-122"/>
-                <a:cs typeface="Jost" pitchFamily="34" charset="-120"/>
-              </a:rPr>
-              <a:t>No Tripadvisor, possui 4,7 estrelas, com 136 avaliações, estando atualmente entre as pousadas mais bem avaliadas de Camburi.</a:t>
-            </a:r>
-            <a:endParaRPr lang="en-US" sz="1060" dirty="0"/>
-          </a:p>
-        </p:txBody>
-      </p:sp>
-      <p:sp>
-        <p:nvSpPr>
-          <p:cNvPr id="31" name="Text 27"/>
-          <p:cNvSpPr txBox="1"/>
-          <p:nvPr/>
-        </p:nvSpPr>
-        <p:spPr>
-          <a:xfrm>
-            <a:off x="4463802" y="6424017"/>
-            <a:ext cx="5553998" cy="280690"/>
-          </a:xfrm>
-          <a:prstGeom prst="rect">
-            <a:avLst/>
-          </a:prstGeom>
-          <a:noFill/>
-          <a:ln/>
-        </p:spPr>
-        <p:txBody>
-          <a:bodyPr wrap="square" lIns="0" tIns="0" rIns="0" bIns="0" rtlCol="0" anchor="t"/>
-          <a:lstStyle/>
-          <a:p>
-            <a:pPr algn="l" indent="0" marL="0">
-              <a:lnSpc>
-                <a:spcPts val="2210"/>
-              </a:lnSpc>
-              <a:buNone/>
-            </a:pPr>
-            <a:r>
-              <a:rPr lang="en-US" sz="1700" dirty="0">
-                <a:solidFill>
-                  <a:srgbClr val="16222E"/>
-                </a:solidFill>
-                <a:latin typeface="EB Garamond" pitchFamily="34" charset="0"/>
-                <a:ea typeface="EB Garamond" pitchFamily="34" charset="-122"/>
-                <a:cs typeface="EB Garamond" pitchFamily="34" charset="-120"/>
-              </a:rPr>
-              <a:t>Mas, para nós, os números são apenas uma parte da história.</a:t>
-            </a:r>
-            <a:endParaRPr lang="en-US" sz="1700" dirty="0"/>
-          </a:p>
-        </p:txBody>
-      </p:sp>
-      <p:sp>
-        <p:nvSpPr>
-          <p:cNvPr id="32" name="Text 28"/>
+              <a:t>google.com.br · tripadvisor.com.br · restaurantguru.com.br</a:t>
+            </a:r>
+            <a:endParaRPr lang="en-US" sz="840" dirty="0"/>
+          </a:p>
+        </p:txBody>
+      </p:sp>
+      <p:sp>
+        <p:nvSpPr>
+          <p:cNvPr id="23" name="Text 19"/>
           <p:cNvSpPr txBox="1"/>
           <p:nvPr/>
         </p:nvSpPr>
@@ -6573,7 +5408,7 @@
         </p:nvSpPr>
         <p:spPr>
           <a:xfrm>
-            <a:off x="4463802" y="6035427"/>
+            <a:off x="4463802" y="1341239"/>
             <a:ext cx="5508278" cy="9525"/>
           </a:xfrm>
           <a:prstGeom prst="rect">
@@ -6593,6 +5428,186 @@
         </p:nvSpPr>
         <p:spPr>
           <a:xfrm>
+            <a:off x="4463802" y="1936105"/>
+            <a:ext cx="5508278" cy="9525"/>
+          </a:xfrm>
+          <a:prstGeom prst="rect">
+            <a:avLst/>
+          </a:prstGeom>
+          <a:solidFill>
+            <a:srgbClr val="E2DFD9"/>
+          </a:solidFill>
+          <a:ln/>
+        </p:spPr>
+      </p:sp>
+      <p:sp>
+        <p:nvSpPr>
+          <p:cNvPr id="8" name="Shape 6"/>
+          <p:cNvSpPr/>
+          <p:nvPr/>
+        </p:nvSpPr>
+        <p:spPr>
+          <a:xfrm>
+            <a:off x="4463802" y="2530971"/>
+            <a:ext cx="5508278" cy="9525"/>
+          </a:xfrm>
+          <a:prstGeom prst="rect">
+            <a:avLst/>
+          </a:prstGeom>
+          <a:solidFill>
+            <a:srgbClr val="E2DFD9"/>
+          </a:solidFill>
+          <a:ln/>
+        </p:spPr>
+      </p:sp>
+      <p:sp>
+        <p:nvSpPr>
+          <p:cNvPr id="9" name="Shape 7"/>
+          <p:cNvSpPr/>
+          <p:nvPr/>
+        </p:nvSpPr>
+        <p:spPr>
+          <a:xfrm>
+            <a:off x="4463802" y="3125837"/>
+            <a:ext cx="5508278" cy="9525"/>
+          </a:xfrm>
+          <a:prstGeom prst="rect">
+            <a:avLst/>
+          </a:prstGeom>
+          <a:solidFill>
+            <a:srgbClr val="E2DFD9"/>
+          </a:solidFill>
+          <a:ln/>
+        </p:spPr>
+      </p:sp>
+      <p:sp>
+        <p:nvSpPr>
+          <p:cNvPr id="10" name="Shape 8"/>
+          <p:cNvSpPr/>
+          <p:nvPr/>
+        </p:nvSpPr>
+        <p:spPr>
+          <a:xfrm>
+            <a:off x="4463802" y="3720703"/>
+            <a:ext cx="5508278" cy="9525"/>
+          </a:xfrm>
+          <a:prstGeom prst="rect">
+            <a:avLst/>
+          </a:prstGeom>
+          <a:solidFill>
+            <a:srgbClr val="E2DFD9"/>
+          </a:solidFill>
+          <a:ln/>
+        </p:spPr>
+      </p:sp>
+      <p:sp>
+        <p:nvSpPr>
+          <p:cNvPr id="11" name="Shape 9"/>
+          <p:cNvSpPr/>
+          <p:nvPr/>
+        </p:nvSpPr>
+        <p:spPr>
+          <a:xfrm>
+            <a:off x="4463802" y="4315569"/>
+            <a:ext cx="5508278" cy="9525"/>
+          </a:xfrm>
+          <a:prstGeom prst="rect">
+            <a:avLst/>
+          </a:prstGeom>
+          <a:solidFill>
+            <a:srgbClr val="E2DFD9"/>
+          </a:solidFill>
+          <a:ln/>
+        </p:spPr>
+      </p:sp>
+      <p:sp>
+        <p:nvSpPr>
+          <p:cNvPr id="12" name="Shape 10"/>
+          <p:cNvSpPr/>
+          <p:nvPr/>
+        </p:nvSpPr>
+        <p:spPr>
+          <a:xfrm>
+            <a:off x="4463802" y="4910435"/>
+            <a:ext cx="5508278" cy="9525"/>
+          </a:xfrm>
+          <a:prstGeom prst="rect">
+            <a:avLst/>
+          </a:prstGeom>
+          <a:solidFill>
+            <a:srgbClr val="E2DFD9"/>
+          </a:solidFill>
+          <a:ln/>
+        </p:spPr>
+      </p:sp>
+      <p:sp>
+        <p:nvSpPr>
+          <p:cNvPr id="13" name="Shape 11"/>
+          <p:cNvSpPr/>
+          <p:nvPr/>
+        </p:nvSpPr>
+        <p:spPr>
+          <a:xfrm>
+            <a:off x="4463802" y="5505301"/>
+            <a:ext cx="5508278" cy="9525"/>
+          </a:xfrm>
+          <a:prstGeom prst="rect">
+            <a:avLst/>
+          </a:prstGeom>
+          <a:solidFill>
+            <a:srgbClr val="E2DFD9"/>
+          </a:solidFill>
+          <a:ln/>
+        </p:spPr>
+      </p:sp>
+      <p:sp>
+        <p:nvSpPr>
+          <p:cNvPr id="14" name="Shape 12"/>
+          <p:cNvSpPr/>
+          <p:nvPr/>
+        </p:nvSpPr>
+        <p:spPr>
+          <a:xfrm>
+            <a:off x="4463802" y="6100167"/>
+            <a:ext cx="5508278" cy="9525"/>
+          </a:xfrm>
+          <a:prstGeom prst="rect">
+            <a:avLst/>
+          </a:prstGeom>
+          <a:solidFill>
+            <a:srgbClr val="E2DFD9"/>
+          </a:solidFill>
+          <a:ln/>
+        </p:spPr>
+      </p:sp>
+      <p:sp>
+        <p:nvSpPr>
+          <p:cNvPr id="15" name="Shape 13"/>
+          <p:cNvSpPr/>
+          <p:nvPr/>
+        </p:nvSpPr>
+        <p:spPr>
+          <a:xfrm>
+            <a:off x="4463802" y="6695033"/>
+            <a:ext cx="5508278" cy="9525"/>
+          </a:xfrm>
+          <a:prstGeom prst="rect">
+            <a:avLst/>
+          </a:prstGeom>
+          <a:solidFill>
+            <a:srgbClr val="E2DFD9"/>
+          </a:solidFill>
+          <a:ln/>
+        </p:spPr>
+      </p:sp>
+      <p:sp>
+        <p:nvSpPr>
+          <p:cNvPr id="16" name="Shape 14"/>
+          <p:cNvSpPr/>
+          <p:nvPr/>
+        </p:nvSpPr>
+        <p:spPr>
+          <a:xfrm>
             <a:off x="719882" y="6704707"/>
             <a:ext cx="9252198" cy="9525"/>
           </a:xfrm>
@@ -6607,7 +5622,7 @@
       </p:sp>
       <p:pic>
         <p:nvPicPr>
-          <p:cNvPr id="8" name="Image 0" descr="/home/user/SkillsClaude/apresentacao-victorinox/build/logos/logo-pc.png">    </p:cNvPr>
+          <p:cNvPr id="17" name="Image 0" descr="/home/user/SkillsClaude/apresentacao-victorinox/build/logos/logo-pc.png">    </p:cNvPr>
           <p:cNvPicPr>
             <a:picLocks noChangeAspect="1"/>
           </p:cNvPicPr>
@@ -6631,7 +5646,7 @@
       </p:pic>
       <p:pic>
         <p:nvPicPr>
-          <p:cNvPr id="9" name="Image 1" descr="/home/user/SkillsClaude/apresentacao-victorinox/build/logos/logo-vx.png">    </p:cNvPr>
+          <p:cNvPr id="18" name="Image 1" descr="/home/user/SkillsClaude/apresentacao-victorinox/build/logos/logo-vx.png">    </p:cNvPr>
           <p:cNvPicPr>
             <a:picLocks noChangeAspect="1"/>
           </p:cNvPicPr>
@@ -6655,7 +5670,7 @@
       </p:pic>
       <p:sp>
         <p:nvSpPr>
-          <p:cNvPr id="10" name="Text 6"/>
+          <p:cNvPr id="19" name="Text 15"/>
           <p:cNvSpPr txBox="1"/>
           <p:nvPr/>
         </p:nvSpPr>
@@ -6697,7 +5712,7 @@
       </p:sp>
       <p:sp>
         <p:nvSpPr>
-          <p:cNvPr id="11" name="Text 7"/>
+          <p:cNvPr id="20" name="Text 16"/>
           <p:cNvSpPr txBox="1"/>
           <p:nvPr/>
         </p:nvSpPr>
@@ -6739,7 +5754,7 @@
       </p:sp>
       <p:sp>
         <p:nvSpPr>
-          <p:cNvPr id="12" name="Text 8"/>
+          <p:cNvPr id="21" name="Text 17"/>
           <p:cNvSpPr txBox="1"/>
           <p:nvPr/>
         </p:nvSpPr>
@@ -6773,7 +5788,7 @@
                 <a:ea typeface="Jost Medium" pitchFamily="34" charset="-122"/>
                 <a:cs typeface="Jost Medium" pitchFamily="34" charset="-120"/>
               </a:rPr>
-              <a:t>A EXPERIÊNCIA DOS NOSSOS HÓSPEDES</a:t>
+              <a:t>HOSPITALIDADE</a:t>
             </a:r>
             <a:endParaRPr lang="en-US" sz="660" dirty="0"/>
           </a:p>
@@ -6781,14 +5796,14 @@
       </p:sp>
       <p:sp>
         <p:nvSpPr>
-          <p:cNvPr id="13" name="Text 9"/>
+          <p:cNvPr id="22" name="Text 18"/>
           <p:cNvSpPr txBox="1"/>
           <p:nvPr/>
         </p:nvSpPr>
         <p:spPr>
           <a:xfrm>
             <a:off x="719882" y="1617464"/>
-            <a:ext cx="2700218" cy="1172468"/>
+            <a:ext cx="2700218" cy="781645"/>
           </a:xfrm>
           <a:prstGeom prst="rect">
             <a:avLst/>
@@ -6815,7 +5830,7 @@
                 <a:ea typeface="EB Garamond Medium" pitchFamily="34" charset="-122"/>
                 <a:cs typeface="EB Garamond Medium" pitchFamily="34" charset="-120"/>
               </a:rPr>
-              <a:t>O que realmente importa são os comentários</a:t>
+              <a:t>Qualidade está nos detalhes</a:t>
             </a:r>
             <a:endParaRPr lang="en-US" sz="2700" dirty="0"/>
           </a:p>
@@ -6823,7 +5838,49 @@
       </p:sp>
       <p:sp>
         <p:nvSpPr>
-          <p:cNvPr id="14" name="Text 10"/>
+          <p:cNvPr id="23" name="Text 19"/>
+          <p:cNvSpPr txBox="1"/>
+          <p:nvPr/>
+        </p:nvSpPr>
+        <p:spPr>
+          <a:xfrm>
+            <a:off x="719882" y="2615059"/>
+            <a:ext cx="2700218" cy="735360"/>
+          </a:xfrm>
+          <a:prstGeom prst="rect">
+            <a:avLst/>
+          </a:prstGeom>
+          <a:noFill/>
+          <a:ln/>
+        </p:spPr>
+        <p:txBody>
+          <a:bodyPr wrap="square" lIns="0" tIns="0" rIns="0" bIns="0" rtlCol="0" anchor="t"/>
+          <a:lstStyle/>
+          <a:p>
+            <a:pPr algn="l" indent="0" marL="0">
+              <a:lnSpc>
+                <a:spcPts val="1929"/>
+              </a:lnSpc>
+              <a:buNone/>
+            </a:pPr>
+            <a:r>
+              <a:rPr lang="en-US" sz="1060" dirty="0">
+                <a:solidFill>
+                  <a:srgbClr val="5A6672"/>
+                </a:solidFill>
+                <a:latin typeface="Jost" pitchFamily="34" charset="0"/>
+                <a:ea typeface="Jost" pitchFamily="34" charset="-122"/>
+                <a:cs typeface="Jost" pitchFamily="34" charset="-120"/>
+              </a:rPr>
+              <a:t>Acreditamos que hospitalidade não está apenas na estrutura física. Ela está nos detalhes.</a:t>
+            </a:r>
+            <a:endParaRPr lang="en-US" sz="1060" dirty="0"/>
+          </a:p>
+        </p:txBody>
+      </p:sp>
+      <p:sp>
+        <p:nvSpPr>
+          <p:cNvPr id="24" name="Text 20"/>
           <p:cNvSpPr txBox="1"/>
           <p:nvPr/>
         </p:nvSpPr>
@@ -6857,7 +5914,7 @@
                 <a:ea typeface="EB Garamond" pitchFamily="34" charset="-122"/>
                 <a:cs typeface="EB Garamond" pitchFamily="34" charset="-120"/>
               </a:rPr>
-              <a:t>“É exatamente esse tipo de reconhecimento que buscamos construir diariamente.”</a:t>
+              <a:t>“Essa filosofia orientou a construção da Pousada Camburi ao longo de mais de duas décadas.”</a:t>
             </a:r>
             <a:endParaRPr lang="en-US" sz="1500" dirty="0"/>
           </a:p>
@@ -6865,75 +5922,75 @@
       </p:sp>
       <p:sp>
         <p:nvSpPr>
-          <p:cNvPr id="15" name="Text 11"/>
-          <p:cNvSpPr txBox="1"/>
-          <p:nvPr/>
-        </p:nvSpPr>
-        <p:spPr>
-          <a:xfrm>
-            <a:off x="4463802" y="1341239"/>
-            <a:ext cx="5553998" cy="531019"/>
-          </a:xfrm>
-          <a:prstGeom prst="rect">
-            <a:avLst/>
-          </a:prstGeom>
-          <a:noFill/>
-          <a:ln/>
-        </p:spPr>
-        <p:txBody>
-          <a:bodyPr wrap="square" lIns="0" tIns="0" rIns="0" bIns="0" rtlCol="0" anchor="t"/>
-          <a:lstStyle/>
-          <a:p>
-            <a:pPr algn="l" indent="0" marL="0">
-              <a:lnSpc>
-                <a:spcPts val="2092"/>
-              </a:lnSpc>
-              <a:buNone/>
-            </a:pPr>
-            <a:r>
-              <a:rPr lang="en-US" sz="1260" dirty="0">
-                <a:solidFill>
-                  <a:srgbClr val="2E3A45"/>
-                </a:solidFill>
-                <a:latin typeface="Jost Light" pitchFamily="34" charset="0"/>
-                <a:ea typeface="Jost Light" pitchFamily="34" charset="-122"/>
-                <a:cs typeface="Jost Light" pitchFamily="34" charset="-120"/>
-              </a:rPr>
-              <a:t>Hóspedes destacam nossa localização, limpeza, café da manhã, serviço de praia, conforto e, principalmente, o atendimento e a atenção da equipe.</a:t>
-            </a:r>
-            <a:endParaRPr lang="en-US" sz="1260" dirty="0"/>
-          </a:p>
-        </p:txBody>
-      </p:sp>
-      <p:sp>
-        <p:nvSpPr>
-          <p:cNvPr id="16" name="Text 12"/>
-          <p:cNvSpPr txBox="1"/>
-          <p:nvPr/>
-        </p:nvSpPr>
-        <p:spPr>
-          <a:xfrm>
-            <a:off x="4463802" y="2304157"/>
-            <a:ext cx="5553998" cy="1225600"/>
-          </a:xfrm>
-          <a:prstGeom prst="rect">
-            <a:avLst/>
-          </a:prstGeom>
-          <a:noFill/>
-          <a:ln/>
-        </p:spPr>
-        <p:txBody>
-          <a:bodyPr wrap="square" lIns="0" tIns="0" rIns="0" bIns="0" rtlCol="0" anchor="t"/>
-          <a:lstStyle/>
-          <a:p>
-            <a:pPr algn="l" indent="0" marL="0">
-              <a:lnSpc>
-                <a:spcPts val="1929"/>
-              </a:lnSpc>
-              <a:buNone/>
-            </a:pPr>
-            <a:r>
-              <a:rPr lang="en-US" sz="1060" dirty="0">
+          <p:cNvPr id="25" name="Text 21"/>
+          <p:cNvSpPr txBox="1"/>
+          <p:nvPr/>
+        </p:nvSpPr>
+        <p:spPr>
+          <a:xfrm>
+            <a:off x="4463802" y="1514773"/>
+            <a:ext cx="477619" cy="257175"/>
+          </a:xfrm>
+          <a:prstGeom prst="rect">
+            <a:avLst/>
+          </a:prstGeom>
+          <a:noFill/>
+          <a:ln/>
+        </p:spPr>
+        <p:txBody>
+          <a:bodyPr wrap="square" lIns="0" tIns="0" rIns="0" bIns="0" rtlCol="0" anchor="t"/>
+          <a:lstStyle/>
+          <a:p>
+            <a:pPr algn="l" indent="0" marL="0">
+              <a:lnSpc>
+                <a:spcPts val="1920"/>
+              </a:lnSpc>
+              <a:buNone/>
+            </a:pPr>
+            <a:r>
+              <a:rPr lang="en-US" sz="1600" dirty="0">
+                <a:solidFill>
+                  <a:srgbClr val="C1121C"/>
+                </a:solidFill>
+                <a:latin typeface="EB Garamond" pitchFamily="34" charset="0"/>
+                <a:ea typeface="EB Garamond" pitchFamily="34" charset="-122"/>
+                <a:cs typeface="EB Garamond" pitchFamily="34" charset="-120"/>
+              </a:rPr>
+              <a:t>01</a:t>
+            </a:r>
+            <a:endParaRPr lang="en-US" sz="1600" dirty="0"/>
+          </a:p>
+        </p:txBody>
+      </p:sp>
+      <p:sp>
+        <p:nvSpPr>
+          <p:cNvPr id="26" name="Text 22"/>
+          <p:cNvSpPr txBox="1"/>
+          <p:nvPr/>
+        </p:nvSpPr>
+        <p:spPr>
+          <a:xfrm>
+            <a:off x="4895701" y="1528614"/>
+            <a:ext cx="5122099" cy="229642"/>
+          </a:xfrm>
+          <a:prstGeom prst="rect">
+            <a:avLst/>
+          </a:prstGeom>
+          <a:noFill/>
+          <a:ln/>
+        </p:spPr>
+        <p:txBody>
+          <a:bodyPr wrap="square" lIns="0" tIns="0" rIns="0" bIns="0" rtlCol="0" anchor="t"/>
+          <a:lstStyle/>
+          <a:p>
+            <a:pPr algn="l" indent="0" marL="0">
+              <a:lnSpc>
+                <a:spcPts val="1810"/>
+              </a:lnSpc>
+              <a:buNone/>
+            </a:pPr>
+            <a:r>
+              <a:rPr lang="en-US" sz="1040" dirty="0">
                 <a:solidFill>
                   <a:srgbClr val="5A6672"/>
                 </a:solidFill>
@@ -6941,41 +5998,83 @@
                 <a:ea typeface="Jost" pitchFamily="34" charset="-122"/>
                 <a:cs typeface="Jost" pitchFamily="34" charset="-120"/>
               </a:rPr>
-              <a:t>Uma avaliação recente no Tripadvisor, por exemplo, descreve a experiência como uma agradável surpresa e destaca a proximidade da praia, o ambiente cercado pela Mata Atlântica, o estilo rústico, o conforto dos quartos, o café da manhã, o serviço de praia e a atenção dos proprietários. O hóspede ainda registra que existem clientes que frequentam a pousada há aproximadamente 20 anos.</a:t>
-            </a:r>
-            <a:endParaRPr lang="en-US" sz="1060" dirty="0"/>
-          </a:p>
-        </p:txBody>
-      </p:sp>
-      <p:sp>
-        <p:nvSpPr>
-          <p:cNvPr id="17" name="Text 13"/>
-          <p:cNvSpPr txBox="1"/>
-          <p:nvPr/>
-        </p:nvSpPr>
-        <p:spPr>
-          <a:xfrm>
-            <a:off x="4463802" y="3727698"/>
-            <a:ext cx="5553998" cy="735360"/>
-          </a:xfrm>
-          <a:prstGeom prst="rect">
-            <a:avLst/>
-          </a:prstGeom>
-          <a:noFill/>
-          <a:ln/>
-        </p:spPr>
-        <p:txBody>
-          <a:bodyPr wrap="square" lIns="0" tIns="0" rIns="0" bIns="0" rtlCol="0" anchor="t"/>
-          <a:lstStyle/>
-          <a:p>
-            <a:pPr algn="l" indent="0" marL="0">
-              <a:lnSpc>
-                <a:spcPts val="1929"/>
-              </a:lnSpc>
-              <a:buNone/>
-            </a:pPr>
-            <a:r>
-              <a:rPr lang="en-US" sz="1060" dirty="0">
+              <a:t>Está em receber o hóspede pelo nome.</a:t>
+            </a:r>
+            <a:endParaRPr lang="en-US" sz="1040" dirty="0"/>
+          </a:p>
+        </p:txBody>
+      </p:sp>
+      <p:sp>
+        <p:nvSpPr>
+          <p:cNvPr id="27" name="Text 23"/>
+          <p:cNvSpPr txBox="1"/>
+          <p:nvPr/>
+        </p:nvSpPr>
+        <p:spPr>
+          <a:xfrm>
+            <a:off x="4463802" y="2109639"/>
+            <a:ext cx="477619" cy="257175"/>
+          </a:xfrm>
+          <a:prstGeom prst="rect">
+            <a:avLst/>
+          </a:prstGeom>
+          <a:noFill/>
+          <a:ln/>
+        </p:spPr>
+        <p:txBody>
+          <a:bodyPr wrap="square" lIns="0" tIns="0" rIns="0" bIns="0" rtlCol="0" anchor="t"/>
+          <a:lstStyle/>
+          <a:p>
+            <a:pPr algn="l" indent="0" marL="0">
+              <a:lnSpc>
+                <a:spcPts val="1920"/>
+              </a:lnSpc>
+              <a:buNone/>
+            </a:pPr>
+            <a:r>
+              <a:rPr lang="en-US" sz="1600" dirty="0">
+                <a:solidFill>
+                  <a:srgbClr val="C1121C"/>
+                </a:solidFill>
+                <a:latin typeface="EB Garamond" pitchFamily="34" charset="0"/>
+                <a:ea typeface="EB Garamond" pitchFamily="34" charset="-122"/>
+                <a:cs typeface="EB Garamond" pitchFamily="34" charset="-120"/>
+              </a:rPr>
+              <a:t>02</a:t>
+            </a:r>
+            <a:endParaRPr lang="en-US" sz="1600" dirty="0"/>
+          </a:p>
+        </p:txBody>
+      </p:sp>
+      <p:sp>
+        <p:nvSpPr>
+          <p:cNvPr id="28" name="Text 24"/>
+          <p:cNvSpPr txBox="1"/>
+          <p:nvPr/>
+        </p:nvSpPr>
+        <p:spPr>
+          <a:xfrm>
+            <a:off x="4895701" y="2123480"/>
+            <a:ext cx="5122099" cy="229642"/>
+          </a:xfrm>
+          <a:prstGeom prst="rect">
+            <a:avLst/>
+          </a:prstGeom>
+          <a:noFill/>
+          <a:ln/>
+        </p:spPr>
+        <p:txBody>
+          <a:bodyPr wrap="square" lIns="0" tIns="0" rIns="0" bIns="0" rtlCol="0" anchor="t"/>
+          <a:lstStyle/>
+          <a:p>
+            <a:pPr algn="l" indent="0" marL="0">
+              <a:lnSpc>
+                <a:spcPts val="1810"/>
+              </a:lnSpc>
+              <a:buNone/>
+            </a:pPr>
+            <a:r>
+              <a:rPr lang="en-US" sz="1040" dirty="0">
                 <a:solidFill>
                   <a:srgbClr val="5A6672"/>
                 </a:solidFill>
@@ -6983,99 +6082,603 @@
                 <a:ea typeface="Jost" pitchFamily="34" charset="-122"/>
                 <a:cs typeface="Jost" pitchFamily="34" charset="-120"/>
               </a:rPr>
-              <a:t>Outra avaliação recente publicada no Google ressalta que a experiência começa antes mesmo do check-in, destacando o cuidado com a chegada, as malas, o veículo, as explicações de boas-vindas e a atenção permanente da equipe com o bem-estar dos hóspedes.</a:t>
-            </a:r>
-            <a:endParaRPr lang="en-US" sz="1060" dirty="0"/>
-          </a:p>
-        </p:txBody>
-      </p:sp>
-      <p:sp>
-        <p:nvSpPr>
-          <p:cNvPr id="18" name="Text 14"/>
-          <p:cNvSpPr txBox="1"/>
-          <p:nvPr/>
-        </p:nvSpPr>
-        <p:spPr>
-          <a:xfrm>
-            <a:off x="4463802" y="6296918"/>
-            <a:ext cx="5553998" cy="114300"/>
-          </a:xfrm>
-          <a:prstGeom prst="rect">
-            <a:avLst/>
-          </a:prstGeom>
-          <a:noFill/>
-          <a:ln/>
-        </p:spPr>
-        <p:txBody>
-          <a:bodyPr wrap="square" lIns="0" tIns="0" rIns="0" bIns="0" rtlCol="0" anchor="t"/>
-          <a:lstStyle/>
-          <a:p>
-            <a:pPr algn="l" indent="0" marL="0">
-              <a:lnSpc>
-                <a:spcPts val="744"/>
-              </a:lnSpc>
-              <a:buNone/>
-            </a:pPr>
-            <a:r>
-              <a:rPr lang="en-US" sz="620" spc="149" kern="0" dirty="0">
-                <a:solidFill>
-                  <a:srgbClr val="8C959D"/>
-                </a:solidFill>
-                <a:latin typeface="Jost Medium" pitchFamily="34" charset="0"/>
-                <a:ea typeface="Jost Medium" pitchFamily="34" charset="-122"/>
-                <a:cs typeface="Jost Medium" pitchFamily="34" charset="-120"/>
-              </a:rPr>
-              <a:t>FONTES CITADAS NA CARTA ORIGINAL</a:t>
-            </a:r>
-            <a:endParaRPr lang="en-US" sz="620" dirty="0"/>
-          </a:p>
-        </p:txBody>
-      </p:sp>
-      <p:sp>
-        <p:nvSpPr>
-          <p:cNvPr id="19" name="Text 15"/>
-          <p:cNvSpPr txBox="1"/>
-          <p:nvPr/>
-        </p:nvSpPr>
-        <p:spPr>
-          <a:xfrm>
-            <a:off x="4463802" y="6519118"/>
-            <a:ext cx="5553998" cy="185589"/>
-          </a:xfrm>
-          <a:prstGeom prst="rect">
-            <a:avLst/>
-          </a:prstGeom>
-          <a:noFill/>
-          <a:ln/>
-        </p:spPr>
-        <p:txBody>
-          <a:bodyPr wrap="square" lIns="0" tIns="0" rIns="0" bIns="0" rtlCol="0" anchor="t"/>
-          <a:lstStyle/>
-          <a:p>
-            <a:pPr algn="l" indent="0" marL="0">
-              <a:lnSpc>
-                <a:spcPts val="1462"/>
-              </a:lnSpc>
-              <a:buNone/>
-            </a:pPr>
-            <a:r>
-              <a:rPr lang="en-US" sz="840" dirty="0">
-                <a:solidFill>
-                  <a:srgbClr val="8C959D"/>
+              <a:t>Em perceber aquilo de que ele precisa antes mesmo que peça.</a:t>
+            </a:r>
+            <a:endParaRPr lang="en-US" sz="1040" dirty="0"/>
+          </a:p>
+        </p:txBody>
+      </p:sp>
+      <p:sp>
+        <p:nvSpPr>
+          <p:cNvPr id="29" name="Text 25"/>
+          <p:cNvSpPr txBox="1"/>
+          <p:nvPr/>
+        </p:nvSpPr>
+        <p:spPr>
+          <a:xfrm>
+            <a:off x="4463802" y="2704505"/>
+            <a:ext cx="477619" cy="257175"/>
+          </a:xfrm>
+          <a:prstGeom prst="rect">
+            <a:avLst/>
+          </a:prstGeom>
+          <a:noFill/>
+          <a:ln/>
+        </p:spPr>
+        <p:txBody>
+          <a:bodyPr wrap="square" lIns="0" tIns="0" rIns="0" bIns="0" rtlCol="0" anchor="t"/>
+          <a:lstStyle/>
+          <a:p>
+            <a:pPr algn="l" indent="0" marL="0">
+              <a:lnSpc>
+                <a:spcPts val="1920"/>
+              </a:lnSpc>
+              <a:buNone/>
+            </a:pPr>
+            <a:r>
+              <a:rPr lang="en-US" sz="1600" dirty="0">
+                <a:solidFill>
+                  <a:srgbClr val="C1121C"/>
+                </a:solidFill>
+                <a:latin typeface="EB Garamond" pitchFamily="34" charset="0"/>
+                <a:ea typeface="EB Garamond" pitchFamily="34" charset="-122"/>
+                <a:cs typeface="EB Garamond" pitchFamily="34" charset="-120"/>
+              </a:rPr>
+              <a:t>03</a:t>
+            </a:r>
+            <a:endParaRPr lang="en-US" sz="1600" dirty="0"/>
+          </a:p>
+        </p:txBody>
+      </p:sp>
+      <p:sp>
+        <p:nvSpPr>
+          <p:cNvPr id="30" name="Text 26"/>
+          <p:cNvSpPr txBox="1"/>
+          <p:nvPr/>
+        </p:nvSpPr>
+        <p:spPr>
+          <a:xfrm>
+            <a:off x="4895701" y="2718346"/>
+            <a:ext cx="5122099" cy="229642"/>
+          </a:xfrm>
+          <a:prstGeom prst="rect">
+            <a:avLst/>
+          </a:prstGeom>
+          <a:noFill/>
+          <a:ln/>
+        </p:spPr>
+        <p:txBody>
+          <a:bodyPr wrap="square" lIns="0" tIns="0" rIns="0" bIns="0" rtlCol="0" anchor="t"/>
+          <a:lstStyle/>
+          <a:p>
+            <a:pPr algn="l" indent="0" marL="0">
+              <a:lnSpc>
+                <a:spcPts val="1810"/>
+              </a:lnSpc>
+              <a:buNone/>
+            </a:pPr>
+            <a:r>
+              <a:rPr lang="en-US" sz="1040" dirty="0">
+                <a:solidFill>
+                  <a:srgbClr val="5A6672"/>
                 </a:solidFill>
                 <a:latin typeface="Jost" pitchFamily="34" charset="0"/>
                 <a:ea typeface="Jost" pitchFamily="34" charset="-122"/>
                 <a:cs typeface="Jost" pitchFamily="34" charset="-120"/>
               </a:rPr>
-              <a:t>google.com.br · tripadvisor.com.br · restaurantguru.com.br</a:t>
-            </a:r>
-            <a:endParaRPr lang="en-US" sz="840" dirty="0"/>
-          </a:p>
-        </p:txBody>
-      </p:sp>
-      <p:sp>
-        <p:nvSpPr>
-          <p:cNvPr id="20" name="Text 16"/>
+              <a:t>Em cuidar do quarto.</a:t>
+            </a:r>
+            <a:endParaRPr lang="en-US" sz="1040" dirty="0"/>
+          </a:p>
+        </p:txBody>
+      </p:sp>
+      <p:sp>
+        <p:nvSpPr>
+          <p:cNvPr id="31" name="Text 27"/>
+          <p:cNvSpPr txBox="1"/>
+          <p:nvPr/>
+        </p:nvSpPr>
+        <p:spPr>
+          <a:xfrm>
+            <a:off x="4463802" y="3299371"/>
+            <a:ext cx="477619" cy="257175"/>
+          </a:xfrm>
+          <a:prstGeom prst="rect">
+            <a:avLst/>
+          </a:prstGeom>
+          <a:noFill/>
+          <a:ln/>
+        </p:spPr>
+        <p:txBody>
+          <a:bodyPr wrap="square" lIns="0" tIns="0" rIns="0" bIns="0" rtlCol="0" anchor="t"/>
+          <a:lstStyle/>
+          <a:p>
+            <a:pPr algn="l" indent="0" marL="0">
+              <a:lnSpc>
+                <a:spcPts val="1920"/>
+              </a:lnSpc>
+              <a:buNone/>
+            </a:pPr>
+            <a:r>
+              <a:rPr lang="en-US" sz="1600" dirty="0">
+                <a:solidFill>
+                  <a:srgbClr val="C1121C"/>
+                </a:solidFill>
+                <a:latin typeface="EB Garamond" pitchFamily="34" charset="0"/>
+                <a:ea typeface="EB Garamond" pitchFamily="34" charset="-122"/>
+                <a:cs typeface="EB Garamond" pitchFamily="34" charset="-120"/>
+              </a:rPr>
+              <a:t>04</a:t>
+            </a:r>
+            <a:endParaRPr lang="en-US" sz="1600" dirty="0"/>
+          </a:p>
+        </p:txBody>
+      </p:sp>
+      <p:sp>
+        <p:nvSpPr>
+          <p:cNvPr id="32" name="Text 28"/>
+          <p:cNvSpPr txBox="1"/>
+          <p:nvPr/>
+        </p:nvSpPr>
+        <p:spPr>
+          <a:xfrm>
+            <a:off x="4895701" y="3313212"/>
+            <a:ext cx="5122099" cy="229642"/>
+          </a:xfrm>
+          <a:prstGeom prst="rect">
+            <a:avLst/>
+          </a:prstGeom>
+          <a:noFill/>
+          <a:ln/>
+        </p:spPr>
+        <p:txBody>
+          <a:bodyPr wrap="square" lIns="0" tIns="0" rIns="0" bIns="0" rtlCol="0" anchor="t"/>
+          <a:lstStyle/>
+          <a:p>
+            <a:pPr algn="l" indent="0" marL="0">
+              <a:lnSpc>
+                <a:spcPts val="1810"/>
+              </a:lnSpc>
+              <a:buNone/>
+            </a:pPr>
+            <a:r>
+              <a:rPr lang="en-US" sz="1040" dirty="0">
+                <a:solidFill>
+                  <a:srgbClr val="5A6672"/>
+                </a:solidFill>
+                <a:latin typeface="Jost" pitchFamily="34" charset="0"/>
+                <a:ea typeface="Jost" pitchFamily="34" charset="-122"/>
+                <a:cs typeface="Jost" pitchFamily="34" charset="-120"/>
+              </a:rPr>
+              <a:t>Em preparar um bom café da manhã.</a:t>
+            </a:r>
+            <a:endParaRPr lang="en-US" sz="1040" dirty="0"/>
+          </a:p>
+        </p:txBody>
+      </p:sp>
+      <p:sp>
+        <p:nvSpPr>
+          <p:cNvPr id="33" name="Text 29"/>
+          <p:cNvSpPr txBox="1"/>
+          <p:nvPr/>
+        </p:nvSpPr>
+        <p:spPr>
+          <a:xfrm>
+            <a:off x="4463802" y="3894237"/>
+            <a:ext cx="477619" cy="257175"/>
+          </a:xfrm>
+          <a:prstGeom prst="rect">
+            <a:avLst/>
+          </a:prstGeom>
+          <a:noFill/>
+          <a:ln/>
+        </p:spPr>
+        <p:txBody>
+          <a:bodyPr wrap="square" lIns="0" tIns="0" rIns="0" bIns="0" rtlCol="0" anchor="t"/>
+          <a:lstStyle/>
+          <a:p>
+            <a:pPr algn="l" indent="0" marL="0">
+              <a:lnSpc>
+                <a:spcPts val="1920"/>
+              </a:lnSpc>
+              <a:buNone/>
+            </a:pPr>
+            <a:r>
+              <a:rPr lang="en-US" sz="1600" dirty="0">
+                <a:solidFill>
+                  <a:srgbClr val="C1121C"/>
+                </a:solidFill>
+                <a:latin typeface="EB Garamond" pitchFamily="34" charset="0"/>
+                <a:ea typeface="EB Garamond" pitchFamily="34" charset="-122"/>
+                <a:cs typeface="EB Garamond" pitchFamily="34" charset="-120"/>
+              </a:rPr>
+              <a:t>05</a:t>
+            </a:r>
+            <a:endParaRPr lang="en-US" sz="1600" dirty="0"/>
+          </a:p>
+        </p:txBody>
+      </p:sp>
+      <p:sp>
+        <p:nvSpPr>
+          <p:cNvPr id="34" name="Text 30"/>
+          <p:cNvSpPr txBox="1"/>
+          <p:nvPr/>
+        </p:nvSpPr>
+        <p:spPr>
+          <a:xfrm>
+            <a:off x="4895701" y="3908078"/>
+            <a:ext cx="5122099" cy="229642"/>
+          </a:xfrm>
+          <a:prstGeom prst="rect">
+            <a:avLst/>
+          </a:prstGeom>
+          <a:noFill/>
+          <a:ln/>
+        </p:spPr>
+        <p:txBody>
+          <a:bodyPr wrap="square" lIns="0" tIns="0" rIns="0" bIns="0" rtlCol="0" anchor="t"/>
+          <a:lstStyle/>
+          <a:p>
+            <a:pPr algn="l" indent="0" marL="0">
+              <a:lnSpc>
+                <a:spcPts val="1810"/>
+              </a:lnSpc>
+              <a:buNone/>
+            </a:pPr>
+            <a:r>
+              <a:rPr lang="en-US" sz="1040" dirty="0">
+                <a:solidFill>
+                  <a:srgbClr val="5A6672"/>
+                </a:solidFill>
+                <a:latin typeface="Jost" pitchFamily="34" charset="0"/>
+                <a:ea typeface="Jost" pitchFamily="34" charset="-122"/>
+                <a:cs typeface="Jost" pitchFamily="34" charset="-120"/>
+              </a:rPr>
+              <a:t>Em oferecer conforto na praia.</a:t>
+            </a:r>
+            <a:endParaRPr lang="en-US" sz="1040" dirty="0"/>
+          </a:p>
+        </p:txBody>
+      </p:sp>
+      <p:sp>
+        <p:nvSpPr>
+          <p:cNvPr id="35" name="Text 31"/>
+          <p:cNvSpPr txBox="1"/>
+          <p:nvPr/>
+        </p:nvSpPr>
+        <p:spPr>
+          <a:xfrm>
+            <a:off x="4463802" y="4489103"/>
+            <a:ext cx="477619" cy="257175"/>
+          </a:xfrm>
+          <a:prstGeom prst="rect">
+            <a:avLst/>
+          </a:prstGeom>
+          <a:noFill/>
+          <a:ln/>
+        </p:spPr>
+        <p:txBody>
+          <a:bodyPr wrap="square" lIns="0" tIns="0" rIns="0" bIns="0" rtlCol="0" anchor="t"/>
+          <a:lstStyle/>
+          <a:p>
+            <a:pPr algn="l" indent="0" marL="0">
+              <a:lnSpc>
+                <a:spcPts val="1920"/>
+              </a:lnSpc>
+              <a:buNone/>
+            </a:pPr>
+            <a:r>
+              <a:rPr lang="en-US" sz="1600" dirty="0">
+                <a:solidFill>
+                  <a:srgbClr val="C1121C"/>
+                </a:solidFill>
+                <a:latin typeface="EB Garamond" pitchFamily="34" charset="0"/>
+                <a:ea typeface="EB Garamond" pitchFamily="34" charset="-122"/>
+                <a:cs typeface="EB Garamond" pitchFamily="34" charset="-120"/>
+              </a:rPr>
+              <a:t>06</a:t>
+            </a:r>
+            <a:endParaRPr lang="en-US" sz="1600" dirty="0"/>
+          </a:p>
+        </p:txBody>
+      </p:sp>
+      <p:sp>
+        <p:nvSpPr>
+          <p:cNvPr id="36" name="Text 32"/>
+          <p:cNvSpPr txBox="1"/>
+          <p:nvPr/>
+        </p:nvSpPr>
+        <p:spPr>
+          <a:xfrm>
+            <a:off x="4895701" y="4502944"/>
+            <a:ext cx="5122099" cy="229642"/>
+          </a:xfrm>
+          <a:prstGeom prst="rect">
+            <a:avLst/>
+          </a:prstGeom>
+          <a:noFill/>
+          <a:ln/>
+        </p:spPr>
+        <p:txBody>
+          <a:bodyPr wrap="square" lIns="0" tIns="0" rIns="0" bIns="0" rtlCol="0" anchor="t"/>
+          <a:lstStyle/>
+          <a:p>
+            <a:pPr algn="l" indent="0" marL="0">
+              <a:lnSpc>
+                <a:spcPts val="1810"/>
+              </a:lnSpc>
+              <a:buNone/>
+            </a:pPr>
+            <a:r>
+              <a:rPr lang="en-US" sz="1040" dirty="0">
+                <a:solidFill>
+                  <a:srgbClr val="5A6672"/>
+                </a:solidFill>
+                <a:latin typeface="Jost" pitchFamily="34" charset="0"/>
+                <a:ea typeface="Jost" pitchFamily="34" charset="-122"/>
+                <a:cs typeface="Jost" pitchFamily="34" charset="-120"/>
+              </a:rPr>
+              <a:t>Em ajudar com uma mala.</a:t>
+            </a:r>
+            <a:endParaRPr lang="en-US" sz="1040" dirty="0"/>
+          </a:p>
+        </p:txBody>
+      </p:sp>
+      <p:sp>
+        <p:nvSpPr>
+          <p:cNvPr id="37" name="Text 33"/>
+          <p:cNvSpPr txBox="1"/>
+          <p:nvPr/>
+        </p:nvSpPr>
+        <p:spPr>
+          <a:xfrm>
+            <a:off x="4463802" y="5083969"/>
+            <a:ext cx="477619" cy="257175"/>
+          </a:xfrm>
+          <a:prstGeom prst="rect">
+            <a:avLst/>
+          </a:prstGeom>
+          <a:noFill/>
+          <a:ln/>
+        </p:spPr>
+        <p:txBody>
+          <a:bodyPr wrap="square" lIns="0" tIns="0" rIns="0" bIns="0" rtlCol="0" anchor="t"/>
+          <a:lstStyle/>
+          <a:p>
+            <a:pPr algn="l" indent="0" marL="0">
+              <a:lnSpc>
+                <a:spcPts val="1920"/>
+              </a:lnSpc>
+              <a:buNone/>
+            </a:pPr>
+            <a:r>
+              <a:rPr lang="en-US" sz="1600" dirty="0">
+                <a:solidFill>
+                  <a:srgbClr val="C1121C"/>
+                </a:solidFill>
+                <a:latin typeface="EB Garamond" pitchFamily="34" charset="0"/>
+                <a:ea typeface="EB Garamond" pitchFamily="34" charset="-122"/>
+                <a:cs typeface="EB Garamond" pitchFamily="34" charset="-120"/>
+              </a:rPr>
+              <a:t>07</a:t>
+            </a:r>
+            <a:endParaRPr lang="en-US" sz="1600" dirty="0"/>
+          </a:p>
+        </p:txBody>
+      </p:sp>
+      <p:sp>
+        <p:nvSpPr>
+          <p:cNvPr id="38" name="Text 34"/>
+          <p:cNvSpPr txBox="1"/>
+          <p:nvPr/>
+        </p:nvSpPr>
+        <p:spPr>
+          <a:xfrm>
+            <a:off x="4895701" y="5097810"/>
+            <a:ext cx="5122099" cy="229642"/>
+          </a:xfrm>
+          <a:prstGeom prst="rect">
+            <a:avLst/>
+          </a:prstGeom>
+          <a:noFill/>
+          <a:ln/>
+        </p:spPr>
+        <p:txBody>
+          <a:bodyPr wrap="square" lIns="0" tIns="0" rIns="0" bIns="0" rtlCol="0" anchor="t"/>
+          <a:lstStyle/>
+          <a:p>
+            <a:pPr algn="l" indent="0" marL="0">
+              <a:lnSpc>
+                <a:spcPts val="1810"/>
+              </a:lnSpc>
+              <a:buNone/>
+            </a:pPr>
+            <a:r>
+              <a:rPr lang="en-US" sz="1040" dirty="0">
+                <a:solidFill>
+                  <a:srgbClr val="5A6672"/>
+                </a:solidFill>
+                <a:latin typeface="Jost" pitchFamily="34" charset="0"/>
+                <a:ea typeface="Jost" pitchFamily="34" charset="-122"/>
+                <a:cs typeface="Jost" pitchFamily="34" charset="-120"/>
+              </a:rPr>
+              <a:t>Em lembrar uma preferência.</a:t>
+            </a:r>
+            <a:endParaRPr lang="en-US" sz="1040" dirty="0"/>
+          </a:p>
+        </p:txBody>
+      </p:sp>
+      <p:sp>
+        <p:nvSpPr>
+          <p:cNvPr id="39" name="Text 35"/>
+          <p:cNvSpPr txBox="1"/>
+          <p:nvPr/>
+        </p:nvSpPr>
+        <p:spPr>
+          <a:xfrm>
+            <a:off x="4463802" y="5678835"/>
+            <a:ext cx="477619" cy="257175"/>
+          </a:xfrm>
+          <a:prstGeom prst="rect">
+            <a:avLst/>
+          </a:prstGeom>
+          <a:noFill/>
+          <a:ln/>
+        </p:spPr>
+        <p:txBody>
+          <a:bodyPr wrap="square" lIns="0" tIns="0" rIns="0" bIns="0" rtlCol="0" anchor="t"/>
+          <a:lstStyle/>
+          <a:p>
+            <a:pPr algn="l" indent="0" marL="0">
+              <a:lnSpc>
+                <a:spcPts val="1920"/>
+              </a:lnSpc>
+              <a:buNone/>
+            </a:pPr>
+            <a:r>
+              <a:rPr lang="en-US" sz="1600" dirty="0">
+                <a:solidFill>
+                  <a:srgbClr val="C1121C"/>
+                </a:solidFill>
+                <a:latin typeface="EB Garamond" pitchFamily="34" charset="0"/>
+                <a:ea typeface="EB Garamond" pitchFamily="34" charset="-122"/>
+                <a:cs typeface="EB Garamond" pitchFamily="34" charset="-120"/>
+              </a:rPr>
+              <a:t>08</a:t>
+            </a:r>
+            <a:endParaRPr lang="en-US" sz="1600" dirty="0"/>
+          </a:p>
+        </p:txBody>
+      </p:sp>
+      <p:sp>
+        <p:nvSpPr>
+          <p:cNvPr id="40" name="Text 36"/>
+          <p:cNvSpPr txBox="1"/>
+          <p:nvPr/>
+        </p:nvSpPr>
+        <p:spPr>
+          <a:xfrm>
+            <a:off x="4895701" y="5692676"/>
+            <a:ext cx="5122099" cy="229642"/>
+          </a:xfrm>
+          <a:prstGeom prst="rect">
+            <a:avLst/>
+          </a:prstGeom>
+          <a:noFill/>
+          <a:ln/>
+        </p:spPr>
+        <p:txBody>
+          <a:bodyPr wrap="square" lIns="0" tIns="0" rIns="0" bIns="0" rtlCol="0" anchor="t"/>
+          <a:lstStyle/>
+          <a:p>
+            <a:pPr algn="l" indent="0" marL="0">
+              <a:lnSpc>
+                <a:spcPts val="1810"/>
+              </a:lnSpc>
+              <a:buNone/>
+            </a:pPr>
+            <a:r>
+              <a:rPr lang="en-US" sz="1040" dirty="0">
+                <a:solidFill>
+                  <a:srgbClr val="5A6672"/>
+                </a:solidFill>
+                <a:latin typeface="Jost" pitchFamily="34" charset="0"/>
+                <a:ea typeface="Jost" pitchFamily="34" charset="-122"/>
+                <a:cs typeface="Jost" pitchFamily="34" charset="-120"/>
+              </a:rPr>
+              <a:t>Em resolver rapidamente um pequeno problema.</a:t>
+            </a:r>
+            <a:endParaRPr lang="en-US" sz="1040" dirty="0"/>
+          </a:p>
+        </p:txBody>
+      </p:sp>
+      <p:sp>
+        <p:nvSpPr>
+          <p:cNvPr id="41" name="Text 37"/>
+          <p:cNvSpPr txBox="1"/>
+          <p:nvPr/>
+        </p:nvSpPr>
+        <p:spPr>
+          <a:xfrm>
+            <a:off x="4463802" y="6273701"/>
+            <a:ext cx="477619" cy="257175"/>
+          </a:xfrm>
+          <a:prstGeom prst="rect">
+            <a:avLst/>
+          </a:prstGeom>
+          <a:noFill/>
+          <a:ln/>
+        </p:spPr>
+        <p:txBody>
+          <a:bodyPr wrap="square" lIns="0" tIns="0" rIns="0" bIns="0" rtlCol="0" anchor="t"/>
+          <a:lstStyle/>
+          <a:p>
+            <a:pPr algn="l" indent="0" marL="0">
+              <a:lnSpc>
+                <a:spcPts val="1920"/>
+              </a:lnSpc>
+              <a:buNone/>
+            </a:pPr>
+            <a:r>
+              <a:rPr lang="en-US" sz="1600" dirty="0">
+                <a:solidFill>
+                  <a:srgbClr val="C1121C"/>
+                </a:solidFill>
+                <a:latin typeface="EB Garamond" pitchFamily="34" charset="0"/>
+                <a:ea typeface="EB Garamond" pitchFamily="34" charset="-122"/>
+                <a:cs typeface="EB Garamond" pitchFamily="34" charset="-120"/>
+              </a:rPr>
+              <a:t>09</a:t>
+            </a:r>
+            <a:endParaRPr lang="en-US" sz="1600" dirty="0"/>
+          </a:p>
+        </p:txBody>
+      </p:sp>
+      <p:sp>
+        <p:nvSpPr>
+          <p:cNvPr id="42" name="Text 38"/>
+          <p:cNvSpPr txBox="1"/>
+          <p:nvPr/>
+        </p:nvSpPr>
+        <p:spPr>
+          <a:xfrm>
+            <a:off x="4895701" y="6287542"/>
+            <a:ext cx="5122099" cy="229642"/>
+          </a:xfrm>
+          <a:prstGeom prst="rect">
+            <a:avLst/>
+          </a:prstGeom>
+          <a:noFill/>
+          <a:ln/>
+        </p:spPr>
+        <p:txBody>
+          <a:bodyPr wrap="square" lIns="0" tIns="0" rIns="0" bIns="0" rtlCol="0" anchor="t"/>
+          <a:lstStyle/>
+          <a:p>
+            <a:pPr algn="l" indent="0" marL="0">
+              <a:lnSpc>
+                <a:spcPts val="1810"/>
+              </a:lnSpc>
+              <a:buNone/>
+            </a:pPr>
+            <a:r>
+              <a:rPr lang="en-US" sz="1040" dirty="0">
+                <a:solidFill>
+                  <a:srgbClr val="5A6672"/>
+                </a:solidFill>
+                <a:latin typeface="Jost" pitchFamily="34" charset="0"/>
+                <a:ea typeface="Jost" pitchFamily="34" charset="-122"/>
+                <a:cs typeface="Jost" pitchFamily="34" charset="-120"/>
+              </a:rPr>
+              <a:t>Em fazer com que uma pessoa que chegou como hóspede queira voltar como amigo.</a:t>
+            </a:r>
+            <a:endParaRPr lang="en-US" sz="1040" dirty="0"/>
+          </a:p>
+        </p:txBody>
+      </p:sp>
+      <p:sp>
+        <p:nvSpPr>
+          <p:cNvPr id="43" name="Text 39"/>
           <p:cNvSpPr txBox="1"/>
           <p:nvPr/>
         </p:nvSpPr>
@@ -7235,7 +6838,7 @@
         </p:nvSpPr>
         <p:spPr>
           <a:xfrm>
-            <a:off x="4463802" y="1341239"/>
+            <a:off x="4463802" y="5845820"/>
             <a:ext cx="5508278" cy="9525"/>
           </a:xfrm>
           <a:prstGeom prst="rect">
@@ -7255,186 +6858,6 @@
         </p:nvSpPr>
         <p:spPr>
           <a:xfrm>
-            <a:off x="4463802" y="1936105"/>
-            <a:ext cx="5508278" cy="9525"/>
-          </a:xfrm>
-          <a:prstGeom prst="rect">
-            <a:avLst/>
-          </a:prstGeom>
-          <a:solidFill>
-            <a:srgbClr val="E2DFD9"/>
-          </a:solidFill>
-          <a:ln/>
-        </p:spPr>
-      </p:sp>
-      <p:sp>
-        <p:nvSpPr>
-          <p:cNvPr id="8" name="Shape 6"/>
-          <p:cNvSpPr/>
-          <p:nvPr/>
-        </p:nvSpPr>
-        <p:spPr>
-          <a:xfrm>
-            <a:off x="4463802" y="2530971"/>
-            <a:ext cx="5508278" cy="9525"/>
-          </a:xfrm>
-          <a:prstGeom prst="rect">
-            <a:avLst/>
-          </a:prstGeom>
-          <a:solidFill>
-            <a:srgbClr val="E2DFD9"/>
-          </a:solidFill>
-          <a:ln/>
-        </p:spPr>
-      </p:sp>
-      <p:sp>
-        <p:nvSpPr>
-          <p:cNvPr id="9" name="Shape 7"/>
-          <p:cNvSpPr/>
-          <p:nvPr/>
-        </p:nvSpPr>
-        <p:spPr>
-          <a:xfrm>
-            <a:off x="4463802" y="3125837"/>
-            <a:ext cx="5508278" cy="9525"/>
-          </a:xfrm>
-          <a:prstGeom prst="rect">
-            <a:avLst/>
-          </a:prstGeom>
-          <a:solidFill>
-            <a:srgbClr val="E2DFD9"/>
-          </a:solidFill>
-          <a:ln/>
-        </p:spPr>
-      </p:sp>
-      <p:sp>
-        <p:nvSpPr>
-          <p:cNvPr id="10" name="Shape 8"/>
-          <p:cNvSpPr/>
-          <p:nvPr/>
-        </p:nvSpPr>
-        <p:spPr>
-          <a:xfrm>
-            <a:off x="4463802" y="3720703"/>
-            <a:ext cx="5508278" cy="9525"/>
-          </a:xfrm>
-          <a:prstGeom prst="rect">
-            <a:avLst/>
-          </a:prstGeom>
-          <a:solidFill>
-            <a:srgbClr val="E2DFD9"/>
-          </a:solidFill>
-          <a:ln/>
-        </p:spPr>
-      </p:sp>
-      <p:sp>
-        <p:nvSpPr>
-          <p:cNvPr id="11" name="Shape 9"/>
-          <p:cNvSpPr/>
-          <p:nvPr/>
-        </p:nvSpPr>
-        <p:spPr>
-          <a:xfrm>
-            <a:off x="4463802" y="4315569"/>
-            <a:ext cx="5508278" cy="9525"/>
-          </a:xfrm>
-          <a:prstGeom prst="rect">
-            <a:avLst/>
-          </a:prstGeom>
-          <a:solidFill>
-            <a:srgbClr val="E2DFD9"/>
-          </a:solidFill>
-          <a:ln/>
-        </p:spPr>
-      </p:sp>
-      <p:sp>
-        <p:nvSpPr>
-          <p:cNvPr id="12" name="Shape 10"/>
-          <p:cNvSpPr/>
-          <p:nvPr/>
-        </p:nvSpPr>
-        <p:spPr>
-          <a:xfrm>
-            <a:off x="4463802" y="4910435"/>
-            <a:ext cx="5508278" cy="9525"/>
-          </a:xfrm>
-          <a:prstGeom prst="rect">
-            <a:avLst/>
-          </a:prstGeom>
-          <a:solidFill>
-            <a:srgbClr val="E2DFD9"/>
-          </a:solidFill>
-          <a:ln/>
-        </p:spPr>
-      </p:sp>
-      <p:sp>
-        <p:nvSpPr>
-          <p:cNvPr id="13" name="Shape 11"/>
-          <p:cNvSpPr/>
-          <p:nvPr/>
-        </p:nvSpPr>
-        <p:spPr>
-          <a:xfrm>
-            <a:off x="4463802" y="5505301"/>
-            <a:ext cx="5508278" cy="9525"/>
-          </a:xfrm>
-          <a:prstGeom prst="rect">
-            <a:avLst/>
-          </a:prstGeom>
-          <a:solidFill>
-            <a:srgbClr val="E2DFD9"/>
-          </a:solidFill>
-          <a:ln/>
-        </p:spPr>
-      </p:sp>
-      <p:sp>
-        <p:nvSpPr>
-          <p:cNvPr id="14" name="Shape 12"/>
-          <p:cNvSpPr/>
-          <p:nvPr/>
-        </p:nvSpPr>
-        <p:spPr>
-          <a:xfrm>
-            <a:off x="4463802" y="6100167"/>
-            <a:ext cx="5508278" cy="9525"/>
-          </a:xfrm>
-          <a:prstGeom prst="rect">
-            <a:avLst/>
-          </a:prstGeom>
-          <a:solidFill>
-            <a:srgbClr val="E2DFD9"/>
-          </a:solidFill>
-          <a:ln/>
-        </p:spPr>
-      </p:sp>
-      <p:sp>
-        <p:nvSpPr>
-          <p:cNvPr id="15" name="Shape 13"/>
-          <p:cNvSpPr/>
-          <p:nvPr/>
-        </p:nvSpPr>
-        <p:spPr>
-          <a:xfrm>
-            <a:off x="4463802" y="6695033"/>
-            <a:ext cx="5508278" cy="9525"/>
-          </a:xfrm>
-          <a:prstGeom prst="rect">
-            <a:avLst/>
-          </a:prstGeom>
-          <a:solidFill>
-            <a:srgbClr val="E2DFD9"/>
-          </a:solidFill>
-          <a:ln/>
-        </p:spPr>
-      </p:sp>
-      <p:sp>
-        <p:nvSpPr>
-          <p:cNvPr id="16" name="Shape 14"/>
-          <p:cNvSpPr/>
-          <p:nvPr/>
-        </p:nvSpPr>
-        <p:spPr>
-          <a:xfrm>
             <a:off x="719882" y="6704707"/>
             <a:ext cx="9252198" cy="9525"/>
           </a:xfrm>
@@ -7449,7 +6872,7 @@
       </p:sp>
       <p:pic>
         <p:nvPicPr>
-          <p:cNvPr id="17" name="Image 0" descr="/home/user/SkillsClaude/apresentacao-victorinox/build/logos/logo-pc.png">    </p:cNvPr>
+          <p:cNvPr id="8" name="Image 0" descr="/home/user/SkillsClaude/apresentacao-victorinox/build/logos/logo-pc.png">    </p:cNvPr>
           <p:cNvPicPr>
             <a:picLocks noChangeAspect="1"/>
           </p:cNvPicPr>
@@ -7473,7 +6896,7 @@
       </p:pic>
       <p:pic>
         <p:nvPicPr>
-          <p:cNvPr id="18" name="Image 1" descr="/home/user/SkillsClaude/apresentacao-victorinox/build/logos/logo-vx.png">    </p:cNvPr>
+          <p:cNvPr id="9" name="Image 1" descr="/home/user/SkillsClaude/apresentacao-victorinox/build/logos/logo-vx.png">    </p:cNvPr>
           <p:cNvPicPr>
             <a:picLocks noChangeAspect="1"/>
           </p:cNvPicPr>
@@ -7497,7 +6920,7 @@
       </p:pic>
       <p:sp>
         <p:nvSpPr>
-          <p:cNvPr id="19" name="Text 15"/>
+          <p:cNvPr id="10" name="Text 6"/>
           <p:cNvSpPr txBox="1"/>
           <p:nvPr/>
         </p:nvSpPr>
@@ -7539,7 +6962,7 @@
       </p:sp>
       <p:sp>
         <p:nvSpPr>
-          <p:cNvPr id="20" name="Text 16"/>
+          <p:cNvPr id="11" name="Text 7"/>
           <p:cNvSpPr txBox="1"/>
           <p:nvPr/>
         </p:nvSpPr>
@@ -7581,7 +7004,7 @@
       </p:sp>
       <p:sp>
         <p:nvSpPr>
-          <p:cNvPr id="21" name="Text 17"/>
+          <p:cNvPr id="12" name="Text 8"/>
           <p:cNvSpPr txBox="1"/>
           <p:nvPr/>
         </p:nvSpPr>
@@ -7615,7 +7038,7 @@
                 <a:ea typeface="Jost Medium" pitchFamily="34" charset="-122"/>
                 <a:cs typeface="Jost Medium" pitchFamily="34" charset="-120"/>
               </a:rPr>
-              <a:t>HOSPITALIDADE</a:t>
+              <a:t>TRAJETÓRIA</a:t>
             </a:r>
             <a:endParaRPr lang="en-US" sz="660" dirty="0"/>
           </a:p>
@@ -7623,7 +7046,7 @@
       </p:sp>
       <p:sp>
         <p:nvSpPr>
-          <p:cNvPr id="22" name="Text 18"/>
+          <p:cNvPr id="13" name="Text 9"/>
           <p:cNvSpPr txBox="1"/>
           <p:nvPr/>
         </p:nvSpPr>
@@ -7657,7 +7080,7 @@
                 <a:ea typeface="EB Garamond Medium" pitchFamily="34" charset="-122"/>
                 <a:cs typeface="EB Garamond Medium" pitchFamily="34" charset="-120"/>
               </a:rPr>
-              <a:t>Qualidade está nos detalhes</a:t>
+              <a:t>Uma empresa consolidada</a:t>
             </a:r>
             <a:endParaRPr lang="en-US" sz="2700" dirty="0"/>
           </a:p>
@@ -7665,14 +7088,98 @@
       </p:sp>
       <p:sp>
         <p:nvSpPr>
-          <p:cNvPr id="23" name="Text 19"/>
-          <p:cNvSpPr txBox="1"/>
-          <p:nvPr/>
-        </p:nvSpPr>
-        <p:spPr>
-          <a:xfrm>
-            <a:off x="719882" y="2615059"/>
-            <a:ext cx="2700218" cy="735360"/>
+          <p:cNvPr id="14" name="Text 10"/>
+          <p:cNvSpPr txBox="1"/>
+          <p:nvPr/>
+        </p:nvSpPr>
+        <p:spPr>
+          <a:xfrm>
+            <a:off x="719882" y="5916216"/>
+            <a:ext cx="2700218" cy="788491"/>
+          </a:xfrm>
+          <a:prstGeom prst="rect">
+            <a:avLst/>
+          </a:prstGeom>
+          <a:noFill/>
+          <a:ln/>
+        </p:spPr>
+        <p:txBody>
+          <a:bodyPr wrap="square" lIns="0" tIns="0" rIns="0" bIns="0" rtlCol="0" anchor="t"/>
+          <a:lstStyle/>
+          <a:p>
+            <a:pPr algn="l" indent="0" marL="0">
+              <a:lnSpc>
+                <a:spcPts val="2070"/>
+              </a:lnSpc>
+              <a:buNone/>
+            </a:pPr>
+            <a:r>
+              <a:rPr lang="en-US" sz="1500" i="1" spc="3" kern="0" dirty="0">
+                <a:solidFill>
+                  <a:srgbClr val="16222E"/>
+                </a:solidFill>
+                <a:latin typeface="EB Garamond" pitchFamily="34" charset="0"/>
+                <a:ea typeface="EB Garamond" pitchFamily="34" charset="-122"/>
+                <a:cs typeface="EB Garamond" pitchFamily="34" charset="-120"/>
+              </a:rPr>
+              <a:t>“Confiança não é conquistada em uma campanha publicitária; é construída ao longo do tempo.”</a:t>
+            </a:r>
+            <a:endParaRPr lang="en-US" sz="1500" dirty="0"/>
+          </a:p>
+        </p:txBody>
+      </p:sp>
+      <p:sp>
+        <p:nvSpPr>
+          <p:cNvPr id="15" name="Text 11"/>
+          <p:cNvSpPr txBox="1"/>
+          <p:nvPr/>
+        </p:nvSpPr>
+        <p:spPr>
+          <a:xfrm>
+            <a:off x="4463802" y="1341239"/>
+            <a:ext cx="5553998" cy="265509"/>
+          </a:xfrm>
+          <a:prstGeom prst="rect">
+            <a:avLst/>
+          </a:prstGeom>
+          <a:noFill/>
+          <a:ln/>
+        </p:spPr>
+        <p:txBody>
+          <a:bodyPr wrap="square" lIns="0" tIns="0" rIns="0" bIns="0" rtlCol="0" anchor="t"/>
+          <a:lstStyle/>
+          <a:p>
+            <a:pPr algn="l" indent="0" marL="0">
+              <a:lnSpc>
+                <a:spcPts val="2092"/>
+              </a:lnSpc>
+              <a:buNone/>
+            </a:pPr>
+            <a:r>
+              <a:rPr lang="en-US" sz="1260" dirty="0">
+                <a:solidFill>
+                  <a:srgbClr val="2E3A45"/>
+                </a:solidFill>
+                <a:latin typeface="Jost Light" pitchFamily="34" charset="0"/>
+                <a:ea typeface="Jost Light" pitchFamily="34" charset="-122"/>
+                <a:cs typeface="Jost Light" pitchFamily="34" charset="-120"/>
+              </a:rPr>
+              <a:t>São mais de 20 anos de operação contínua.</a:t>
+            </a:r>
+            <a:endParaRPr lang="en-US" sz="1260" dirty="0"/>
+          </a:p>
+        </p:txBody>
+      </p:sp>
+      <p:sp>
+        <p:nvSpPr>
+          <p:cNvPr id="16" name="Text 12"/>
+          <p:cNvSpPr txBox="1"/>
+          <p:nvPr/>
+        </p:nvSpPr>
+        <p:spPr>
+          <a:xfrm>
+            <a:off x="4463802" y="2038648"/>
+            <a:ext cx="5553998" cy="490240"/>
           </a:xfrm>
           <a:prstGeom prst="rect">
             <a:avLst/>
@@ -7699,7 +7206,7 @@
                 <a:ea typeface="Jost" pitchFamily="34" charset="-122"/>
                 <a:cs typeface="Jost" pitchFamily="34" charset="-120"/>
               </a:rPr>
-              <a:t>Acreditamos que hospitalidade não está apenas na estrutura física. Ela está nos detalhes.</a:t>
+              <a:t>Mais de duas décadas enfrentando diferentes momentos da economia, mudanças no comportamento dos consumidores, transformações no turismo e novas formas de comunicação.</a:t>
             </a:r>
             <a:endParaRPr lang="en-US" sz="1060" dirty="0"/>
           </a:p>
@@ -7707,33 +7214,117 @@
       </p:sp>
       <p:sp>
         <p:nvSpPr>
-          <p:cNvPr id="24" name="Text 20"/>
-          <p:cNvSpPr txBox="1"/>
-          <p:nvPr/>
-        </p:nvSpPr>
-        <p:spPr>
-          <a:xfrm>
-            <a:off x="719882" y="5916216"/>
-            <a:ext cx="2700218" cy="788491"/>
-          </a:xfrm>
-          <a:prstGeom prst="rect">
-            <a:avLst/>
-          </a:prstGeom>
-          <a:noFill/>
-          <a:ln/>
-        </p:spPr>
-        <p:txBody>
-          <a:bodyPr wrap="square" lIns="0" tIns="0" rIns="0" bIns="0" rtlCol="0" anchor="t"/>
-          <a:lstStyle/>
-          <a:p>
-            <a:pPr algn="l" indent="0" marL="0">
-              <a:lnSpc>
-                <a:spcPts val="2070"/>
-              </a:lnSpc>
-              <a:buNone/>
-            </a:pPr>
-            <a:r>
-              <a:rPr lang="en-US" sz="1500" i="1" spc="3" kern="0" dirty="0">
+          <p:cNvPr id="17" name="Text 13"/>
+          <p:cNvSpPr txBox="1"/>
+          <p:nvPr/>
+        </p:nvSpPr>
+        <p:spPr>
+          <a:xfrm>
+            <a:off x="4463802" y="2726829"/>
+            <a:ext cx="5553998" cy="490240"/>
+          </a:xfrm>
+          <a:prstGeom prst="rect">
+            <a:avLst/>
+          </a:prstGeom>
+          <a:noFill/>
+          <a:ln/>
+        </p:spPr>
+        <p:txBody>
+          <a:bodyPr wrap="square" lIns="0" tIns="0" rIns="0" bIns="0" rtlCol="0" anchor="t"/>
+          <a:lstStyle/>
+          <a:p>
+            <a:pPr algn="l" indent="0" marL="0">
+              <a:lnSpc>
+                <a:spcPts val="1929"/>
+              </a:lnSpc>
+              <a:buNone/>
+            </a:pPr>
+            <a:r>
+              <a:rPr lang="en-US" sz="1060" dirty="0">
+                <a:solidFill>
+                  <a:srgbClr val="5A6672"/>
+                </a:solidFill>
+                <a:latin typeface="Jost" pitchFamily="34" charset="0"/>
+                <a:ea typeface="Jost" pitchFamily="34" charset="-122"/>
+                <a:cs typeface="Jost" pitchFamily="34" charset="-120"/>
+              </a:rPr>
+              <a:t>E permanecemos aqui. Cuidando da empresa. Cuidando da nossa equipe. Cuidando dos nossos hóspedes. Cuidando do patrimônio que construímos.</a:t>
+            </a:r>
+            <a:endParaRPr lang="en-US" sz="1060" dirty="0"/>
+          </a:p>
+        </p:txBody>
+      </p:sp>
+      <p:sp>
+        <p:nvSpPr>
+          <p:cNvPr id="18" name="Text 14"/>
+          <p:cNvSpPr txBox="1"/>
+          <p:nvPr/>
+        </p:nvSpPr>
+        <p:spPr>
+          <a:xfrm>
+            <a:off x="4463802" y="3415010"/>
+            <a:ext cx="5553998" cy="490240"/>
+          </a:xfrm>
+          <a:prstGeom prst="rect">
+            <a:avLst/>
+          </a:prstGeom>
+          <a:noFill/>
+          <a:ln/>
+        </p:spPr>
+        <p:txBody>
+          <a:bodyPr wrap="square" lIns="0" tIns="0" rIns="0" bIns="0" rtlCol="0" anchor="t"/>
+          <a:lstStyle/>
+          <a:p>
+            <a:pPr algn="l" indent="0" marL="0">
+              <a:lnSpc>
+                <a:spcPts val="1929"/>
+              </a:lnSpc>
+              <a:buNone/>
+            </a:pPr>
+            <a:r>
+              <a:rPr lang="en-US" sz="1060" dirty="0">
+                <a:solidFill>
+                  <a:srgbClr val="5A6672"/>
+                </a:solidFill>
+                <a:latin typeface="Jost" pitchFamily="34" charset="0"/>
+                <a:ea typeface="Jost" pitchFamily="34" charset="-122"/>
+                <a:cs typeface="Jost" pitchFamily="34" charset="-120"/>
+              </a:rPr>
+              <a:t>Essa longevidade nos ensinou que confiança não é conquistada em uma campanha publicitária; é construída ao longo do tempo.</a:t>
+            </a:r>
+            <a:endParaRPr lang="en-US" sz="1060" dirty="0"/>
+          </a:p>
+        </p:txBody>
+      </p:sp>
+      <p:sp>
+        <p:nvSpPr>
+          <p:cNvPr id="19" name="Text 15"/>
+          <p:cNvSpPr txBox="1"/>
+          <p:nvPr/>
+        </p:nvSpPr>
+        <p:spPr>
+          <a:xfrm>
+            <a:off x="4463802" y="6143327"/>
+            <a:ext cx="5553998" cy="561380"/>
+          </a:xfrm>
+          <a:prstGeom prst="rect">
+            <a:avLst/>
+          </a:prstGeom>
+          <a:noFill/>
+          <a:ln/>
+        </p:spPr>
+        <p:txBody>
+          <a:bodyPr wrap="square" lIns="0" tIns="0" rIns="0" bIns="0" rtlCol="0" anchor="t"/>
+          <a:lstStyle/>
+          <a:p>
+            <a:pPr algn="l" indent="0" marL="0">
+              <a:lnSpc>
+                <a:spcPts val="2210"/>
+              </a:lnSpc>
+              <a:buNone/>
+            </a:pPr>
+            <a:r>
+              <a:rPr lang="en-US" sz="1700" dirty="0">
                 <a:solidFill>
                   <a:srgbClr val="16222E"/>
                 </a:solidFill>
@@ -7741,771 +7332,15 @@
                 <a:ea typeface="EB Garamond" pitchFamily="34" charset="-122"/>
                 <a:cs typeface="EB Garamond" pitchFamily="34" charset="-120"/>
               </a:rPr>
-              <a:t>“Essa filosofia orientou a construção da Pousada Camburi ao longo de mais de duas décadas.”</a:t>
-            </a:r>
-            <a:endParaRPr lang="en-US" sz="1500" dirty="0"/>
-          </a:p>
-        </p:txBody>
-      </p:sp>
-      <p:sp>
-        <p:nvSpPr>
-          <p:cNvPr id="25" name="Text 21"/>
-          <p:cNvSpPr txBox="1"/>
-          <p:nvPr/>
-        </p:nvSpPr>
-        <p:spPr>
-          <a:xfrm>
-            <a:off x="4463802" y="1514773"/>
-            <a:ext cx="477619" cy="257175"/>
-          </a:xfrm>
-          <a:prstGeom prst="rect">
-            <a:avLst/>
-          </a:prstGeom>
-          <a:noFill/>
-          <a:ln/>
-        </p:spPr>
-        <p:txBody>
-          <a:bodyPr wrap="square" lIns="0" tIns="0" rIns="0" bIns="0" rtlCol="0" anchor="t"/>
-          <a:lstStyle/>
-          <a:p>
-            <a:pPr algn="l" indent="0" marL="0">
-              <a:lnSpc>
-                <a:spcPts val="1920"/>
-              </a:lnSpc>
-              <a:buNone/>
-            </a:pPr>
-            <a:r>
-              <a:rPr lang="en-US" sz="1600" dirty="0">
-                <a:solidFill>
-                  <a:srgbClr val="C1121C"/>
-                </a:solidFill>
-                <a:latin typeface="EB Garamond" pitchFamily="34" charset="0"/>
-                <a:ea typeface="EB Garamond" pitchFamily="34" charset="-122"/>
-                <a:cs typeface="EB Garamond" pitchFamily="34" charset="-120"/>
-              </a:rPr>
-              <a:t>01</a:t>
-            </a:r>
-            <a:endParaRPr lang="en-US" sz="1600" dirty="0"/>
-          </a:p>
-        </p:txBody>
-      </p:sp>
-      <p:sp>
-        <p:nvSpPr>
-          <p:cNvPr id="26" name="Text 22"/>
-          <p:cNvSpPr txBox="1"/>
-          <p:nvPr/>
-        </p:nvSpPr>
-        <p:spPr>
-          <a:xfrm>
-            <a:off x="4895701" y="1528614"/>
-            <a:ext cx="5122099" cy="229642"/>
-          </a:xfrm>
-          <a:prstGeom prst="rect">
-            <a:avLst/>
-          </a:prstGeom>
-          <a:noFill/>
-          <a:ln/>
-        </p:spPr>
-        <p:txBody>
-          <a:bodyPr wrap="square" lIns="0" tIns="0" rIns="0" bIns="0" rtlCol="0" anchor="t"/>
-          <a:lstStyle/>
-          <a:p>
-            <a:pPr algn="l" indent="0" marL="0">
-              <a:lnSpc>
-                <a:spcPts val="1810"/>
-              </a:lnSpc>
-              <a:buNone/>
-            </a:pPr>
-            <a:r>
-              <a:rPr lang="en-US" sz="1040" dirty="0">
-                <a:solidFill>
-                  <a:srgbClr val="5A6672"/>
-                </a:solidFill>
-                <a:latin typeface="Jost" pitchFamily="34" charset="0"/>
-                <a:ea typeface="Jost" pitchFamily="34" charset="-122"/>
-                <a:cs typeface="Jost" pitchFamily="34" charset="-120"/>
-              </a:rPr>
-              <a:t>Está em receber o hóspede pelo nome.</a:t>
-            </a:r>
-            <a:endParaRPr lang="en-US" sz="1040" dirty="0"/>
-          </a:p>
-        </p:txBody>
-      </p:sp>
-      <p:sp>
-        <p:nvSpPr>
-          <p:cNvPr id="27" name="Text 23"/>
-          <p:cNvSpPr txBox="1"/>
-          <p:nvPr/>
-        </p:nvSpPr>
-        <p:spPr>
-          <a:xfrm>
-            <a:off x="4463802" y="2109639"/>
-            <a:ext cx="477619" cy="257175"/>
-          </a:xfrm>
-          <a:prstGeom prst="rect">
-            <a:avLst/>
-          </a:prstGeom>
-          <a:noFill/>
-          <a:ln/>
-        </p:spPr>
-        <p:txBody>
-          <a:bodyPr wrap="square" lIns="0" tIns="0" rIns="0" bIns="0" rtlCol="0" anchor="t"/>
-          <a:lstStyle/>
-          <a:p>
-            <a:pPr algn="l" indent="0" marL="0">
-              <a:lnSpc>
-                <a:spcPts val="1920"/>
-              </a:lnSpc>
-              <a:buNone/>
-            </a:pPr>
-            <a:r>
-              <a:rPr lang="en-US" sz="1600" dirty="0">
-                <a:solidFill>
-                  <a:srgbClr val="C1121C"/>
-                </a:solidFill>
-                <a:latin typeface="EB Garamond" pitchFamily="34" charset="0"/>
-                <a:ea typeface="EB Garamond" pitchFamily="34" charset="-122"/>
-                <a:cs typeface="EB Garamond" pitchFamily="34" charset="-120"/>
-              </a:rPr>
-              <a:t>02</a:t>
-            </a:r>
-            <a:endParaRPr lang="en-US" sz="1600" dirty="0"/>
-          </a:p>
-        </p:txBody>
-      </p:sp>
-      <p:sp>
-        <p:nvSpPr>
-          <p:cNvPr id="28" name="Text 24"/>
-          <p:cNvSpPr txBox="1"/>
-          <p:nvPr/>
-        </p:nvSpPr>
-        <p:spPr>
-          <a:xfrm>
-            <a:off x="4895701" y="2123480"/>
-            <a:ext cx="5122099" cy="229642"/>
-          </a:xfrm>
-          <a:prstGeom prst="rect">
-            <a:avLst/>
-          </a:prstGeom>
-          <a:noFill/>
-          <a:ln/>
-        </p:spPr>
-        <p:txBody>
-          <a:bodyPr wrap="square" lIns="0" tIns="0" rIns="0" bIns="0" rtlCol="0" anchor="t"/>
-          <a:lstStyle/>
-          <a:p>
-            <a:pPr algn="l" indent="0" marL="0">
-              <a:lnSpc>
-                <a:spcPts val="1810"/>
-              </a:lnSpc>
-              <a:buNone/>
-            </a:pPr>
-            <a:r>
-              <a:rPr lang="en-US" sz="1040" dirty="0">
-                <a:solidFill>
-                  <a:srgbClr val="5A6672"/>
-                </a:solidFill>
-                <a:latin typeface="Jost" pitchFamily="34" charset="0"/>
-                <a:ea typeface="Jost" pitchFamily="34" charset="-122"/>
-                <a:cs typeface="Jost" pitchFamily="34" charset="-120"/>
-              </a:rPr>
-              <a:t>Em perceber aquilo de que ele precisa antes mesmo que peça.</a:t>
-            </a:r>
-            <a:endParaRPr lang="en-US" sz="1040" dirty="0"/>
-          </a:p>
-        </p:txBody>
-      </p:sp>
-      <p:sp>
-        <p:nvSpPr>
-          <p:cNvPr id="29" name="Text 25"/>
-          <p:cNvSpPr txBox="1"/>
-          <p:nvPr/>
-        </p:nvSpPr>
-        <p:spPr>
-          <a:xfrm>
-            <a:off x="4463802" y="2704505"/>
-            <a:ext cx="477619" cy="257175"/>
-          </a:xfrm>
-          <a:prstGeom prst="rect">
-            <a:avLst/>
-          </a:prstGeom>
-          <a:noFill/>
-          <a:ln/>
-        </p:spPr>
-        <p:txBody>
-          <a:bodyPr wrap="square" lIns="0" tIns="0" rIns="0" bIns="0" rtlCol="0" anchor="t"/>
-          <a:lstStyle/>
-          <a:p>
-            <a:pPr algn="l" indent="0" marL="0">
-              <a:lnSpc>
-                <a:spcPts val="1920"/>
-              </a:lnSpc>
-              <a:buNone/>
-            </a:pPr>
-            <a:r>
-              <a:rPr lang="en-US" sz="1600" dirty="0">
-                <a:solidFill>
-                  <a:srgbClr val="C1121C"/>
-                </a:solidFill>
-                <a:latin typeface="EB Garamond" pitchFamily="34" charset="0"/>
-                <a:ea typeface="EB Garamond" pitchFamily="34" charset="-122"/>
-                <a:cs typeface="EB Garamond" pitchFamily="34" charset="-120"/>
-              </a:rPr>
-              <a:t>03</a:t>
-            </a:r>
-            <a:endParaRPr lang="en-US" sz="1600" dirty="0"/>
-          </a:p>
-        </p:txBody>
-      </p:sp>
-      <p:sp>
-        <p:nvSpPr>
-          <p:cNvPr id="30" name="Text 26"/>
-          <p:cNvSpPr txBox="1"/>
-          <p:nvPr/>
-        </p:nvSpPr>
-        <p:spPr>
-          <a:xfrm>
-            <a:off x="4895701" y="2718346"/>
-            <a:ext cx="5122099" cy="229642"/>
-          </a:xfrm>
-          <a:prstGeom prst="rect">
-            <a:avLst/>
-          </a:prstGeom>
-          <a:noFill/>
-          <a:ln/>
-        </p:spPr>
-        <p:txBody>
-          <a:bodyPr wrap="square" lIns="0" tIns="0" rIns="0" bIns="0" rtlCol="0" anchor="t"/>
-          <a:lstStyle/>
-          <a:p>
-            <a:pPr algn="l" indent="0" marL="0">
-              <a:lnSpc>
-                <a:spcPts val="1810"/>
-              </a:lnSpc>
-              <a:buNone/>
-            </a:pPr>
-            <a:r>
-              <a:rPr lang="en-US" sz="1040" dirty="0">
-                <a:solidFill>
-                  <a:srgbClr val="5A6672"/>
-                </a:solidFill>
-                <a:latin typeface="Jost" pitchFamily="34" charset="0"/>
-                <a:ea typeface="Jost" pitchFamily="34" charset="-122"/>
-                <a:cs typeface="Jost" pitchFamily="34" charset="-120"/>
-              </a:rPr>
-              <a:t>Em cuidar do quarto.</a:t>
-            </a:r>
-            <a:endParaRPr lang="en-US" sz="1040" dirty="0"/>
-          </a:p>
-        </p:txBody>
-      </p:sp>
-      <p:sp>
-        <p:nvSpPr>
-          <p:cNvPr id="31" name="Text 27"/>
-          <p:cNvSpPr txBox="1"/>
-          <p:nvPr/>
-        </p:nvSpPr>
-        <p:spPr>
-          <a:xfrm>
-            <a:off x="4463802" y="3299371"/>
-            <a:ext cx="477619" cy="257175"/>
-          </a:xfrm>
-          <a:prstGeom prst="rect">
-            <a:avLst/>
-          </a:prstGeom>
-          <a:noFill/>
-          <a:ln/>
-        </p:spPr>
-        <p:txBody>
-          <a:bodyPr wrap="square" lIns="0" tIns="0" rIns="0" bIns="0" rtlCol="0" anchor="t"/>
-          <a:lstStyle/>
-          <a:p>
-            <a:pPr algn="l" indent="0" marL="0">
-              <a:lnSpc>
-                <a:spcPts val="1920"/>
-              </a:lnSpc>
-              <a:buNone/>
-            </a:pPr>
-            <a:r>
-              <a:rPr lang="en-US" sz="1600" dirty="0">
-                <a:solidFill>
-                  <a:srgbClr val="C1121C"/>
-                </a:solidFill>
-                <a:latin typeface="EB Garamond" pitchFamily="34" charset="0"/>
-                <a:ea typeface="EB Garamond" pitchFamily="34" charset="-122"/>
-                <a:cs typeface="EB Garamond" pitchFamily="34" charset="-120"/>
-              </a:rPr>
-              <a:t>04</a:t>
-            </a:r>
-            <a:endParaRPr lang="en-US" sz="1600" dirty="0"/>
-          </a:p>
-        </p:txBody>
-      </p:sp>
-      <p:sp>
-        <p:nvSpPr>
-          <p:cNvPr id="32" name="Text 28"/>
-          <p:cNvSpPr txBox="1"/>
-          <p:nvPr/>
-        </p:nvSpPr>
-        <p:spPr>
-          <a:xfrm>
-            <a:off x="4895701" y="3313212"/>
-            <a:ext cx="5122099" cy="229642"/>
-          </a:xfrm>
-          <a:prstGeom prst="rect">
-            <a:avLst/>
-          </a:prstGeom>
-          <a:noFill/>
-          <a:ln/>
-        </p:spPr>
-        <p:txBody>
-          <a:bodyPr wrap="square" lIns="0" tIns="0" rIns="0" bIns="0" rtlCol="0" anchor="t"/>
-          <a:lstStyle/>
-          <a:p>
-            <a:pPr algn="l" indent="0" marL="0">
-              <a:lnSpc>
-                <a:spcPts val="1810"/>
-              </a:lnSpc>
-              <a:buNone/>
-            </a:pPr>
-            <a:r>
-              <a:rPr lang="en-US" sz="1040" dirty="0">
-                <a:solidFill>
-                  <a:srgbClr val="5A6672"/>
-                </a:solidFill>
-                <a:latin typeface="Jost" pitchFamily="34" charset="0"/>
-                <a:ea typeface="Jost" pitchFamily="34" charset="-122"/>
-                <a:cs typeface="Jost" pitchFamily="34" charset="-120"/>
-              </a:rPr>
-              <a:t>Em preparar um bom café da manhã.</a:t>
-            </a:r>
-            <a:endParaRPr lang="en-US" sz="1040" dirty="0"/>
-          </a:p>
-        </p:txBody>
-      </p:sp>
-      <p:sp>
-        <p:nvSpPr>
-          <p:cNvPr id="33" name="Text 29"/>
-          <p:cNvSpPr txBox="1"/>
-          <p:nvPr/>
-        </p:nvSpPr>
-        <p:spPr>
-          <a:xfrm>
-            <a:off x="4463802" y="3894237"/>
-            <a:ext cx="477619" cy="257175"/>
-          </a:xfrm>
-          <a:prstGeom prst="rect">
-            <a:avLst/>
-          </a:prstGeom>
-          <a:noFill/>
-          <a:ln/>
-        </p:spPr>
-        <p:txBody>
-          <a:bodyPr wrap="square" lIns="0" tIns="0" rIns="0" bIns="0" rtlCol="0" anchor="t"/>
-          <a:lstStyle/>
-          <a:p>
-            <a:pPr algn="l" indent="0" marL="0">
-              <a:lnSpc>
-                <a:spcPts val="1920"/>
-              </a:lnSpc>
-              <a:buNone/>
-            </a:pPr>
-            <a:r>
-              <a:rPr lang="en-US" sz="1600" dirty="0">
-                <a:solidFill>
-                  <a:srgbClr val="C1121C"/>
-                </a:solidFill>
-                <a:latin typeface="EB Garamond" pitchFamily="34" charset="0"/>
-                <a:ea typeface="EB Garamond" pitchFamily="34" charset="-122"/>
-                <a:cs typeface="EB Garamond" pitchFamily="34" charset="-120"/>
-              </a:rPr>
-              <a:t>05</a:t>
-            </a:r>
-            <a:endParaRPr lang="en-US" sz="1600" dirty="0"/>
-          </a:p>
-        </p:txBody>
-      </p:sp>
-      <p:sp>
-        <p:nvSpPr>
-          <p:cNvPr id="34" name="Text 30"/>
-          <p:cNvSpPr txBox="1"/>
-          <p:nvPr/>
-        </p:nvSpPr>
-        <p:spPr>
-          <a:xfrm>
-            <a:off x="4895701" y="3908078"/>
-            <a:ext cx="5122099" cy="229642"/>
-          </a:xfrm>
-          <a:prstGeom prst="rect">
-            <a:avLst/>
-          </a:prstGeom>
-          <a:noFill/>
-          <a:ln/>
-        </p:spPr>
-        <p:txBody>
-          <a:bodyPr wrap="square" lIns="0" tIns="0" rIns="0" bIns="0" rtlCol="0" anchor="t"/>
-          <a:lstStyle/>
-          <a:p>
-            <a:pPr algn="l" indent="0" marL="0">
-              <a:lnSpc>
-                <a:spcPts val="1810"/>
-              </a:lnSpc>
-              <a:buNone/>
-            </a:pPr>
-            <a:r>
-              <a:rPr lang="en-US" sz="1040" dirty="0">
-                <a:solidFill>
-                  <a:srgbClr val="5A6672"/>
-                </a:solidFill>
-                <a:latin typeface="Jost" pitchFamily="34" charset="0"/>
-                <a:ea typeface="Jost" pitchFamily="34" charset="-122"/>
-                <a:cs typeface="Jost" pitchFamily="34" charset="-120"/>
-              </a:rPr>
-              <a:t>Em oferecer conforto na praia.</a:t>
-            </a:r>
-            <a:endParaRPr lang="en-US" sz="1040" dirty="0"/>
-          </a:p>
-        </p:txBody>
-      </p:sp>
-      <p:sp>
-        <p:nvSpPr>
-          <p:cNvPr id="35" name="Text 31"/>
-          <p:cNvSpPr txBox="1"/>
-          <p:nvPr/>
-        </p:nvSpPr>
-        <p:spPr>
-          <a:xfrm>
-            <a:off x="4463802" y="4489103"/>
-            <a:ext cx="477619" cy="257175"/>
-          </a:xfrm>
-          <a:prstGeom prst="rect">
-            <a:avLst/>
-          </a:prstGeom>
-          <a:noFill/>
-          <a:ln/>
-        </p:spPr>
-        <p:txBody>
-          <a:bodyPr wrap="square" lIns="0" tIns="0" rIns="0" bIns="0" rtlCol="0" anchor="t"/>
-          <a:lstStyle/>
-          <a:p>
-            <a:pPr algn="l" indent="0" marL="0">
-              <a:lnSpc>
-                <a:spcPts val="1920"/>
-              </a:lnSpc>
-              <a:buNone/>
-            </a:pPr>
-            <a:r>
-              <a:rPr lang="en-US" sz="1600" dirty="0">
-                <a:solidFill>
-                  <a:srgbClr val="C1121C"/>
-                </a:solidFill>
-                <a:latin typeface="EB Garamond" pitchFamily="34" charset="0"/>
-                <a:ea typeface="EB Garamond" pitchFamily="34" charset="-122"/>
-                <a:cs typeface="EB Garamond" pitchFamily="34" charset="-120"/>
-              </a:rPr>
-              <a:t>06</a:t>
-            </a:r>
-            <a:endParaRPr lang="en-US" sz="1600" dirty="0"/>
-          </a:p>
-        </p:txBody>
-      </p:sp>
-      <p:sp>
-        <p:nvSpPr>
-          <p:cNvPr id="36" name="Text 32"/>
-          <p:cNvSpPr txBox="1"/>
-          <p:nvPr/>
-        </p:nvSpPr>
-        <p:spPr>
-          <a:xfrm>
-            <a:off x="4895701" y="4502944"/>
-            <a:ext cx="5122099" cy="229642"/>
-          </a:xfrm>
-          <a:prstGeom prst="rect">
-            <a:avLst/>
-          </a:prstGeom>
-          <a:noFill/>
-          <a:ln/>
-        </p:spPr>
-        <p:txBody>
-          <a:bodyPr wrap="square" lIns="0" tIns="0" rIns="0" bIns="0" rtlCol="0" anchor="t"/>
-          <a:lstStyle/>
-          <a:p>
-            <a:pPr algn="l" indent="0" marL="0">
-              <a:lnSpc>
-                <a:spcPts val="1810"/>
-              </a:lnSpc>
-              <a:buNone/>
-            </a:pPr>
-            <a:r>
-              <a:rPr lang="en-US" sz="1040" dirty="0">
-                <a:solidFill>
-                  <a:srgbClr val="5A6672"/>
-                </a:solidFill>
-                <a:latin typeface="Jost" pitchFamily="34" charset="0"/>
-                <a:ea typeface="Jost" pitchFamily="34" charset="-122"/>
-                <a:cs typeface="Jost" pitchFamily="34" charset="-120"/>
-              </a:rPr>
-              <a:t>Em ajudar com uma mala.</a:t>
-            </a:r>
-            <a:endParaRPr lang="en-US" sz="1040" dirty="0"/>
-          </a:p>
-        </p:txBody>
-      </p:sp>
-      <p:sp>
-        <p:nvSpPr>
-          <p:cNvPr id="37" name="Text 33"/>
-          <p:cNvSpPr txBox="1"/>
-          <p:nvPr/>
-        </p:nvSpPr>
-        <p:spPr>
-          <a:xfrm>
-            <a:off x="4463802" y="5083969"/>
-            <a:ext cx="477619" cy="257175"/>
-          </a:xfrm>
-          <a:prstGeom prst="rect">
-            <a:avLst/>
-          </a:prstGeom>
-          <a:noFill/>
-          <a:ln/>
-        </p:spPr>
-        <p:txBody>
-          <a:bodyPr wrap="square" lIns="0" tIns="0" rIns="0" bIns="0" rtlCol="0" anchor="t"/>
-          <a:lstStyle/>
-          <a:p>
-            <a:pPr algn="l" indent="0" marL="0">
-              <a:lnSpc>
-                <a:spcPts val="1920"/>
-              </a:lnSpc>
-              <a:buNone/>
-            </a:pPr>
-            <a:r>
-              <a:rPr lang="en-US" sz="1600" dirty="0">
-                <a:solidFill>
-                  <a:srgbClr val="C1121C"/>
-                </a:solidFill>
-                <a:latin typeface="EB Garamond" pitchFamily="34" charset="0"/>
-                <a:ea typeface="EB Garamond" pitchFamily="34" charset="-122"/>
-                <a:cs typeface="EB Garamond" pitchFamily="34" charset="-120"/>
-              </a:rPr>
-              <a:t>07</a:t>
-            </a:r>
-            <a:endParaRPr lang="en-US" sz="1600" dirty="0"/>
-          </a:p>
-        </p:txBody>
-      </p:sp>
-      <p:sp>
-        <p:nvSpPr>
-          <p:cNvPr id="38" name="Text 34"/>
-          <p:cNvSpPr txBox="1"/>
-          <p:nvPr/>
-        </p:nvSpPr>
-        <p:spPr>
-          <a:xfrm>
-            <a:off x="4895701" y="5097810"/>
-            <a:ext cx="5122099" cy="229642"/>
-          </a:xfrm>
-          <a:prstGeom prst="rect">
-            <a:avLst/>
-          </a:prstGeom>
-          <a:noFill/>
-          <a:ln/>
-        </p:spPr>
-        <p:txBody>
-          <a:bodyPr wrap="square" lIns="0" tIns="0" rIns="0" bIns="0" rtlCol="0" anchor="t"/>
-          <a:lstStyle/>
-          <a:p>
-            <a:pPr algn="l" indent="0" marL="0">
-              <a:lnSpc>
-                <a:spcPts val="1810"/>
-              </a:lnSpc>
-              <a:buNone/>
-            </a:pPr>
-            <a:r>
-              <a:rPr lang="en-US" sz="1040" dirty="0">
-                <a:solidFill>
-                  <a:srgbClr val="5A6672"/>
-                </a:solidFill>
-                <a:latin typeface="Jost" pitchFamily="34" charset="0"/>
-                <a:ea typeface="Jost" pitchFamily="34" charset="-122"/>
-                <a:cs typeface="Jost" pitchFamily="34" charset="-120"/>
-              </a:rPr>
-              <a:t>Em lembrar uma preferência.</a:t>
-            </a:r>
-            <a:endParaRPr lang="en-US" sz="1040" dirty="0"/>
-          </a:p>
-        </p:txBody>
-      </p:sp>
-      <p:sp>
-        <p:nvSpPr>
-          <p:cNvPr id="39" name="Text 35"/>
-          <p:cNvSpPr txBox="1"/>
-          <p:nvPr/>
-        </p:nvSpPr>
-        <p:spPr>
-          <a:xfrm>
-            <a:off x="4463802" y="5678835"/>
-            <a:ext cx="477619" cy="257175"/>
-          </a:xfrm>
-          <a:prstGeom prst="rect">
-            <a:avLst/>
-          </a:prstGeom>
-          <a:noFill/>
-          <a:ln/>
-        </p:spPr>
-        <p:txBody>
-          <a:bodyPr wrap="square" lIns="0" tIns="0" rIns="0" bIns="0" rtlCol="0" anchor="t"/>
-          <a:lstStyle/>
-          <a:p>
-            <a:pPr algn="l" indent="0" marL="0">
-              <a:lnSpc>
-                <a:spcPts val="1920"/>
-              </a:lnSpc>
-              <a:buNone/>
-            </a:pPr>
-            <a:r>
-              <a:rPr lang="en-US" sz="1600" dirty="0">
-                <a:solidFill>
-                  <a:srgbClr val="C1121C"/>
-                </a:solidFill>
-                <a:latin typeface="EB Garamond" pitchFamily="34" charset="0"/>
-                <a:ea typeface="EB Garamond" pitchFamily="34" charset="-122"/>
-                <a:cs typeface="EB Garamond" pitchFamily="34" charset="-120"/>
-              </a:rPr>
-              <a:t>08</a:t>
-            </a:r>
-            <a:endParaRPr lang="en-US" sz="1600" dirty="0"/>
-          </a:p>
-        </p:txBody>
-      </p:sp>
-      <p:sp>
-        <p:nvSpPr>
-          <p:cNvPr id="40" name="Text 36"/>
-          <p:cNvSpPr txBox="1"/>
-          <p:nvPr/>
-        </p:nvSpPr>
-        <p:spPr>
-          <a:xfrm>
-            <a:off x="4895701" y="5692676"/>
-            <a:ext cx="5122099" cy="229642"/>
-          </a:xfrm>
-          <a:prstGeom prst="rect">
-            <a:avLst/>
-          </a:prstGeom>
-          <a:noFill/>
-          <a:ln/>
-        </p:spPr>
-        <p:txBody>
-          <a:bodyPr wrap="square" lIns="0" tIns="0" rIns="0" bIns="0" rtlCol="0" anchor="t"/>
-          <a:lstStyle/>
-          <a:p>
-            <a:pPr algn="l" indent="0" marL="0">
-              <a:lnSpc>
-                <a:spcPts val="1810"/>
-              </a:lnSpc>
-              <a:buNone/>
-            </a:pPr>
-            <a:r>
-              <a:rPr lang="en-US" sz="1040" dirty="0">
-                <a:solidFill>
-                  <a:srgbClr val="5A6672"/>
-                </a:solidFill>
-                <a:latin typeface="Jost" pitchFamily="34" charset="0"/>
-                <a:ea typeface="Jost" pitchFamily="34" charset="-122"/>
-                <a:cs typeface="Jost" pitchFamily="34" charset="-120"/>
-              </a:rPr>
-              <a:t>Em resolver rapidamente um pequeno problema.</a:t>
-            </a:r>
-            <a:endParaRPr lang="en-US" sz="1040" dirty="0"/>
-          </a:p>
-        </p:txBody>
-      </p:sp>
-      <p:sp>
-        <p:nvSpPr>
-          <p:cNvPr id="41" name="Text 37"/>
-          <p:cNvSpPr txBox="1"/>
-          <p:nvPr/>
-        </p:nvSpPr>
-        <p:spPr>
-          <a:xfrm>
-            <a:off x="4463802" y="6273701"/>
-            <a:ext cx="477619" cy="257175"/>
-          </a:xfrm>
-          <a:prstGeom prst="rect">
-            <a:avLst/>
-          </a:prstGeom>
-          <a:noFill/>
-          <a:ln/>
-        </p:spPr>
-        <p:txBody>
-          <a:bodyPr wrap="square" lIns="0" tIns="0" rIns="0" bIns="0" rtlCol="0" anchor="t"/>
-          <a:lstStyle/>
-          <a:p>
-            <a:pPr algn="l" indent="0" marL="0">
-              <a:lnSpc>
-                <a:spcPts val="1920"/>
-              </a:lnSpc>
-              <a:buNone/>
-            </a:pPr>
-            <a:r>
-              <a:rPr lang="en-US" sz="1600" dirty="0">
-                <a:solidFill>
-                  <a:srgbClr val="C1121C"/>
-                </a:solidFill>
-                <a:latin typeface="EB Garamond" pitchFamily="34" charset="0"/>
-                <a:ea typeface="EB Garamond" pitchFamily="34" charset="-122"/>
-                <a:cs typeface="EB Garamond" pitchFamily="34" charset="-120"/>
-              </a:rPr>
-              <a:t>09</a:t>
-            </a:r>
-            <a:endParaRPr lang="en-US" sz="1600" dirty="0"/>
-          </a:p>
-        </p:txBody>
-      </p:sp>
-      <p:sp>
-        <p:nvSpPr>
-          <p:cNvPr id="42" name="Text 38"/>
-          <p:cNvSpPr txBox="1"/>
-          <p:nvPr/>
-        </p:nvSpPr>
-        <p:spPr>
-          <a:xfrm>
-            <a:off x="4895701" y="6287542"/>
-            <a:ext cx="5122099" cy="229642"/>
-          </a:xfrm>
-          <a:prstGeom prst="rect">
-            <a:avLst/>
-          </a:prstGeom>
-          <a:noFill/>
-          <a:ln/>
-        </p:spPr>
-        <p:txBody>
-          <a:bodyPr wrap="square" lIns="0" tIns="0" rIns="0" bIns="0" rtlCol="0" anchor="t"/>
-          <a:lstStyle/>
-          <a:p>
-            <a:pPr algn="l" indent="0" marL="0">
-              <a:lnSpc>
-                <a:spcPts val="1810"/>
-              </a:lnSpc>
-              <a:buNone/>
-            </a:pPr>
-            <a:r>
-              <a:rPr lang="en-US" sz="1040" dirty="0">
-                <a:solidFill>
-                  <a:srgbClr val="5A6672"/>
-                </a:solidFill>
-                <a:latin typeface="Jost" pitchFamily="34" charset="0"/>
-                <a:ea typeface="Jost" pitchFamily="34" charset="-122"/>
-                <a:cs typeface="Jost" pitchFamily="34" charset="-120"/>
-              </a:rPr>
-              <a:t>Em fazer com que uma pessoa que chegou como hóspede queira voltar como amigo.</a:t>
-            </a:r>
-            <a:endParaRPr lang="en-US" sz="1040" dirty="0"/>
-          </a:p>
-        </p:txBody>
-      </p:sp>
-      <p:sp>
-        <p:nvSpPr>
-          <p:cNvPr id="43" name="Text 39"/>
+              <a:t>E talvez seja justamente esse um dos pontos que mais nos aproximam da filosofia da Victorinox.</a:t>
+            </a:r>
+            <a:endParaRPr lang="en-US" sz="1700" dirty="0"/>
+          </a:p>
+        </p:txBody>
+      </p:sp>
+      <p:sp>
+        <p:nvSpPr>
+          <p:cNvPr id="20" name="Text 16"/>
           <p:cNvSpPr txBox="1"/>
           <p:nvPr/>
         </p:nvSpPr>
@@ -8665,14 +7500,16 @@
         </p:nvSpPr>
         <p:spPr>
           <a:xfrm>
-            <a:off x="4463802" y="5845820"/>
-            <a:ext cx="5508278" cy="9525"/>
-          </a:xfrm>
-          <a:prstGeom prst="rect">
-            <a:avLst/>
-          </a:prstGeom>
-          <a:solidFill>
-            <a:srgbClr val="E2DFD9"/>
+            <a:off x="4463802" y="2322165"/>
+            <a:ext cx="964704" cy="367903"/>
+          </a:xfrm>
+          <a:prstGeom prst="roundRect">
+            <a:avLst>
+              <a:gd name="adj" fmla="val 50000"/>
+            </a:avLst>
+          </a:prstGeom>
+          <a:solidFill>
+            <a:srgbClr val="FAF8F5"/>
           </a:solidFill>
           <a:ln/>
         </p:spPr>
@@ -8685,6 +7522,718 @@
         </p:nvSpPr>
         <p:spPr>
           <a:xfrm>
+            <a:off x="4463802" y="2322165"/>
+            <a:ext cx="964704" cy="9525"/>
+          </a:xfrm>
+          <a:prstGeom prst="rect">
+            <a:avLst/>
+          </a:prstGeom>
+          <a:solidFill>
+            <a:srgbClr val="E2DFD9"/>
+          </a:solidFill>
+          <a:ln/>
+        </p:spPr>
+      </p:sp>
+      <p:sp>
+        <p:nvSpPr>
+          <p:cNvPr id="8" name="Shape 6"/>
+          <p:cNvSpPr/>
+          <p:nvPr/>
+        </p:nvSpPr>
+        <p:spPr>
+          <a:xfrm>
+            <a:off x="5418981" y="2322165"/>
+            <a:ext cx="9525" cy="367903"/>
+          </a:xfrm>
+          <a:prstGeom prst="rect">
+            <a:avLst/>
+          </a:prstGeom>
+          <a:solidFill>
+            <a:srgbClr val="E2DFD9"/>
+          </a:solidFill>
+          <a:ln/>
+        </p:spPr>
+      </p:sp>
+      <p:sp>
+        <p:nvSpPr>
+          <p:cNvPr id="9" name="Shape 7"/>
+          <p:cNvSpPr/>
+          <p:nvPr/>
+        </p:nvSpPr>
+        <p:spPr>
+          <a:xfrm>
+            <a:off x="4463802" y="2680543"/>
+            <a:ext cx="964704" cy="9525"/>
+          </a:xfrm>
+          <a:prstGeom prst="rect">
+            <a:avLst/>
+          </a:prstGeom>
+          <a:solidFill>
+            <a:srgbClr val="E2DFD9"/>
+          </a:solidFill>
+          <a:ln/>
+        </p:spPr>
+      </p:sp>
+      <p:sp>
+        <p:nvSpPr>
+          <p:cNvPr id="10" name="Shape 8"/>
+          <p:cNvSpPr/>
+          <p:nvPr/>
+        </p:nvSpPr>
+        <p:spPr>
+          <a:xfrm>
+            <a:off x="4463802" y="2322165"/>
+            <a:ext cx="9525" cy="367903"/>
+          </a:xfrm>
+          <a:prstGeom prst="rect">
+            <a:avLst/>
+          </a:prstGeom>
+          <a:solidFill>
+            <a:srgbClr val="E2DFD9"/>
+          </a:solidFill>
+          <a:ln/>
+        </p:spPr>
+      </p:sp>
+      <p:sp>
+        <p:nvSpPr>
+          <p:cNvPr id="11" name="Shape 9"/>
+          <p:cNvSpPr/>
+          <p:nvPr/>
+        </p:nvSpPr>
+        <p:spPr>
+          <a:xfrm>
+            <a:off x="5536406" y="2322165"/>
+            <a:ext cx="1178719" cy="367903"/>
+          </a:xfrm>
+          <a:prstGeom prst="roundRect">
+            <a:avLst>
+              <a:gd name="adj" fmla="val 50000"/>
+            </a:avLst>
+          </a:prstGeom>
+          <a:solidFill>
+            <a:srgbClr val="FAF8F5"/>
+          </a:solidFill>
+          <a:ln/>
+        </p:spPr>
+      </p:sp>
+      <p:sp>
+        <p:nvSpPr>
+          <p:cNvPr id="12" name="Shape 10"/>
+          <p:cNvSpPr/>
+          <p:nvPr/>
+        </p:nvSpPr>
+        <p:spPr>
+          <a:xfrm>
+            <a:off x="5536406" y="2322165"/>
+            <a:ext cx="1178719" cy="9525"/>
+          </a:xfrm>
+          <a:prstGeom prst="rect">
+            <a:avLst/>
+          </a:prstGeom>
+          <a:solidFill>
+            <a:srgbClr val="E2DFD9"/>
+          </a:solidFill>
+          <a:ln/>
+        </p:spPr>
+      </p:sp>
+      <p:sp>
+        <p:nvSpPr>
+          <p:cNvPr id="13" name="Shape 11"/>
+          <p:cNvSpPr/>
+          <p:nvPr/>
+        </p:nvSpPr>
+        <p:spPr>
+          <a:xfrm>
+            <a:off x="6705600" y="2322165"/>
+            <a:ext cx="9525" cy="367903"/>
+          </a:xfrm>
+          <a:prstGeom prst="rect">
+            <a:avLst/>
+          </a:prstGeom>
+          <a:solidFill>
+            <a:srgbClr val="E2DFD9"/>
+          </a:solidFill>
+          <a:ln/>
+        </p:spPr>
+      </p:sp>
+      <p:sp>
+        <p:nvSpPr>
+          <p:cNvPr id="14" name="Shape 12"/>
+          <p:cNvSpPr/>
+          <p:nvPr/>
+        </p:nvSpPr>
+        <p:spPr>
+          <a:xfrm>
+            <a:off x="5536406" y="2680543"/>
+            <a:ext cx="1178719" cy="9525"/>
+          </a:xfrm>
+          <a:prstGeom prst="rect">
+            <a:avLst/>
+          </a:prstGeom>
+          <a:solidFill>
+            <a:srgbClr val="E2DFD9"/>
+          </a:solidFill>
+          <a:ln/>
+        </p:spPr>
+      </p:sp>
+      <p:sp>
+        <p:nvSpPr>
+          <p:cNvPr id="15" name="Shape 13"/>
+          <p:cNvSpPr/>
+          <p:nvPr/>
+        </p:nvSpPr>
+        <p:spPr>
+          <a:xfrm>
+            <a:off x="5536406" y="2322165"/>
+            <a:ext cx="9525" cy="367903"/>
+          </a:xfrm>
+          <a:prstGeom prst="rect">
+            <a:avLst/>
+          </a:prstGeom>
+          <a:solidFill>
+            <a:srgbClr val="E2DFD9"/>
+          </a:solidFill>
+          <a:ln/>
+        </p:spPr>
+      </p:sp>
+      <p:sp>
+        <p:nvSpPr>
+          <p:cNvPr id="16" name="Shape 14"/>
+          <p:cNvSpPr/>
+          <p:nvPr/>
+        </p:nvSpPr>
+        <p:spPr>
+          <a:xfrm>
+            <a:off x="6823025" y="2322165"/>
+            <a:ext cx="1090017" cy="367903"/>
+          </a:xfrm>
+          <a:prstGeom prst="roundRect">
+            <a:avLst>
+              <a:gd name="adj" fmla="val 50000"/>
+            </a:avLst>
+          </a:prstGeom>
+          <a:solidFill>
+            <a:srgbClr val="FAF8F5"/>
+          </a:solidFill>
+          <a:ln/>
+        </p:spPr>
+      </p:sp>
+      <p:sp>
+        <p:nvSpPr>
+          <p:cNvPr id="17" name="Shape 15"/>
+          <p:cNvSpPr/>
+          <p:nvPr/>
+        </p:nvSpPr>
+        <p:spPr>
+          <a:xfrm>
+            <a:off x="6823025" y="2322165"/>
+            <a:ext cx="1090017" cy="9525"/>
+          </a:xfrm>
+          <a:prstGeom prst="rect">
+            <a:avLst/>
+          </a:prstGeom>
+          <a:solidFill>
+            <a:srgbClr val="E2DFD9"/>
+          </a:solidFill>
+          <a:ln/>
+        </p:spPr>
+      </p:sp>
+      <p:sp>
+        <p:nvSpPr>
+          <p:cNvPr id="18" name="Shape 16"/>
+          <p:cNvSpPr/>
+          <p:nvPr/>
+        </p:nvSpPr>
+        <p:spPr>
+          <a:xfrm>
+            <a:off x="7903518" y="2322165"/>
+            <a:ext cx="9525" cy="367903"/>
+          </a:xfrm>
+          <a:prstGeom prst="rect">
+            <a:avLst/>
+          </a:prstGeom>
+          <a:solidFill>
+            <a:srgbClr val="E2DFD9"/>
+          </a:solidFill>
+          <a:ln/>
+        </p:spPr>
+      </p:sp>
+      <p:sp>
+        <p:nvSpPr>
+          <p:cNvPr id="19" name="Shape 17"/>
+          <p:cNvSpPr/>
+          <p:nvPr/>
+        </p:nvSpPr>
+        <p:spPr>
+          <a:xfrm>
+            <a:off x="6823025" y="2680543"/>
+            <a:ext cx="1090017" cy="9525"/>
+          </a:xfrm>
+          <a:prstGeom prst="rect">
+            <a:avLst/>
+          </a:prstGeom>
+          <a:solidFill>
+            <a:srgbClr val="E2DFD9"/>
+          </a:solidFill>
+          <a:ln/>
+        </p:spPr>
+      </p:sp>
+      <p:sp>
+        <p:nvSpPr>
+          <p:cNvPr id="20" name="Shape 18"/>
+          <p:cNvSpPr/>
+          <p:nvPr/>
+        </p:nvSpPr>
+        <p:spPr>
+          <a:xfrm>
+            <a:off x="6823025" y="2322165"/>
+            <a:ext cx="9525" cy="367903"/>
+          </a:xfrm>
+          <a:prstGeom prst="rect">
+            <a:avLst/>
+          </a:prstGeom>
+          <a:solidFill>
+            <a:srgbClr val="E2DFD9"/>
+          </a:solidFill>
+          <a:ln/>
+        </p:spPr>
+      </p:sp>
+      <p:sp>
+        <p:nvSpPr>
+          <p:cNvPr id="21" name="Shape 19"/>
+          <p:cNvSpPr/>
+          <p:nvPr/>
+        </p:nvSpPr>
+        <p:spPr>
+          <a:xfrm>
+            <a:off x="8020943" y="2322165"/>
+            <a:ext cx="1201787" cy="367903"/>
+          </a:xfrm>
+          <a:prstGeom prst="roundRect">
+            <a:avLst>
+              <a:gd name="adj" fmla="val 50000"/>
+            </a:avLst>
+          </a:prstGeom>
+          <a:solidFill>
+            <a:srgbClr val="FAF8F5"/>
+          </a:solidFill>
+          <a:ln/>
+        </p:spPr>
+      </p:sp>
+      <p:sp>
+        <p:nvSpPr>
+          <p:cNvPr id="22" name="Shape 20"/>
+          <p:cNvSpPr/>
+          <p:nvPr/>
+        </p:nvSpPr>
+        <p:spPr>
+          <a:xfrm>
+            <a:off x="8020943" y="2322165"/>
+            <a:ext cx="1201787" cy="9525"/>
+          </a:xfrm>
+          <a:prstGeom prst="rect">
+            <a:avLst/>
+          </a:prstGeom>
+          <a:solidFill>
+            <a:srgbClr val="E2DFD9"/>
+          </a:solidFill>
+          <a:ln/>
+        </p:spPr>
+      </p:sp>
+      <p:sp>
+        <p:nvSpPr>
+          <p:cNvPr id="23" name="Shape 21"/>
+          <p:cNvSpPr/>
+          <p:nvPr/>
+        </p:nvSpPr>
+        <p:spPr>
+          <a:xfrm>
+            <a:off x="9213205" y="2322165"/>
+            <a:ext cx="9525" cy="367903"/>
+          </a:xfrm>
+          <a:prstGeom prst="rect">
+            <a:avLst/>
+          </a:prstGeom>
+          <a:solidFill>
+            <a:srgbClr val="E2DFD9"/>
+          </a:solidFill>
+          <a:ln/>
+        </p:spPr>
+      </p:sp>
+      <p:sp>
+        <p:nvSpPr>
+          <p:cNvPr id="24" name="Shape 22"/>
+          <p:cNvSpPr/>
+          <p:nvPr/>
+        </p:nvSpPr>
+        <p:spPr>
+          <a:xfrm>
+            <a:off x="8020943" y="2680543"/>
+            <a:ext cx="1201787" cy="9525"/>
+          </a:xfrm>
+          <a:prstGeom prst="rect">
+            <a:avLst/>
+          </a:prstGeom>
+          <a:solidFill>
+            <a:srgbClr val="E2DFD9"/>
+          </a:solidFill>
+          <a:ln/>
+        </p:spPr>
+      </p:sp>
+      <p:sp>
+        <p:nvSpPr>
+          <p:cNvPr id="25" name="Shape 23"/>
+          <p:cNvSpPr/>
+          <p:nvPr/>
+        </p:nvSpPr>
+        <p:spPr>
+          <a:xfrm>
+            <a:off x="8020943" y="2322165"/>
+            <a:ext cx="9525" cy="367903"/>
+          </a:xfrm>
+          <a:prstGeom prst="rect">
+            <a:avLst/>
+          </a:prstGeom>
+          <a:solidFill>
+            <a:srgbClr val="E2DFD9"/>
+          </a:solidFill>
+          <a:ln/>
+        </p:spPr>
+      </p:sp>
+      <p:sp>
+        <p:nvSpPr>
+          <p:cNvPr id="26" name="Shape 24"/>
+          <p:cNvSpPr/>
+          <p:nvPr/>
+        </p:nvSpPr>
+        <p:spPr>
+          <a:xfrm>
+            <a:off x="4463802" y="2797969"/>
+            <a:ext cx="1495574" cy="367903"/>
+          </a:xfrm>
+          <a:prstGeom prst="roundRect">
+            <a:avLst>
+              <a:gd name="adj" fmla="val 50000"/>
+            </a:avLst>
+          </a:prstGeom>
+          <a:solidFill>
+            <a:srgbClr val="FAF8F5"/>
+          </a:solidFill>
+          <a:ln/>
+        </p:spPr>
+      </p:sp>
+      <p:sp>
+        <p:nvSpPr>
+          <p:cNvPr id="27" name="Shape 25"/>
+          <p:cNvSpPr/>
+          <p:nvPr/>
+        </p:nvSpPr>
+        <p:spPr>
+          <a:xfrm>
+            <a:off x="4463802" y="2797969"/>
+            <a:ext cx="1495574" cy="9525"/>
+          </a:xfrm>
+          <a:prstGeom prst="rect">
+            <a:avLst/>
+          </a:prstGeom>
+          <a:solidFill>
+            <a:srgbClr val="E2DFD9"/>
+          </a:solidFill>
+          <a:ln/>
+        </p:spPr>
+      </p:sp>
+      <p:sp>
+        <p:nvSpPr>
+          <p:cNvPr id="28" name="Shape 26"/>
+          <p:cNvSpPr/>
+          <p:nvPr/>
+        </p:nvSpPr>
+        <p:spPr>
+          <a:xfrm>
+            <a:off x="5949851" y="2797969"/>
+            <a:ext cx="9525" cy="367903"/>
+          </a:xfrm>
+          <a:prstGeom prst="rect">
+            <a:avLst/>
+          </a:prstGeom>
+          <a:solidFill>
+            <a:srgbClr val="E2DFD9"/>
+          </a:solidFill>
+          <a:ln/>
+        </p:spPr>
+      </p:sp>
+      <p:sp>
+        <p:nvSpPr>
+          <p:cNvPr id="29" name="Shape 27"/>
+          <p:cNvSpPr/>
+          <p:nvPr/>
+        </p:nvSpPr>
+        <p:spPr>
+          <a:xfrm>
+            <a:off x="4463802" y="3156347"/>
+            <a:ext cx="1495574" cy="9525"/>
+          </a:xfrm>
+          <a:prstGeom prst="rect">
+            <a:avLst/>
+          </a:prstGeom>
+          <a:solidFill>
+            <a:srgbClr val="E2DFD9"/>
+          </a:solidFill>
+          <a:ln/>
+        </p:spPr>
+      </p:sp>
+      <p:sp>
+        <p:nvSpPr>
+          <p:cNvPr id="30" name="Shape 28"/>
+          <p:cNvSpPr/>
+          <p:nvPr/>
+        </p:nvSpPr>
+        <p:spPr>
+          <a:xfrm>
+            <a:off x="4463802" y="2797969"/>
+            <a:ext cx="9525" cy="367903"/>
+          </a:xfrm>
+          <a:prstGeom prst="rect">
+            <a:avLst/>
+          </a:prstGeom>
+          <a:solidFill>
+            <a:srgbClr val="E2DFD9"/>
+          </a:solidFill>
+          <a:ln/>
+        </p:spPr>
+      </p:sp>
+      <p:sp>
+        <p:nvSpPr>
+          <p:cNvPr id="31" name="Shape 29"/>
+          <p:cNvSpPr/>
+          <p:nvPr/>
+        </p:nvSpPr>
+        <p:spPr>
+          <a:xfrm>
+            <a:off x="6067276" y="2797969"/>
+            <a:ext cx="1640086" cy="367903"/>
+          </a:xfrm>
+          <a:prstGeom prst="roundRect">
+            <a:avLst>
+              <a:gd name="adj" fmla="val 50000"/>
+            </a:avLst>
+          </a:prstGeom>
+          <a:solidFill>
+            <a:srgbClr val="FAF8F5"/>
+          </a:solidFill>
+          <a:ln/>
+        </p:spPr>
+      </p:sp>
+      <p:sp>
+        <p:nvSpPr>
+          <p:cNvPr id="32" name="Shape 30"/>
+          <p:cNvSpPr/>
+          <p:nvPr/>
+        </p:nvSpPr>
+        <p:spPr>
+          <a:xfrm>
+            <a:off x="6067276" y="2797969"/>
+            <a:ext cx="1640086" cy="9525"/>
+          </a:xfrm>
+          <a:prstGeom prst="rect">
+            <a:avLst/>
+          </a:prstGeom>
+          <a:solidFill>
+            <a:srgbClr val="E2DFD9"/>
+          </a:solidFill>
+          <a:ln/>
+        </p:spPr>
+      </p:sp>
+      <p:sp>
+        <p:nvSpPr>
+          <p:cNvPr id="33" name="Shape 31"/>
+          <p:cNvSpPr/>
+          <p:nvPr/>
+        </p:nvSpPr>
+        <p:spPr>
+          <a:xfrm>
+            <a:off x="7697837" y="2797969"/>
+            <a:ext cx="9525" cy="367903"/>
+          </a:xfrm>
+          <a:prstGeom prst="rect">
+            <a:avLst/>
+          </a:prstGeom>
+          <a:solidFill>
+            <a:srgbClr val="E2DFD9"/>
+          </a:solidFill>
+          <a:ln/>
+        </p:spPr>
+      </p:sp>
+      <p:sp>
+        <p:nvSpPr>
+          <p:cNvPr id="34" name="Shape 32"/>
+          <p:cNvSpPr/>
+          <p:nvPr/>
+        </p:nvSpPr>
+        <p:spPr>
+          <a:xfrm>
+            <a:off x="6067276" y="3156347"/>
+            <a:ext cx="1640086" cy="9525"/>
+          </a:xfrm>
+          <a:prstGeom prst="rect">
+            <a:avLst/>
+          </a:prstGeom>
+          <a:solidFill>
+            <a:srgbClr val="E2DFD9"/>
+          </a:solidFill>
+          <a:ln/>
+        </p:spPr>
+      </p:sp>
+      <p:sp>
+        <p:nvSpPr>
+          <p:cNvPr id="35" name="Shape 33"/>
+          <p:cNvSpPr/>
+          <p:nvPr/>
+        </p:nvSpPr>
+        <p:spPr>
+          <a:xfrm>
+            <a:off x="6067276" y="2797969"/>
+            <a:ext cx="9525" cy="367903"/>
+          </a:xfrm>
+          <a:prstGeom prst="rect">
+            <a:avLst/>
+          </a:prstGeom>
+          <a:solidFill>
+            <a:srgbClr val="E2DFD9"/>
+          </a:solidFill>
+          <a:ln/>
+        </p:spPr>
+      </p:sp>
+      <p:sp>
+        <p:nvSpPr>
+          <p:cNvPr id="36" name="Shape 34"/>
+          <p:cNvSpPr/>
+          <p:nvPr/>
+        </p:nvSpPr>
+        <p:spPr>
+          <a:xfrm>
+            <a:off x="4463802" y="3273772"/>
+            <a:ext cx="2588419" cy="367903"/>
+          </a:xfrm>
+          <a:prstGeom prst="roundRect">
+            <a:avLst>
+              <a:gd name="adj" fmla="val 50000"/>
+            </a:avLst>
+          </a:prstGeom>
+          <a:solidFill>
+            <a:srgbClr val="FAF8F5"/>
+          </a:solidFill>
+          <a:ln/>
+        </p:spPr>
+      </p:sp>
+      <p:sp>
+        <p:nvSpPr>
+          <p:cNvPr id="37" name="Shape 35"/>
+          <p:cNvSpPr/>
+          <p:nvPr/>
+        </p:nvSpPr>
+        <p:spPr>
+          <a:xfrm>
+            <a:off x="4463802" y="3273772"/>
+            <a:ext cx="2588419" cy="9525"/>
+          </a:xfrm>
+          <a:prstGeom prst="rect">
+            <a:avLst/>
+          </a:prstGeom>
+          <a:solidFill>
+            <a:srgbClr val="E2DFD9"/>
+          </a:solidFill>
+          <a:ln/>
+        </p:spPr>
+      </p:sp>
+      <p:sp>
+        <p:nvSpPr>
+          <p:cNvPr id="38" name="Shape 36"/>
+          <p:cNvSpPr/>
+          <p:nvPr/>
+        </p:nvSpPr>
+        <p:spPr>
+          <a:xfrm>
+            <a:off x="7042696" y="3273772"/>
+            <a:ext cx="9525" cy="367903"/>
+          </a:xfrm>
+          <a:prstGeom prst="rect">
+            <a:avLst/>
+          </a:prstGeom>
+          <a:solidFill>
+            <a:srgbClr val="E2DFD9"/>
+          </a:solidFill>
+          <a:ln/>
+        </p:spPr>
+      </p:sp>
+      <p:sp>
+        <p:nvSpPr>
+          <p:cNvPr id="39" name="Shape 37"/>
+          <p:cNvSpPr/>
+          <p:nvPr/>
+        </p:nvSpPr>
+        <p:spPr>
+          <a:xfrm>
+            <a:off x="4463802" y="3632150"/>
+            <a:ext cx="2588419" cy="9525"/>
+          </a:xfrm>
+          <a:prstGeom prst="rect">
+            <a:avLst/>
+          </a:prstGeom>
+          <a:solidFill>
+            <a:srgbClr val="E2DFD9"/>
+          </a:solidFill>
+          <a:ln/>
+        </p:spPr>
+      </p:sp>
+      <p:sp>
+        <p:nvSpPr>
+          <p:cNvPr id="40" name="Shape 38"/>
+          <p:cNvSpPr/>
+          <p:nvPr/>
+        </p:nvSpPr>
+        <p:spPr>
+          <a:xfrm>
+            <a:off x="4463802" y="3273772"/>
+            <a:ext cx="9525" cy="367903"/>
+          </a:xfrm>
+          <a:prstGeom prst="rect">
+            <a:avLst/>
+          </a:prstGeom>
+          <a:solidFill>
+            <a:srgbClr val="E2DFD9"/>
+          </a:solidFill>
+          <a:ln/>
+        </p:spPr>
+      </p:sp>
+      <p:sp>
+        <p:nvSpPr>
+          <p:cNvPr id="41" name="Shape 39"/>
+          <p:cNvSpPr/>
+          <p:nvPr/>
+        </p:nvSpPr>
+        <p:spPr>
+          <a:xfrm>
+            <a:off x="4463802" y="6126510"/>
+            <a:ext cx="5508278" cy="9525"/>
+          </a:xfrm>
+          <a:prstGeom prst="rect">
+            <a:avLst/>
+          </a:prstGeom>
+          <a:solidFill>
+            <a:srgbClr val="E2DFD9"/>
+          </a:solidFill>
+          <a:ln/>
+        </p:spPr>
+      </p:sp>
+      <p:sp>
+        <p:nvSpPr>
+          <p:cNvPr id="42" name="Shape 40"/>
+          <p:cNvSpPr/>
+          <p:nvPr/>
+        </p:nvSpPr>
+        <p:spPr>
+          <a:xfrm>
             <a:off x="719882" y="6704707"/>
             <a:ext cx="9252198" cy="9525"/>
           </a:xfrm>
@@ -8699,7 +8248,7 @@
       </p:sp>
       <p:pic>
         <p:nvPicPr>
-          <p:cNvPr id="8" name="Image 0" descr="/home/user/SkillsClaude/apresentacao-victorinox/build/logos/logo-pc.png">    </p:cNvPr>
+          <p:cNvPr id="43" name="Image 0" descr="/home/user/SkillsClaude/apresentacao-victorinox/build/logos/logo-pc.png">    </p:cNvPr>
           <p:cNvPicPr>
             <a:picLocks noChangeAspect="1"/>
           </p:cNvPicPr>
@@ -8723,7 +8272,7 @@
       </p:pic>
       <p:pic>
         <p:nvPicPr>
-          <p:cNvPr id="9" name="Image 1" descr="/home/user/SkillsClaude/apresentacao-victorinox/build/logos/logo-vx.png">    </p:cNvPr>
+          <p:cNvPr id="44" name="Image 1" descr="/home/user/SkillsClaude/apresentacao-victorinox/build/logos/logo-vx.png">    </p:cNvPr>
           <p:cNvPicPr>
             <a:picLocks noChangeAspect="1"/>
           </p:cNvPicPr>
@@ -8747,7 +8296,7 @@
       </p:pic>
       <p:sp>
         <p:nvSpPr>
-          <p:cNvPr id="10" name="Text 6"/>
+          <p:cNvPr id="45" name="Text 41"/>
           <p:cNvSpPr txBox="1"/>
           <p:nvPr/>
         </p:nvSpPr>
@@ -8789,7 +8338,7 @@
       </p:sp>
       <p:sp>
         <p:nvSpPr>
-          <p:cNvPr id="11" name="Text 7"/>
+          <p:cNvPr id="46" name="Text 42"/>
           <p:cNvSpPr txBox="1"/>
           <p:nvPr/>
         </p:nvSpPr>
@@ -8831,7 +8380,7 @@
       </p:sp>
       <p:sp>
         <p:nvSpPr>
-          <p:cNvPr id="12" name="Text 8"/>
+          <p:cNvPr id="47" name="Text 43"/>
           <p:cNvSpPr txBox="1"/>
           <p:nvPr/>
         </p:nvSpPr>
@@ -8865,7 +8414,7 @@
                 <a:ea typeface="Jost Medium" pitchFamily="34" charset="-122"/>
                 <a:cs typeface="Jost Medium" pitchFamily="34" charset="-120"/>
               </a:rPr>
-              <a:t>TRAJETÓRIA</a:t>
+              <a:t>AFINIDADE</a:t>
             </a:r>
             <a:endParaRPr lang="en-US" sz="660" dirty="0"/>
           </a:p>
@@ -8873,7 +8422,7 @@
       </p:sp>
       <p:sp>
         <p:nvSpPr>
-          <p:cNvPr id="13" name="Text 9"/>
+          <p:cNvPr id="48" name="Text 44"/>
           <p:cNvSpPr txBox="1"/>
           <p:nvPr/>
         </p:nvSpPr>
@@ -8907,7 +8456,7 @@
                 <a:ea typeface="EB Garamond Medium" pitchFamily="34" charset="-122"/>
                 <a:cs typeface="EB Garamond Medium" pitchFamily="34" charset="-120"/>
               </a:rPr>
-              <a:t>Uma empresa consolidada</a:t>
+              <a:t>Por que Victorinox?</a:t>
             </a:r>
             <a:endParaRPr lang="en-US" sz="2700" dirty="0"/>
           </a:p>
@@ -8915,7 +8464,7 @@
       </p:sp>
       <p:sp>
         <p:nvSpPr>
-          <p:cNvPr id="14" name="Text 10"/>
+          <p:cNvPr id="49" name="Text 45"/>
           <p:cNvSpPr txBox="1"/>
           <p:nvPr/>
         </p:nvSpPr>
@@ -8949,7 +8498,7 @@
                 <a:ea typeface="EB Garamond" pitchFamily="34" charset="-122"/>
                 <a:cs typeface="EB Garamond" pitchFamily="34" charset="-120"/>
               </a:rPr>
-              <a:t>“Confiança não é conquistada em uma campanha publicitária; é construída ao longo do tempo.”</a:t>
+              <a:t>“Um bom produto ou um bom serviço não precisa apenas funcionar bem. Ele precisa gerar confiança.”</a:t>
             </a:r>
             <a:endParaRPr lang="en-US" sz="1500" dirty="0"/>
           </a:p>
@@ -8957,14 +8506,14 @@
       </p:sp>
       <p:sp>
         <p:nvSpPr>
-          <p:cNvPr id="15" name="Text 11"/>
+          <p:cNvPr id="50" name="Text 46"/>
           <p:cNvSpPr txBox="1"/>
           <p:nvPr/>
         </p:nvSpPr>
         <p:spPr>
           <a:xfrm>
             <a:off x="4463802" y="1341239"/>
-            <a:ext cx="5553998" cy="265509"/>
+            <a:ext cx="5553998" cy="531019"/>
           </a:xfrm>
           <a:prstGeom prst="rect">
             <a:avLst/>
@@ -8991,7 +8540,7 @@
                 <a:ea typeface="Jost Light" pitchFamily="34" charset="-122"/>
                 <a:cs typeface="Jost Light" pitchFamily="34" charset="-120"/>
               </a:rPr>
-              <a:t>São mais de 20 anos de operação contínua.</a:t>
+              <a:t>Admiramos a Victorinox justamente porque reconhecemos na marca valores que também procuramos praticar:</a:t>
             </a:r>
             <a:endParaRPr lang="en-US" sz="1260" dirty="0"/>
           </a:p>
@@ -8999,125 +8548,335 @@
       </p:sp>
       <p:sp>
         <p:nvSpPr>
-          <p:cNvPr id="16" name="Text 12"/>
-          <p:cNvSpPr txBox="1"/>
-          <p:nvPr/>
-        </p:nvSpPr>
-        <p:spPr>
-          <a:xfrm>
-            <a:off x="4463802" y="2038648"/>
-            <a:ext cx="5553998" cy="490240"/>
-          </a:xfrm>
-          <a:prstGeom prst="rect">
-            <a:avLst/>
-          </a:prstGeom>
-          <a:noFill/>
-          <a:ln/>
-        </p:spPr>
-        <p:txBody>
-          <a:bodyPr wrap="square" lIns="0" tIns="0" rIns="0" bIns="0" rtlCol="0" anchor="t"/>
-          <a:lstStyle/>
-          <a:p>
-            <a:pPr algn="l" indent="0" marL="0">
-              <a:lnSpc>
-                <a:spcPts val="1929"/>
-              </a:lnSpc>
-              <a:buNone/>
-            </a:pPr>
-            <a:r>
-              <a:rPr lang="en-US" sz="1060" dirty="0">
-                <a:solidFill>
-                  <a:srgbClr val="5A6672"/>
+          <p:cNvPr id="51" name="Text 47"/>
+          <p:cNvSpPr txBox="1"/>
+          <p:nvPr/>
+        </p:nvSpPr>
+        <p:spPr>
+          <a:xfrm>
+            <a:off x="4679802" y="2415765"/>
+            <a:ext cx="578423" cy="274303"/>
+          </a:xfrm>
+          <a:prstGeom prst="rect">
+            <a:avLst/>
+          </a:prstGeom>
+          <a:noFill/>
+          <a:ln/>
+        </p:spPr>
+        <p:txBody>
+          <a:bodyPr wrap="square" lIns="0" tIns="0" rIns="0" bIns="0" rtlCol="0" anchor="t"/>
+          <a:lstStyle/>
+          <a:p>
+            <a:pPr algn="l" indent="0" marL="0">
+              <a:lnSpc>
+                <a:spcPts val="1056"/>
+              </a:lnSpc>
+              <a:buNone/>
+            </a:pPr>
+            <a:r>
+              <a:rPr lang="en-US" sz="880" spc="18" kern="0" dirty="0">
+                <a:solidFill>
+                  <a:srgbClr val="2E3A45"/>
                 </a:solidFill>
                 <a:latin typeface="Jost" pitchFamily="34" charset="0"/>
                 <a:ea typeface="Jost" pitchFamily="34" charset="-122"/>
                 <a:cs typeface="Jost" pitchFamily="34" charset="-120"/>
               </a:rPr>
-              <a:t>Mais de duas décadas enfrentando diferentes momentos da economia, mudanças no comportamento dos consumidores, transformações no turismo e novas formas de comunicação.</a:t>
-            </a:r>
-            <a:endParaRPr lang="en-US" sz="1060" dirty="0"/>
-          </a:p>
-        </p:txBody>
-      </p:sp>
-      <p:sp>
-        <p:nvSpPr>
-          <p:cNvPr id="17" name="Text 13"/>
-          <p:cNvSpPr txBox="1"/>
-          <p:nvPr/>
-        </p:nvSpPr>
-        <p:spPr>
-          <a:xfrm>
-            <a:off x="4463802" y="2726829"/>
-            <a:ext cx="5553998" cy="490240"/>
-          </a:xfrm>
-          <a:prstGeom prst="rect">
-            <a:avLst/>
-          </a:prstGeom>
-          <a:noFill/>
-          <a:ln/>
-        </p:spPr>
-        <p:txBody>
-          <a:bodyPr wrap="square" lIns="0" tIns="0" rIns="0" bIns="0" rtlCol="0" anchor="t"/>
-          <a:lstStyle/>
-          <a:p>
-            <a:pPr algn="l" indent="0" marL="0">
-              <a:lnSpc>
-                <a:spcPts val="1929"/>
-              </a:lnSpc>
-              <a:buNone/>
-            </a:pPr>
-            <a:r>
-              <a:rPr lang="en-US" sz="1060" dirty="0">
-                <a:solidFill>
-                  <a:srgbClr val="5A6672"/>
+              <a:t>Qualidade</a:t>
+            </a:r>
+            <a:endParaRPr lang="en-US" sz="880" dirty="0"/>
+          </a:p>
+        </p:txBody>
+      </p:sp>
+      <p:sp>
+        <p:nvSpPr>
+          <p:cNvPr id="52" name="Text 48"/>
+          <p:cNvSpPr txBox="1"/>
+          <p:nvPr/>
+        </p:nvSpPr>
+        <p:spPr>
+          <a:xfrm>
+            <a:off x="5752407" y="2415765"/>
+            <a:ext cx="792438" cy="274303"/>
+          </a:xfrm>
+          <a:prstGeom prst="rect">
+            <a:avLst/>
+          </a:prstGeom>
+          <a:noFill/>
+          <a:ln/>
+        </p:spPr>
+        <p:txBody>
+          <a:bodyPr wrap="square" lIns="0" tIns="0" rIns="0" bIns="0" rtlCol="0" anchor="t"/>
+          <a:lstStyle/>
+          <a:p>
+            <a:pPr algn="l" indent="0" marL="0">
+              <a:lnSpc>
+                <a:spcPts val="1056"/>
+              </a:lnSpc>
+              <a:buNone/>
+            </a:pPr>
+            <a:r>
+              <a:rPr lang="en-US" sz="880" spc="18" kern="0" dirty="0">
+                <a:solidFill>
+                  <a:srgbClr val="2E3A45"/>
                 </a:solidFill>
                 <a:latin typeface="Jost" pitchFamily="34" charset="0"/>
                 <a:ea typeface="Jost" pitchFamily="34" charset="-122"/>
                 <a:cs typeface="Jost" pitchFamily="34" charset="-120"/>
               </a:rPr>
-              <a:t>E permanecemos aqui. Cuidando da empresa. Cuidando da nossa equipe. Cuidando dos nossos hóspedes. Cuidando do patrimônio que construímos.</a:t>
-            </a:r>
-            <a:endParaRPr lang="en-US" sz="1060" dirty="0"/>
-          </a:p>
-        </p:txBody>
-      </p:sp>
-      <p:sp>
-        <p:nvSpPr>
-          <p:cNvPr id="18" name="Text 14"/>
-          <p:cNvSpPr txBox="1"/>
-          <p:nvPr/>
-        </p:nvSpPr>
-        <p:spPr>
-          <a:xfrm>
-            <a:off x="4463802" y="3415010"/>
-            <a:ext cx="5553998" cy="490240"/>
-          </a:xfrm>
-          <a:prstGeom prst="rect">
-            <a:avLst/>
-          </a:prstGeom>
-          <a:noFill/>
-          <a:ln/>
-        </p:spPr>
-        <p:txBody>
-          <a:bodyPr wrap="square" lIns="0" tIns="0" rIns="0" bIns="0" rtlCol="0" anchor="t"/>
-          <a:lstStyle/>
-          <a:p>
-            <a:pPr algn="l" indent="0" marL="0">
-              <a:lnSpc>
-                <a:spcPts val="1929"/>
-              </a:lnSpc>
-              <a:buNone/>
-            </a:pPr>
-            <a:r>
-              <a:rPr lang="en-US" sz="1060" dirty="0">
-                <a:solidFill>
-                  <a:srgbClr val="5A6672"/>
+              <a:t>Confiabilidade</a:t>
+            </a:r>
+            <a:endParaRPr lang="en-US" sz="880" dirty="0"/>
+          </a:p>
+        </p:txBody>
+      </p:sp>
+      <p:sp>
+        <p:nvSpPr>
+          <p:cNvPr id="53" name="Text 49"/>
+          <p:cNvSpPr txBox="1"/>
+          <p:nvPr/>
+        </p:nvSpPr>
+        <p:spPr>
+          <a:xfrm>
+            <a:off x="7039026" y="2415765"/>
+            <a:ext cx="703737" cy="274303"/>
+          </a:xfrm>
+          <a:prstGeom prst="rect">
+            <a:avLst/>
+          </a:prstGeom>
+          <a:noFill/>
+          <a:ln/>
+        </p:spPr>
+        <p:txBody>
+          <a:bodyPr wrap="square" lIns="0" tIns="0" rIns="0" bIns="0" rtlCol="0" anchor="t"/>
+          <a:lstStyle/>
+          <a:p>
+            <a:pPr algn="l" indent="0" marL="0">
+              <a:lnSpc>
+                <a:spcPts val="1056"/>
+              </a:lnSpc>
+              <a:buNone/>
+            </a:pPr>
+            <a:r>
+              <a:rPr lang="en-US" sz="880" spc="18" kern="0" dirty="0">
+                <a:solidFill>
+                  <a:srgbClr val="2E3A45"/>
                 </a:solidFill>
                 <a:latin typeface="Jost" pitchFamily="34" charset="0"/>
                 <a:ea typeface="Jost" pitchFamily="34" charset="-122"/>
                 <a:cs typeface="Jost" pitchFamily="34" charset="-120"/>
               </a:rPr>
-              <a:t>Essa longevidade nos ensinou que confiança não é conquistada em uma campanha publicitária; é construída ao longo do tempo.</a:t>
+              <a:t>Durabilidade</a:t>
+            </a:r>
+            <a:endParaRPr lang="en-US" sz="880" dirty="0"/>
+          </a:p>
+        </p:txBody>
+      </p:sp>
+      <p:sp>
+        <p:nvSpPr>
+          <p:cNvPr id="54" name="Text 50"/>
+          <p:cNvSpPr txBox="1"/>
+          <p:nvPr/>
+        </p:nvSpPr>
+        <p:spPr>
+          <a:xfrm>
+            <a:off x="8236943" y="2415765"/>
+            <a:ext cx="815506" cy="274303"/>
+          </a:xfrm>
+          <a:prstGeom prst="rect">
+            <a:avLst/>
+          </a:prstGeom>
+          <a:noFill/>
+          <a:ln/>
+        </p:spPr>
+        <p:txBody>
+          <a:bodyPr wrap="square" lIns="0" tIns="0" rIns="0" bIns="0" rtlCol="0" anchor="t"/>
+          <a:lstStyle/>
+          <a:p>
+            <a:pPr algn="l" indent="0" marL="0">
+              <a:lnSpc>
+                <a:spcPts val="1056"/>
+              </a:lnSpc>
+              <a:buNone/>
+            </a:pPr>
+            <a:r>
+              <a:rPr lang="en-US" sz="880" spc="18" kern="0" dirty="0">
+                <a:solidFill>
+                  <a:srgbClr val="2E3A45"/>
+                </a:solidFill>
+                <a:latin typeface="Jost" pitchFamily="34" charset="0"/>
+                <a:ea typeface="Jost" pitchFamily="34" charset="-122"/>
+                <a:cs typeface="Jost" pitchFamily="34" charset="-120"/>
+              </a:rPr>
+              <a:t>Funcionalidade</a:t>
+            </a:r>
+            <a:endParaRPr lang="en-US" sz="880" dirty="0"/>
+          </a:p>
+        </p:txBody>
+      </p:sp>
+      <p:sp>
+        <p:nvSpPr>
+          <p:cNvPr id="55" name="Text 51"/>
+          <p:cNvSpPr txBox="1"/>
+          <p:nvPr/>
+        </p:nvSpPr>
+        <p:spPr>
+          <a:xfrm>
+            <a:off x="4679802" y="2891569"/>
+            <a:ext cx="1109293" cy="274303"/>
+          </a:xfrm>
+          <a:prstGeom prst="rect">
+            <a:avLst/>
+          </a:prstGeom>
+          <a:noFill/>
+          <a:ln/>
+        </p:spPr>
+        <p:txBody>
+          <a:bodyPr wrap="square" lIns="0" tIns="0" rIns="0" bIns="0" rtlCol="0" anchor="t"/>
+          <a:lstStyle/>
+          <a:p>
+            <a:pPr algn="l" indent="0" marL="0">
+              <a:lnSpc>
+                <a:spcPts val="1056"/>
+              </a:lnSpc>
+              <a:buNone/>
+            </a:pPr>
+            <a:r>
+              <a:rPr lang="en-US" sz="880" spc="18" kern="0" dirty="0">
+                <a:solidFill>
+                  <a:srgbClr val="2E3A45"/>
+                </a:solidFill>
+                <a:latin typeface="Jost" pitchFamily="34" charset="0"/>
+                <a:ea typeface="Jost" pitchFamily="34" charset="-122"/>
+                <a:cs typeface="Jost" pitchFamily="34" charset="-120"/>
+              </a:rPr>
+              <a:t>Atenção aos detalhes</a:t>
+            </a:r>
+            <a:endParaRPr lang="en-US" sz="880" dirty="0"/>
+          </a:p>
+        </p:txBody>
+      </p:sp>
+      <p:sp>
+        <p:nvSpPr>
+          <p:cNvPr id="56" name="Text 52"/>
+          <p:cNvSpPr txBox="1"/>
+          <p:nvPr/>
+        </p:nvSpPr>
+        <p:spPr>
+          <a:xfrm>
+            <a:off x="6283277" y="2891569"/>
+            <a:ext cx="1253805" cy="274303"/>
+          </a:xfrm>
+          <a:prstGeom prst="rect">
+            <a:avLst/>
+          </a:prstGeom>
+          <a:noFill/>
+          <a:ln/>
+        </p:spPr>
+        <p:txBody>
+          <a:bodyPr wrap="square" lIns="0" tIns="0" rIns="0" bIns="0" rtlCol="0" anchor="t"/>
+          <a:lstStyle/>
+          <a:p>
+            <a:pPr algn="l" indent="0" marL="0">
+              <a:lnSpc>
+                <a:spcPts val="1056"/>
+              </a:lnSpc>
+              <a:buNone/>
+            </a:pPr>
+            <a:r>
+              <a:rPr lang="en-US" sz="880" spc="18" kern="0" dirty="0">
+                <a:solidFill>
+                  <a:srgbClr val="2E3A45"/>
+                </a:solidFill>
+                <a:latin typeface="Jost" pitchFamily="34" charset="0"/>
+                <a:ea typeface="Jost" pitchFamily="34" charset="-122"/>
+                <a:cs typeface="Jost" pitchFamily="34" charset="-120"/>
+              </a:rPr>
+              <a:t>Respeito ao consumidor</a:t>
+            </a:r>
+            <a:endParaRPr lang="en-US" sz="880" dirty="0"/>
+          </a:p>
+        </p:txBody>
+      </p:sp>
+      <p:sp>
+        <p:nvSpPr>
+          <p:cNvPr id="57" name="Text 53"/>
+          <p:cNvSpPr txBox="1"/>
+          <p:nvPr/>
+        </p:nvSpPr>
+        <p:spPr>
+          <a:xfrm>
+            <a:off x="4679802" y="3367372"/>
+            <a:ext cx="2202138" cy="274303"/>
+          </a:xfrm>
+          <a:prstGeom prst="rect">
+            <a:avLst/>
+          </a:prstGeom>
+          <a:noFill/>
+          <a:ln/>
+        </p:spPr>
+        <p:txBody>
+          <a:bodyPr wrap="square" lIns="0" tIns="0" rIns="0" bIns="0" rtlCol="0" anchor="t"/>
+          <a:lstStyle/>
+          <a:p>
+            <a:pPr algn="l" indent="0" marL="0">
+              <a:lnSpc>
+                <a:spcPts val="1056"/>
+              </a:lnSpc>
+              <a:buNone/>
+            </a:pPr>
+            <a:r>
+              <a:rPr lang="en-US" sz="880" spc="18" kern="0" dirty="0">
+                <a:solidFill>
+                  <a:srgbClr val="2E3A45"/>
+                </a:solidFill>
+                <a:latin typeface="Jost" pitchFamily="34" charset="0"/>
+                <a:ea typeface="Jost" pitchFamily="34" charset="-122"/>
+                <a:cs typeface="Jost" pitchFamily="34" charset="-120"/>
+              </a:rPr>
+              <a:t>Uma história construída ao longo do tempo</a:t>
+            </a:r>
+            <a:endParaRPr lang="en-US" sz="880" dirty="0"/>
+          </a:p>
+        </p:txBody>
+      </p:sp>
+      <p:sp>
+        <p:nvSpPr>
+          <p:cNvPr id="58" name="Text 54"/>
+          <p:cNvSpPr txBox="1"/>
+          <p:nvPr/>
+        </p:nvSpPr>
+        <p:spPr>
+          <a:xfrm>
+            <a:off x="4463802" y="3965674"/>
+            <a:ext cx="5553998" cy="490240"/>
+          </a:xfrm>
+          <a:prstGeom prst="rect">
+            <a:avLst/>
+          </a:prstGeom>
+          <a:noFill/>
+          <a:ln/>
+        </p:spPr>
+        <p:txBody>
+          <a:bodyPr wrap="square" lIns="0" tIns="0" rIns="0" bIns="0" rtlCol="0" anchor="t"/>
+          <a:lstStyle/>
+          <a:p>
+            <a:pPr algn="l" indent="0" marL="0">
+              <a:lnSpc>
+                <a:spcPts val="1929"/>
+              </a:lnSpc>
+              <a:buNone/>
+            </a:pPr>
+            <a:r>
+              <a:rPr lang="en-US" sz="1060" dirty="0">
+                <a:solidFill>
+                  <a:srgbClr val="5A6672"/>
+                </a:solidFill>
+                <a:latin typeface="Jost" pitchFamily="34" charset="0"/>
+                <a:ea typeface="Jost" pitchFamily="34" charset="-122"/>
+                <a:cs typeface="Jost" pitchFamily="34" charset="-120"/>
+              </a:rPr>
+              <a:t>A Victorinox possui uma tradição centenária e tornou seus produtos companheiros de pessoas em viagens, aventuras, trabalho e momentos cotidianos.</a:t>
             </a:r>
             <a:endParaRPr lang="en-US" sz="1060" dirty="0"/>
           </a:p>
@@ -9125,14 +8884,56 @@
       </p:sp>
       <p:sp>
         <p:nvSpPr>
-          <p:cNvPr id="19" name="Text 15"/>
-          <p:cNvSpPr txBox="1"/>
-          <p:nvPr/>
-        </p:nvSpPr>
-        <p:spPr>
-          <a:xfrm>
-            <a:off x="4463802" y="6143327"/>
-            <a:ext cx="5553998" cy="561380"/>
+          <p:cNvPr id="59" name="Text 55"/>
+          <p:cNvSpPr txBox="1"/>
+          <p:nvPr/>
+        </p:nvSpPr>
+        <p:spPr>
+          <a:xfrm>
+            <a:off x="4463802" y="4653855"/>
+            <a:ext cx="5553998" cy="735360"/>
+          </a:xfrm>
+          <a:prstGeom prst="rect">
+            <a:avLst/>
+          </a:prstGeom>
+          <a:noFill/>
+          <a:ln/>
+        </p:spPr>
+        <p:txBody>
+          <a:bodyPr wrap="square" lIns="0" tIns="0" rIns="0" bIns="0" rtlCol="0" anchor="t"/>
+          <a:lstStyle/>
+          <a:p>
+            <a:pPr algn="l" indent="0" marL="0">
+              <a:lnSpc>
+                <a:spcPts val="1929"/>
+              </a:lnSpc>
+              <a:buNone/>
+            </a:pPr>
+            <a:r>
+              <a:rPr lang="en-US" sz="1060" dirty="0">
+                <a:solidFill>
+                  <a:srgbClr val="5A6672"/>
+                </a:solidFill>
+                <a:latin typeface="Jost" pitchFamily="34" charset="0"/>
+                <a:ea typeface="Jost" pitchFamily="34" charset="-122"/>
+                <a:cs typeface="Jost" pitchFamily="34" charset="-120"/>
+              </a:rPr>
+              <a:t>A Pousada Camburi possui uma história muito mais jovem, mas compartilha uma convicção semelhante: um bom produto ou um bom serviço não precisa apenas funcionar bem. Ele precisa gerar confiança.</a:t>
+            </a:r>
+            <a:endParaRPr lang="en-US" sz="1060" dirty="0"/>
+          </a:p>
+        </p:txBody>
+      </p:sp>
+      <p:sp>
+        <p:nvSpPr>
+          <p:cNvPr id="60" name="Text 56"/>
+          <p:cNvSpPr txBox="1"/>
+          <p:nvPr/>
+        </p:nvSpPr>
+        <p:spPr>
+          <a:xfrm>
+            <a:off x="4463802" y="6424017"/>
+            <a:ext cx="5553998" cy="280690"/>
           </a:xfrm>
           <a:prstGeom prst="rect">
             <a:avLst/>
@@ -9159,7 +8960,7 @@
                 <a:ea typeface="EB Garamond" pitchFamily="34" charset="-122"/>
                 <a:cs typeface="EB Garamond" pitchFamily="34" charset="-120"/>
               </a:rPr>
-              <a:t>E talvez seja justamente esse um dos pontos que mais nos aproximam da filosofia da Victorinox.</a:t>
+              <a:t>E confiança é aquilo que faz uma pessoa voltar.</a:t>
             </a:r>
             <a:endParaRPr lang="en-US" sz="1700" dirty="0"/>
           </a:p>
@@ -9167,7 +8968,7 @@
       </p:sp>
       <p:sp>
         <p:nvSpPr>
-          <p:cNvPr id="20" name="Text 16"/>
+          <p:cNvPr id="61" name="Text 57"/>
           <p:cNvSpPr txBox="1"/>
           <p:nvPr/>
         </p:nvSpPr>
@@ -9307,7 +9108,7 @@
         </p:nvSpPr>
         <p:spPr>
           <a:xfrm>
-            <a:off x="719882" y="5654725"/>
+            <a:off x="719882" y="5917555"/>
             <a:ext cx="2654498" cy="9525"/>
           </a:xfrm>
           <a:prstGeom prst="rect">
@@ -9327,16 +9128,14 @@
         </p:nvSpPr>
         <p:spPr>
           <a:xfrm>
-            <a:off x="4463802" y="2322165"/>
-            <a:ext cx="964704" cy="367903"/>
-          </a:xfrm>
-          <a:prstGeom prst="roundRect">
-            <a:avLst>
-              <a:gd name="adj" fmla="val 50000"/>
-            </a:avLst>
-          </a:prstGeom>
-          <a:solidFill>
-            <a:srgbClr val="FAF8F5"/>
+            <a:off x="4463802" y="6126510"/>
+            <a:ext cx="5508278" cy="9525"/>
+          </a:xfrm>
+          <a:prstGeom prst="rect">
+            <a:avLst/>
+          </a:prstGeom>
+          <a:solidFill>
+            <a:srgbClr val="E2DFD9"/>
           </a:solidFill>
           <a:ln/>
         </p:spPr>
@@ -9349,718 +9148,6 @@
         </p:nvSpPr>
         <p:spPr>
           <a:xfrm>
-            <a:off x="4463802" y="2322165"/>
-            <a:ext cx="964704" cy="9525"/>
-          </a:xfrm>
-          <a:prstGeom prst="rect">
-            <a:avLst/>
-          </a:prstGeom>
-          <a:solidFill>
-            <a:srgbClr val="E2DFD9"/>
-          </a:solidFill>
-          <a:ln/>
-        </p:spPr>
-      </p:sp>
-      <p:sp>
-        <p:nvSpPr>
-          <p:cNvPr id="8" name="Shape 6"/>
-          <p:cNvSpPr/>
-          <p:nvPr/>
-        </p:nvSpPr>
-        <p:spPr>
-          <a:xfrm>
-            <a:off x="5418981" y="2322165"/>
-            <a:ext cx="9525" cy="367903"/>
-          </a:xfrm>
-          <a:prstGeom prst="rect">
-            <a:avLst/>
-          </a:prstGeom>
-          <a:solidFill>
-            <a:srgbClr val="E2DFD9"/>
-          </a:solidFill>
-          <a:ln/>
-        </p:spPr>
-      </p:sp>
-      <p:sp>
-        <p:nvSpPr>
-          <p:cNvPr id="9" name="Shape 7"/>
-          <p:cNvSpPr/>
-          <p:nvPr/>
-        </p:nvSpPr>
-        <p:spPr>
-          <a:xfrm>
-            <a:off x="4463802" y="2680543"/>
-            <a:ext cx="964704" cy="9525"/>
-          </a:xfrm>
-          <a:prstGeom prst="rect">
-            <a:avLst/>
-          </a:prstGeom>
-          <a:solidFill>
-            <a:srgbClr val="E2DFD9"/>
-          </a:solidFill>
-          <a:ln/>
-        </p:spPr>
-      </p:sp>
-      <p:sp>
-        <p:nvSpPr>
-          <p:cNvPr id="10" name="Shape 8"/>
-          <p:cNvSpPr/>
-          <p:nvPr/>
-        </p:nvSpPr>
-        <p:spPr>
-          <a:xfrm>
-            <a:off x="4463802" y="2322165"/>
-            <a:ext cx="9525" cy="367903"/>
-          </a:xfrm>
-          <a:prstGeom prst="rect">
-            <a:avLst/>
-          </a:prstGeom>
-          <a:solidFill>
-            <a:srgbClr val="E2DFD9"/>
-          </a:solidFill>
-          <a:ln/>
-        </p:spPr>
-      </p:sp>
-      <p:sp>
-        <p:nvSpPr>
-          <p:cNvPr id="11" name="Shape 9"/>
-          <p:cNvSpPr/>
-          <p:nvPr/>
-        </p:nvSpPr>
-        <p:spPr>
-          <a:xfrm>
-            <a:off x="5536406" y="2322165"/>
-            <a:ext cx="1178719" cy="367903"/>
-          </a:xfrm>
-          <a:prstGeom prst="roundRect">
-            <a:avLst>
-              <a:gd name="adj" fmla="val 50000"/>
-            </a:avLst>
-          </a:prstGeom>
-          <a:solidFill>
-            <a:srgbClr val="FAF8F5"/>
-          </a:solidFill>
-          <a:ln/>
-        </p:spPr>
-      </p:sp>
-      <p:sp>
-        <p:nvSpPr>
-          <p:cNvPr id="12" name="Shape 10"/>
-          <p:cNvSpPr/>
-          <p:nvPr/>
-        </p:nvSpPr>
-        <p:spPr>
-          <a:xfrm>
-            <a:off x="5536406" y="2322165"/>
-            <a:ext cx="1178719" cy="9525"/>
-          </a:xfrm>
-          <a:prstGeom prst="rect">
-            <a:avLst/>
-          </a:prstGeom>
-          <a:solidFill>
-            <a:srgbClr val="E2DFD9"/>
-          </a:solidFill>
-          <a:ln/>
-        </p:spPr>
-      </p:sp>
-      <p:sp>
-        <p:nvSpPr>
-          <p:cNvPr id="13" name="Shape 11"/>
-          <p:cNvSpPr/>
-          <p:nvPr/>
-        </p:nvSpPr>
-        <p:spPr>
-          <a:xfrm>
-            <a:off x="6705600" y="2322165"/>
-            <a:ext cx="9525" cy="367903"/>
-          </a:xfrm>
-          <a:prstGeom prst="rect">
-            <a:avLst/>
-          </a:prstGeom>
-          <a:solidFill>
-            <a:srgbClr val="E2DFD9"/>
-          </a:solidFill>
-          <a:ln/>
-        </p:spPr>
-      </p:sp>
-      <p:sp>
-        <p:nvSpPr>
-          <p:cNvPr id="14" name="Shape 12"/>
-          <p:cNvSpPr/>
-          <p:nvPr/>
-        </p:nvSpPr>
-        <p:spPr>
-          <a:xfrm>
-            <a:off x="5536406" y="2680543"/>
-            <a:ext cx="1178719" cy="9525"/>
-          </a:xfrm>
-          <a:prstGeom prst="rect">
-            <a:avLst/>
-          </a:prstGeom>
-          <a:solidFill>
-            <a:srgbClr val="E2DFD9"/>
-          </a:solidFill>
-          <a:ln/>
-        </p:spPr>
-      </p:sp>
-      <p:sp>
-        <p:nvSpPr>
-          <p:cNvPr id="15" name="Shape 13"/>
-          <p:cNvSpPr/>
-          <p:nvPr/>
-        </p:nvSpPr>
-        <p:spPr>
-          <a:xfrm>
-            <a:off x="5536406" y="2322165"/>
-            <a:ext cx="9525" cy="367903"/>
-          </a:xfrm>
-          <a:prstGeom prst="rect">
-            <a:avLst/>
-          </a:prstGeom>
-          <a:solidFill>
-            <a:srgbClr val="E2DFD9"/>
-          </a:solidFill>
-          <a:ln/>
-        </p:spPr>
-      </p:sp>
-      <p:sp>
-        <p:nvSpPr>
-          <p:cNvPr id="16" name="Shape 14"/>
-          <p:cNvSpPr/>
-          <p:nvPr/>
-        </p:nvSpPr>
-        <p:spPr>
-          <a:xfrm>
-            <a:off x="6823025" y="2322165"/>
-            <a:ext cx="1090017" cy="367903"/>
-          </a:xfrm>
-          <a:prstGeom prst="roundRect">
-            <a:avLst>
-              <a:gd name="adj" fmla="val 50000"/>
-            </a:avLst>
-          </a:prstGeom>
-          <a:solidFill>
-            <a:srgbClr val="FAF8F5"/>
-          </a:solidFill>
-          <a:ln/>
-        </p:spPr>
-      </p:sp>
-      <p:sp>
-        <p:nvSpPr>
-          <p:cNvPr id="17" name="Shape 15"/>
-          <p:cNvSpPr/>
-          <p:nvPr/>
-        </p:nvSpPr>
-        <p:spPr>
-          <a:xfrm>
-            <a:off x="6823025" y="2322165"/>
-            <a:ext cx="1090017" cy="9525"/>
-          </a:xfrm>
-          <a:prstGeom prst="rect">
-            <a:avLst/>
-          </a:prstGeom>
-          <a:solidFill>
-            <a:srgbClr val="E2DFD9"/>
-          </a:solidFill>
-          <a:ln/>
-        </p:spPr>
-      </p:sp>
-      <p:sp>
-        <p:nvSpPr>
-          <p:cNvPr id="18" name="Shape 16"/>
-          <p:cNvSpPr/>
-          <p:nvPr/>
-        </p:nvSpPr>
-        <p:spPr>
-          <a:xfrm>
-            <a:off x="7903518" y="2322165"/>
-            <a:ext cx="9525" cy="367903"/>
-          </a:xfrm>
-          <a:prstGeom prst="rect">
-            <a:avLst/>
-          </a:prstGeom>
-          <a:solidFill>
-            <a:srgbClr val="E2DFD9"/>
-          </a:solidFill>
-          <a:ln/>
-        </p:spPr>
-      </p:sp>
-      <p:sp>
-        <p:nvSpPr>
-          <p:cNvPr id="19" name="Shape 17"/>
-          <p:cNvSpPr/>
-          <p:nvPr/>
-        </p:nvSpPr>
-        <p:spPr>
-          <a:xfrm>
-            <a:off x="6823025" y="2680543"/>
-            <a:ext cx="1090017" cy="9525"/>
-          </a:xfrm>
-          <a:prstGeom prst="rect">
-            <a:avLst/>
-          </a:prstGeom>
-          <a:solidFill>
-            <a:srgbClr val="E2DFD9"/>
-          </a:solidFill>
-          <a:ln/>
-        </p:spPr>
-      </p:sp>
-      <p:sp>
-        <p:nvSpPr>
-          <p:cNvPr id="20" name="Shape 18"/>
-          <p:cNvSpPr/>
-          <p:nvPr/>
-        </p:nvSpPr>
-        <p:spPr>
-          <a:xfrm>
-            <a:off x="6823025" y="2322165"/>
-            <a:ext cx="9525" cy="367903"/>
-          </a:xfrm>
-          <a:prstGeom prst="rect">
-            <a:avLst/>
-          </a:prstGeom>
-          <a:solidFill>
-            <a:srgbClr val="E2DFD9"/>
-          </a:solidFill>
-          <a:ln/>
-        </p:spPr>
-      </p:sp>
-      <p:sp>
-        <p:nvSpPr>
-          <p:cNvPr id="21" name="Shape 19"/>
-          <p:cNvSpPr/>
-          <p:nvPr/>
-        </p:nvSpPr>
-        <p:spPr>
-          <a:xfrm>
-            <a:off x="8020943" y="2322165"/>
-            <a:ext cx="1201787" cy="367903"/>
-          </a:xfrm>
-          <a:prstGeom prst="roundRect">
-            <a:avLst>
-              <a:gd name="adj" fmla="val 50000"/>
-            </a:avLst>
-          </a:prstGeom>
-          <a:solidFill>
-            <a:srgbClr val="FAF8F5"/>
-          </a:solidFill>
-          <a:ln/>
-        </p:spPr>
-      </p:sp>
-      <p:sp>
-        <p:nvSpPr>
-          <p:cNvPr id="22" name="Shape 20"/>
-          <p:cNvSpPr/>
-          <p:nvPr/>
-        </p:nvSpPr>
-        <p:spPr>
-          <a:xfrm>
-            <a:off x="8020943" y="2322165"/>
-            <a:ext cx="1201787" cy="9525"/>
-          </a:xfrm>
-          <a:prstGeom prst="rect">
-            <a:avLst/>
-          </a:prstGeom>
-          <a:solidFill>
-            <a:srgbClr val="E2DFD9"/>
-          </a:solidFill>
-          <a:ln/>
-        </p:spPr>
-      </p:sp>
-      <p:sp>
-        <p:nvSpPr>
-          <p:cNvPr id="23" name="Shape 21"/>
-          <p:cNvSpPr/>
-          <p:nvPr/>
-        </p:nvSpPr>
-        <p:spPr>
-          <a:xfrm>
-            <a:off x="9213205" y="2322165"/>
-            <a:ext cx="9525" cy="367903"/>
-          </a:xfrm>
-          <a:prstGeom prst="rect">
-            <a:avLst/>
-          </a:prstGeom>
-          <a:solidFill>
-            <a:srgbClr val="E2DFD9"/>
-          </a:solidFill>
-          <a:ln/>
-        </p:spPr>
-      </p:sp>
-      <p:sp>
-        <p:nvSpPr>
-          <p:cNvPr id="24" name="Shape 22"/>
-          <p:cNvSpPr/>
-          <p:nvPr/>
-        </p:nvSpPr>
-        <p:spPr>
-          <a:xfrm>
-            <a:off x="8020943" y="2680543"/>
-            <a:ext cx="1201787" cy="9525"/>
-          </a:xfrm>
-          <a:prstGeom prst="rect">
-            <a:avLst/>
-          </a:prstGeom>
-          <a:solidFill>
-            <a:srgbClr val="E2DFD9"/>
-          </a:solidFill>
-          <a:ln/>
-        </p:spPr>
-      </p:sp>
-      <p:sp>
-        <p:nvSpPr>
-          <p:cNvPr id="25" name="Shape 23"/>
-          <p:cNvSpPr/>
-          <p:nvPr/>
-        </p:nvSpPr>
-        <p:spPr>
-          <a:xfrm>
-            <a:off x="8020943" y="2322165"/>
-            <a:ext cx="9525" cy="367903"/>
-          </a:xfrm>
-          <a:prstGeom prst="rect">
-            <a:avLst/>
-          </a:prstGeom>
-          <a:solidFill>
-            <a:srgbClr val="E2DFD9"/>
-          </a:solidFill>
-          <a:ln/>
-        </p:spPr>
-      </p:sp>
-      <p:sp>
-        <p:nvSpPr>
-          <p:cNvPr id="26" name="Shape 24"/>
-          <p:cNvSpPr/>
-          <p:nvPr/>
-        </p:nvSpPr>
-        <p:spPr>
-          <a:xfrm>
-            <a:off x="4463802" y="2797969"/>
-            <a:ext cx="1495574" cy="367903"/>
-          </a:xfrm>
-          <a:prstGeom prst="roundRect">
-            <a:avLst>
-              <a:gd name="adj" fmla="val 50000"/>
-            </a:avLst>
-          </a:prstGeom>
-          <a:solidFill>
-            <a:srgbClr val="FAF8F5"/>
-          </a:solidFill>
-          <a:ln/>
-        </p:spPr>
-      </p:sp>
-      <p:sp>
-        <p:nvSpPr>
-          <p:cNvPr id="27" name="Shape 25"/>
-          <p:cNvSpPr/>
-          <p:nvPr/>
-        </p:nvSpPr>
-        <p:spPr>
-          <a:xfrm>
-            <a:off x="4463802" y="2797969"/>
-            <a:ext cx="1495574" cy="9525"/>
-          </a:xfrm>
-          <a:prstGeom prst="rect">
-            <a:avLst/>
-          </a:prstGeom>
-          <a:solidFill>
-            <a:srgbClr val="E2DFD9"/>
-          </a:solidFill>
-          <a:ln/>
-        </p:spPr>
-      </p:sp>
-      <p:sp>
-        <p:nvSpPr>
-          <p:cNvPr id="28" name="Shape 26"/>
-          <p:cNvSpPr/>
-          <p:nvPr/>
-        </p:nvSpPr>
-        <p:spPr>
-          <a:xfrm>
-            <a:off x="5949851" y="2797969"/>
-            <a:ext cx="9525" cy="367903"/>
-          </a:xfrm>
-          <a:prstGeom prst="rect">
-            <a:avLst/>
-          </a:prstGeom>
-          <a:solidFill>
-            <a:srgbClr val="E2DFD9"/>
-          </a:solidFill>
-          <a:ln/>
-        </p:spPr>
-      </p:sp>
-      <p:sp>
-        <p:nvSpPr>
-          <p:cNvPr id="29" name="Shape 27"/>
-          <p:cNvSpPr/>
-          <p:nvPr/>
-        </p:nvSpPr>
-        <p:spPr>
-          <a:xfrm>
-            <a:off x="4463802" y="3156347"/>
-            <a:ext cx="1495574" cy="9525"/>
-          </a:xfrm>
-          <a:prstGeom prst="rect">
-            <a:avLst/>
-          </a:prstGeom>
-          <a:solidFill>
-            <a:srgbClr val="E2DFD9"/>
-          </a:solidFill>
-          <a:ln/>
-        </p:spPr>
-      </p:sp>
-      <p:sp>
-        <p:nvSpPr>
-          <p:cNvPr id="30" name="Shape 28"/>
-          <p:cNvSpPr/>
-          <p:nvPr/>
-        </p:nvSpPr>
-        <p:spPr>
-          <a:xfrm>
-            <a:off x="4463802" y="2797969"/>
-            <a:ext cx="9525" cy="367903"/>
-          </a:xfrm>
-          <a:prstGeom prst="rect">
-            <a:avLst/>
-          </a:prstGeom>
-          <a:solidFill>
-            <a:srgbClr val="E2DFD9"/>
-          </a:solidFill>
-          <a:ln/>
-        </p:spPr>
-      </p:sp>
-      <p:sp>
-        <p:nvSpPr>
-          <p:cNvPr id="31" name="Shape 29"/>
-          <p:cNvSpPr/>
-          <p:nvPr/>
-        </p:nvSpPr>
-        <p:spPr>
-          <a:xfrm>
-            <a:off x="6067276" y="2797969"/>
-            <a:ext cx="1640086" cy="367903"/>
-          </a:xfrm>
-          <a:prstGeom prst="roundRect">
-            <a:avLst>
-              <a:gd name="adj" fmla="val 50000"/>
-            </a:avLst>
-          </a:prstGeom>
-          <a:solidFill>
-            <a:srgbClr val="FAF8F5"/>
-          </a:solidFill>
-          <a:ln/>
-        </p:spPr>
-      </p:sp>
-      <p:sp>
-        <p:nvSpPr>
-          <p:cNvPr id="32" name="Shape 30"/>
-          <p:cNvSpPr/>
-          <p:nvPr/>
-        </p:nvSpPr>
-        <p:spPr>
-          <a:xfrm>
-            <a:off x="6067276" y="2797969"/>
-            <a:ext cx="1640086" cy="9525"/>
-          </a:xfrm>
-          <a:prstGeom prst="rect">
-            <a:avLst/>
-          </a:prstGeom>
-          <a:solidFill>
-            <a:srgbClr val="E2DFD9"/>
-          </a:solidFill>
-          <a:ln/>
-        </p:spPr>
-      </p:sp>
-      <p:sp>
-        <p:nvSpPr>
-          <p:cNvPr id="33" name="Shape 31"/>
-          <p:cNvSpPr/>
-          <p:nvPr/>
-        </p:nvSpPr>
-        <p:spPr>
-          <a:xfrm>
-            <a:off x="7697837" y="2797969"/>
-            <a:ext cx="9525" cy="367903"/>
-          </a:xfrm>
-          <a:prstGeom prst="rect">
-            <a:avLst/>
-          </a:prstGeom>
-          <a:solidFill>
-            <a:srgbClr val="E2DFD9"/>
-          </a:solidFill>
-          <a:ln/>
-        </p:spPr>
-      </p:sp>
-      <p:sp>
-        <p:nvSpPr>
-          <p:cNvPr id="34" name="Shape 32"/>
-          <p:cNvSpPr/>
-          <p:nvPr/>
-        </p:nvSpPr>
-        <p:spPr>
-          <a:xfrm>
-            <a:off x="6067276" y="3156347"/>
-            <a:ext cx="1640086" cy="9525"/>
-          </a:xfrm>
-          <a:prstGeom prst="rect">
-            <a:avLst/>
-          </a:prstGeom>
-          <a:solidFill>
-            <a:srgbClr val="E2DFD9"/>
-          </a:solidFill>
-          <a:ln/>
-        </p:spPr>
-      </p:sp>
-      <p:sp>
-        <p:nvSpPr>
-          <p:cNvPr id="35" name="Shape 33"/>
-          <p:cNvSpPr/>
-          <p:nvPr/>
-        </p:nvSpPr>
-        <p:spPr>
-          <a:xfrm>
-            <a:off x="6067276" y="2797969"/>
-            <a:ext cx="9525" cy="367903"/>
-          </a:xfrm>
-          <a:prstGeom prst="rect">
-            <a:avLst/>
-          </a:prstGeom>
-          <a:solidFill>
-            <a:srgbClr val="E2DFD9"/>
-          </a:solidFill>
-          <a:ln/>
-        </p:spPr>
-      </p:sp>
-      <p:sp>
-        <p:nvSpPr>
-          <p:cNvPr id="36" name="Shape 34"/>
-          <p:cNvSpPr/>
-          <p:nvPr/>
-        </p:nvSpPr>
-        <p:spPr>
-          <a:xfrm>
-            <a:off x="4463802" y="3273772"/>
-            <a:ext cx="2588419" cy="367903"/>
-          </a:xfrm>
-          <a:prstGeom prst="roundRect">
-            <a:avLst>
-              <a:gd name="adj" fmla="val 50000"/>
-            </a:avLst>
-          </a:prstGeom>
-          <a:solidFill>
-            <a:srgbClr val="FAF8F5"/>
-          </a:solidFill>
-          <a:ln/>
-        </p:spPr>
-      </p:sp>
-      <p:sp>
-        <p:nvSpPr>
-          <p:cNvPr id="37" name="Shape 35"/>
-          <p:cNvSpPr/>
-          <p:nvPr/>
-        </p:nvSpPr>
-        <p:spPr>
-          <a:xfrm>
-            <a:off x="4463802" y="3273772"/>
-            <a:ext cx="2588419" cy="9525"/>
-          </a:xfrm>
-          <a:prstGeom prst="rect">
-            <a:avLst/>
-          </a:prstGeom>
-          <a:solidFill>
-            <a:srgbClr val="E2DFD9"/>
-          </a:solidFill>
-          <a:ln/>
-        </p:spPr>
-      </p:sp>
-      <p:sp>
-        <p:nvSpPr>
-          <p:cNvPr id="38" name="Shape 36"/>
-          <p:cNvSpPr/>
-          <p:nvPr/>
-        </p:nvSpPr>
-        <p:spPr>
-          <a:xfrm>
-            <a:off x="7042696" y="3273772"/>
-            <a:ext cx="9525" cy="367903"/>
-          </a:xfrm>
-          <a:prstGeom prst="rect">
-            <a:avLst/>
-          </a:prstGeom>
-          <a:solidFill>
-            <a:srgbClr val="E2DFD9"/>
-          </a:solidFill>
-          <a:ln/>
-        </p:spPr>
-      </p:sp>
-      <p:sp>
-        <p:nvSpPr>
-          <p:cNvPr id="39" name="Shape 37"/>
-          <p:cNvSpPr/>
-          <p:nvPr/>
-        </p:nvSpPr>
-        <p:spPr>
-          <a:xfrm>
-            <a:off x="4463802" y="3632150"/>
-            <a:ext cx="2588419" cy="9525"/>
-          </a:xfrm>
-          <a:prstGeom prst="rect">
-            <a:avLst/>
-          </a:prstGeom>
-          <a:solidFill>
-            <a:srgbClr val="E2DFD9"/>
-          </a:solidFill>
-          <a:ln/>
-        </p:spPr>
-      </p:sp>
-      <p:sp>
-        <p:nvSpPr>
-          <p:cNvPr id="40" name="Shape 38"/>
-          <p:cNvSpPr/>
-          <p:nvPr/>
-        </p:nvSpPr>
-        <p:spPr>
-          <a:xfrm>
-            <a:off x="4463802" y="3273772"/>
-            <a:ext cx="9525" cy="367903"/>
-          </a:xfrm>
-          <a:prstGeom prst="rect">
-            <a:avLst/>
-          </a:prstGeom>
-          <a:solidFill>
-            <a:srgbClr val="E2DFD9"/>
-          </a:solidFill>
-          <a:ln/>
-        </p:spPr>
-      </p:sp>
-      <p:sp>
-        <p:nvSpPr>
-          <p:cNvPr id="41" name="Shape 39"/>
-          <p:cNvSpPr/>
-          <p:nvPr/>
-        </p:nvSpPr>
-        <p:spPr>
-          <a:xfrm>
-            <a:off x="4463802" y="6126510"/>
-            <a:ext cx="5508278" cy="9525"/>
-          </a:xfrm>
-          <a:prstGeom prst="rect">
-            <a:avLst/>
-          </a:prstGeom>
-          <a:solidFill>
-            <a:srgbClr val="E2DFD9"/>
-          </a:solidFill>
-          <a:ln/>
-        </p:spPr>
-      </p:sp>
-      <p:sp>
-        <p:nvSpPr>
-          <p:cNvPr id="42" name="Shape 40"/>
-          <p:cNvSpPr/>
-          <p:nvPr/>
-        </p:nvSpPr>
-        <p:spPr>
-          <a:xfrm>
             <a:off x="719882" y="6704707"/>
             <a:ext cx="9252198" cy="9525"/>
           </a:xfrm>
@@ -10075,7 +9162,7 @@
       </p:sp>
       <p:pic>
         <p:nvPicPr>
-          <p:cNvPr id="43" name="Image 0" descr="/home/user/SkillsClaude/apresentacao-victorinox/build/logos/logo-pc.png">    </p:cNvPr>
+          <p:cNvPr id="8" name="Image 0" descr="/home/user/SkillsClaude/apresentacao-victorinox/build/logos/logo-pc.png">    </p:cNvPr>
           <p:cNvPicPr>
             <a:picLocks noChangeAspect="1"/>
           </p:cNvPicPr>
@@ -10099,7 +9186,7 @@
       </p:pic>
       <p:pic>
         <p:nvPicPr>
-          <p:cNvPr id="44" name="Image 1" descr="/home/user/SkillsClaude/apresentacao-victorinox/build/logos/logo-vx.png">    </p:cNvPr>
+          <p:cNvPr id="9" name="Image 1" descr="/home/user/SkillsClaude/apresentacao-victorinox/build/logos/logo-vx.png">    </p:cNvPr>
           <p:cNvPicPr>
             <a:picLocks noChangeAspect="1"/>
           </p:cNvPicPr>
@@ -10123,7 +9210,7 @@
       </p:pic>
       <p:sp>
         <p:nvSpPr>
-          <p:cNvPr id="45" name="Text 41"/>
+          <p:cNvPr id="10" name="Text 6"/>
           <p:cNvSpPr txBox="1"/>
           <p:nvPr/>
         </p:nvSpPr>
@@ -10165,7 +9252,7 @@
       </p:sp>
       <p:sp>
         <p:nvSpPr>
-          <p:cNvPr id="46" name="Text 42"/>
+          <p:cNvPr id="11" name="Text 7"/>
           <p:cNvSpPr txBox="1"/>
           <p:nvPr/>
         </p:nvSpPr>
@@ -10207,7 +9294,7 @@
       </p:sp>
       <p:sp>
         <p:nvSpPr>
-          <p:cNvPr id="47" name="Text 43"/>
+          <p:cNvPr id="12" name="Text 8"/>
           <p:cNvSpPr txBox="1"/>
           <p:nvPr/>
         </p:nvSpPr>
@@ -10241,7 +9328,7 @@
                 <a:ea typeface="Jost Medium" pitchFamily="34" charset="-122"/>
                 <a:cs typeface="Jost Medium" pitchFamily="34" charset="-120"/>
               </a:rPr>
-              <a:t>AFINIDADE</a:t>
+              <a:t>OPORTUNIDADE</a:t>
             </a:r>
             <a:endParaRPr lang="en-US" sz="660" dirty="0"/>
           </a:p>
@@ -10249,7 +9336,7 @@
       </p:sp>
       <p:sp>
         <p:nvSpPr>
-          <p:cNvPr id="48" name="Text 44"/>
+          <p:cNvPr id="13" name="Text 9"/>
           <p:cNvSpPr txBox="1"/>
           <p:nvPr/>
         </p:nvSpPr>
@@ -10283,7 +9370,7 @@
                 <a:ea typeface="EB Garamond Medium" pitchFamily="34" charset="-122"/>
                 <a:cs typeface="EB Garamond Medium" pitchFamily="34" charset="-120"/>
               </a:rPr>
-              <a:t>Por que Victorinox?</a:t>
+              <a:t>Um ambiente de experiência</a:t>
             </a:r>
             <a:endParaRPr lang="en-US" sz="2700" dirty="0"/>
           </a:p>
@@ -10291,14 +9378,14 @@
       </p:sp>
       <p:sp>
         <p:nvSpPr>
-          <p:cNvPr id="49" name="Text 45"/>
-          <p:cNvSpPr txBox="1"/>
-          <p:nvPr/>
-        </p:nvSpPr>
-        <p:spPr>
-          <a:xfrm>
-            <a:off x="719882" y="5916216"/>
-            <a:ext cx="2700218" cy="788491"/>
+          <p:cNvPr id="14" name="Text 10"/>
+          <p:cNvSpPr txBox="1"/>
+          <p:nvPr/>
+        </p:nvSpPr>
+        <p:spPr>
+          <a:xfrm>
+            <a:off x="719882" y="6179046"/>
+            <a:ext cx="2700218" cy="525661"/>
           </a:xfrm>
           <a:prstGeom prst="rect">
             <a:avLst/>
@@ -10325,7 +9412,7 @@
                 <a:ea typeface="EB Garamond" pitchFamily="34" charset="-122"/>
                 <a:cs typeface="EB Garamond" pitchFamily="34" charset="-120"/>
               </a:rPr>
-              <a:t>“Um bom produto ou um bom serviço não precisa apenas funcionar bem. Ele precisa gerar confiança.”</a:t>
+              <a:t>“É um ambiente real de experiências.”</a:t>
             </a:r>
             <a:endParaRPr lang="en-US" sz="1500" dirty="0"/>
           </a:p>
@@ -10333,7 +9420,7 @@
       </p:sp>
       <p:sp>
         <p:nvSpPr>
-          <p:cNvPr id="50" name="Text 46"/>
+          <p:cNvPr id="15" name="Text 11"/>
           <p:cNvSpPr txBox="1"/>
           <p:nvPr/>
         </p:nvSpPr>
@@ -10367,7 +9454,7 @@
                 <a:ea typeface="Jost Light" pitchFamily="34" charset="-122"/>
                 <a:cs typeface="Jost Light" pitchFamily="34" charset="-120"/>
               </a:rPr>
-              <a:t>Admiramos a Victorinox justamente porque reconhecemos na marca valores que também procuramos praticar:</a:t>
+              <a:t>É nesse contexto que enxergamos uma possibilidade especial de aproximação entre nossas empresas.</a:t>
             </a:r>
             <a:endParaRPr lang="en-US" sz="1260" dirty="0"/>
           </a:p>
@@ -10375,335 +9462,125 @@
       </p:sp>
       <p:sp>
         <p:nvSpPr>
-          <p:cNvPr id="51" name="Text 47"/>
-          <p:cNvSpPr txBox="1"/>
-          <p:nvPr/>
-        </p:nvSpPr>
-        <p:spPr>
-          <a:xfrm>
-            <a:off x="4679802" y="2415765"/>
-            <a:ext cx="578423" cy="274303"/>
-          </a:xfrm>
-          <a:prstGeom prst="rect">
-            <a:avLst/>
-          </a:prstGeom>
-          <a:noFill/>
-          <a:ln/>
-        </p:spPr>
-        <p:txBody>
-          <a:bodyPr wrap="square" lIns="0" tIns="0" rIns="0" bIns="0" rtlCol="0" anchor="t"/>
-          <a:lstStyle/>
-          <a:p>
-            <a:pPr algn="l" indent="0" marL="0">
-              <a:lnSpc>
-                <a:spcPts val="1056"/>
-              </a:lnSpc>
-              <a:buNone/>
-            </a:pPr>
-            <a:r>
-              <a:rPr lang="en-US" sz="880" spc="18" kern="0" dirty="0">
-                <a:solidFill>
-                  <a:srgbClr val="2E3A45"/>
+          <p:cNvPr id="16" name="Text 12"/>
+          <p:cNvSpPr txBox="1"/>
+          <p:nvPr/>
+        </p:nvSpPr>
+        <p:spPr>
+          <a:xfrm>
+            <a:off x="4463802" y="2304157"/>
+            <a:ext cx="5553998" cy="735360"/>
+          </a:xfrm>
+          <a:prstGeom prst="rect">
+            <a:avLst/>
+          </a:prstGeom>
+          <a:noFill/>
+          <a:ln/>
+        </p:spPr>
+        <p:txBody>
+          <a:bodyPr wrap="square" lIns="0" tIns="0" rIns="0" bIns="0" rtlCol="0" anchor="t"/>
+          <a:lstStyle/>
+          <a:p>
+            <a:pPr algn="l" indent="0" marL="0">
+              <a:lnSpc>
+                <a:spcPts val="1929"/>
+              </a:lnSpc>
+              <a:buNone/>
+            </a:pPr>
+            <a:r>
+              <a:rPr lang="en-US" sz="1060" dirty="0">
+                <a:solidFill>
+                  <a:srgbClr val="5A6672"/>
                 </a:solidFill>
                 <a:latin typeface="Jost" pitchFamily="34" charset="0"/>
                 <a:ea typeface="Jost" pitchFamily="34" charset="-122"/>
                 <a:cs typeface="Jost" pitchFamily="34" charset="-120"/>
               </a:rPr>
-              <a:t>Qualidade</a:t>
-            </a:r>
-            <a:endParaRPr lang="en-US" sz="880" dirty="0"/>
-          </a:p>
-        </p:txBody>
-      </p:sp>
-      <p:sp>
-        <p:nvSpPr>
-          <p:cNvPr id="52" name="Text 48"/>
-          <p:cNvSpPr txBox="1"/>
-          <p:nvPr/>
-        </p:nvSpPr>
-        <p:spPr>
-          <a:xfrm>
-            <a:off x="5752407" y="2415765"/>
-            <a:ext cx="792438" cy="274303"/>
-          </a:xfrm>
-          <a:prstGeom prst="rect">
-            <a:avLst/>
-          </a:prstGeom>
-          <a:noFill/>
-          <a:ln/>
-        </p:spPr>
-        <p:txBody>
-          <a:bodyPr wrap="square" lIns="0" tIns="0" rIns="0" bIns="0" rtlCol="0" anchor="t"/>
-          <a:lstStyle/>
-          <a:p>
-            <a:pPr algn="l" indent="0" marL="0">
-              <a:lnSpc>
-                <a:spcPts val="1056"/>
-              </a:lnSpc>
-              <a:buNone/>
-            </a:pPr>
-            <a:r>
-              <a:rPr lang="en-US" sz="880" spc="18" kern="0" dirty="0">
-                <a:solidFill>
-                  <a:srgbClr val="2E3A45"/>
+              <a:t>A Pousada Camburi recebe pessoas que viajam, exploram, descansam, praticam esportes, aproveitam a natureza, desfrutam da gastronomia e compartilham momentos com familiares e amigos.</a:t>
+            </a:r>
+            <a:endParaRPr lang="en-US" sz="1060" dirty="0"/>
+          </a:p>
+        </p:txBody>
+      </p:sp>
+      <p:sp>
+        <p:nvSpPr>
+          <p:cNvPr id="17" name="Text 13"/>
+          <p:cNvSpPr txBox="1"/>
+          <p:nvPr/>
+        </p:nvSpPr>
+        <p:spPr>
+          <a:xfrm>
+            <a:off x="4463802" y="3237458"/>
+            <a:ext cx="5553998" cy="490240"/>
+          </a:xfrm>
+          <a:prstGeom prst="rect">
+            <a:avLst/>
+          </a:prstGeom>
+          <a:noFill/>
+          <a:ln/>
+        </p:spPr>
+        <p:txBody>
+          <a:bodyPr wrap="square" lIns="0" tIns="0" rIns="0" bIns="0" rtlCol="0" anchor="t"/>
+          <a:lstStyle/>
+          <a:p>
+            <a:pPr algn="l" indent="0" marL="0">
+              <a:lnSpc>
+                <a:spcPts val="1929"/>
+              </a:lnSpc>
+              <a:buNone/>
+            </a:pPr>
+            <a:r>
+              <a:rPr lang="en-US" sz="1060" dirty="0">
+                <a:solidFill>
+                  <a:srgbClr val="5A6672"/>
                 </a:solidFill>
                 <a:latin typeface="Jost" pitchFamily="34" charset="0"/>
                 <a:ea typeface="Jost" pitchFamily="34" charset="-122"/>
                 <a:cs typeface="Jost" pitchFamily="34" charset="-120"/>
               </a:rPr>
-              <a:t>Confiabilidade</a:t>
-            </a:r>
-            <a:endParaRPr lang="en-US" sz="880" dirty="0"/>
-          </a:p>
-        </p:txBody>
-      </p:sp>
-      <p:sp>
-        <p:nvSpPr>
-          <p:cNvPr id="53" name="Text 49"/>
-          <p:cNvSpPr txBox="1"/>
-          <p:nvPr/>
-        </p:nvSpPr>
-        <p:spPr>
-          <a:xfrm>
-            <a:off x="7039026" y="2415765"/>
-            <a:ext cx="703737" cy="274303"/>
-          </a:xfrm>
-          <a:prstGeom prst="rect">
-            <a:avLst/>
-          </a:prstGeom>
-          <a:noFill/>
-          <a:ln/>
-        </p:spPr>
-        <p:txBody>
-          <a:bodyPr wrap="square" lIns="0" tIns="0" rIns="0" bIns="0" rtlCol="0" anchor="t"/>
-          <a:lstStyle/>
-          <a:p>
-            <a:pPr algn="l" indent="0" marL="0">
-              <a:lnSpc>
-                <a:spcPts val="1056"/>
-              </a:lnSpc>
-              <a:buNone/>
-            </a:pPr>
-            <a:r>
-              <a:rPr lang="en-US" sz="880" spc="18" kern="0" dirty="0">
-                <a:solidFill>
-                  <a:srgbClr val="2E3A45"/>
+              <a:t>Um lugar onde qualidade, funcionalidade, natureza, gastronomia, viagem e hospitalidade podem se encontrar naturalmente.</a:t>
+            </a:r>
+            <a:endParaRPr lang="en-US" sz="1060" dirty="0"/>
+          </a:p>
+        </p:txBody>
+      </p:sp>
+      <p:sp>
+        <p:nvSpPr>
+          <p:cNvPr id="18" name="Text 14"/>
+          <p:cNvSpPr txBox="1"/>
+          <p:nvPr/>
+        </p:nvSpPr>
+        <p:spPr>
+          <a:xfrm>
+            <a:off x="4463802" y="3925639"/>
+            <a:ext cx="5553998" cy="735360"/>
+          </a:xfrm>
+          <a:prstGeom prst="rect">
+            <a:avLst/>
+          </a:prstGeom>
+          <a:noFill/>
+          <a:ln/>
+        </p:spPr>
+        <p:txBody>
+          <a:bodyPr wrap="square" lIns="0" tIns="0" rIns="0" bIns="0" rtlCol="0" anchor="t"/>
+          <a:lstStyle/>
+          <a:p>
+            <a:pPr algn="l" indent="0" marL="0">
+              <a:lnSpc>
+                <a:spcPts val="1929"/>
+              </a:lnSpc>
+              <a:buNone/>
+            </a:pPr>
+            <a:r>
+              <a:rPr lang="en-US" sz="1060" dirty="0">
+                <a:solidFill>
+                  <a:srgbClr val="5A6672"/>
                 </a:solidFill>
                 <a:latin typeface="Jost" pitchFamily="34" charset="0"/>
                 <a:ea typeface="Jost" pitchFamily="34" charset="-122"/>
                 <a:cs typeface="Jost" pitchFamily="34" charset="-120"/>
               </a:rPr>
-              <a:t>Durabilidade</a:t>
-            </a:r>
-            <a:endParaRPr lang="en-US" sz="880" dirty="0"/>
-          </a:p>
-        </p:txBody>
-      </p:sp>
-      <p:sp>
-        <p:nvSpPr>
-          <p:cNvPr id="54" name="Text 50"/>
-          <p:cNvSpPr txBox="1"/>
-          <p:nvPr/>
-        </p:nvSpPr>
-        <p:spPr>
-          <a:xfrm>
-            <a:off x="8236943" y="2415765"/>
-            <a:ext cx="815506" cy="274303"/>
-          </a:xfrm>
-          <a:prstGeom prst="rect">
-            <a:avLst/>
-          </a:prstGeom>
-          <a:noFill/>
-          <a:ln/>
-        </p:spPr>
-        <p:txBody>
-          <a:bodyPr wrap="square" lIns="0" tIns="0" rIns="0" bIns="0" rtlCol="0" anchor="t"/>
-          <a:lstStyle/>
-          <a:p>
-            <a:pPr algn="l" indent="0" marL="0">
-              <a:lnSpc>
-                <a:spcPts val="1056"/>
-              </a:lnSpc>
-              <a:buNone/>
-            </a:pPr>
-            <a:r>
-              <a:rPr lang="en-US" sz="880" spc="18" kern="0" dirty="0">
-                <a:solidFill>
-                  <a:srgbClr val="2E3A45"/>
-                </a:solidFill>
-                <a:latin typeface="Jost" pitchFamily="34" charset="0"/>
-                <a:ea typeface="Jost" pitchFamily="34" charset="-122"/>
-                <a:cs typeface="Jost" pitchFamily="34" charset="-120"/>
-              </a:rPr>
-              <a:t>Funcionalidade</a:t>
-            </a:r>
-            <a:endParaRPr lang="en-US" sz="880" dirty="0"/>
-          </a:p>
-        </p:txBody>
-      </p:sp>
-      <p:sp>
-        <p:nvSpPr>
-          <p:cNvPr id="55" name="Text 51"/>
-          <p:cNvSpPr txBox="1"/>
-          <p:nvPr/>
-        </p:nvSpPr>
-        <p:spPr>
-          <a:xfrm>
-            <a:off x="4679802" y="2891569"/>
-            <a:ext cx="1109293" cy="274303"/>
-          </a:xfrm>
-          <a:prstGeom prst="rect">
-            <a:avLst/>
-          </a:prstGeom>
-          <a:noFill/>
-          <a:ln/>
-        </p:spPr>
-        <p:txBody>
-          <a:bodyPr wrap="square" lIns="0" tIns="0" rIns="0" bIns="0" rtlCol="0" anchor="t"/>
-          <a:lstStyle/>
-          <a:p>
-            <a:pPr algn="l" indent="0" marL="0">
-              <a:lnSpc>
-                <a:spcPts val="1056"/>
-              </a:lnSpc>
-              <a:buNone/>
-            </a:pPr>
-            <a:r>
-              <a:rPr lang="en-US" sz="880" spc="18" kern="0" dirty="0">
-                <a:solidFill>
-                  <a:srgbClr val="2E3A45"/>
-                </a:solidFill>
-                <a:latin typeface="Jost" pitchFamily="34" charset="0"/>
-                <a:ea typeface="Jost" pitchFamily="34" charset="-122"/>
-                <a:cs typeface="Jost" pitchFamily="34" charset="-120"/>
-              </a:rPr>
-              <a:t>Atenção aos detalhes</a:t>
-            </a:r>
-            <a:endParaRPr lang="en-US" sz="880" dirty="0"/>
-          </a:p>
-        </p:txBody>
-      </p:sp>
-      <p:sp>
-        <p:nvSpPr>
-          <p:cNvPr id="56" name="Text 52"/>
-          <p:cNvSpPr txBox="1"/>
-          <p:nvPr/>
-        </p:nvSpPr>
-        <p:spPr>
-          <a:xfrm>
-            <a:off x="6283277" y="2891569"/>
-            <a:ext cx="1253805" cy="274303"/>
-          </a:xfrm>
-          <a:prstGeom prst="rect">
-            <a:avLst/>
-          </a:prstGeom>
-          <a:noFill/>
-          <a:ln/>
-        </p:spPr>
-        <p:txBody>
-          <a:bodyPr wrap="square" lIns="0" tIns="0" rIns="0" bIns="0" rtlCol="0" anchor="t"/>
-          <a:lstStyle/>
-          <a:p>
-            <a:pPr algn="l" indent="0" marL="0">
-              <a:lnSpc>
-                <a:spcPts val="1056"/>
-              </a:lnSpc>
-              <a:buNone/>
-            </a:pPr>
-            <a:r>
-              <a:rPr lang="en-US" sz="880" spc="18" kern="0" dirty="0">
-                <a:solidFill>
-                  <a:srgbClr val="2E3A45"/>
-                </a:solidFill>
-                <a:latin typeface="Jost" pitchFamily="34" charset="0"/>
-                <a:ea typeface="Jost" pitchFamily="34" charset="-122"/>
-                <a:cs typeface="Jost" pitchFamily="34" charset="-120"/>
-              </a:rPr>
-              <a:t>Respeito ao consumidor</a:t>
-            </a:r>
-            <a:endParaRPr lang="en-US" sz="880" dirty="0"/>
-          </a:p>
-        </p:txBody>
-      </p:sp>
-      <p:sp>
-        <p:nvSpPr>
-          <p:cNvPr id="57" name="Text 53"/>
-          <p:cNvSpPr txBox="1"/>
-          <p:nvPr/>
-        </p:nvSpPr>
-        <p:spPr>
-          <a:xfrm>
-            <a:off x="4679802" y="3367372"/>
-            <a:ext cx="2202138" cy="274303"/>
-          </a:xfrm>
-          <a:prstGeom prst="rect">
-            <a:avLst/>
-          </a:prstGeom>
-          <a:noFill/>
-          <a:ln/>
-        </p:spPr>
-        <p:txBody>
-          <a:bodyPr wrap="square" lIns="0" tIns="0" rIns="0" bIns="0" rtlCol="0" anchor="t"/>
-          <a:lstStyle/>
-          <a:p>
-            <a:pPr algn="l" indent="0" marL="0">
-              <a:lnSpc>
-                <a:spcPts val="1056"/>
-              </a:lnSpc>
-              <a:buNone/>
-            </a:pPr>
-            <a:r>
-              <a:rPr lang="en-US" sz="880" spc="18" kern="0" dirty="0">
-                <a:solidFill>
-                  <a:srgbClr val="2E3A45"/>
-                </a:solidFill>
-                <a:latin typeface="Jost" pitchFamily="34" charset="0"/>
-                <a:ea typeface="Jost" pitchFamily="34" charset="-122"/>
-                <a:cs typeface="Jost" pitchFamily="34" charset="-120"/>
-              </a:rPr>
-              <a:t>Uma história construída ao longo do tempo</a:t>
-            </a:r>
-            <a:endParaRPr lang="en-US" sz="880" dirty="0"/>
-          </a:p>
-        </p:txBody>
-      </p:sp>
-      <p:sp>
-        <p:nvSpPr>
-          <p:cNvPr id="58" name="Text 54"/>
-          <p:cNvSpPr txBox="1"/>
-          <p:nvPr/>
-        </p:nvSpPr>
-        <p:spPr>
-          <a:xfrm>
-            <a:off x="4463802" y="3965674"/>
-            <a:ext cx="5553998" cy="490240"/>
-          </a:xfrm>
-          <a:prstGeom prst="rect">
-            <a:avLst/>
-          </a:prstGeom>
-          <a:noFill/>
-          <a:ln/>
-        </p:spPr>
-        <p:txBody>
-          <a:bodyPr wrap="square" lIns="0" tIns="0" rIns="0" bIns="0" rtlCol="0" anchor="t"/>
-          <a:lstStyle/>
-          <a:p>
-            <a:pPr algn="l" indent="0" marL="0">
-              <a:lnSpc>
-                <a:spcPts val="1929"/>
-              </a:lnSpc>
-              <a:buNone/>
-            </a:pPr>
-            <a:r>
-              <a:rPr lang="en-US" sz="1060" dirty="0">
-                <a:solidFill>
-                  <a:srgbClr val="5A6672"/>
-                </a:solidFill>
-                <a:latin typeface="Jost" pitchFamily="34" charset="0"/>
-                <a:ea typeface="Jost" pitchFamily="34" charset="-122"/>
-                <a:cs typeface="Jost" pitchFamily="34" charset="-120"/>
-              </a:rPr>
-              <a:t>A Victorinox possui uma tradição centenária e tornou seus produtos companheiros de pessoas em viagens, aventuras, trabalho e momentos cotidianos.</a:t>
+              <a:t>Por isso, acreditamos que a Pousada Camburi pode representar um ambiente particularmente interessante para que clientes, colaboradores, parceiros e convidados da Victorinox possam conhecer, utilizar e vivenciar seus produtos dentro de situações reais.</a:t>
             </a:r>
             <a:endParaRPr lang="en-US" sz="1060" dirty="0"/>
           </a:p>
@@ -10711,49 +9588,7 @@
       </p:sp>
       <p:sp>
         <p:nvSpPr>
-          <p:cNvPr id="59" name="Text 55"/>
-          <p:cNvSpPr txBox="1"/>
-          <p:nvPr/>
-        </p:nvSpPr>
-        <p:spPr>
-          <a:xfrm>
-            <a:off x="4463802" y="4653855"/>
-            <a:ext cx="5553998" cy="735360"/>
-          </a:xfrm>
-          <a:prstGeom prst="rect">
-            <a:avLst/>
-          </a:prstGeom>
-          <a:noFill/>
-          <a:ln/>
-        </p:spPr>
-        <p:txBody>
-          <a:bodyPr wrap="square" lIns="0" tIns="0" rIns="0" bIns="0" rtlCol="0" anchor="t"/>
-          <a:lstStyle/>
-          <a:p>
-            <a:pPr algn="l" indent="0" marL="0">
-              <a:lnSpc>
-                <a:spcPts val="1929"/>
-              </a:lnSpc>
-              <a:buNone/>
-            </a:pPr>
-            <a:r>
-              <a:rPr lang="en-US" sz="1060" dirty="0">
-                <a:solidFill>
-                  <a:srgbClr val="5A6672"/>
-                </a:solidFill>
-                <a:latin typeface="Jost" pitchFamily="34" charset="0"/>
-                <a:ea typeface="Jost" pitchFamily="34" charset="-122"/>
-                <a:cs typeface="Jost" pitchFamily="34" charset="-120"/>
-              </a:rPr>
-              <a:t>A Pousada Camburi possui uma história muito mais jovem, mas compartilha uma convicção semelhante: um bom produto ou um bom serviço não precisa apenas funcionar bem. Ele precisa gerar confiança.</a:t>
-            </a:r>
-            <a:endParaRPr lang="en-US" sz="1060" dirty="0"/>
-          </a:p>
-        </p:txBody>
-      </p:sp>
-      <p:sp>
-        <p:nvSpPr>
-          <p:cNvPr id="60" name="Text 56"/>
+          <p:cNvPr id="19" name="Text 15"/>
           <p:cNvSpPr txBox="1"/>
           <p:nvPr/>
         </p:nvSpPr>
@@ -10787,7 +9622,7 @@
                 <a:ea typeface="EB Garamond" pitchFamily="34" charset="-122"/>
                 <a:cs typeface="EB Garamond" pitchFamily="34" charset="-120"/>
               </a:rPr>
-              <a:t>E confiança é aquilo que faz uma pessoa voltar.</a:t>
+              <a:t>Não simplesmente ver. Viver.</a:t>
             </a:r>
             <a:endParaRPr lang="en-US" sz="1700" dirty="0"/>
           </a:p>
@@ -10795,7 +9630,7 @@
       </p:sp>
       <p:sp>
         <p:nvSpPr>
-          <p:cNvPr id="61" name="Text 57"/>
+          <p:cNvPr id="20" name="Text 16"/>
           <p:cNvSpPr txBox="1"/>
           <p:nvPr/>
         </p:nvSpPr>
@@ -10955,7 +9790,7 @@
         </p:nvSpPr>
         <p:spPr>
           <a:xfrm>
-            <a:off x="4463802" y="6126510"/>
+            <a:off x="4463802" y="5845820"/>
             <a:ext cx="5508278" cy="9525"/>
           </a:xfrm>
           <a:prstGeom prst="rect">
@@ -11155,7 +9990,7 @@
                 <a:ea typeface="Jost Medium" pitchFamily="34" charset="-122"/>
                 <a:cs typeface="Jost Medium" pitchFamily="34" charset="-120"/>
               </a:rPr>
-              <a:t>OPORTUNIDADE</a:t>
+              <a:t>O CONVITE</a:t>
             </a:r>
             <a:endParaRPr lang="en-US" sz="660" dirty="0"/>
           </a:p>
@@ -11170,7 +10005,7 @@
         <p:spPr>
           <a:xfrm>
             <a:off x="719882" y="1617464"/>
-            <a:ext cx="2700218" cy="781645"/>
+            <a:ext cx="2700218" cy="390823"/>
           </a:xfrm>
           <a:prstGeom prst="rect">
             <a:avLst/>
@@ -11197,7 +10032,7 @@
                 <a:ea typeface="EB Garamond Medium" pitchFamily="34" charset="-122"/>
                 <a:cs typeface="EB Garamond Medium" pitchFamily="34" charset="-120"/>
               </a:rPr>
-              <a:t>Um ambiente de experiência</a:t>
+              <a:t>Nosso convite</a:t>
             </a:r>
             <a:endParaRPr lang="en-US" sz="2700" dirty="0"/>
           </a:p>
@@ -11239,7 +10074,7 @@
                 <a:ea typeface="EB Garamond" pitchFamily="34" charset="-122"/>
                 <a:cs typeface="EB Garamond" pitchFamily="34" charset="-120"/>
               </a:rPr>
-              <a:t>“É um ambiente real de experiências.”</a:t>
+              <a:t>“Talvez seja justamente aí que exista uma oportunidade.”</a:t>
             </a:r>
             <a:endParaRPr lang="en-US" sz="1500" dirty="0"/>
           </a:p>
@@ -11281,7 +10116,7 @@
                 <a:ea typeface="Jost Light" pitchFamily="34" charset="-122"/>
                 <a:cs typeface="Jost Light" pitchFamily="34" charset="-120"/>
               </a:rPr>
-              <a:t>É nesse contexto que enxergamos uma possibilidade especial de aproximação entre nossas empresas.</a:t>
+              <a:t>Gostaríamos de apresentar oficialmente a Pousada Camburi à Victorinox Brasil e abrir uma conversa sobre possibilidades de relacionamento entre nossas empresas.</a:t>
             </a:r>
             <a:endParaRPr lang="en-US" sz="1260" dirty="0"/>
           </a:p>
@@ -11296,7 +10131,7 @@
         <p:spPr>
           <a:xfrm>
             <a:off x="4463802" y="2304157"/>
-            <a:ext cx="5553998" cy="735360"/>
+            <a:ext cx="5553998" cy="490240"/>
           </a:xfrm>
           <a:prstGeom prst="rect">
             <a:avLst/>
@@ -11323,7 +10158,7 @@
                 <a:ea typeface="Jost" pitchFamily="34" charset="-122"/>
                 <a:cs typeface="Jost" pitchFamily="34" charset="-120"/>
               </a:rPr>
-              <a:t>A Pousada Camburi recebe pessoas que viajam, exploram, descansam, praticam esportes, aproveitam a natureza, desfrutam da gastronomia e compartilham momentos com familiares e amigos.</a:t>
+              <a:t>Temos muito respeito pela história e pelo posicionamento da Victorinox, e acreditamos que existe uma afinidade verdadeira entre nossas marcas.</a:t>
             </a:r>
             <a:endParaRPr lang="en-US" sz="1060" dirty="0"/>
           </a:p>
@@ -11337,8 +10172,8 @@
         </p:nvSpPr>
         <p:spPr>
           <a:xfrm>
-            <a:off x="4463802" y="3237458"/>
-            <a:ext cx="5553998" cy="490240"/>
+            <a:off x="4463802" y="2992338"/>
+            <a:ext cx="5553998" cy="735360"/>
           </a:xfrm>
           <a:prstGeom prst="rect">
             <a:avLst/>
@@ -11365,7 +10200,7 @@
                 <a:ea typeface="Jost" pitchFamily="34" charset="-122"/>
                 <a:cs typeface="Jost" pitchFamily="34" charset="-120"/>
               </a:rPr>
-              <a:t>Um lugar onde qualidade, funcionalidade, natureza, gastronomia, viagem e hospitalidade podem se encontrar naturalmente.</a:t>
+              <a:t>A Pousada Camburi possui uma história construída com pessoas. A Victorinox possui uma história construída com produtos que acompanham pessoas. Talvez seja justamente aí que exista uma oportunidade.</a:t>
             </a:r>
             <a:endParaRPr lang="en-US" sz="1060" dirty="0"/>
           </a:p>
@@ -11379,50 +10214,8 @@
         </p:nvSpPr>
         <p:spPr>
           <a:xfrm>
-            <a:off x="4463802" y="3925639"/>
-            <a:ext cx="5553998" cy="735360"/>
-          </a:xfrm>
-          <a:prstGeom prst="rect">
-            <a:avLst/>
-          </a:prstGeom>
-          <a:noFill/>
-          <a:ln/>
-        </p:spPr>
-        <p:txBody>
-          <a:bodyPr wrap="square" lIns="0" tIns="0" rIns="0" bIns="0" rtlCol="0" anchor="t"/>
-          <a:lstStyle/>
-          <a:p>
-            <a:pPr algn="l" indent="0" marL="0">
-              <a:lnSpc>
-                <a:spcPts val="1929"/>
-              </a:lnSpc>
-              <a:buNone/>
-            </a:pPr>
-            <a:r>
-              <a:rPr lang="en-US" sz="1060" dirty="0">
-                <a:solidFill>
-                  <a:srgbClr val="5A6672"/>
-                </a:solidFill>
-                <a:latin typeface="Jost" pitchFamily="34" charset="0"/>
-                <a:ea typeface="Jost" pitchFamily="34" charset="-122"/>
-                <a:cs typeface="Jost" pitchFamily="34" charset="-120"/>
-              </a:rPr>
-              <a:t>Por isso, acreditamos que a Pousada Camburi pode representar um ambiente particularmente interessante para que clientes, colaboradores, parceiros e convidados da Victorinox possam conhecer, utilizar e vivenciar seus produtos dentro de situações reais.</a:t>
-            </a:r>
-            <a:endParaRPr lang="en-US" sz="1060" dirty="0"/>
-          </a:p>
-        </p:txBody>
-      </p:sp>
-      <p:sp>
-        <p:nvSpPr>
-          <p:cNvPr id="19" name="Text 15"/>
-          <p:cNvSpPr txBox="1"/>
-          <p:nvPr/>
-        </p:nvSpPr>
-        <p:spPr>
-          <a:xfrm>
-            <a:off x="4463802" y="6424017"/>
-            <a:ext cx="5553998" cy="280690"/>
+            <a:off x="4463802" y="6143327"/>
+            <a:ext cx="5553998" cy="561380"/>
           </a:xfrm>
           <a:prstGeom prst="rect">
             <a:avLst/>
@@ -11449,7 +10242,7 @@
                 <a:ea typeface="EB Garamond" pitchFamily="34" charset="-122"/>
                 <a:cs typeface="EB Garamond" pitchFamily="34" charset="-120"/>
               </a:rPr>
-              <a:t>Não simplesmente ver. Viver.</a:t>
+              <a:t>Uma marca que acompanha pessoas. Um lugar que recebe pessoas. E uma experiência que pode unir as duas.</a:t>
             </a:r>
             <a:endParaRPr lang="en-US" sz="1700" dirty="0"/>
           </a:p>
@@ -11457,7 +10250,7 @@
       </p:sp>
       <p:sp>
         <p:nvSpPr>
-          <p:cNvPr id="20" name="Text 16"/>
+          <p:cNvPr id="19" name="Text 15"/>
           <p:cNvSpPr txBox="1"/>
           <p:nvPr/>
         </p:nvSpPr>
